--- a/presentaciones/clase08_componentes_principales.pptx
+++ b/presentaciones/clase08_componentes_principales.pptx
@@ -30,6 +30,9 @@
     <p:sldId id="278" r:id="rId29"/>
     <p:sldId id="279" r:id="rId30"/>
     <p:sldId id="280" r:id="rId31"/>
+    <p:sldId id="281" r:id="rId32"/>
+    <p:sldId id="282" r:id="rId33"/>
+    <p:sldId id="283" r:id="rId34"/>
   </p:sldIdLst>
   <p:sldSz cx="9144000" cy="5138928" type="screen4x3"/>
   <p:notesSz cx="6858000" cy="9144000"/>
@@ -3447,21 +3450,45 @@
                 </a:solidFill>
                 <a:latin typeface="Fira Sans"/>
               </a:rPr>
-              <a:t>¿Para qué sirve?</a:t>
-            </a:r>
-          </a:p>
-        </p:txBody>
-      </p:sp>
-      <p:sp>
-        <p:nvSpPr>
-          <p:cNvPr id="4" name="TextBox 3"/>
+              <a:t>La dirección en que los datos más varían</a:t>
+            </a:r>
+          </a:p>
+        </p:txBody>
+      </p:sp>
+      <p:pic>
+        <p:nvPicPr>
+          <p:cNvPr id="4" name="Picture 3" descr="c8_01_dos_variables.png"/>
+          <p:cNvPicPr>
+            <a:picLocks noChangeAspect="1"/>
+          </p:cNvPicPr>
+          <p:nvPr/>
+        </p:nvPicPr>
+        <p:blipFill>
+          <a:blip r:embed="rId2"/>
+          <a:stretch>
+            <a:fillRect/>
+          </a:stretch>
+        </p:blipFill>
+        <p:spPr>
+          <a:xfrm>
+            <a:off x="2282292" y="1143000"/>
+            <a:ext cx="4579414" cy="2331720"/>
+          </a:xfrm>
+          <a:prstGeom prst="rect">
+            <a:avLst/>
+          </a:prstGeom>
+        </p:spPr>
+      </p:pic>
+      <p:sp>
+        <p:nvSpPr>
+          <p:cNvPr id="5" name="TextBox 4"/>
           <p:cNvSpPr txBox="1"/>
           <p:nvPr/>
         </p:nvSpPr>
         <p:spPr>
           <a:xfrm>
-            <a:off x="704088" y="1353312"/>
-            <a:ext cx="7744968" cy="3300984"/>
+            <a:off x="704088" y="3611879"/>
+            <a:ext cx="7744968" cy="1280160"/>
           </a:xfrm>
           <a:prstGeom prst="rect">
             <a:avLst/>
@@ -3474,115 +3501,14 @@
           </a:bodyPr>
           <a:lstStyle/>
           <a:p>
-            <a:pPr>
-              <a:lnSpc>
-                <a:spcPct val="112000"/>
-              </a:lnSpc>
-              <a:spcAft>
-                <a:spcPts val="900"/>
-              </a:spcAft>
-            </a:pPr>
-            <a:r>
-              <a:rPr sz="1800" b="1">
-                <a:solidFill>
-                  <a:srgbClr val="E0A437"/>
-                </a:solidFill>
-                <a:latin typeface="Fira Sans"/>
-              </a:rPr>
-              <a:t>▸ </a:t>
-            </a:r>
-            <a:r>
-              <a:rPr sz="1800" b="1">
-                <a:solidFill>
-                  <a:srgbClr val="1D3557"/>
-                </a:solidFill>
-                <a:latin typeface="Fira Sans"/>
-              </a:rPr>
-              <a:t>Para mirar los datos: con 16 variables hay 120 gráficos de dispersión posibles; con dos componentes, uno solo.</a:t>
-            </a:r>
-          </a:p>
-          <a:p>
-            <a:pPr>
-              <a:lnSpc>
-                <a:spcPct val="112000"/>
-              </a:lnSpc>
-              <a:spcAft>
-                <a:spcPts val="900"/>
-              </a:spcAft>
-            </a:pPr>
-            <a:r>
-              <a:rPr sz="1800" b="1">
-                <a:solidFill>
-                  <a:srgbClr val="E0A437"/>
-                </a:solidFill>
-                <a:latin typeface="Fira Sans"/>
-              </a:rPr>
-              <a:t>▸ </a:t>
-            </a:r>
-            <a:r>
-              <a:rPr sz="1800" b="0">
-                <a:solidFill>
-                  <a:srgbClr val="000000"/>
-                </a:solidFill>
-                <a:latin typeface="Fira Sans"/>
-              </a:rPr>
-              <a:t>Para entregarle a un modelo menos entradas: las componentes reemplazan a un grupo de variables que se repiten (regresión sobre componentes principales).</a:t>
-            </a:r>
-          </a:p>
-          <a:p>
-            <a:pPr>
-              <a:lnSpc>
-                <a:spcPct val="112000"/>
-              </a:lnSpc>
-              <a:spcAft>
-                <a:spcPts val="900"/>
-              </a:spcAft>
-            </a:pPr>
-            <a:r>
-              <a:rPr sz="1800" b="1">
-                <a:solidFill>
-                  <a:srgbClr val="E0A437"/>
-                </a:solidFill>
-                <a:latin typeface="Fira Sans"/>
-              </a:rPr>
-              <a:t>▸ </a:t>
-            </a:r>
-            <a:r>
-              <a:rPr sz="1800" b="0">
-                <a:solidFill>
-                  <a:srgbClr val="000000"/>
-                </a:solidFill>
-                <a:latin typeface="Fira Sans"/>
-              </a:rPr>
-              <a:t>Para entender de qué está hecha la variación: qué variables se mueven juntas y cuánto pesa cada grupo.</a:t>
-            </a:r>
-          </a:p>
-          <a:p>
-            <a:pPr>
-              <a:lnSpc>
-                <a:spcPct val="112000"/>
-              </a:lnSpc>
-              <a:spcAft>
-                <a:spcPts val="900"/>
-              </a:spcAft>
-            </a:pPr>
-            <a:r>
-              <a:rPr sz="1800" b="1">
-                <a:solidFill>
-                  <a:srgbClr val="E0A437"/>
-                </a:solidFill>
-                <a:latin typeface="Fira Sans"/>
-              </a:rPr>
-              <a:t>▸ </a:t>
-            </a:r>
-            <a:r>
-              <a:rPr sz="1800" b="0">
-                <a:solidFill>
-                  <a:srgbClr val="000000"/>
-                </a:solidFill>
-                <a:latin typeface="Fira Sans"/>
-              </a:rPr>
-              <a:t>Lo que no hace: no elige variables ni las descarta, y no sabe qué se quiere predecir.</a:t>
+            <a:r>
+              <a:rPr sz="1300" b="0">
+                <a:solidFill>
+                  <a:srgbClr val="333333"/>
+                </a:solidFill>
+                <a:latin typeface="Fira Sans"/>
+              </a:rPr>
+              <a:t>Los mismos jugadores, con las dos variables estandarizadas, y cuatro direcciones que pasan por el centro. Para cada una se mide cuánto se dispersan las posiciones de los puntos a lo largo de ella: 1,00 en la horizontal y en la vertical, 1,41 en la diagonal y 0,07 en su perpendicular. La diagonal gana: es la primera componente y recoge el 99,8% de la variación; su perpendicular es la segunda, con el 0,2%.</a:t>
             </a:r>
           </a:p>
         </p:txBody>
@@ -3678,14 +3604,14 @@
                 </a:solidFill>
                 <a:latin typeface="Fira Sans"/>
               </a:rPr>
-              <a:t>Antes de calcular: estandarizar cada variable</a:t>
+              <a:t>En la práctica: un puntaje ponderado por jugador</a:t>
             </a:r>
           </a:p>
         </p:txBody>
       </p:sp>
       <p:pic>
         <p:nvPicPr>
-          <p:cNvPr id="4" name="Picture 3" descr="c8_02_estandarizar.png"/>
+          <p:cNvPr id="4" name="Picture 3" descr="c8_01b_puntaje_ponderado.png"/>
           <p:cNvPicPr>
             <a:picLocks noChangeAspect="1"/>
           </p:cNvPicPr>
@@ -3699,8 +3625,8 @@
         </p:blipFill>
         <p:spPr>
           <a:xfrm>
-            <a:off x="2421351" y="1143000"/>
-            <a:ext cx="4301297" cy="2331720"/>
+            <a:off x="728851" y="1143000"/>
+            <a:ext cx="7686296" cy="2587752"/>
           </a:xfrm>
           <a:prstGeom prst="rect">
             <a:avLst/>
@@ -3715,8 +3641,8 @@
         </p:nvSpPr>
         <p:spPr>
           <a:xfrm>
-            <a:off x="704088" y="3611879"/>
-            <a:ext cx="7744968" cy="1280160"/>
+            <a:off x="704088" y="3867912"/>
+            <a:ext cx="7744968" cy="1024128"/>
           </a:xfrm>
           <a:prstGeom prst="rect">
             <a:avLst/>
@@ -3736,7 +3662,7 @@
                 </a:solidFill>
                 <a:latin typeface="Fira Sans"/>
               </a:rPr>
-              <a:t>Con las variables en sus unidades, la primera componente es casi solo turnos_carrera, porque su desviación estándar (2.287) es 476 veces la de temporadas (4,8): PCA sigue a la variable que más varía en sus unidades. Con cada variable estandarizada (media 0 y desviación 1, como en las clases 2 y 7) todas parten iguales. El libro recomienda estandarizar, salvo que las variables compartan unidad (James et al., 2013, p. 381).</a:t>
+              <a:t>Como el puntaje ponderado de la admisión universitaria: cada variable entra con un peso y sale un número por jugador, que es su valor en la componente. La diferencia es que aquí los pesos no los fija nadie: se calculan para que ese número separe a los jugadores lo más posible, con la condición de que los pesos al cuadrado sumen 1.</a:t>
             </a:r>
           </a:p>
         </p:txBody>
@@ -3774,7 +3700,7 @@
             <a:avLst/>
           </a:prstGeom>
           <a:solidFill>
-            <a:srgbClr val="1D3557"/>
+            <a:srgbClr val="FAFBFC"/>
           </a:solidFill>
           <a:ln>
             <a:noFill/>
@@ -3811,8 +3737,8 @@
         </p:nvSpPr>
         <p:spPr>
           <a:xfrm>
-            <a:off x="603504" y="1847088"/>
-            <a:ext cx="7946136" cy="1399032"/>
+            <a:off x="402336" y="301752"/>
+            <a:ext cx="8348472" cy="795528"/>
           </a:xfrm>
           <a:prstGeom prst="rect">
             <a:avLst/>
@@ -3826,24 +3752,148 @@
           <a:lstStyle/>
           <a:p>
             <a:r>
-              <a:rPr sz="3400" b="1">
-                <a:solidFill>
-                  <a:srgbClr val="FFFFFF"/>
-                </a:solidFill>
-                <a:latin typeface="Fira Sans"/>
-              </a:rPr>
-              <a:t>3. Cómo se leen</a:t>
-            </a:r>
-          </a:p>
-          <a:p>
+              <a:rPr sz="2800" b="1">
+                <a:solidFill>
+                  <a:srgbClr val="0F0F0F"/>
+                </a:solidFill>
+                <a:latin typeface="Fira Sans"/>
+              </a:rPr>
+              <a:t>¿Para qué sirve?</a:t>
+            </a:r>
+          </a:p>
+        </p:txBody>
+      </p:sp>
+      <p:sp>
+        <p:nvSpPr>
+          <p:cNvPr id="4" name="TextBox 3"/>
+          <p:cNvSpPr txBox="1"/>
+          <p:nvPr/>
+        </p:nvSpPr>
+        <p:spPr>
+          <a:xfrm>
+            <a:off x="704088" y="1353312"/>
+            <a:ext cx="7744968" cy="3300984"/>
+          </a:xfrm>
+          <a:prstGeom prst="rect">
+            <a:avLst/>
+          </a:prstGeom>
+          <a:noFill/>
+        </p:spPr>
+        <p:txBody>
+          <a:bodyPr wrap="square">
+            <a:spAutoFit/>
+          </a:bodyPr>
+          <a:lstStyle/>
+          <a:p>
+            <a:pPr>
+              <a:lnSpc>
+                <a:spcPct val="112000"/>
+              </a:lnSpc>
+              <a:spcAft>
+                <a:spcPts val="900"/>
+              </a:spcAft>
+            </a:pPr>
+            <a:r>
+              <a:rPr sz="1800" b="1">
+                <a:solidFill>
+                  <a:srgbClr val="E0A437"/>
+                </a:solidFill>
+                <a:latin typeface="Fira Sans"/>
+              </a:rPr>
+              <a:t>▸ </a:t>
+            </a:r>
+            <a:r>
+              <a:rPr sz="1800" b="1">
+                <a:solidFill>
+                  <a:srgbClr val="1D3557"/>
+                </a:solidFill>
+                <a:latin typeface="Fira Sans"/>
+              </a:rPr>
+              <a:t>Para mirar los datos: con 16 variables hay 120 gráficos de dispersión posibles; con dos componentes, uno solo.</a:t>
+            </a:r>
+          </a:p>
+          <a:p>
+            <a:pPr>
+              <a:lnSpc>
+                <a:spcPct val="112000"/>
+              </a:lnSpc>
+              <a:spcAft>
+                <a:spcPts val="900"/>
+              </a:spcAft>
+            </a:pPr>
+            <a:r>
+              <a:rPr sz="1800" b="1">
+                <a:solidFill>
+                  <a:srgbClr val="E0A437"/>
+                </a:solidFill>
+                <a:latin typeface="Fira Sans"/>
+              </a:rPr>
+              <a:t>▸ </a:t>
+            </a:r>
             <a:r>
               <a:rPr sz="1800" b="0">
                 <a:solidFill>
+                  <a:srgbClr val="000000"/>
+                </a:solidFill>
+                <a:latin typeface="Fira Sans"/>
+              </a:rPr>
+              <a:t>Para entregarle a un modelo menos entradas: las componentes reemplazan a un grupo de variables que se repiten (regresión sobre componentes principales).</a:t>
+            </a:r>
+          </a:p>
+          <a:p>
+            <a:pPr>
+              <a:lnSpc>
+                <a:spcPct val="112000"/>
+              </a:lnSpc>
+              <a:spcAft>
+                <a:spcPts val="900"/>
+              </a:spcAft>
+            </a:pPr>
+            <a:r>
+              <a:rPr sz="1800" b="1">
+                <a:solidFill>
                   <a:srgbClr val="E0A437"/>
                 </a:solidFill>
                 <a:latin typeface="Fira Sans"/>
               </a:rPr>
-              <a:t>Cuánta variación explica cada componente y de qué está hecha</a:t>
+              <a:t>▸ </a:t>
+            </a:r>
+            <a:r>
+              <a:rPr sz="1800" b="0">
+                <a:solidFill>
+                  <a:srgbClr val="000000"/>
+                </a:solidFill>
+                <a:latin typeface="Fira Sans"/>
+              </a:rPr>
+              <a:t>Para entender de qué está hecha la variación: qué variables se mueven juntas y cuánto pesa cada grupo.</a:t>
+            </a:r>
+          </a:p>
+          <a:p>
+            <a:pPr>
+              <a:lnSpc>
+                <a:spcPct val="112000"/>
+              </a:lnSpc>
+              <a:spcAft>
+                <a:spcPts val="900"/>
+              </a:spcAft>
+            </a:pPr>
+            <a:r>
+              <a:rPr sz="1800" b="1">
+                <a:solidFill>
+                  <a:srgbClr val="E0A437"/>
+                </a:solidFill>
+                <a:latin typeface="Fira Sans"/>
+              </a:rPr>
+              <a:t>▸ </a:t>
+            </a:r>
+            <a:r>
+              <a:rPr sz="1800" b="0">
+                <a:solidFill>
+                  <a:srgbClr val="000000"/>
+                </a:solidFill>
+                <a:latin typeface="Fira Sans"/>
+              </a:rPr>
+              <a:t>Lo que no hace: no elige variables ni las descarta, y no sabe qué se quiere predecir.</a:t>
             </a:r>
           </a:p>
         </p:txBody>
@@ -3939,45 +3989,21 @@
                 </a:solidFill>
                 <a:latin typeface="Fira Sans"/>
               </a:rPr>
-              <a:t>Cuánta variación explica cada componente</a:t>
-            </a:r>
-          </a:p>
-        </p:txBody>
-      </p:sp>
-      <p:pic>
-        <p:nvPicPr>
-          <p:cNvPr id="4" name="Picture 3" descr="c8_03_scree.png"/>
-          <p:cNvPicPr>
-            <a:picLocks noChangeAspect="1"/>
-          </p:cNvPicPr>
-          <p:nvPr/>
-        </p:nvPicPr>
-        <p:blipFill>
-          <a:blip r:embed="rId2"/>
-          <a:stretch>
-            <a:fillRect/>
-          </a:stretch>
-        </p:blipFill>
-        <p:spPr>
-          <a:xfrm>
-            <a:off x="2337301" y="1143000"/>
-            <a:ext cx="4469397" cy="2587752"/>
-          </a:xfrm>
-          <a:prstGeom prst="rect">
-            <a:avLst/>
-          </a:prstGeom>
-        </p:spPr>
-      </p:pic>
-      <p:sp>
-        <p:nvSpPr>
-          <p:cNvPr id="5" name="TextBox 4"/>
+              <a:t>Cómo se construye, paso a paso</a:t>
+            </a:r>
+          </a:p>
+        </p:txBody>
+      </p:sp>
+      <p:sp>
+        <p:nvSpPr>
+          <p:cNvPr id="4" name="TextBox 3"/>
           <p:cNvSpPr txBox="1"/>
           <p:nvPr/>
         </p:nvSpPr>
         <p:spPr>
           <a:xfrm>
-            <a:off x="704088" y="3867912"/>
-            <a:ext cx="7744968" cy="1024128"/>
+            <a:off x="704088" y="1353312"/>
+            <a:ext cx="7744968" cy="3300984"/>
           </a:xfrm>
           <a:prstGeom prst="rect">
             <a:avLst/>
@@ -3990,14 +4016,143 @@
           </a:bodyPr>
           <a:lstStyle/>
           <a:p>
-            <a:r>
-              <a:rPr sz="1300" b="0">
-                <a:solidFill>
-                  <a:srgbClr val="333333"/>
-                </a:solidFill>
-                <a:latin typeface="Fira Sans"/>
-              </a:rPr>
-              <a:t>La primera componente explica el 45,3% de la variación de las 16 variables; la segunda, el 25,7%; la tercera, el 10,8%. Dos componentes reúnen el 71% y tres, el 82%. Para decidir cuántas conservar, el libro sugiere mirar dónde la curva deja de caer (el codo) y advierte que no hay una regla objetiva: depende del uso (James et al., 2013, p. 384).</a:t>
+            <a:pPr>
+              <a:lnSpc>
+                <a:spcPct val="112000"/>
+              </a:lnSpc>
+              <a:spcAft>
+                <a:spcPts val="900"/>
+              </a:spcAft>
+            </a:pPr>
+            <a:r>
+              <a:rPr sz="1800" b="1">
+                <a:solidFill>
+                  <a:srgbClr val="E0A437"/>
+                </a:solidFill>
+                <a:latin typeface="Fira Sans"/>
+              </a:rPr>
+              <a:t>▸ </a:t>
+            </a:r>
+            <a:r>
+              <a:rPr sz="1800" b="1">
+                <a:solidFill>
+                  <a:srgbClr val="1D3557"/>
+                </a:solidFill>
+                <a:latin typeface="Fira Sans"/>
+              </a:rPr>
+              <a:t>Se estandariza cada variable: se le resta su media y se divide por su desviación estándar (el puntaje z de la clase 2).</a:t>
+            </a:r>
+          </a:p>
+          <a:p>
+            <a:pPr>
+              <a:lnSpc>
+                <a:spcPct val="112000"/>
+              </a:lnSpc>
+              <a:spcAft>
+                <a:spcPts val="900"/>
+              </a:spcAft>
+            </a:pPr>
+            <a:r>
+              <a:rPr sz="1800" b="1">
+                <a:solidFill>
+                  <a:srgbClr val="E0A437"/>
+                </a:solidFill>
+                <a:latin typeface="Fira Sans"/>
+              </a:rPr>
+              <a:t>▸ </a:t>
+            </a:r>
+            <a:r>
+              <a:rPr sz="1800" b="0">
+                <a:solidFill>
+                  <a:srgbClr val="000000"/>
+                </a:solidFill>
+                <a:latin typeface="Fira Sans"/>
+              </a:rPr>
+              <a:t>Cada jugador es un punto y el centro de la nube queda en el origen.</a:t>
+            </a:r>
+          </a:p>
+          <a:p>
+            <a:pPr>
+              <a:lnSpc>
+                <a:spcPct val="112000"/>
+              </a:lnSpc>
+              <a:spcAft>
+                <a:spcPts val="900"/>
+              </a:spcAft>
+            </a:pPr>
+            <a:r>
+              <a:rPr sz="1800" b="1">
+                <a:solidFill>
+                  <a:srgbClr val="E0A437"/>
+                </a:solidFill>
+                <a:latin typeface="Fira Sans"/>
+              </a:rPr>
+              <a:t>▸ </a:t>
+            </a:r>
+            <a:r>
+              <a:rPr sz="1800" b="0">
+                <a:solidFill>
+                  <a:srgbClr val="000000"/>
+                </a:solidFill>
+                <a:latin typeface="Fira Sans"/>
+              </a:rPr>
+              <a:t>Se busca la recta por el centro a lo largo de la cual los puntos están más dispersos (la diagonal roja de la figura): es la primera componente. El valor de cada jugador es su posición sobre esa recta.</a:t>
+            </a:r>
+          </a:p>
+          <a:p>
+            <a:pPr>
+              <a:lnSpc>
+                <a:spcPct val="112000"/>
+              </a:lnSpc>
+              <a:spcAft>
+                <a:spcPts val="900"/>
+              </a:spcAft>
+            </a:pPr>
+            <a:r>
+              <a:rPr sz="1800" b="1">
+                <a:solidFill>
+                  <a:srgbClr val="E0A437"/>
+                </a:solidFill>
+                <a:latin typeface="Fira Sans"/>
+              </a:rPr>
+              <a:t>▸ </a:t>
+            </a:r>
+            <a:r>
+              <a:rPr sz="1800" b="0">
+                <a:solidFill>
+                  <a:srgbClr val="000000"/>
+                </a:solidFill>
+                <a:latin typeface="Fira Sans"/>
+              </a:rPr>
+              <a:t>La perpendicular es la segunda componente; con más variables se sigue hasta tener tantas como variables.</a:t>
+            </a:r>
+          </a:p>
+          <a:p>
+            <a:pPr>
+              <a:lnSpc>
+                <a:spcPct val="112000"/>
+              </a:lnSpc>
+              <a:spcAft>
+                <a:spcPts val="900"/>
+              </a:spcAft>
+            </a:pPr>
+            <a:r>
+              <a:rPr sz="1800" b="1">
+                <a:solidFill>
+                  <a:srgbClr val="E0A437"/>
+                </a:solidFill>
+                <a:latin typeface="Fira Sans"/>
+              </a:rPr>
+              <a:t>▸ </a:t>
+            </a:r>
+            <a:r>
+              <a:rPr sz="1800" b="0">
+                <a:solidFill>
+                  <a:srgbClr val="000000"/>
+                </a:solidFill>
+                <a:latin typeface="Fira Sans"/>
+              </a:rPr>
+              <a:t>La variación total se reparte entre ellas: el porcentaje de cada una dice cuánto se conserva al quedarse con las primeras.</a:t>
             </a:r>
           </a:p>
         </p:txBody>
@@ -4093,14 +4248,14 @@
                 </a:solidFill>
                 <a:latin typeface="Fira Sans"/>
               </a:rPr>
-              <a:t>De qué está hecha cada componente: los pesos</a:t>
+              <a:t>Por qué se estandariza</a:t>
             </a:r>
           </a:p>
         </p:txBody>
       </p:sp>
       <p:pic>
         <p:nvPicPr>
-          <p:cNvPr id="4" name="Picture 3" descr="c8_04_pesos.png"/>
+          <p:cNvPr id="4" name="Picture 3" descr="c8_02_estandarizar.png"/>
           <p:cNvPicPr>
             <a:picLocks noChangeAspect="1"/>
           </p:cNvPicPr>
@@ -4114,8 +4269,8 @@
         </p:blipFill>
         <p:spPr>
           <a:xfrm>
-            <a:off x="2196563" y="1143000"/>
-            <a:ext cx="4750872" cy="2587752"/>
+            <a:off x="2421351" y="1143000"/>
+            <a:ext cx="4301297" cy="2331720"/>
           </a:xfrm>
           <a:prstGeom prst="rect">
             <a:avLst/>
@@ -4130,8 +4285,8 @@
         </p:nvSpPr>
         <p:spPr>
           <a:xfrm>
-            <a:off x="704088" y="3867912"/>
-            <a:ext cx="7744968" cy="1024128"/>
+            <a:off x="704088" y="3611879"/>
+            <a:ext cx="7744968" cy="1280160"/>
           </a:xfrm>
           <a:prstGeom prst="rect">
             <a:avLst/>
@@ -4151,7 +4306,7 @@
                 </a:solidFill>
                 <a:latin typeface="Fira Sans"/>
               </a:rPr>
-              <a:t>Primera componente: las siete variables de la carrera pesan casi lo mismo (0,29 a 0,34), las de la temporada la mitad (0,19 a 0,23) y la defensa no cuenta: mide cuánta carrera lleva el jugador. Segunda componente: la temporada 1986 pesa positivo (0,24 a 0,39) y la carrera negativo (−0,12 a −0,26): separa a quien rindió este año más de lo que dice su carrera.</a:t>
+              <a:t>Con las variables en sus unidades, la primera componente es casi solo turnos_carrera, porque su desviación estándar (2.287) es 476 veces la de temporadas (4,8): PCA sigue a la variable que más varía en sus unidades. Con cada variable estandarizada (media 0 y desviación 1, como en las clases 2 y 7) todas parten iguales. El libro recomienda estandarizar, salvo que las variables compartan unidad (James et al., 2013, p. 381).</a:t>
             </a:r>
           </a:p>
         </p:txBody>
@@ -4189,7 +4344,7 @@
             <a:avLst/>
           </a:prstGeom>
           <a:solidFill>
-            <a:srgbClr val="FAFBFC"/>
+            <a:srgbClr val="1D3557"/>
           </a:solidFill>
           <a:ln>
             <a:noFill/>
@@ -4226,8 +4381,8 @@
         </p:nvSpPr>
         <p:spPr>
           <a:xfrm>
-            <a:off x="402336" y="301752"/>
-            <a:ext cx="8348472" cy="795528"/>
+            <a:off x="603504" y="1847088"/>
+            <a:ext cx="7946136" cy="1399032"/>
           </a:xfrm>
           <a:prstGeom prst="rect">
             <a:avLst/>
@@ -4241,71 +4396,24 @@
           <a:lstStyle/>
           <a:p>
             <a:r>
-              <a:rPr sz="2800" b="1">
-                <a:solidFill>
-                  <a:srgbClr val="0F0F0F"/>
-                </a:solidFill>
-                <a:latin typeface="Fira Sans"/>
-              </a:rPr>
-              <a:t>Los 263 jugadores en dos componentes</a:t>
-            </a:r>
-          </a:p>
-        </p:txBody>
-      </p:sp>
-      <p:pic>
-        <p:nvPicPr>
-          <p:cNvPr id="4" name="Picture 3" descr="c8_05_jugadores.png"/>
-          <p:cNvPicPr>
-            <a:picLocks noChangeAspect="1"/>
-          </p:cNvPicPr>
-          <p:nvPr/>
-        </p:nvPicPr>
-        <p:blipFill>
-          <a:blip r:embed="rId2"/>
-          <a:stretch>
-            <a:fillRect/>
-          </a:stretch>
-        </p:blipFill>
-        <p:spPr>
-          <a:xfrm>
-            <a:off x="2699826" y="1143000"/>
-            <a:ext cx="3744346" cy="2587751"/>
-          </a:xfrm>
-          <a:prstGeom prst="rect">
-            <a:avLst/>
-          </a:prstGeom>
-        </p:spPr>
-      </p:pic>
-      <p:sp>
-        <p:nvSpPr>
-          <p:cNvPr id="5" name="TextBox 4"/>
-          <p:cNvSpPr txBox="1"/>
-          <p:nvPr/>
-        </p:nvSpPr>
-        <p:spPr>
-          <a:xfrm>
-            <a:off x="704088" y="3867912"/>
-            <a:ext cx="7744968" cy="1024128"/>
-          </a:xfrm>
-          <a:prstGeom prst="rect">
-            <a:avLst/>
-          </a:prstGeom>
-          <a:noFill/>
-        </p:spPr>
-        <p:txBody>
-          <a:bodyPr wrap="square">
-            <a:spAutoFit/>
-          </a:bodyPr>
-          <a:lstStyle/>
-          <a:p>
-            <a:r>
-              <a:rPr sz="1300" b="0">
-                <a:solidFill>
-                  <a:srgbClr val="333333"/>
-                </a:solidFill>
-                <a:latin typeface="Fira Sans"/>
-              </a:rPr>
-              <a:t>Cada punto es un jugador y el color, su salario de 1987, que PCA no usó. El salario crece hacia la derecha (correlación 0,64 con la primera componente) y casi nada hacia arriba (0,11 con la segunda): la carrera pesa en el salario; la última temporada, poco. Dos ejes muestran lo que en 16 variables había que leer coeficiente por coeficiente.</a:t>
+              <a:rPr sz="3400" b="1">
+                <a:solidFill>
+                  <a:srgbClr val="FFFFFF"/>
+                </a:solidFill>
+                <a:latin typeface="Fira Sans"/>
+              </a:rPr>
+              <a:t>3. Cómo se leen</a:t>
+            </a:r>
+          </a:p>
+          <a:p>
+            <a:r>
+              <a:rPr sz="1800" b="0">
+                <a:solidFill>
+                  <a:srgbClr val="E0A437"/>
+                </a:solidFill>
+                <a:latin typeface="Fira Sans"/>
+              </a:rPr>
+              <a:t>Cuánta variación explica cada componente y de qué está hecha</a:t>
             </a:r>
           </a:p>
         </p:txBody>
@@ -4401,14 +4509,14 @@
                 </a:solidFill>
                 <a:latin typeface="Fira Sans"/>
               </a:rPr>
-              <a:t>El mismo cálculo con las flores de la clase 2</a:t>
+              <a:t>Cuánta variación explica cada componente</a:t>
             </a:r>
           </a:p>
         </p:txBody>
       </p:sp>
       <p:pic>
         <p:nvPicPr>
-          <p:cNvPr id="4" name="Picture 3" descr="c8_06_iris.png"/>
+          <p:cNvPr id="4" name="Picture 3" descr="c8_03_scree.png"/>
           <p:cNvPicPr>
             <a:picLocks noChangeAspect="1"/>
           </p:cNvPicPr>
@@ -4422,8 +4530,8 @@
         </p:blipFill>
         <p:spPr>
           <a:xfrm>
-            <a:off x="2906606" y="1143000"/>
-            <a:ext cx="3330786" cy="2587751"/>
+            <a:off x="2337301" y="1143000"/>
+            <a:ext cx="4469397" cy="2587752"/>
           </a:xfrm>
           <a:prstGeom prst="rect">
             <a:avLst/>
@@ -4459,7 +4567,7 @@
                 </a:solidFill>
                 <a:latin typeface="Fira Sans"/>
               </a:rPr>
-              <a:t>Las cuatro medidas de iris se resumen en dos componentes que reúnen el 96% de la variación. La primera (73%) pesa casi igual el largo y el ancho del pétalo y el largo del sépalo (0,52 a 0,58): el tamaño de la flor. La segunda (23%) es casi solo el ancho del sépalo (0,92). PCA no conoce la especie y aun así las tres quedan separadas a lo largo de la primera componente.</a:t>
+              <a:t>La primera componente explica el 45,3% de la variación de las 16 variables; la segunda, el 25,7%; la tercera, el 10,8%. Dos componentes reúnen el 71% y tres, el 82%. Para decidir cuántas conservar, el libro sugiere mirar dónde la curva deja de caer (el codo) y advierte que no hay una regla objetiva: depende del uso (James et al., 2013, p. 384).</a:t>
             </a:r>
           </a:p>
         </p:txBody>
@@ -4497,7 +4605,7 @@
             <a:avLst/>
           </a:prstGeom>
           <a:solidFill>
-            <a:srgbClr val="1D3557"/>
+            <a:srgbClr val="FAFBFC"/>
           </a:solidFill>
           <a:ln>
             <a:noFill/>
@@ -4534,8 +4642,8 @@
         </p:nvSpPr>
         <p:spPr>
           <a:xfrm>
-            <a:off x="603504" y="1847088"/>
-            <a:ext cx="7946136" cy="1399032"/>
+            <a:off x="402336" y="301752"/>
+            <a:ext cx="8348472" cy="795528"/>
           </a:xfrm>
           <a:prstGeom prst="rect">
             <a:avLst/>
@@ -4549,24 +4657,71 @@
           <a:lstStyle/>
           <a:p>
             <a:r>
-              <a:rPr sz="3400" b="1">
-                <a:solidFill>
-                  <a:srgbClr val="FFFFFF"/>
-                </a:solidFill>
-                <a:latin typeface="Fira Sans"/>
-              </a:rPr>
-              <a:t>4. Cuándo</a:t>
-            </a:r>
-          </a:p>
-          <a:p>
-            <a:r>
-              <a:rPr sz="1800" b="0">
-                <a:solidFill>
-                  <a:srgbClr val="E0A437"/>
-                </a:solidFill>
-                <a:latin typeface="Fira Sans"/>
-              </a:rPr>
-              <a:t>Cuándo conviene y cuándo no</a:t>
+              <a:rPr sz="2800" b="1">
+                <a:solidFill>
+                  <a:srgbClr val="0F0F0F"/>
+                </a:solidFill>
+                <a:latin typeface="Fira Sans"/>
+              </a:rPr>
+              <a:t>De qué está hecha cada componente: los pesos</a:t>
+            </a:r>
+          </a:p>
+        </p:txBody>
+      </p:sp>
+      <p:pic>
+        <p:nvPicPr>
+          <p:cNvPr id="4" name="Picture 3" descr="c8_04_pesos.png"/>
+          <p:cNvPicPr>
+            <a:picLocks noChangeAspect="1"/>
+          </p:cNvPicPr>
+          <p:nvPr/>
+        </p:nvPicPr>
+        <p:blipFill>
+          <a:blip r:embed="rId2"/>
+          <a:stretch>
+            <a:fillRect/>
+          </a:stretch>
+        </p:blipFill>
+        <p:spPr>
+          <a:xfrm>
+            <a:off x="2196563" y="1143000"/>
+            <a:ext cx="4750872" cy="2587752"/>
+          </a:xfrm>
+          <a:prstGeom prst="rect">
+            <a:avLst/>
+          </a:prstGeom>
+        </p:spPr>
+      </p:pic>
+      <p:sp>
+        <p:nvSpPr>
+          <p:cNvPr id="5" name="TextBox 4"/>
+          <p:cNvSpPr txBox="1"/>
+          <p:nvPr/>
+        </p:nvSpPr>
+        <p:spPr>
+          <a:xfrm>
+            <a:off x="704088" y="3867912"/>
+            <a:ext cx="7744968" cy="1024128"/>
+          </a:xfrm>
+          <a:prstGeom prst="rect">
+            <a:avLst/>
+          </a:prstGeom>
+          <a:noFill/>
+        </p:spPr>
+        <p:txBody>
+          <a:bodyPr wrap="square">
+            <a:spAutoFit/>
+          </a:bodyPr>
+          <a:lstStyle/>
+          <a:p>
+            <a:r>
+              <a:rPr sz="1300" b="0">
+                <a:solidFill>
+                  <a:srgbClr val="333333"/>
+                </a:solidFill>
+                <a:latin typeface="Fira Sans"/>
+              </a:rPr>
+              <a:t>Primera componente: las siete variables de la carrera pesan casi lo mismo (0,29 a 0,34), las de la temporada la mitad (0,19 a 0,23) y la defensa no cuenta: mide cuánta carrera lleva el jugador. Segunda componente: la temporada 1986 pesa positivo (0,24 a 0,39) y la carrera negativo (−0,12 a −0,26): separa a quien rindió este año más de lo que dice su carrera.</a:t>
             </a:r>
           </a:p>
         </p:txBody>
@@ -4662,21 +4817,45 @@
                 </a:solidFill>
                 <a:latin typeface="Fira Sans"/>
               </a:rPr>
-              <a:t>¿Cuándo conviene?</a:t>
-            </a:r>
-          </a:p>
-        </p:txBody>
-      </p:sp>
-      <p:sp>
-        <p:nvSpPr>
-          <p:cNvPr id="4" name="TextBox 3"/>
+              <a:t>Los 263 jugadores en dos componentes</a:t>
+            </a:r>
+          </a:p>
+        </p:txBody>
+      </p:sp>
+      <p:pic>
+        <p:nvPicPr>
+          <p:cNvPr id="4" name="Picture 3" descr="c8_05_jugadores.png"/>
+          <p:cNvPicPr>
+            <a:picLocks noChangeAspect="1"/>
+          </p:cNvPicPr>
+          <p:nvPr/>
+        </p:nvPicPr>
+        <p:blipFill>
+          <a:blip r:embed="rId2"/>
+          <a:stretch>
+            <a:fillRect/>
+          </a:stretch>
+        </p:blipFill>
+        <p:spPr>
+          <a:xfrm>
+            <a:off x="2699826" y="1143000"/>
+            <a:ext cx="3744346" cy="2587751"/>
+          </a:xfrm>
+          <a:prstGeom prst="rect">
+            <a:avLst/>
+          </a:prstGeom>
+        </p:spPr>
+      </p:pic>
+      <p:sp>
+        <p:nvSpPr>
+          <p:cNvPr id="5" name="TextBox 4"/>
           <p:cNvSpPr txBox="1"/>
           <p:nvPr/>
         </p:nvSpPr>
         <p:spPr>
           <a:xfrm>
-            <a:off x="704088" y="1353312"/>
-            <a:ext cx="7744968" cy="3300984"/>
+            <a:off x="704088" y="3867912"/>
+            <a:ext cx="7744968" cy="1024128"/>
           </a:xfrm>
           <a:prstGeom prst="rect">
             <a:avLst/>
@@ -4689,87 +4868,14 @@
           </a:bodyPr>
           <a:lstStyle/>
           <a:p>
-            <a:pPr>
-              <a:lnSpc>
-                <a:spcPct val="112000"/>
-              </a:lnSpc>
-              <a:spcAft>
-                <a:spcPts val="900"/>
-              </a:spcAft>
-            </a:pPr>
-            <a:r>
-              <a:rPr sz="1800" b="1">
-                <a:solidFill>
-                  <a:srgbClr val="E0A437"/>
-                </a:solidFill>
-                <a:latin typeface="Fira Sans"/>
-              </a:rPr>
-              <a:t>▸ </a:t>
-            </a:r>
-            <a:r>
-              <a:rPr sz="1800" b="1">
-                <a:solidFill>
-                  <a:srgbClr val="1D3557"/>
-                </a:solidFill>
-                <a:latin typeface="Fira Sans"/>
-              </a:rPr>
-              <a:t>Con muchas variables numéricas que se correlacionan en bloques, como en la matriz de la clase 7.</a:t>
-            </a:r>
-          </a:p>
-          <a:p>
-            <a:pPr>
-              <a:lnSpc>
-                <a:spcPct val="112000"/>
-              </a:lnSpc>
-              <a:spcAft>
-                <a:spcPts val="900"/>
-              </a:spcAft>
-            </a:pPr>
-            <a:r>
-              <a:rPr sz="1800" b="1">
-                <a:solidFill>
-                  <a:srgbClr val="E0A437"/>
-                </a:solidFill>
-                <a:latin typeface="Fira Sans"/>
-              </a:rPr>
-              <a:t>▸ </a:t>
-            </a:r>
-            <a:r>
-              <a:rPr sz="1800" b="0">
-                <a:solidFill>
-                  <a:srgbClr val="000000"/>
-                </a:solidFill>
-                <a:latin typeface="Fira Sans"/>
-              </a:rPr>
-              <a:t>Para mirar los datos en un plano, o para entregarle a un modelo menos entradas.</a:t>
-            </a:r>
-          </a:p>
-          <a:p>
-            <a:pPr>
-              <a:lnSpc>
-                <a:spcPct val="112000"/>
-              </a:lnSpc>
-              <a:spcAft>
-                <a:spcPts val="900"/>
-              </a:spcAft>
-            </a:pPr>
-            <a:r>
-              <a:rPr sz="1800" b="1">
-                <a:solidFill>
-                  <a:srgbClr val="E0A437"/>
-                </a:solidFill>
-                <a:latin typeface="Fira Sans"/>
-              </a:rPr>
-              <a:t>▸ </a:t>
-            </a:r>
-            <a:r>
-              <a:rPr sz="1800" b="0">
-                <a:solidFill>
-                  <a:srgbClr val="000000"/>
-                </a:solidFill>
-                <a:latin typeface="Fira Sans"/>
-              </a:rPr>
-              <a:t>No aporta si las variables son pocas y distintas entre sí: no hay nada que resumir.</a:t>
+            <a:r>
+              <a:rPr sz="1300" b="0">
+                <a:solidFill>
+                  <a:srgbClr val="333333"/>
+                </a:solidFill>
+                <a:latin typeface="Fira Sans"/>
+              </a:rPr>
+              <a:t>Cada punto es un jugador y el color, su salario de 1987, que PCA no usó. El salario crece hacia la derecha (correlación 0,64 con la primera componente) y casi nada hacia arriba (0,11 con la segunda): la carrera pesa en el salario; la última temporada, poco. Dos ejes muestran lo que en 16 variables había que leer coeficiente por coeficiente.</a:t>
             </a:r>
           </a:p>
         </p:txBody>
@@ -4865,21 +4971,45 @@
                 </a:solidFill>
                 <a:latin typeface="Fira Sans"/>
               </a:rPr>
-              <a:t>Tres precauciones</a:t>
-            </a:r>
-          </a:p>
-        </p:txBody>
-      </p:sp>
-      <p:sp>
-        <p:nvSpPr>
-          <p:cNvPr id="4" name="TextBox 3"/>
+              <a:t>El mismo cálculo con las flores de la clase 2</a:t>
+            </a:r>
+          </a:p>
+        </p:txBody>
+      </p:sp>
+      <p:pic>
+        <p:nvPicPr>
+          <p:cNvPr id="4" name="Picture 3" descr="c8_06_iris.png"/>
+          <p:cNvPicPr>
+            <a:picLocks noChangeAspect="1"/>
+          </p:cNvPicPr>
+          <p:nvPr/>
+        </p:nvPicPr>
+        <p:blipFill>
+          <a:blip r:embed="rId2"/>
+          <a:stretch>
+            <a:fillRect/>
+          </a:stretch>
+        </p:blipFill>
+        <p:spPr>
+          <a:xfrm>
+            <a:off x="2906606" y="1143000"/>
+            <a:ext cx="3330786" cy="2587751"/>
+          </a:xfrm>
+          <a:prstGeom prst="rect">
+            <a:avLst/>
+          </a:prstGeom>
+        </p:spPr>
+      </p:pic>
+      <p:sp>
+        <p:nvSpPr>
+          <p:cNvPr id="5" name="TextBox 4"/>
           <p:cNvSpPr txBox="1"/>
           <p:nvPr/>
         </p:nvSpPr>
         <p:spPr>
           <a:xfrm>
-            <a:off x="704088" y="1353312"/>
-            <a:ext cx="7744968" cy="3300984"/>
+            <a:off x="704088" y="3867912"/>
+            <a:ext cx="7744968" cy="1024128"/>
           </a:xfrm>
           <a:prstGeom prst="rect">
             <a:avLst/>
@@ -4892,87 +5022,14 @@
           </a:bodyPr>
           <a:lstStyle/>
           <a:p>
-            <a:pPr>
-              <a:lnSpc>
-                <a:spcPct val="112000"/>
-              </a:lnSpc>
-              <a:spcAft>
-                <a:spcPts val="900"/>
-              </a:spcAft>
-            </a:pPr>
-            <a:r>
-              <a:rPr sz="1800" b="1">
-                <a:solidFill>
-                  <a:srgbClr val="E0A437"/>
-                </a:solidFill>
-                <a:latin typeface="Fira Sans"/>
-              </a:rPr>
-              <a:t>▸ </a:t>
-            </a:r>
-            <a:r>
-              <a:rPr sz="1800" b="1">
-                <a:solidFill>
-                  <a:srgbClr val="1D3557"/>
-                </a:solidFill>
-                <a:latin typeface="Fira Sans"/>
-              </a:rPr>
-              <a:t>Las variables categóricas (las dummies de la clase 6) no entran bien en el cálculo: se dejan fuera o se tratan aparte.</a:t>
-            </a:r>
-          </a:p>
-          <a:p>
-            <a:pPr>
-              <a:lnSpc>
-                <a:spcPct val="112000"/>
-              </a:lnSpc>
-              <a:spcAft>
-                <a:spcPts val="900"/>
-              </a:spcAft>
-            </a:pPr>
-            <a:r>
-              <a:rPr sz="1800" b="1">
-                <a:solidFill>
-                  <a:srgbClr val="E0A437"/>
-                </a:solidFill>
-                <a:latin typeface="Fira Sans"/>
-              </a:rPr>
-              <a:t>▸ </a:t>
-            </a:r>
-            <a:r>
-              <a:rPr sz="1800" b="0">
-                <a:solidFill>
-                  <a:srgbClr val="000000"/>
-                </a:solidFill>
-                <a:latin typeface="Fira Sans"/>
-              </a:rPr>
-              <a:t>Las componentes no siempre tienen una lectura clara. Aquí sí (la carrera; la temporada frente a la carrera), pero no está garantizado.</a:t>
-            </a:r>
-          </a:p>
-          <a:p>
-            <a:pPr>
-              <a:lnSpc>
-                <a:spcPct val="112000"/>
-              </a:lnSpc>
-              <a:spcAft>
-                <a:spcPts val="900"/>
-              </a:spcAft>
-            </a:pPr>
-            <a:r>
-              <a:rPr sz="1800" b="1">
-                <a:solidFill>
-                  <a:srgbClr val="E0A437"/>
-                </a:solidFill>
-                <a:latin typeface="Fira Sans"/>
-              </a:rPr>
-              <a:t>▸ </a:t>
-            </a:r>
-            <a:r>
-              <a:rPr sz="1800" b="0">
-                <a:solidFill>
-                  <a:srgbClr val="000000"/>
-                </a:solidFill>
-                <a:latin typeface="Fira Sans"/>
-              </a:rPr>
-              <a:t>Es no supervisado: la dirección de más variación no es necesariamente la que mejor predice la respuesta. Ridge y Lasso eligen mirando Y; PCA no la mira.</a:t>
+            <a:r>
+              <a:rPr sz="1300" b="0">
+                <a:solidFill>
+                  <a:srgbClr val="333333"/>
+                </a:solidFill>
+                <a:latin typeface="Fira Sans"/>
+              </a:rPr>
+              <a:t>Las cuatro medidas de iris se resumen en dos componentes que reúnen el 96% de la variación. La primera (73%) pesa casi igual el largo y el ancho del pétalo y el largo del sépalo (0,52 a 0,58): el tamaño de la flor. La segunda (23%) es casi solo el ancho del sépalo (0,92). PCA no conoce la especie y aun así las tres quedan separadas a lo largo de la primera componente.</a:t>
             </a:r>
           </a:p>
         </p:txBody>
@@ -5241,7 +5298,7 @@
             <a:avLst/>
           </a:prstGeom>
           <a:solidFill>
-            <a:srgbClr val="FAFBFC"/>
+            <a:srgbClr val="1D3557"/>
           </a:solidFill>
           <a:ln>
             <a:noFill/>
@@ -5278,8 +5335,8 @@
         </p:nvSpPr>
         <p:spPr>
           <a:xfrm>
-            <a:off x="402336" y="301752"/>
-            <a:ext cx="8348472" cy="795528"/>
+            <a:off x="603504" y="1847088"/>
+            <a:ext cx="7946136" cy="1399032"/>
           </a:xfrm>
           <a:prstGeom prst="rect">
             <a:avLst/>
@@ -5293,167 +5350,24 @@
           <a:lstStyle/>
           <a:p>
             <a:r>
-              <a:rPr sz="2800" b="1">
-                <a:solidFill>
-                  <a:srgbClr val="0F0F0F"/>
-                </a:solidFill>
-                <a:latin typeface="Fira Sans"/>
-              </a:rPr>
-              <a:t>En el código: cinco líneas</a:t>
-            </a:r>
-          </a:p>
-        </p:txBody>
-      </p:sp>
-      <p:sp>
-        <p:nvSpPr>
-          <p:cNvPr id="4" name="Rectangle 3"/>
-          <p:cNvSpPr/>
-          <p:nvPr/>
-        </p:nvSpPr>
-        <p:spPr>
-          <a:xfrm>
-            <a:off x="704088" y="1280160"/>
-            <a:ext cx="7744968" cy="2880360"/>
-          </a:xfrm>
-          <a:prstGeom prst="rect">
-            <a:avLst/>
-          </a:prstGeom>
-          <a:solidFill>
-            <a:srgbClr val="F0F2F5"/>
-          </a:solidFill>
-          <a:ln>
-            <a:solidFill>
-              <a:srgbClr val="D8DDE3"/>
-            </a:solidFill>
-          </a:ln>
-          <a:effectLst/>
-        </p:spPr>
-        <p:style>
-          <a:lnRef idx="1">
-            <a:schemeClr val="accent1"/>
-          </a:lnRef>
-          <a:fillRef idx="3">
-            <a:schemeClr val="accent1"/>
-          </a:fillRef>
-          <a:effectRef idx="2">
-            <a:schemeClr val="accent1"/>
-          </a:effectRef>
-          <a:fontRef idx="minor">
-            <a:schemeClr val="lt1"/>
-          </a:fontRef>
-        </p:style>
-        <p:txBody>
-          <a:bodyPr rtlCol="0" anchor="ctr" wrap="square" lIns="228600" tIns="137160"/>
-          <a:lstStyle/>
-          <a:p>
-            <a:pPr/>
-            <a:r>
-              <a:rPr sz="1500" b="0">
-                <a:solidFill>
-                  <a:srgbClr val="1D3557"/>
-                </a:solidFill>
-                <a:latin typeface="Menlo"/>
-              </a:rPr>
-              <a:t>Z = StandardScaler().fit_transform(X)  # 1. estandarizar</a:t>
-            </a:r>
-          </a:p>
-          <a:p>
-            <a:pPr/>
-            <a:r>
-              <a:rPr sz="1500" b="0">
-                <a:solidFill>
-                  <a:srgbClr val="1D3557"/>
-                </a:solidFill>
-                <a:latin typeface="Menlo"/>
-              </a:rPr>
-              <a:t>pca = PCA().fit(Z)                     # 2. las componentes</a:t>
-            </a:r>
-          </a:p>
-          <a:p>
-            <a:pPr/>
-            <a:r>
-              <a:rPr sz="1500" b="0">
-                <a:solidFill>
-                  <a:srgbClr val="1D3557"/>
-                </a:solidFill>
-                <a:latin typeface="Menlo"/>
-              </a:rPr>
-              <a:t>pca.explained_variance_ratio_          # 3. cuánto explica</a:t>
-            </a:r>
-          </a:p>
-          <a:p>
-            <a:pPr/>
-            <a:r>
-              <a:rPr sz="1500" b="0">
-                <a:solidFill>
-                  <a:srgbClr val="1D3557"/>
-                </a:solidFill>
-                <a:latin typeface="Menlo"/>
-              </a:rPr>
-              <a:t>pca.components_                        # 4. los pesos</a:t>
-            </a:r>
-          </a:p>
-          <a:p>
-            <a:pPr/>
-            <a:r>
-              <a:rPr sz="1500" b="0">
-                <a:solidFill>
-                  <a:srgbClr val="1D3557"/>
-                </a:solidFill>
-                <a:latin typeface="Menlo"/>
-              </a:rPr>
-              <a:t>puntajes = pca.transform(Z)            # 5. los puntajes</a:t>
-            </a:r>
-          </a:p>
-        </p:txBody>
-      </p:sp>
-      <p:sp>
-        <p:nvSpPr>
-          <p:cNvPr id="5" name="TextBox 4"/>
-          <p:cNvSpPr txBox="1"/>
-          <p:nvPr/>
-        </p:nvSpPr>
-        <p:spPr>
-          <a:xfrm>
-            <a:off x="704088" y="4389120"/>
-            <a:ext cx="7744968" cy="1097280"/>
-          </a:xfrm>
-          <a:prstGeom prst="rect">
-            <a:avLst/>
-          </a:prstGeom>
-          <a:noFill/>
-        </p:spPr>
-        <p:txBody>
-          <a:bodyPr wrap="square">
-            <a:spAutoFit/>
-          </a:bodyPr>
-          <a:lstStyle/>
-          <a:p>
-            <a:pPr>
-              <a:lnSpc>
-                <a:spcPct val="112000"/>
-              </a:lnSpc>
-              <a:spcAft>
-                <a:spcPts val="900"/>
-              </a:spcAft>
-            </a:pPr>
-            <a:r>
-              <a:rPr sz="1600" b="1">
+              <a:rPr sz="3400" b="1">
+                <a:solidFill>
+                  <a:srgbClr val="FFFFFF"/>
+                </a:solidFill>
+                <a:latin typeface="Fira Sans"/>
+              </a:rPr>
+              <a:t>4. Cuándo</a:t>
+            </a:r>
+          </a:p>
+          <a:p>
+            <a:r>
+              <a:rPr sz="1800" b="0">
                 <a:solidFill>
                   <a:srgbClr val="E0A437"/>
                 </a:solidFill>
                 <a:latin typeface="Fira Sans"/>
               </a:rPr>
-              <a:t>▸ </a:t>
-            </a:r>
-            <a:r>
-              <a:rPr sz="1600" b="0">
-                <a:solidFill>
-                  <a:srgbClr val="000000"/>
-                </a:solidFill>
-                <a:latin typeface="Fira Sans"/>
-              </a:rPr>
-              <a:t>El ejemplo completo, con las tablas de pesos y los gráficos de la clase, está en el notebook 08_componentes_principales.ipynb.</a:t>
+              <a:t>Cuándo conviene y cuándo no</a:t>
             </a:r>
           </a:p>
         </p:txBody>
@@ -5491,7 +5405,7 @@
             <a:avLst/>
           </a:prstGeom>
           <a:solidFill>
-            <a:srgbClr val="1D3557"/>
+            <a:srgbClr val="FAFBFC"/>
           </a:solidFill>
           <a:ln>
             <a:noFill/>
@@ -5528,8 +5442,8 @@
         </p:nvSpPr>
         <p:spPr>
           <a:xfrm>
-            <a:off x="603504" y="1847088"/>
-            <a:ext cx="7946136" cy="1399032"/>
+            <a:off x="402336" y="301752"/>
+            <a:ext cx="8348472" cy="795528"/>
           </a:xfrm>
           <a:prstGeom prst="rect">
             <a:avLst/>
@@ -5543,24 +5457,120 @@
           <a:lstStyle/>
           <a:p>
             <a:r>
-              <a:rPr sz="3400" b="1">
-                <a:solidFill>
-                  <a:srgbClr val="FFFFFF"/>
-                </a:solidFill>
-                <a:latin typeface="Fira Sans"/>
-              </a:rPr>
-              <a:t>5. Cierre del módulo</a:t>
-            </a:r>
-          </a:p>
-          <a:p>
+              <a:rPr sz="2800" b="1">
+                <a:solidFill>
+                  <a:srgbClr val="0F0F0F"/>
+                </a:solidFill>
+                <a:latin typeface="Fira Sans"/>
+              </a:rPr>
+              <a:t>¿Cuándo conviene?</a:t>
+            </a:r>
+          </a:p>
+        </p:txBody>
+      </p:sp>
+      <p:sp>
+        <p:nvSpPr>
+          <p:cNvPr id="4" name="TextBox 3"/>
+          <p:cNvSpPr txBox="1"/>
+          <p:nvPr/>
+        </p:nvSpPr>
+        <p:spPr>
+          <a:xfrm>
+            <a:off x="704088" y="1353312"/>
+            <a:ext cx="7744968" cy="3300984"/>
+          </a:xfrm>
+          <a:prstGeom prst="rect">
+            <a:avLst/>
+          </a:prstGeom>
+          <a:noFill/>
+        </p:spPr>
+        <p:txBody>
+          <a:bodyPr wrap="square">
+            <a:spAutoFit/>
+          </a:bodyPr>
+          <a:lstStyle/>
+          <a:p>
+            <a:pPr>
+              <a:lnSpc>
+                <a:spcPct val="112000"/>
+              </a:lnSpc>
+              <a:spcAft>
+                <a:spcPts val="900"/>
+              </a:spcAft>
+            </a:pPr>
+            <a:r>
+              <a:rPr sz="1800" b="1">
+                <a:solidFill>
+                  <a:srgbClr val="E0A437"/>
+                </a:solidFill>
+                <a:latin typeface="Fira Sans"/>
+              </a:rPr>
+              <a:t>▸ </a:t>
+            </a:r>
+            <a:r>
+              <a:rPr sz="1800" b="1">
+                <a:solidFill>
+                  <a:srgbClr val="1D3557"/>
+                </a:solidFill>
+                <a:latin typeface="Fira Sans"/>
+              </a:rPr>
+              <a:t>Con muchas variables numéricas que se correlacionan en bloques, como en la matriz de la clase 7.</a:t>
+            </a:r>
+          </a:p>
+          <a:p>
+            <a:pPr>
+              <a:lnSpc>
+                <a:spcPct val="112000"/>
+              </a:lnSpc>
+              <a:spcAft>
+                <a:spcPts val="900"/>
+              </a:spcAft>
+            </a:pPr>
+            <a:r>
+              <a:rPr sz="1800" b="1">
+                <a:solidFill>
+                  <a:srgbClr val="E0A437"/>
+                </a:solidFill>
+                <a:latin typeface="Fira Sans"/>
+              </a:rPr>
+              <a:t>▸ </a:t>
+            </a:r>
             <a:r>
               <a:rPr sz="1800" b="0">
                 <a:solidFill>
+                  <a:srgbClr val="000000"/>
+                </a:solidFill>
+                <a:latin typeface="Fira Sans"/>
+              </a:rPr>
+              <a:t>Para mirar los datos en un plano, o para entregarle a un modelo menos entradas.</a:t>
+            </a:r>
+          </a:p>
+          <a:p>
+            <a:pPr>
+              <a:lnSpc>
+                <a:spcPct val="112000"/>
+              </a:lnSpc>
+              <a:spcAft>
+                <a:spcPts val="900"/>
+              </a:spcAft>
+            </a:pPr>
+            <a:r>
+              <a:rPr sz="1800" b="1">
+                <a:solidFill>
                   <a:srgbClr val="E0A437"/>
                 </a:solidFill>
                 <a:latin typeface="Fira Sans"/>
               </a:rPr>
-              <a:t>Ocho clases, un hilo</a:t>
+              <a:t>▸ </a:t>
+            </a:r>
+            <a:r>
+              <a:rPr sz="1800" b="0">
+                <a:solidFill>
+                  <a:srgbClr val="000000"/>
+                </a:solidFill>
+                <a:latin typeface="Fira Sans"/>
+              </a:rPr>
+              <a:t>No aporta si las variables son pocas y distintas entre sí: no hay nada que resumir.</a:t>
             </a:r>
           </a:p>
         </p:txBody>
@@ -5656,45 +5666,21 @@
                 </a:solidFill>
                 <a:latin typeface="Fira Sans"/>
               </a:rPr>
-              <a:t>El módulo en una página</a:t>
-            </a:r>
-          </a:p>
-        </p:txBody>
-      </p:sp>
-      <p:pic>
-        <p:nvPicPr>
-          <p:cNvPr id="4" name="Picture 3" descr="c8_07_mapa_modulo.png"/>
-          <p:cNvPicPr>
-            <a:picLocks noChangeAspect="1"/>
-          </p:cNvPicPr>
-          <p:nvPr/>
-        </p:nvPicPr>
-        <p:blipFill>
-          <a:blip r:embed="rId2"/>
-          <a:stretch>
-            <a:fillRect/>
-          </a:stretch>
-        </p:blipFill>
-        <p:spPr>
-          <a:xfrm>
-            <a:off x="1029546" y="1143000"/>
-            <a:ext cx="7084906" cy="3099816"/>
-          </a:xfrm>
-          <a:prstGeom prst="rect">
-            <a:avLst/>
-          </a:prstGeom>
-        </p:spPr>
-      </p:pic>
-      <p:sp>
-        <p:nvSpPr>
-          <p:cNvPr id="5" name="TextBox 4"/>
+              <a:t>Tres precauciones</a:t>
+            </a:r>
+          </a:p>
+        </p:txBody>
+      </p:sp>
+      <p:sp>
+        <p:nvSpPr>
+          <p:cNvPr id="4" name="TextBox 3"/>
           <p:cNvSpPr txBox="1"/>
           <p:nvPr/>
         </p:nvSpPr>
         <p:spPr>
           <a:xfrm>
-            <a:off x="704088" y="4379976"/>
-            <a:ext cx="7744968" cy="512064"/>
+            <a:off x="704088" y="1353312"/>
+            <a:ext cx="7744968" cy="3300984"/>
           </a:xfrm>
           <a:prstGeom prst="rect">
             <a:avLst/>
@@ -5707,14 +5693,87 @@
           </a:bodyPr>
           <a:lstStyle/>
           <a:p>
-            <a:r>
-              <a:rPr sz="1300" b="0">
-                <a:solidFill>
-                  <a:srgbClr val="333333"/>
-                </a:solidFill>
-                <a:latin typeface="Fira Sans"/>
-              </a:rPr>
-              <a:t>Cada clase dejó una idea. Juntas, son lo que el módulo enseñó: cómo se llega de una pregunta y unos datos a un resultado, y cómo se lee ese resultado con su incertidumbre.</a:t>
+            <a:pPr>
+              <a:lnSpc>
+                <a:spcPct val="112000"/>
+              </a:lnSpc>
+              <a:spcAft>
+                <a:spcPts val="900"/>
+              </a:spcAft>
+            </a:pPr>
+            <a:r>
+              <a:rPr sz="1800" b="1">
+                <a:solidFill>
+                  <a:srgbClr val="E0A437"/>
+                </a:solidFill>
+                <a:latin typeface="Fira Sans"/>
+              </a:rPr>
+              <a:t>▸ </a:t>
+            </a:r>
+            <a:r>
+              <a:rPr sz="1800" b="1">
+                <a:solidFill>
+                  <a:srgbClr val="1D3557"/>
+                </a:solidFill>
+                <a:latin typeface="Fira Sans"/>
+              </a:rPr>
+              <a:t>Las variables categóricas (las dummies de la clase 6) no entran bien en el cálculo: se dejan fuera o se tratan aparte.</a:t>
+            </a:r>
+          </a:p>
+          <a:p>
+            <a:pPr>
+              <a:lnSpc>
+                <a:spcPct val="112000"/>
+              </a:lnSpc>
+              <a:spcAft>
+                <a:spcPts val="900"/>
+              </a:spcAft>
+            </a:pPr>
+            <a:r>
+              <a:rPr sz="1800" b="1">
+                <a:solidFill>
+                  <a:srgbClr val="E0A437"/>
+                </a:solidFill>
+                <a:latin typeface="Fira Sans"/>
+              </a:rPr>
+              <a:t>▸ </a:t>
+            </a:r>
+            <a:r>
+              <a:rPr sz="1800" b="0">
+                <a:solidFill>
+                  <a:srgbClr val="000000"/>
+                </a:solidFill>
+                <a:latin typeface="Fira Sans"/>
+              </a:rPr>
+              <a:t>Las componentes no siempre tienen una lectura clara. Aquí sí (la carrera; la temporada frente a la carrera), pero no está garantizado.</a:t>
+            </a:r>
+          </a:p>
+          <a:p>
+            <a:pPr>
+              <a:lnSpc>
+                <a:spcPct val="112000"/>
+              </a:lnSpc>
+              <a:spcAft>
+                <a:spcPts val="900"/>
+              </a:spcAft>
+            </a:pPr>
+            <a:r>
+              <a:rPr sz="1800" b="1">
+                <a:solidFill>
+                  <a:srgbClr val="E0A437"/>
+                </a:solidFill>
+                <a:latin typeface="Fira Sans"/>
+              </a:rPr>
+              <a:t>▸ </a:t>
+            </a:r>
+            <a:r>
+              <a:rPr sz="1800" b="0">
+                <a:solidFill>
+                  <a:srgbClr val="000000"/>
+                </a:solidFill>
+                <a:latin typeface="Fira Sans"/>
+              </a:rPr>
+              <a:t>Es no supervisado: la dirección de más variación no es necesariamente la que mejor predice la respuesta. Ridge y Lasso eligen mirando Y; PCA no la mira.</a:t>
             </a:r>
           </a:p>
         </p:txBody>
@@ -5810,21 +5869,124 @@
                 </a:solidFill>
                 <a:latin typeface="Fira Sans"/>
               </a:rPr>
-              <a:t>Lo que sigue en el diplomado</a:t>
-            </a:r>
-          </a:p>
-        </p:txBody>
-      </p:sp>
-      <p:sp>
-        <p:nvSpPr>
-          <p:cNvPr id="4" name="TextBox 3"/>
+              <a:t>En el código: cinco líneas</a:t>
+            </a:r>
+          </a:p>
+        </p:txBody>
+      </p:sp>
+      <p:sp>
+        <p:nvSpPr>
+          <p:cNvPr id="4" name="Rectangle 3"/>
+          <p:cNvSpPr/>
+          <p:nvPr/>
+        </p:nvSpPr>
+        <p:spPr>
+          <a:xfrm>
+            <a:off x="704088" y="1280160"/>
+            <a:ext cx="7744968" cy="2880360"/>
+          </a:xfrm>
+          <a:prstGeom prst="rect">
+            <a:avLst/>
+          </a:prstGeom>
+          <a:solidFill>
+            <a:srgbClr val="F0F2F5"/>
+          </a:solidFill>
+          <a:ln>
+            <a:solidFill>
+              <a:srgbClr val="D8DDE3"/>
+            </a:solidFill>
+          </a:ln>
+          <a:effectLst/>
+        </p:spPr>
+        <p:style>
+          <a:lnRef idx="1">
+            <a:schemeClr val="accent1"/>
+          </a:lnRef>
+          <a:fillRef idx="3">
+            <a:schemeClr val="accent1"/>
+          </a:fillRef>
+          <a:effectRef idx="2">
+            <a:schemeClr val="accent1"/>
+          </a:effectRef>
+          <a:fontRef idx="minor">
+            <a:schemeClr val="lt1"/>
+          </a:fontRef>
+        </p:style>
+        <p:txBody>
+          <a:bodyPr rtlCol="0" anchor="ctr" wrap="square" lIns="228600" tIns="137160"/>
+          <a:lstStyle/>
+          <a:p>
+            <a:pPr/>
+            <a:r>
+              <a:rPr sz="1500" b="0">
+                <a:solidFill>
+                  <a:srgbClr val="1D3557"/>
+                </a:solidFill>
+                <a:latin typeface="Menlo"/>
+              </a:rPr>
+              <a:t>Z = StandardScaler().fit_transform(X)  # 1. estandarizar</a:t>
+            </a:r>
+          </a:p>
+          <a:p>
+            <a:pPr/>
+            <a:r>
+              <a:rPr sz="1500" b="0">
+                <a:solidFill>
+                  <a:srgbClr val="1D3557"/>
+                </a:solidFill>
+                <a:latin typeface="Menlo"/>
+              </a:rPr>
+              <a:t>pca = PCA().fit(Z)                     # 2. las componentes</a:t>
+            </a:r>
+          </a:p>
+          <a:p>
+            <a:pPr/>
+            <a:r>
+              <a:rPr sz="1500" b="0">
+                <a:solidFill>
+                  <a:srgbClr val="1D3557"/>
+                </a:solidFill>
+                <a:latin typeface="Menlo"/>
+              </a:rPr>
+              <a:t>pca.explained_variance_ratio_          # 3. cuánto explica</a:t>
+            </a:r>
+          </a:p>
+          <a:p>
+            <a:pPr/>
+            <a:r>
+              <a:rPr sz="1500" b="0">
+                <a:solidFill>
+                  <a:srgbClr val="1D3557"/>
+                </a:solidFill>
+                <a:latin typeface="Menlo"/>
+              </a:rPr>
+              <a:t>pca.components_                        # 4. los pesos</a:t>
+            </a:r>
+          </a:p>
+          <a:p>
+            <a:pPr/>
+            <a:r>
+              <a:rPr sz="1500" b="0">
+                <a:solidFill>
+                  <a:srgbClr val="1D3557"/>
+                </a:solidFill>
+                <a:latin typeface="Menlo"/>
+              </a:rPr>
+              <a:t>puntajes = pca.transform(Z)            # 5. los puntajes</a:t>
+            </a:r>
+          </a:p>
+        </p:txBody>
+      </p:sp>
+      <p:sp>
+        <p:nvSpPr>
+          <p:cNvPr id="5" name="TextBox 4"/>
           <p:cNvSpPr txBox="1"/>
           <p:nvPr/>
         </p:nvSpPr>
         <p:spPr>
           <a:xfrm>
-            <a:off x="704088" y="1353312"/>
-            <a:ext cx="7744968" cy="3300984"/>
+            <a:off x="704088" y="4389120"/>
+            <a:ext cx="7744968" cy="1097280"/>
           </a:xfrm>
           <a:prstGeom prst="rect">
             <a:avLst/>
@@ -5846,7 +6008,7 @@
               </a:spcAft>
             </a:pPr>
             <a:r>
-              <a:rPr sz="1800" b="1">
+              <a:rPr sz="1600" b="1">
                 <a:solidFill>
                   <a:srgbClr val="E0A437"/>
                 </a:solidFill>
@@ -5855,97 +6017,13 @@
               <a:t>▸ </a:t>
             </a:r>
             <a:r>
-              <a:rPr sz="1800" b="1">
-                <a:solidFill>
-                  <a:srgbClr val="1D3557"/>
-                </a:solidFill>
-                <a:latin typeface="Fira Sans"/>
-              </a:rPr>
-              <a:t>Módulo 2, Visualización e Inteligencia de Negocios: visualización efectiva, narrativas con datos y métricas de negocio.</a:t>
-            </a:r>
-          </a:p>
-          <a:p>
-            <a:pPr>
-              <a:lnSpc>
-                <a:spcPct val="112000"/>
-              </a:lnSpc>
-              <a:spcAft>
-                <a:spcPts val="900"/>
-              </a:spcAft>
-            </a:pPr>
-            <a:r>
-              <a:rPr sz="1800" b="1">
-                <a:solidFill>
-                  <a:srgbClr val="E0A437"/>
-                </a:solidFill>
-                <a:latin typeface="Fira Sans"/>
-              </a:rPr>
-              <a:t>▸ </a:t>
-            </a:r>
-            <a:r>
-              <a:rPr sz="1800" b="0">
+              <a:rPr sz="1600" b="0">
                 <a:solidFill>
                   <a:srgbClr val="000000"/>
                 </a:solidFill>
                 <a:latin typeface="Fira Sans"/>
               </a:rPr>
-              <a:t>Módulo 3, Machine Learning para la Toma de Decisiones: aprendizaje supervisado y no supervisado (clustering y PCA en profundidad), evaluación de modelos, redes neuronales y explicabilidad.</a:t>
-            </a:r>
-          </a:p>
-          <a:p>
-            <a:pPr>
-              <a:lnSpc>
-                <a:spcPct val="112000"/>
-              </a:lnSpc>
-              <a:spcAft>
-                <a:spcPts val="900"/>
-              </a:spcAft>
-            </a:pPr>
-            <a:r>
-              <a:rPr sz="1800" b="1">
-                <a:solidFill>
-                  <a:srgbClr val="E0A437"/>
-                </a:solidFill>
-                <a:latin typeface="Fira Sans"/>
-              </a:rPr>
-              <a:t>▸ </a:t>
-            </a:r>
-            <a:r>
-              <a:rPr sz="1800" b="0">
-                <a:solidFill>
-                  <a:srgbClr val="000000"/>
-                </a:solidFill>
-                <a:latin typeface="Fira Sans"/>
-              </a:rPr>
-              <a:t>El Capstone continúa en esos módulos: el primer modelo de hoy es el punto de partida.</a:t>
-            </a:r>
-          </a:p>
-          <a:p>
-            <a:pPr>
-              <a:lnSpc>
-                <a:spcPct val="112000"/>
-              </a:lnSpc>
-              <a:spcAft>
-                <a:spcPts val="900"/>
-              </a:spcAft>
-            </a:pPr>
-            <a:r>
-              <a:rPr sz="1800" b="1">
-                <a:solidFill>
-                  <a:srgbClr val="E0A437"/>
-                </a:solidFill>
-                <a:latin typeface="Fira Sans"/>
-              </a:rPr>
-              <a:t>▸ </a:t>
-            </a:r>
-            <a:r>
-              <a:rPr sz="1800" b="0">
-                <a:solidFill>
-                  <a:srgbClr val="000000"/>
-                </a:solidFill>
-                <a:latin typeface="Fira Sans"/>
-              </a:rPr>
-              <a:t>Lo que se lleva de aquí: leer un resultado con su incertidumbre, juzgar un modelo en datos que no vio, y distinguir describir de encontrar una relación.</a:t>
+              <a:t>El ejemplo completo, con las tablas de pesos y los gráficos de la clase, está en el notebook 08_componentes_principales.ipynb.</a:t>
             </a:r>
           </a:p>
         </p:txBody>
@@ -5983,7 +6061,7 @@
             <a:avLst/>
           </a:prstGeom>
           <a:solidFill>
-            <a:srgbClr val="FAFBFC"/>
+            <a:srgbClr val="1D3557"/>
           </a:solidFill>
           <a:ln>
             <a:noFill/>
@@ -6020,8 +6098,8 @@
         </p:nvSpPr>
         <p:spPr>
           <a:xfrm>
-            <a:off x="402336" y="301752"/>
-            <a:ext cx="8348472" cy="795528"/>
+            <a:off x="603504" y="1847088"/>
+            <a:ext cx="7946136" cy="1399032"/>
           </a:xfrm>
           <a:prstGeom prst="rect">
             <a:avLst/>
@@ -6035,148 +6113,24 @@
           <a:lstStyle/>
           <a:p>
             <a:r>
-              <a:rPr sz="2800" b="1">
-                <a:solidFill>
-                  <a:srgbClr val="0F0F0F"/>
-                </a:solidFill>
-                <a:latin typeface="Fira Sans"/>
-              </a:rPr>
-              <a:t>Ahora: las presentaciones del avance</a:t>
-            </a:r>
-          </a:p>
-        </p:txBody>
-      </p:sp>
-      <p:sp>
-        <p:nvSpPr>
-          <p:cNvPr id="4" name="TextBox 3"/>
-          <p:cNvSpPr txBox="1"/>
-          <p:nvPr/>
-        </p:nvSpPr>
-        <p:spPr>
-          <a:xfrm>
-            <a:off x="704088" y="1353312"/>
-            <a:ext cx="7744968" cy="3300984"/>
-          </a:xfrm>
-          <a:prstGeom prst="rect">
-            <a:avLst/>
-          </a:prstGeom>
-          <a:noFill/>
-        </p:spPr>
-        <p:txBody>
-          <a:bodyPr wrap="square">
-            <a:spAutoFit/>
-          </a:bodyPr>
-          <a:lstStyle/>
-          <a:p>
-            <a:pPr>
-              <a:lnSpc>
-                <a:spcPct val="112000"/>
-              </a:lnSpc>
-              <a:spcAft>
-                <a:spcPts val="900"/>
-              </a:spcAft>
-            </a:pPr>
-            <a:r>
-              <a:rPr sz="1800" b="1">
+              <a:rPr sz="3400" b="1">
+                <a:solidFill>
+                  <a:srgbClr val="FFFFFF"/>
+                </a:solidFill>
+                <a:latin typeface="Fira Sans"/>
+              </a:rPr>
+              <a:t>5. Cierre del módulo</a:t>
+            </a:r>
+          </a:p>
+          <a:p>
+            <a:r>
+              <a:rPr sz="1800" b="0">
                 <a:solidFill>
                   <a:srgbClr val="E0A437"/>
                 </a:solidFill>
                 <a:latin typeface="Fira Sans"/>
               </a:rPr>
-              <a:t>▸ </a:t>
-            </a:r>
-            <a:r>
-              <a:rPr sz="1800" b="1">
-                <a:solidFill>
-                  <a:srgbClr val="1D3557"/>
-                </a:solidFill>
-                <a:latin typeface="Fira Sans"/>
-              </a:rPr>
-              <a:t>Ocho equipos, en el orden en que se ofrezcan. Máximo 10 minutos por equipo; el tiempo se controla. Después, preguntas de la profesora y del curso.</a:t>
-            </a:r>
-          </a:p>
-          <a:p>
-            <a:pPr>
-              <a:lnSpc>
-                <a:spcPct val="112000"/>
-              </a:lnSpc>
-              <a:spcAft>
-                <a:spcPts val="900"/>
-              </a:spcAft>
-            </a:pPr>
-            <a:r>
-              <a:rPr sz="1800" b="1">
-                <a:solidFill>
-                  <a:srgbClr val="E0A437"/>
-                </a:solidFill>
-                <a:latin typeface="Fira Sans"/>
-              </a:rPr>
-              <a:t>▸ </a:t>
-            </a:r>
-            <a:r>
-              <a:rPr sz="1800" b="0">
-                <a:solidFill>
-                  <a:srgbClr val="000000"/>
-                </a:solidFill>
-                <a:latin typeface="Fira Sans"/>
-              </a:rPr>
-              <a:t>Se evalúa el avance, no un resultado final: el modelo es un primer intento. La exigencia está en el tiempo, la claridad, la explicación de los gráficos y las relaciones, y en advertir qué falta o qué no tiene sentido.</a:t>
-            </a:r>
-          </a:p>
-          <a:p>
-            <a:pPr>
-              <a:lnSpc>
-                <a:spcPct val="112000"/>
-              </a:lnSpc>
-              <a:spcAft>
-                <a:spcPts val="900"/>
-              </a:spcAft>
-            </a:pPr>
-            <a:r>
-              <a:rPr sz="1800" b="1">
-                <a:solidFill>
-                  <a:srgbClr val="E0A437"/>
-                </a:solidFill>
-                <a:latin typeface="Fira Sans"/>
-              </a:rPr>
-              <a:t>▸ </a:t>
-            </a:r>
-            <a:r>
-              <a:rPr sz="1800" b="0">
-                <a:solidFill>
-                  <a:srgbClr val="000000"/>
-                </a:solidFill>
-                <a:latin typeface="Fira Sans"/>
-              </a:rPr>
-              <a:t>Las slides, en PDF, al Aula hasta las 20:30: un envío por equipo con los nombres.</a:t>
-            </a:r>
-          </a:p>
-          <a:p>
-            <a:pPr>
-              <a:lnSpc>
-                <a:spcPct val="112000"/>
-              </a:lnSpc>
-              <a:spcAft>
-                <a:spcPts val="900"/>
-              </a:spcAft>
-            </a:pPr>
-            <a:r>
-              <a:rPr sz="1800" b="1">
-                <a:solidFill>
-                  <a:srgbClr val="E0A437"/>
-                </a:solidFill>
-                <a:latin typeface="Fira Sans"/>
-              </a:rPr>
-              <a:t>▸ </a:t>
-            </a:r>
-            <a:r>
-              <a:rPr sz="1800" b="0">
-                <a:solidFill>
-                  <a:srgbClr val="000000"/>
-                </a:solidFill>
-                <a:latin typeface="Fira Sans"/>
-              </a:rPr>
-              <a:t>El informe escrito, el viernes 25 de septiembre por el Aula: máximo 7 páginas, con su rúbrica publicada.</a:t>
+              <a:t>Ocho clases, un hilo</a:t>
             </a:r>
           </a:p>
         </p:txBody>
@@ -6272,6 +6226,622 @@
                 </a:solidFill>
                 <a:latin typeface="Fira Sans"/>
               </a:rPr>
+              <a:t>El módulo en una página</a:t>
+            </a:r>
+          </a:p>
+        </p:txBody>
+      </p:sp>
+      <p:pic>
+        <p:nvPicPr>
+          <p:cNvPr id="4" name="Picture 3" descr="c8_07_mapa_modulo.png"/>
+          <p:cNvPicPr>
+            <a:picLocks noChangeAspect="1"/>
+          </p:cNvPicPr>
+          <p:nvPr/>
+        </p:nvPicPr>
+        <p:blipFill>
+          <a:blip r:embed="rId2"/>
+          <a:stretch>
+            <a:fillRect/>
+          </a:stretch>
+        </p:blipFill>
+        <p:spPr>
+          <a:xfrm>
+            <a:off x="1029546" y="1143000"/>
+            <a:ext cx="7084906" cy="3099816"/>
+          </a:xfrm>
+          <a:prstGeom prst="rect">
+            <a:avLst/>
+          </a:prstGeom>
+        </p:spPr>
+      </p:pic>
+      <p:sp>
+        <p:nvSpPr>
+          <p:cNvPr id="5" name="TextBox 4"/>
+          <p:cNvSpPr txBox="1"/>
+          <p:nvPr/>
+        </p:nvSpPr>
+        <p:spPr>
+          <a:xfrm>
+            <a:off x="704088" y="4379976"/>
+            <a:ext cx="7744968" cy="512064"/>
+          </a:xfrm>
+          <a:prstGeom prst="rect">
+            <a:avLst/>
+          </a:prstGeom>
+          <a:noFill/>
+        </p:spPr>
+        <p:txBody>
+          <a:bodyPr wrap="square">
+            <a:spAutoFit/>
+          </a:bodyPr>
+          <a:lstStyle/>
+          <a:p>
+            <a:r>
+              <a:rPr sz="1300" b="0">
+                <a:solidFill>
+                  <a:srgbClr val="333333"/>
+                </a:solidFill>
+                <a:latin typeface="Fira Sans"/>
+              </a:rPr>
+              <a:t>Cada clase dejó una idea. Juntas, son lo que el módulo enseñó: cómo se llega de una pregunta y unos datos a un resultado, y cómo se lee ese resultado con su incertidumbre.</a:t>
+            </a:r>
+          </a:p>
+        </p:txBody>
+      </p:sp>
+    </p:spTree>
+  </p:cSld>
+  <p:clrMapOvr>
+    <a:masterClrMapping/>
+  </p:clrMapOvr>
+</p:sld>
+</file>
+
+<file path=ppt/slides/slide26.xml><?xml version="1.0" encoding="utf-8"?>
+<p:sld xmlns:a="http://schemas.openxmlformats.org/drawingml/2006/main" xmlns:p="http://schemas.openxmlformats.org/presentationml/2006/main" xmlns:r="http://schemas.openxmlformats.org/officeDocument/2006/relationships">
+  <p:cSld>
+    <p:spTree>
+      <p:nvGrpSpPr>
+        <p:cNvPr id="1" name=""/>
+        <p:cNvGrpSpPr/>
+        <p:nvPr/>
+      </p:nvGrpSpPr>
+      <p:grpSpPr/>
+      <p:sp>
+        <p:nvSpPr>
+          <p:cNvPr id="2" name="Rectangle 1"/>
+          <p:cNvSpPr/>
+          <p:nvPr/>
+        </p:nvSpPr>
+        <p:spPr>
+          <a:xfrm>
+            <a:off x="0" y="0"/>
+            <a:ext cx="9144000" cy="5138928"/>
+          </a:xfrm>
+          <a:prstGeom prst="rect">
+            <a:avLst/>
+          </a:prstGeom>
+          <a:solidFill>
+            <a:srgbClr val="FAFBFC"/>
+          </a:solidFill>
+          <a:ln>
+            <a:noFill/>
+          </a:ln>
+          <a:effectLst/>
+        </p:spPr>
+        <p:style>
+          <a:lnRef idx="1">
+            <a:schemeClr val="accent1"/>
+          </a:lnRef>
+          <a:fillRef idx="3">
+            <a:schemeClr val="accent1"/>
+          </a:fillRef>
+          <a:effectRef idx="2">
+            <a:schemeClr val="accent1"/>
+          </a:effectRef>
+          <a:fontRef idx="minor">
+            <a:schemeClr val="lt1"/>
+          </a:fontRef>
+        </p:style>
+        <p:txBody>
+          <a:bodyPr rtlCol="0" anchor="ctr"/>
+          <a:lstStyle/>
+          <a:p>
+            <a:pPr algn="ctr"/>
+          </a:p>
+        </p:txBody>
+      </p:sp>
+      <p:sp>
+        <p:nvSpPr>
+          <p:cNvPr id="3" name="TextBox 2"/>
+          <p:cNvSpPr txBox="1"/>
+          <p:nvPr/>
+        </p:nvSpPr>
+        <p:spPr>
+          <a:xfrm>
+            <a:off x="402336" y="301752"/>
+            <a:ext cx="8348472" cy="795528"/>
+          </a:xfrm>
+          <a:prstGeom prst="rect">
+            <a:avLst/>
+          </a:prstGeom>
+          <a:noFill/>
+        </p:spPr>
+        <p:txBody>
+          <a:bodyPr wrap="square">
+            <a:spAutoFit/>
+          </a:bodyPr>
+          <a:lstStyle/>
+          <a:p>
+            <a:r>
+              <a:rPr sz="2800" b="1">
+                <a:solidFill>
+                  <a:srgbClr val="0F0F0F"/>
+                </a:solidFill>
+                <a:latin typeface="Fira Sans"/>
+              </a:rPr>
+              <a:t>Lo que sigue en el diplomado</a:t>
+            </a:r>
+          </a:p>
+        </p:txBody>
+      </p:sp>
+      <p:sp>
+        <p:nvSpPr>
+          <p:cNvPr id="4" name="TextBox 3"/>
+          <p:cNvSpPr txBox="1"/>
+          <p:nvPr/>
+        </p:nvSpPr>
+        <p:spPr>
+          <a:xfrm>
+            <a:off x="704088" y="1353312"/>
+            <a:ext cx="7744968" cy="3300984"/>
+          </a:xfrm>
+          <a:prstGeom prst="rect">
+            <a:avLst/>
+          </a:prstGeom>
+          <a:noFill/>
+        </p:spPr>
+        <p:txBody>
+          <a:bodyPr wrap="square">
+            <a:spAutoFit/>
+          </a:bodyPr>
+          <a:lstStyle/>
+          <a:p>
+            <a:pPr>
+              <a:lnSpc>
+                <a:spcPct val="112000"/>
+              </a:lnSpc>
+              <a:spcAft>
+                <a:spcPts val="900"/>
+              </a:spcAft>
+            </a:pPr>
+            <a:r>
+              <a:rPr sz="1800" b="1">
+                <a:solidFill>
+                  <a:srgbClr val="E0A437"/>
+                </a:solidFill>
+                <a:latin typeface="Fira Sans"/>
+              </a:rPr>
+              <a:t>▸ </a:t>
+            </a:r>
+            <a:r>
+              <a:rPr sz="1800" b="1">
+                <a:solidFill>
+                  <a:srgbClr val="1D3557"/>
+                </a:solidFill>
+                <a:latin typeface="Fira Sans"/>
+              </a:rPr>
+              <a:t>Módulo 2, Visualización e Inteligencia de Negocios: visualización efectiva, narrativas con datos y métricas de negocio.</a:t>
+            </a:r>
+          </a:p>
+          <a:p>
+            <a:pPr>
+              <a:lnSpc>
+                <a:spcPct val="112000"/>
+              </a:lnSpc>
+              <a:spcAft>
+                <a:spcPts val="900"/>
+              </a:spcAft>
+            </a:pPr>
+            <a:r>
+              <a:rPr sz="1800" b="1">
+                <a:solidFill>
+                  <a:srgbClr val="E0A437"/>
+                </a:solidFill>
+                <a:latin typeface="Fira Sans"/>
+              </a:rPr>
+              <a:t>▸ </a:t>
+            </a:r>
+            <a:r>
+              <a:rPr sz="1800" b="0">
+                <a:solidFill>
+                  <a:srgbClr val="000000"/>
+                </a:solidFill>
+                <a:latin typeface="Fira Sans"/>
+              </a:rPr>
+              <a:t>Módulo 3, Machine Learning para la Toma de Decisiones: aprendizaje supervisado y no supervisado (clustering y PCA en profundidad), evaluación de modelos, redes neuronales y explicabilidad.</a:t>
+            </a:r>
+          </a:p>
+          <a:p>
+            <a:pPr>
+              <a:lnSpc>
+                <a:spcPct val="112000"/>
+              </a:lnSpc>
+              <a:spcAft>
+                <a:spcPts val="900"/>
+              </a:spcAft>
+            </a:pPr>
+            <a:r>
+              <a:rPr sz="1800" b="1">
+                <a:solidFill>
+                  <a:srgbClr val="E0A437"/>
+                </a:solidFill>
+                <a:latin typeface="Fira Sans"/>
+              </a:rPr>
+              <a:t>▸ </a:t>
+            </a:r>
+            <a:r>
+              <a:rPr sz="1800" b="0">
+                <a:solidFill>
+                  <a:srgbClr val="000000"/>
+                </a:solidFill>
+                <a:latin typeface="Fira Sans"/>
+              </a:rPr>
+              <a:t>El Capstone continúa en esos módulos: el primer modelo de hoy es el punto de partida.</a:t>
+            </a:r>
+          </a:p>
+          <a:p>
+            <a:pPr>
+              <a:lnSpc>
+                <a:spcPct val="112000"/>
+              </a:lnSpc>
+              <a:spcAft>
+                <a:spcPts val="900"/>
+              </a:spcAft>
+            </a:pPr>
+            <a:r>
+              <a:rPr sz="1800" b="1">
+                <a:solidFill>
+                  <a:srgbClr val="E0A437"/>
+                </a:solidFill>
+                <a:latin typeface="Fira Sans"/>
+              </a:rPr>
+              <a:t>▸ </a:t>
+            </a:r>
+            <a:r>
+              <a:rPr sz="1800" b="0">
+                <a:solidFill>
+                  <a:srgbClr val="000000"/>
+                </a:solidFill>
+                <a:latin typeface="Fira Sans"/>
+              </a:rPr>
+              <a:t>Lo que se lleva de aquí: leer un resultado con su incertidumbre, juzgar un modelo en datos que no vio, y distinguir describir de encontrar una relación.</a:t>
+            </a:r>
+          </a:p>
+        </p:txBody>
+      </p:sp>
+    </p:spTree>
+  </p:cSld>
+  <p:clrMapOvr>
+    <a:masterClrMapping/>
+  </p:clrMapOvr>
+</p:sld>
+</file>
+
+<file path=ppt/slides/slide27.xml><?xml version="1.0" encoding="utf-8"?>
+<p:sld xmlns:a="http://schemas.openxmlformats.org/drawingml/2006/main" xmlns:p="http://schemas.openxmlformats.org/presentationml/2006/main" xmlns:r="http://schemas.openxmlformats.org/officeDocument/2006/relationships">
+  <p:cSld>
+    <p:spTree>
+      <p:nvGrpSpPr>
+        <p:cNvPr id="1" name=""/>
+        <p:cNvGrpSpPr/>
+        <p:nvPr/>
+      </p:nvGrpSpPr>
+      <p:grpSpPr/>
+      <p:sp>
+        <p:nvSpPr>
+          <p:cNvPr id="2" name="Rectangle 1"/>
+          <p:cNvSpPr/>
+          <p:nvPr/>
+        </p:nvSpPr>
+        <p:spPr>
+          <a:xfrm>
+            <a:off x="0" y="0"/>
+            <a:ext cx="9144000" cy="5138928"/>
+          </a:xfrm>
+          <a:prstGeom prst="rect">
+            <a:avLst/>
+          </a:prstGeom>
+          <a:solidFill>
+            <a:srgbClr val="FAFBFC"/>
+          </a:solidFill>
+          <a:ln>
+            <a:noFill/>
+          </a:ln>
+          <a:effectLst/>
+        </p:spPr>
+        <p:style>
+          <a:lnRef idx="1">
+            <a:schemeClr val="accent1"/>
+          </a:lnRef>
+          <a:fillRef idx="3">
+            <a:schemeClr val="accent1"/>
+          </a:fillRef>
+          <a:effectRef idx="2">
+            <a:schemeClr val="accent1"/>
+          </a:effectRef>
+          <a:fontRef idx="minor">
+            <a:schemeClr val="lt1"/>
+          </a:fontRef>
+        </p:style>
+        <p:txBody>
+          <a:bodyPr rtlCol="0" anchor="ctr"/>
+          <a:lstStyle/>
+          <a:p>
+            <a:pPr algn="ctr"/>
+          </a:p>
+        </p:txBody>
+      </p:sp>
+      <p:sp>
+        <p:nvSpPr>
+          <p:cNvPr id="3" name="TextBox 2"/>
+          <p:cNvSpPr txBox="1"/>
+          <p:nvPr/>
+        </p:nvSpPr>
+        <p:spPr>
+          <a:xfrm>
+            <a:off x="402336" y="301752"/>
+            <a:ext cx="8348472" cy="795528"/>
+          </a:xfrm>
+          <a:prstGeom prst="rect">
+            <a:avLst/>
+          </a:prstGeom>
+          <a:noFill/>
+        </p:spPr>
+        <p:txBody>
+          <a:bodyPr wrap="square">
+            <a:spAutoFit/>
+          </a:bodyPr>
+          <a:lstStyle/>
+          <a:p>
+            <a:r>
+              <a:rPr sz="2800" b="1">
+                <a:solidFill>
+                  <a:srgbClr val="0F0F0F"/>
+                </a:solidFill>
+                <a:latin typeface="Fira Sans"/>
+              </a:rPr>
+              <a:t>Ahora: las presentaciones del avance</a:t>
+            </a:r>
+          </a:p>
+        </p:txBody>
+      </p:sp>
+      <p:sp>
+        <p:nvSpPr>
+          <p:cNvPr id="4" name="TextBox 3"/>
+          <p:cNvSpPr txBox="1"/>
+          <p:nvPr/>
+        </p:nvSpPr>
+        <p:spPr>
+          <a:xfrm>
+            <a:off x="704088" y="1353312"/>
+            <a:ext cx="7744968" cy="3300984"/>
+          </a:xfrm>
+          <a:prstGeom prst="rect">
+            <a:avLst/>
+          </a:prstGeom>
+          <a:noFill/>
+        </p:spPr>
+        <p:txBody>
+          <a:bodyPr wrap="square">
+            <a:spAutoFit/>
+          </a:bodyPr>
+          <a:lstStyle/>
+          <a:p>
+            <a:pPr>
+              <a:lnSpc>
+                <a:spcPct val="112000"/>
+              </a:lnSpc>
+              <a:spcAft>
+                <a:spcPts val="900"/>
+              </a:spcAft>
+            </a:pPr>
+            <a:r>
+              <a:rPr sz="1800" b="1">
+                <a:solidFill>
+                  <a:srgbClr val="E0A437"/>
+                </a:solidFill>
+                <a:latin typeface="Fira Sans"/>
+              </a:rPr>
+              <a:t>▸ </a:t>
+            </a:r>
+            <a:r>
+              <a:rPr sz="1800" b="1">
+                <a:solidFill>
+                  <a:srgbClr val="1D3557"/>
+                </a:solidFill>
+                <a:latin typeface="Fira Sans"/>
+              </a:rPr>
+              <a:t>Ocho equipos, en el orden en que se ofrezcan. Máximo 10 minutos por equipo; el tiempo se controla. Después, preguntas de la profesora y del curso.</a:t>
+            </a:r>
+          </a:p>
+          <a:p>
+            <a:pPr>
+              <a:lnSpc>
+                <a:spcPct val="112000"/>
+              </a:lnSpc>
+              <a:spcAft>
+                <a:spcPts val="900"/>
+              </a:spcAft>
+            </a:pPr>
+            <a:r>
+              <a:rPr sz="1800" b="1">
+                <a:solidFill>
+                  <a:srgbClr val="E0A437"/>
+                </a:solidFill>
+                <a:latin typeface="Fira Sans"/>
+              </a:rPr>
+              <a:t>▸ </a:t>
+            </a:r>
+            <a:r>
+              <a:rPr sz="1800" b="0">
+                <a:solidFill>
+                  <a:srgbClr val="000000"/>
+                </a:solidFill>
+                <a:latin typeface="Fira Sans"/>
+              </a:rPr>
+              <a:t>Se evalúa el avance, no un resultado final: el modelo es un primer intento. La exigencia está en el tiempo, la claridad, la explicación de los gráficos y las relaciones, y en advertir qué falta o qué no tiene sentido.</a:t>
+            </a:r>
+          </a:p>
+          <a:p>
+            <a:pPr>
+              <a:lnSpc>
+                <a:spcPct val="112000"/>
+              </a:lnSpc>
+              <a:spcAft>
+                <a:spcPts val="900"/>
+              </a:spcAft>
+            </a:pPr>
+            <a:r>
+              <a:rPr sz="1800" b="1">
+                <a:solidFill>
+                  <a:srgbClr val="E0A437"/>
+                </a:solidFill>
+                <a:latin typeface="Fira Sans"/>
+              </a:rPr>
+              <a:t>▸ </a:t>
+            </a:r>
+            <a:r>
+              <a:rPr sz="1800" b="0">
+                <a:solidFill>
+                  <a:srgbClr val="000000"/>
+                </a:solidFill>
+                <a:latin typeface="Fira Sans"/>
+              </a:rPr>
+              <a:t>Las slides, en PDF, al Aula hasta las 20:30: un envío por equipo con los nombres.</a:t>
+            </a:r>
+          </a:p>
+          <a:p>
+            <a:pPr>
+              <a:lnSpc>
+                <a:spcPct val="112000"/>
+              </a:lnSpc>
+              <a:spcAft>
+                <a:spcPts val="900"/>
+              </a:spcAft>
+            </a:pPr>
+            <a:r>
+              <a:rPr sz="1800" b="1">
+                <a:solidFill>
+                  <a:srgbClr val="E0A437"/>
+                </a:solidFill>
+                <a:latin typeface="Fira Sans"/>
+              </a:rPr>
+              <a:t>▸ </a:t>
+            </a:r>
+            <a:r>
+              <a:rPr sz="1800" b="0">
+                <a:solidFill>
+                  <a:srgbClr val="000000"/>
+                </a:solidFill>
+                <a:latin typeface="Fira Sans"/>
+              </a:rPr>
+              <a:t>El informe escrito, el viernes 25 de septiembre por el Aula: máximo 7 páginas, con su rúbrica publicada.</a:t>
+            </a:r>
+          </a:p>
+        </p:txBody>
+      </p:sp>
+    </p:spTree>
+  </p:cSld>
+  <p:clrMapOvr>
+    <a:masterClrMapping/>
+  </p:clrMapOvr>
+</p:sld>
+</file>
+
+<file path=ppt/slides/slide28.xml><?xml version="1.0" encoding="utf-8"?>
+<p:sld xmlns:a="http://schemas.openxmlformats.org/drawingml/2006/main" xmlns:p="http://schemas.openxmlformats.org/presentationml/2006/main" xmlns:r="http://schemas.openxmlformats.org/officeDocument/2006/relationships">
+  <p:cSld>
+    <p:spTree>
+      <p:nvGrpSpPr>
+        <p:cNvPr id="1" name=""/>
+        <p:cNvGrpSpPr/>
+        <p:nvPr/>
+      </p:nvGrpSpPr>
+      <p:grpSpPr/>
+      <p:sp>
+        <p:nvSpPr>
+          <p:cNvPr id="2" name="Rectangle 1"/>
+          <p:cNvSpPr/>
+          <p:nvPr/>
+        </p:nvSpPr>
+        <p:spPr>
+          <a:xfrm>
+            <a:off x="0" y="0"/>
+            <a:ext cx="9144000" cy="5138928"/>
+          </a:xfrm>
+          <a:prstGeom prst="rect">
+            <a:avLst/>
+          </a:prstGeom>
+          <a:solidFill>
+            <a:srgbClr val="FAFBFC"/>
+          </a:solidFill>
+          <a:ln>
+            <a:noFill/>
+          </a:ln>
+          <a:effectLst/>
+        </p:spPr>
+        <p:style>
+          <a:lnRef idx="1">
+            <a:schemeClr val="accent1"/>
+          </a:lnRef>
+          <a:fillRef idx="3">
+            <a:schemeClr val="accent1"/>
+          </a:fillRef>
+          <a:effectRef idx="2">
+            <a:schemeClr val="accent1"/>
+          </a:effectRef>
+          <a:fontRef idx="minor">
+            <a:schemeClr val="lt1"/>
+          </a:fontRef>
+        </p:style>
+        <p:txBody>
+          <a:bodyPr rtlCol="0" anchor="ctr"/>
+          <a:lstStyle/>
+          <a:p>
+            <a:pPr algn="ctr"/>
+          </a:p>
+        </p:txBody>
+      </p:sp>
+      <p:sp>
+        <p:nvSpPr>
+          <p:cNvPr id="3" name="TextBox 2"/>
+          <p:cNvSpPr txBox="1"/>
+          <p:nvPr/>
+        </p:nvSpPr>
+        <p:spPr>
+          <a:xfrm>
+            <a:off x="402336" y="301752"/>
+            <a:ext cx="8348472" cy="795528"/>
+          </a:xfrm>
+          <a:prstGeom prst="rect">
+            <a:avLst/>
+          </a:prstGeom>
+          <a:noFill/>
+        </p:spPr>
+        <p:txBody>
+          <a:bodyPr wrap="square">
+            <a:spAutoFit/>
+          </a:bodyPr>
+          <a:lstStyle/>
+          <a:p>
+            <a:r>
+              <a:rPr sz="2800" b="1">
+                <a:solidFill>
+                  <a:srgbClr val="0F0F0F"/>
+                </a:solidFill>
+                <a:latin typeface="Fira Sans"/>
+              </a:rPr>
               <a:t>Referencias</a:t>
             </a:r>
           </a:p>
@@ -7218,14 +7788,14 @@
                 </a:solidFill>
                 <a:latin typeface="Fira Sans"/>
               </a:rPr>
-              <a:t>Dos variables casi iguales: una sola dirección</a:t>
+              <a:t>Dos variables que dicen casi lo mismo</a:t>
             </a:r>
           </a:p>
         </p:txBody>
       </p:sp>
       <p:pic>
         <p:nvPicPr>
-          <p:cNvPr id="4" name="Picture 3" descr="c8_01_dos_variables.png"/>
+          <p:cNvPr id="4" name="Picture 3" descr="c8_00_dos_variables_crudas.png"/>
           <p:cNvPicPr>
             <a:picLocks noChangeAspect="1"/>
           </p:cNvPicPr>
@@ -7239,8 +7809,8 @@
         </p:blipFill>
         <p:spPr>
           <a:xfrm>
-            <a:off x="3086468" y="1143000"/>
-            <a:ext cx="2971062" cy="2587751"/>
+            <a:off x="411480" y="1143000"/>
+            <a:ext cx="4572000" cy="3178396"/>
           </a:xfrm>
           <a:prstGeom prst="rect">
             <a:avLst/>
@@ -7249,14 +7819,67 @@
       </p:pic>
       <p:sp>
         <p:nvSpPr>
-          <p:cNvPr id="5" name="TextBox 4"/>
+          <p:cNvPr id="5" name="Rectangle 4"/>
+          <p:cNvSpPr/>
+          <p:nvPr/>
+        </p:nvSpPr>
+        <p:spPr>
+          <a:xfrm>
+            <a:off x="5715000" y="1600200"/>
+            <a:ext cx="3063240" cy="1920240"/>
+          </a:xfrm>
+          <a:prstGeom prst="rect">
+            <a:avLst/>
+          </a:prstGeom>
+          <a:solidFill>
+            <a:srgbClr val="E0A437"/>
+          </a:solidFill>
+          <a:ln>
+            <a:noFill/>
+          </a:ln>
+          <a:effectLst/>
+        </p:spPr>
+        <p:style>
+          <a:lnRef idx="1">
+            <a:schemeClr val="accent1"/>
+          </a:lnRef>
+          <a:fillRef idx="3">
+            <a:schemeClr val="accent1"/>
+          </a:fillRef>
+          <a:effectRef idx="2">
+            <a:schemeClr val="accent1"/>
+          </a:effectRef>
+          <a:fontRef idx="minor">
+            <a:schemeClr val="lt1"/>
+          </a:fontRef>
+        </p:style>
+        <p:txBody>
+          <a:bodyPr rtlCol="0" anchor="ctr" wrap="square" lIns="182880" rIns="182880"/>
+          <a:lstStyle/>
+          <a:p>
+            <a:pPr algn="ctr"/>
+            <a:r>
+              <a:rPr sz="1900" b="1">
+                <a:solidFill>
+                  <a:srgbClr val="1D3557"/>
+                </a:solidFill>
+                <a:latin typeface="Fira Sans"/>
+              </a:rPr>
+              <a:t>¿Cuánto se pierde si las dos variables se reemplazan por una sola?</a:t>
+            </a:r>
+          </a:p>
+        </p:txBody>
+      </p:sp>
+      <p:sp>
+        <p:nvSpPr>
+          <p:cNvPr id="6" name="TextBox 5"/>
           <p:cNvSpPr txBox="1"/>
           <p:nvPr/>
         </p:nvSpPr>
         <p:spPr>
           <a:xfrm>
-            <a:off x="704088" y="3867912"/>
-            <a:ext cx="7744968" cy="1024128"/>
+            <a:off x="704088" y="4431123"/>
+            <a:ext cx="7744968" cy="731520"/>
           </a:xfrm>
           <a:prstGeom prst="rect">
             <a:avLst/>
@@ -7276,7 +7899,7 @@
                 </a:solidFill>
                 <a:latin typeface="Fira Sans"/>
               </a:rPr>
-              <a:t>Cada punto es un jugador, con sus turnos y hits de la carrera estandarizados. Los puntos se ordenan a lo largo de la flecha roja: la posición en esa dirección recoge el 99,8% de la variación, y la flecha azul, perpendicular, el 0,2% restante. Una variable nueva, la posición a lo largo de la flecha roja, reemplaza a las dos casi sin perder información.</a:t>
+              <a:t>Cada punto es un jugador, con sus turnos al bate y sus hits acumulados en la carrera. Correlación 0,995: los puntos siguen una diagonal y saber una variable es saber casi la otra.</a:t>
             </a:r>
           </a:p>
         </p:txBody>
@@ -7558,7 +8181,7 @@
                 </a:solidFill>
                 <a:latin typeface="Fira Sans"/>
               </a:rPr>
-              <a:t>Cada componente principal es una variable nueva: una suma ponderada de las variables originales, con un peso para cada una.</a:t>
+              <a:t>La primera componente es la dirección en que los datos más varían. La segunda, la que más varía entre las perpendiculares a la primera, y así hasta tener tantas componentes como variables.</a:t>
             </a:r>
           </a:p>
           <a:p>
@@ -7586,7 +8209,7 @@
                 </a:solidFill>
                 <a:latin typeface="Fira Sans"/>
               </a:rPr>
-              <a:t>La primera componente es la dirección en que los datos más varían. La segunda, la que más varía entre las perpendiculares a la primera, y así hasta tener tantas componentes como variables.</a:t>
+              <a:t>Cada componente es una variable nueva: un puntaje ponderado de las variables originales, con un peso para cada una.</a:t>
             </a:r>
           </a:p>
           <a:p>

--- a/presentaciones/clase08_componentes_principales.pptx
+++ b/presentaciones/clase08_componentes_principales.pptx
@@ -33,6 +33,10 @@
     <p:sldId id="281" r:id="rId32"/>
     <p:sldId id="282" r:id="rId33"/>
     <p:sldId id="283" r:id="rId34"/>
+    <p:sldId id="284" r:id="rId35"/>
+    <p:sldId id="285" r:id="rId36"/>
+    <p:sldId id="286" r:id="rId37"/>
+    <p:sldId id="287" r:id="rId38"/>
   </p:sldIdLst>
   <p:sldSz cx="9144000" cy="5138928" type="screen4x3"/>
   <p:notesSz cx="6858000" cy="9144000"/>
@@ -3450,14 +3454,14 @@
                 </a:solidFill>
                 <a:latin typeface="Fira Sans"/>
               </a:rPr>
-              <a:t>La dirección en que los datos más varían</a:t>
+              <a:t>Los puntos siguen una recta: la diagonal</a:t>
             </a:r>
           </a:p>
         </p:txBody>
       </p:sp>
       <p:pic>
         <p:nvPicPr>
-          <p:cNvPr id="4" name="Picture 3" descr="c8_01_dos_variables.png"/>
+          <p:cNvPr id="4" name="Picture 3" descr="c8_00c_diagonal.png"/>
           <p:cNvPicPr>
             <a:picLocks noChangeAspect="1"/>
           </p:cNvPicPr>
@@ -3471,8 +3475,8 @@
         </p:blipFill>
         <p:spPr>
           <a:xfrm>
-            <a:off x="2282292" y="1143000"/>
-            <a:ext cx="4579414" cy="2331720"/>
+            <a:off x="3105399" y="1143000"/>
+            <a:ext cx="2933200" cy="3099815"/>
           </a:xfrm>
           <a:prstGeom prst="rect">
             <a:avLst/>
@@ -3487,8 +3491,8 @@
         </p:nvSpPr>
         <p:spPr>
           <a:xfrm>
-            <a:off x="704088" y="3611879"/>
-            <a:ext cx="7744968" cy="1280160"/>
+            <a:off x="704088" y="4379976"/>
+            <a:ext cx="7744968" cy="512064"/>
           </a:xfrm>
           <a:prstGeom prst="rect">
             <a:avLst/>
@@ -3508,7 +3512,7 @@
                 </a:solidFill>
                 <a:latin typeface="Fira Sans"/>
               </a:rPr>
-              <a:t>Los mismos jugadores, con las dos variables estandarizadas, y cuatro direcciones que pasan por el centro. Para cada una se mide cuánto se dispersan las posiciones de los puntos a lo largo de ella: 1,00 en la horizontal y en la vertical, 1,41 en la diagonal y 0,07 en su perpendicular. La diagonal gana: es la primera componente y recoge el 99,8% de la variación; su perpendicular es la segunda, con el 0,2%.</a:t>
+              <a:t>La recta pasa por el centro y sigue la nube de puntos. Es la dirección en que los jugadores se diferencian: hacia arriba y a la derecha, más carrera.</a:t>
             </a:r>
           </a:p>
         </p:txBody>
@@ -3604,14 +3608,14 @@
                 </a:solidFill>
                 <a:latin typeface="Fira Sans"/>
               </a:rPr>
-              <a:t>En la práctica: un puntaje ponderado por jugador</a:t>
+              <a:t>Cada jugador queda en un solo número</a:t>
             </a:r>
           </a:p>
         </p:txBody>
       </p:sp>
       <p:pic>
         <p:nvPicPr>
-          <p:cNvPr id="4" name="Picture 3" descr="c8_01b_puntaje_ponderado.png"/>
+          <p:cNvPr id="4" name="Picture 3" descr="c8_01a_proyeccion.png"/>
           <p:cNvPicPr>
             <a:picLocks noChangeAspect="1"/>
           </p:cNvPicPr>
@@ -3625,8 +3629,8 @@
         </p:blipFill>
         <p:spPr>
           <a:xfrm>
-            <a:off x="728851" y="1143000"/>
-            <a:ext cx="7686296" cy="2587752"/>
+            <a:off x="3152663" y="1143000"/>
+            <a:ext cx="2838672" cy="2843784"/>
           </a:xfrm>
           <a:prstGeom prst="rect">
             <a:avLst/>
@@ -3641,8 +3645,8 @@
         </p:nvSpPr>
         <p:spPr>
           <a:xfrm>
-            <a:off x="704088" y="3867912"/>
-            <a:ext cx="7744968" cy="1024128"/>
+            <a:off x="704088" y="4123944"/>
+            <a:ext cx="7744968" cy="768096"/>
           </a:xfrm>
           <a:prstGeom prst="rect">
             <a:avLst/>
@@ -3662,7 +3666,7 @@
                 </a:solidFill>
                 <a:latin typeface="Fira Sans"/>
               </a:rPr>
-              <a:t>Como el puntaje ponderado de la admisión universitaria: cada variable entra con un peso y sale un número por jugador, que es su valor en la componente. La diferencia es que aquí los pesos no los fija nadie: se calculan para que ese número separe a los jugadores lo más posible, con la condición de que los pesos al cuadrado sumen 1.</a:t>
+              <a:t>A cada jugador se le marca el punto más cercano de la diagonal. Su posición sobre ella es un solo número que reemplaza a sus dos valores: A queda en −1,60, B en −0,48 y C en 2,01. Lo que se pierde es la distancia del punto a la recta, que aquí es casi nula.</a:t>
             </a:r>
           </a:p>
         </p:txBody>
@@ -3758,21 +3762,45 @@
                 </a:solidFill>
                 <a:latin typeface="Fira Sans"/>
               </a:rPr>
-              <a:t>¿Para qué sirve?</a:t>
-            </a:r>
-          </a:p>
-        </p:txBody>
-      </p:sp>
-      <p:sp>
-        <p:nvSpPr>
-          <p:cNvPr id="4" name="TextBox 3"/>
+              <a:t>Cuánto se conserva y cuánto se pierde</a:t>
+            </a:r>
+          </a:p>
+        </p:txBody>
+      </p:sp>
+      <p:pic>
+        <p:nvPicPr>
+          <p:cNvPr id="4" name="Picture 3" descr="c8_01_dos_variables.png"/>
+          <p:cNvPicPr>
+            <a:picLocks noChangeAspect="1"/>
+          </p:cNvPicPr>
+          <p:nvPr/>
+        </p:nvPicPr>
+        <p:blipFill>
+          <a:blip r:embed="rId2"/>
+          <a:stretch>
+            <a:fillRect/>
+          </a:stretch>
+        </p:blipFill>
+        <p:spPr>
+          <a:xfrm>
+            <a:off x="1779455" y="1143000"/>
+            <a:ext cx="5585089" cy="2843784"/>
+          </a:xfrm>
+          <a:prstGeom prst="rect">
+            <a:avLst/>
+          </a:prstGeom>
+        </p:spPr>
+      </p:pic>
+      <p:sp>
+        <p:nvSpPr>
+          <p:cNvPr id="5" name="TextBox 4"/>
           <p:cNvSpPr txBox="1"/>
           <p:nvPr/>
         </p:nvSpPr>
         <p:spPr>
           <a:xfrm>
-            <a:off x="704088" y="1353312"/>
-            <a:ext cx="7744968" cy="3300984"/>
+            <a:off x="704088" y="4123944"/>
+            <a:ext cx="7744968" cy="768096"/>
           </a:xfrm>
           <a:prstGeom prst="rect">
             <a:avLst/>
@@ -3785,115 +3813,14 @@
           </a:bodyPr>
           <a:lstStyle/>
           <a:p>
-            <a:pPr>
-              <a:lnSpc>
-                <a:spcPct val="112000"/>
-              </a:lnSpc>
-              <a:spcAft>
-                <a:spcPts val="900"/>
-              </a:spcAft>
-            </a:pPr>
-            <a:r>
-              <a:rPr sz="1800" b="1">
-                <a:solidFill>
-                  <a:srgbClr val="E0A437"/>
-                </a:solidFill>
-                <a:latin typeface="Fira Sans"/>
-              </a:rPr>
-              <a:t>▸ </a:t>
-            </a:r>
-            <a:r>
-              <a:rPr sz="1800" b="1">
-                <a:solidFill>
-                  <a:srgbClr val="1D3557"/>
-                </a:solidFill>
-                <a:latin typeface="Fira Sans"/>
-              </a:rPr>
-              <a:t>Para mirar los datos: con 16 variables hay 120 gráficos de dispersión posibles; con dos componentes, uno solo.</a:t>
-            </a:r>
-          </a:p>
-          <a:p>
-            <a:pPr>
-              <a:lnSpc>
-                <a:spcPct val="112000"/>
-              </a:lnSpc>
-              <a:spcAft>
-                <a:spcPts val="900"/>
-              </a:spcAft>
-            </a:pPr>
-            <a:r>
-              <a:rPr sz="1800" b="1">
-                <a:solidFill>
-                  <a:srgbClr val="E0A437"/>
-                </a:solidFill>
-                <a:latin typeface="Fira Sans"/>
-              </a:rPr>
-              <a:t>▸ </a:t>
-            </a:r>
-            <a:r>
-              <a:rPr sz="1800" b="0">
-                <a:solidFill>
-                  <a:srgbClr val="000000"/>
-                </a:solidFill>
-                <a:latin typeface="Fira Sans"/>
-              </a:rPr>
-              <a:t>Para entregarle a un modelo menos entradas: las componentes reemplazan a un grupo de variables que se repiten (regresión sobre componentes principales).</a:t>
-            </a:r>
-          </a:p>
-          <a:p>
-            <a:pPr>
-              <a:lnSpc>
-                <a:spcPct val="112000"/>
-              </a:lnSpc>
-              <a:spcAft>
-                <a:spcPts val="900"/>
-              </a:spcAft>
-            </a:pPr>
-            <a:r>
-              <a:rPr sz="1800" b="1">
-                <a:solidFill>
-                  <a:srgbClr val="E0A437"/>
-                </a:solidFill>
-                <a:latin typeface="Fira Sans"/>
-              </a:rPr>
-              <a:t>▸ </a:t>
-            </a:r>
-            <a:r>
-              <a:rPr sz="1800" b="0">
-                <a:solidFill>
-                  <a:srgbClr val="000000"/>
-                </a:solidFill>
-                <a:latin typeface="Fira Sans"/>
-              </a:rPr>
-              <a:t>Para entender de qué está hecha la variación: qué variables se mueven juntas y cuánto pesa cada grupo.</a:t>
-            </a:r>
-          </a:p>
-          <a:p>
-            <a:pPr>
-              <a:lnSpc>
-                <a:spcPct val="112000"/>
-              </a:lnSpc>
-              <a:spcAft>
-                <a:spcPts val="900"/>
-              </a:spcAft>
-            </a:pPr>
-            <a:r>
-              <a:rPr sz="1800" b="1">
-                <a:solidFill>
-                  <a:srgbClr val="E0A437"/>
-                </a:solidFill>
-                <a:latin typeface="Fira Sans"/>
-              </a:rPr>
-              <a:t>▸ </a:t>
-            </a:r>
-            <a:r>
-              <a:rPr sz="1800" b="0">
-                <a:solidFill>
-                  <a:srgbClr val="000000"/>
-                </a:solidFill>
-                <a:latin typeface="Fira Sans"/>
-              </a:rPr>
-              <a:t>Lo que no hace: no elige variables ni las descarta, y no sabe qué se quiere predecir.</a:t>
+            <a:r>
+              <a:rPr sz="1300" b="0">
+                <a:solidFill>
+                  <a:srgbClr val="333333"/>
+                </a:solidFill>
+                <a:latin typeface="Fira Sans"/>
+              </a:rPr>
+              <a:t>Se mide con la dispersión de las posiciones a lo largo de cada dirección: 1,41 sobre la diagonal, casi toda la que hay, y 0,07 en su perpendicular. Quedarse con la posición sobre la diagonal conserva el 99,8% de la variación y pierde el 0,2%.</a:t>
             </a:r>
           </a:p>
         </p:txBody>
@@ -3989,21 +3916,45 @@
                 </a:solidFill>
                 <a:latin typeface="Fira Sans"/>
               </a:rPr>
-              <a:t>Cómo se construye, paso a paso</a:t>
-            </a:r>
-          </a:p>
-        </p:txBody>
-      </p:sp>
-      <p:sp>
-        <p:nvSpPr>
-          <p:cNvPr id="4" name="TextBox 3"/>
+              <a:t>La diagonal se llama primera componente</a:t>
+            </a:r>
+          </a:p>
+        </p:txBody>
+      </p:sp>
+      <p:pic>
+        <p:nvPicPr>
+          <p:cNvPr id="4" name="Picture 3" descr="c8_01c_componentes.png"/>
+          <p:cNvPicPr>
+            <a:picLocks noChangeAspect="1"/>
+          </p:cNvPicPr>
+          <p:nvPr/>
+        </p:nvPicPr>
+        <p:blipFill>
+          <a:blip r:embed="rId2"/>
+          <a:stretch>
+            <a:fillRect/>
+          </a:stretch>
+        </p:blipFill>
+        <p:spPr>
+          <a:xfrm>
+            <a:off x="2622002" y="1143000"/>
+            <a:ext cx="3899995" cy="3099816"/>
+          </a:xfrm>
+          <a:prstGeom prst="rect">
+            <a:avLst/>
+          </a:prstGeom>
+        </p:spPr>
+      </p:pic>
+      <p:sp>
+        <p:nvSpPr>
+          <p:cNvPr id="5" name="TextBox 4"/>
           <p:cNvSpPr txBox="1"/>
           <p:nvPr/>
         </p:nvSpPr>
         <p:spPr>
           <a:xfrm>
-            <a:off x="704088" y="1353312"/>
-            <a:ext cx="7744968" cy="3300984"/>
+            <a:off x="704088" y="4379976"/>
+            <a:ext cx="7744968" cy="512064"/>
           </a:xfrm>
           <a:prstGeom prst="rect">
             <a:avLst/>
@@ -4016,143 +3967,14 @@
           </a:bodyPr>
           <a:lstStyle/>
           <a:p>
-            <a:pPr>
-              <a:lnSpc>
-                <a:spcPct val="112000"/>
-              </a:lnSpc>
-              <a:spcAft>
-                <a:spcPts val="900"/>
-              </a:spcAft>
-            </a:pPr>
-            <a:r>
-              <a:rPr sz="1800" b="1">
-                <a:solidFill>
-                  <a:srgbClr val="E0A437"/>
-                </a:solidFill>
-                <a:latin typeface="Fira Sans"/>
-              </a:rPr>
-              <a:t>▸ </a:t>
-            </a:r>
-            <a:r>
-              <a:rPr sz="1800" b="1">
-                <a:solidFill>
-                  <a:srgbClr val="1D3557"/>
-                </a:solidFill>
-                <a:latin typeface="Fira Sans"/>
-              </a:rPr>
-              <a:t>Se estandariza cada variable: se le resta su media y se divide por su desviación estándar (el puntaje z de la clase 2).</a:t>
-            </a:r>
-          </a:p>
-          <a:p>
-            <a:pPr>
-              <a:lnSpc>
-                <a:spcPct val="112000"/>
-              </a:lnSpc>
-              <a:spcAft>
-                <a:spcPts val="900"/>
-              </a:spcAft>
-            </a:pPr>
-            <a:r>
-              <a:rPr sz="1800" b="1">
-                <a:solidFill>
-                  <a:srgbClr val="E0A437"/>
-                </a:solidFill>
-                <a:latin typeface="Fira Sans"/>
-              </a:rPr>
-              <a:t>▸ </a:t>
-            </a:r>
-            <a:r>
-              <a:rPr sz="1800" b="0">
-                <a:solidFill>
-                  <a:srgbClr val="000000"/>
-                </a:solidFill>
-                <a:latin typeface="Fira Sans"/>
-              </a:rPr>
-              <a:t>Cada jugador es un punto y el centro de la nube queda en el origen.</a:t>
-            </a:r>
-          </a:p>
-          <a:p>
-            <a:pPr>
-              <a:lnSpc>
-                <a:spcPct val="112000"/>
-              </a:lnSpc>
-              <a:spcAft>
-                <a:spcPts val="900"/>
-              </a:spcAft>
-            </a:pPr>
-            <a:r>
-              <a:rPr sz="1800" b="1">
-                <a:solidFill>
-                  <a:srgbClr val="E0A437"/>
-                </a:solidFill>
-                <a:latin typeface="Fira Sans"/>
-              </a:rPr>
-              <a:t>▸ </a:t>
-            </a:r>
-            <a:r>
-              <a:rPr sz="1800" b="0">
-                <a:solidFill>
-                  <a:srgbClr val="000000"/>
-                </a:solidFill>
-                <a:latin typeface="Fira Sans"/>
-              </a:rPr>
-              <a:t>Se busca la recta por el centro a lo largo de la cual los puntos están más dispersos (la diagonal roja de la figura): es la primera componente. El valor de cada jugador es su posición sobre esa recta.</a:t>
-            </a:r>
-          </a:p>
-          <a:p>
-            <a:pPr>
-              <a:lnSpc>
-                <a:spcPct val="112000"/>
-              </a:lnSpc>
-              <a:spcAft>
-                <a:spcPts val="900"/>
-              </a:spcAft>
-            </a:pPr>
-            <a:r>
-              <a:rPr sz="1800" b="1">
-                <a:solidFill>
-                  <a:srgbClr val="E0A437"/>
-                </a:solidFill>
-                <a:latin typeface="Fira Sans"/>
-              </a:rPr>
-              <a:t>▸ </a:t>
-            </a:r>
-            <a:r>
-              <a:rPr sz="1800" b="0">
-                <a:solidFill>
-                  <a:srgbClr val="000000"/>
-                </a:solidFill>
-                <a:latin typeface="Fira Sans"/>
-              </a:rPr>
-              <a:t>La perpendicular es la segunda componente; con más variables se sigue hasta tener tantas como variables.</a:t>
-            </a:r>
-          </a:p>
-          <a:p>
-            <a:pPr>
-              <a:lnSpc>
-                <a:spcPct val="112000"/>
-              </a:lnSpc>
-              <a:spcAft>
-                <a:spcPts val="900"/>
-              </a:spcAft>
-            </a:pPr>
-            <a:r>
-              <a:rPr sz="1800" b="1">
-                <a:solidFill>
-                  <a:srgbClr val="E0A437"/>
-                </a:solidFill>
-                <a:latin typeface="Fira Sans"/>
-              </a:rPr>
-              <a:t>▸ </a:t>
-            </a:r>
-            <a:r>
-              <a:rPr sz="1800" b="0">
-                <a:solidFill>
-                  <a:srgbClr val="000000"/>
-                </a:solidFill>
-                <a:latin typeface="Fira Sans"/>
-              </a:rPr>
-              <a:t>La variación total se reparte entre ellas: el porcentaje de cada una dice cuánto se conserva al quedarse con las primeras.</a:t>
+            <a:r>
+              <a:rPr sz="1300" b="0">
+                <a:solidFill>
+                  <a:srgbClr val="333333"/>
+                </a:solidFill>
+                <a:latin typeface="Fira Sans"/>
+              </a:rPr>
+              <a:t>Ninguna otra dirección conserva más variación que la diagonal: por eso se llama primera componente principal. Su perpendicular, la que conserva el resto, es la segunda.</a:t>
             </a:r>
           </a:p>
         </p:txBody>
@@ -4248,14 +4070,14 @@
                 </a:solidFill>
                 <a:latin typeface="Fira Sans"/>
               </a:rPr>
-              <a:t>Por qué se estandariza</a:t>
+              <a:t>En la práctica: un puntaje ponderado por jugador</a:t>
             </a:r>
           </a:p>
         </p:txBody>
       </p:sp>
       <p:pic>
         <p:nvPicPr>
-          <p:cNvPr id="4" name="Picture 3" descr="c8_02_estandarizar.png"/>
+          <p:cNvPr id="4" name="Picture 3" descr="c8_01b_puntaje_ponderado.png"/>
           <p:cNvPicPr>
             <a:picLocks noChangeAspect="1"/>
           </p:cNvPicPr>
@@ -4269,8 +4091,8 @@
         </p:blipFill>
         <p:spPr>
           <a:xfrm>
-            <a:off x="2421351" y="1143000"/>
-            <a:ext cx="4301297" cy="2331720"/>
+            <a:off x="699515" y="1261139"/>
+            <a:ext cx="7744968" cy="2607505"/>
           </a:xfrm>
           <a:prstGeom prst="rect">
             <a:avLst/>
@@ -4285,8 +4107,8 @@
         </p:nvSpPr>
         <p:spPr>
           <a:xfrm>
-            <a:off x="704088" y="3611879"/>
-            <a:ext cx="7744968" cy="1280160"/>
+            <a:off x="704088" y="4005804"/>
+            <a:ext cx="7744968" cy="768096"/>
           </a:xfrm>
           <a:prstGeom prst="rect">
             <a:avLst/>
@@ -4306,7 +4128,7 @@
                 </a:solidFill>
                 <a:latin typeface="Fira Sans"/>
               </a:rPr>
-              <a:t>Con las variables en sus unidades, la primera componente es casi solo turnos_carrera, porque su desviación estándar (2.287) es 476 veces la de temporadas (4,8): PCA sigue a la variable que más varía en sus unidades. Con cada variable estandarizada (media 0 y desviación 1, como en las clases 2 y 7) todas parten iguales. El libro recomienda estandarizar, salvo que las variables compartan unidad (James et al., 2013, p. 381).</a:t>
+              <a:t>La posición sobre la diagonal se calcula como un puntaje ponderado, igual que el de la admisión universitaria: cada variable entra con un peso y sale un número por jugador. Aquí los pesos no los fija nadie: se calculan para que ese número separe a los jugadores lo más posible.</a:t>
             </a:r>
           </a:p>
         </p:txBody>
@@ -4344,7 +4166,7 @@
             <a:avLst/>
           </a:prstGeom>
           <a:solidFill>
-            <a:srgbClr val="1D3557"/>
+            <a:srgbClr val="FAFBFC"/>
           </a:solidFill>
           <a:ln>
             <a:noFill/>
@@ -4381,8 +4203,8 @@
         </p:nvSpPr>
         <p:spPr>
           <a:xfrm>
-            <a:off x="603504" y="1847088"/>
-            <a:ext cx="7946136" cy="1399032"/>
+            <a:off x="402336" y="301752"/>
+            <a:ext cx="8348472" cy="795528"/>
           </a:xfrm>
           <a:prstGeom prst="rect">
             <a:avLst/>
@@ -4396,28 +4218,148 @@
           <a:lstStyle/>
           <a:p>
             <a:r>
-              <a:rPr sz="3400" b="1">
-                <a:solidFill>
-                  <a:srgbClr val="FFFFFF"/>
-                </a:solidFill>
-                <a:latin typeface="Fira Sans"/>
-              </a:rPr>
-              <a:t>3. Cómo se leen</a:t>
-            </a:r>
-          </a:p>
-          <a:p>
-            <a:r>
-              <a:rPr sz="1800" b="0">
+              <a:rPr sz="2800" b="1">
+                <a:solidFill>
+                  <a:srgbClr val="0F0F0F"/>
+                </a:solidFill>
+                <a:latin typeface="Fira Sans"/>
+              </a:rPr>
+              <a:t>El análisis de componentes principales</a:t>
+            </a:r>
+          </a:p>
+        </p:txBody>
+      </p:sp>
+      <p:sp>
+        <p:nvSpPr>
+          <p:cNvPr id="4" name="TextBox 3"/>
+          <p:cNvSpPr txBox="1"/>
+          <p:nvPr/>
+        </p:nvSpPr>
+        <p:spPr>
+          <a:xfrm>
+            <a:off x="502920" y="1252728"/>
+            <a:ext cx="4023360" cy="3200400"/>
+          </a:xfrm>
+          <a:prstGeom prst="rect">
+            <a:avLst/>
+          </a:prstGeom>
+          <a:noFill/>
+        </p:spPr>
+        <p:txBody>
+          <a:bodyPr wrap="square">
+            <a:spAutoFit/>
+          </a:bodyPr>
+          <a:lstStyle/>
+          <a:p>
+            <a:pPr>
+              <a:lnSpc>
+                <a:spcPct val="112000"/>
+              </a:lnSpc>
+              <a:spcAft>
+                <a:spcPts val="900"/>
+              </a:spcAft>
+            </a:pPr>
+            <a:r>
+              <a:rPr sz="1500" b="1">
                 <a:solidFill>
                   <a:srgbClr val="E0A437"/>
                 </a:solidFill>
                 <a:latin typeface="Fira Sans"/>
               </a:rPr>
-              <a:t>Cuánta variación explica cada componente y de qué está hecha</a:t>
-            </a:r>
-          </a:p>
-        </p:txBody>
-      </p:sp>
+              <a:t>▸ </a:t>
+            </a:r>
+            <a:r>
+              <a:rPr sz="1500" b="1">
+                <a:solidFill>
+                  <a:srgbClr val="1D3557"/>
+                </a:solidFill>
+                <a:latin typeface="Fira Sans"/>
+              </a:rPr>
+              <a:t>Busca la dirección en que los datos más se dispersan (la primera componente), luego la que más se dispersa entre las perpendiculares (la segunda), y así hasta tener tantas como variables.</a:t>
+            </a:r>
+          </a:p>
+          <a:p>
+            <a:pPr>
+              <a:lnSpc>
+                <a:spcPct val="112000"/>
+              </a:lnSpc>
+              <a:spcAft>
+                <a:spcPts val="900"/>
+              </a:spcAft>
+            </a:pPr>
+            <a:r>
+              <a:rPr sz="1500" b="1">
+                <a:solidFill>
+                  <a:srgbClr val="E0A437"/>
+                </a:solidFill>
+                <a:latin typeface="Fira Sans"/>
+              </a:rPr>
+              <a:t>▸ </a:t>
+            </a:r>
+            <a:r>
+              <a:rPr sz="1500" b="0">
+                <a:solidFill>
+                  <a:srgbClr val="000000"/>
+                </a:solidFill>
+                <a:latin typeface="Fira Sans"/>
+              </a:rPr>
+              <a:t>Cada componente es una variable nueva: un puntaje ponderado de las originales, con una parte de la variación total.</a:t>
+            </a:r>
+          </a:p>
+          <a:p>
+            <a:pPr>
+              <a:lnSpc>
+                <a:spcPct val="112000"/>
+              </a:lnSpc>
+              <a:spcAft>
+                <a:spcPts val="900"/>
+              </a:spcAft>
+            </a:pPr>
+            <a:r>
+              <a:rPr sz="1500" b="1">
+                <a:solidFill>
+                  <a:srgbClr val="E0A437"/>
+                </a:solidFill>
+                <a:latin typeface="Fira Sans"/>
+              </a:rPr>
+              <a:t>▸ </a:t>
+            </a:r>
+            <a:r>
+              <a:rPr sz="1500" b="0">
+                <a:solidFill>
+                  <a:srgbClr val="000000"/>
+                </a:solidFill>
+                <a:latin typeface="Fira Sans"/>
+              </a:rPr>
+              <a:t>No usa ninguna respuesta Y: es un método no supervisado (James et al., 2013, p. 375).</a:t>
+            </a:r>
+          </a:p>
+        </p:txBody>
+      </p:sp>
+      <p:pic>
+        <p:nvPicPr>
+          <p:cNvPr id="5" name="Picture 4" descr="c8_01c_componentes.png"/>
+          <p:cNvPicPr>
+            <a:picLocks noChangeAspect="1"/>
+          </p:cNvPicPr>
+          <p:nvPr/>
+        </p:nvPicPr>
+        <p:blipFill>
+          <a:blip r:embed="rId2"/>
+          <a:stretch>
+            <a:fillRect/>
+          </a:stretch>
+        </p:blipFill>
+        <p:spPr>
+          <a:xfrm>
+            <a:off x="4892040" y="1371600"/>
+            <a:ext cx="3840480" cy="3052511"/>
+          </a:xfrm>
+          <a:prstGeom prst="rect">
+            <a:avLst/>
+          </a:prstGeom>
+        </p:spPr>
+      </p:pic>
     </p:spTree>
   </p:cSld>
   <p:clrMapOvr>
@@ -4509,45 +4451,21 @@
                 </a:solidFill>
                 <a:latin typeface="Fira Sans"/>
               </a:rPr>
-              <a:t>Cuánta variación explica cada componente</a:t>
-            </a:r>
-          </a:p>
-        </p:txBody>
-      </p:sp>
-      <p:pic>
-        <p:nvPicPr>
-          <p:cNvPr id="4" name="Picture 3" descr="c8_03_scree.png"/>
-          <p:cNvPicPr>
-            <a:picLocks noChangeAspect="1"/>
-          </p:cNvPicPr>
-          <p:nvPr/>
-        </p:nvPicPr>
-        <p:blipFill>
-          <a:blip r:embed="rId2"/>
-          <a:stretch>
-            <a:fillRect/>
-          </a:stretch>
-        </p:blipFill>
-        <p:spPr>
-          <a:xfrm>
-            <a:off x="2337301" y="1143000"/>
-            <a:ext cx="4469397" cy="2587752"/>
-          </a:xfrm>
-          <a:prstGeom prst="rect">
-            <a:avLst/>
-          </a:prstGeom>
-        </p:spPr>
-      </p:pic>
-      <p:sp>
-        <p:nvSpPr>
-          <p:cNvPr id="5" name="TextBox 4"/>
+              <a:t>¿Para qué sirve?</a:t>
+            </a:r>
+          </a:p>
+        </p:txBody>
+      </p:sp>
+      <p:sp>
+        <p:nvSpPr>
+          <p:cNvPr id="4" name="TextBox 3"/>
           <p:cNvSpPr txBox="1"/>
           <p:nvPr/>
         </p:nvSpPr>
         <p:spPr>
           <a:xfrm>
-            <a:off x="704088" y="3867912"/>
-            <a:ext cx="7744968" cy="1024128"/>
+            <a:off x="704088" y="1353312"/>
+            <a:ext cx="7744968" cy="3300984"/>
           </a:xfrm>
           <a:prstGeom prst="rect">
             <a:avLst/>
@@ -4560,14 +4478,115 @@
           </a:bodyPr>
           <a:lstStyle/>
           <a:p>
-            <a:r>
-              <a:rPr sz="1300" b="0">
-                <a:solidFill>
-                  <a:srgbClr val="333333"/>
-                </a:solidFill>
-                <a:latin typeface="Fira Sans"/>
-              </a:rPr>
-              <a:t>La primera componente explica el 45,3% de la variación de las 16 variables; la segunda, el 25,7%; la tercera, el 10,8%. Dos componentes reúnen el 71% y tres, el 82%. Para decidir cuántas conservar, el libro sugiere mirar dónde la curva deja de caer (el codo) y advierte que no hay una regla objetiva: depende del uso (James et al., 2013, p. 384).</a:t>
+            <a:pPr>
+              <a:lnSpc>
+                <a:spcPct val="112000"/>
+              </a:lnSpc>
+              <a:spcAft>
+                <a:spcPts val="900"/>
+              </a:spcAft>
+            </a:pPr>
+            <a:r>
+              <a:rPr sz="1800" b="1">
+                <a:solidFill>
+                  <a:srgbClr val="E0A437"/>
+                </a:solidFill>
+                <a:latin typeface="Fira Sans"/>
+              </a:rPr>
+              <a:t>▸ </a:t>
+            </a:r>
+            <a:r>
+              <a:rPr sz="1800" b="1">
+                <a:solidFill>
+                  <a:srgbClr val="1D3557"/>
+                </a:solidFill>
+                <a:latin typeface="Fira Sans"/>
+              </a:rPr>
+              <a:t>Para mirar los datos: con 16 variables hay 120 gráficos de dispersión posibles; con dos componentes, uno solo.</a:t>
+            </a:r>
+          </a:p>
+          <a:p>
+            <a:pPr>
+              <a:lnSpc>
+                <a:spcPct val="112000"/>
+              </a:lnSpc>
+              <a:spcAft>
+                <a:spcPts val="900"/>
+              </a:spcAft>
+            </a:pPr>
+            <a:r>
+              <a:rPr sz="1800" b="1">
+                <a:solidFill>
+                  <a:srgbClr val="E0A437"/>
+                </a:solidFill>
+                <a:latin typeface="Fira Sans"/>
+              </a:rPr>
+              <a:t>▸ </a:t>
+            </a:r>
+            <a:r>
+              <a:rPr sz="1800" b="0">
+                <a:solidFill>
+                  <a:srgbClr val="000000"/>
+                </a:solidFill>
+                <a:latin typeface="Fira Sans"/>
+              </a:rPr>
+              <a:t>Para entregarle a un modelo menos entradas: las componentes reemplazan a un grupo de variables que se repiten.</a:t>
+            </a:r>
+          </a:p>
+          <a:p>
+            <a:pPr>
+              <a:lnSpc>
+                <a:spcPct val="112000"/>
+              </a:lnSpc>
+              <a:spcAft>
+                <a:spcPts val="900"/>
+              </a:spcAft>
+            </a:pPr>
+            <a:r>
+              <a:rPr sz="1800" b="1">
+                <a:solidFill>
+                  <a:srgbClr val="E0A437"/>
+                </a:solidFill>
+                <a:latin typeface="Fira Sans"/>
+              </a:rPr>
+              <a:t>▸ </a:t>
+            </a:r>
+            <a:r>
+              <a:rPr sz="1800" b="0">
+                <a:solidFill>
+                  <a:srgbClr val="000000"/>
+                </a:solidFill>
+                <a:latin typeface="Fira Sans"/>
+              </a:rPr>
+              <a:t>Para entender de qué está hecha la variación: qué variables se mueven juntas y cuánto pesa cada grupo.</a:t>
+            </a:r>
+          </a:p>
+          <a:p>
+            <a:pPr>
+              <a:lnSpc>
+                <a:spcPct val="112000"/>
+              </a:lnSpc>
+              <a:spcAft>
+                <a:spcPts val="900"/>
+              </a:spcAft>
+            </a:pPr>
+            <a:r>
+              <a:rPr sz="1800" b="1">
+                <a:solidFill>
+                  <a:srgbClr val="E0A437"/>
+                </a:solidFill>
+                <a:latin typeface="Fira Sans"/>
+              </a:rPr>
+              <a:t>▸ </a:t>
+            </a:r>
+            <a:r>
+              <a:rPr sz="1800" b="0">
+                <a:solidFill>
+                  <a:srgbClr val="000000"/>
+                </a:solidFill>
+                <a:latin typeface="Fira Sans"/>
+              </a:rPr>
+              <a:t>Lo que no hace: no elige variables ni las descarta, y no sabe qué se quiere predecir.</a:t>
             </a:r>
           </a:p>
         </p:txBody>
@@ -4663,14 +4682,14 @@
                 </a:solidFill>
                 <a:latin typeface="Fira Sans"/>
               </a:rPr>
-              <a:t>De qué está hecha cada componente: los pesos</a:t>
+              <a:t>Con 16 variables, los mismos pasos</a:t>
             </a:r>
           </a:p>
         </p:txBody>
       </p:sp>
       <p:pic>
         <p:nvPicPr>
-          <p:cNvPr id="4" name="Picture 3" descr="c8_04_pesos.png"/>
+          <p:cNvPr id="4" name="Picture 3" descr="c8_08_pasos.png"/>
           <p:cNvPicPr>
             <a:picLocks noChangeAspect="1"/>
           </p:cNvPicPr>
@@ -4684,8 +4703,8 @@
         </p:blipFill>
         <p:spPr>
           <a:xfrm>
-            <a:off x="2196563" y="1143000"/>
-            <a:ext cx="4750872" cy="2587752"/>
+            <a:off x="699515" y="1531946"/>
+            <a:ext cx="7744968" cy="2065892"/>
           </a:xfrm>
           <a:prstGeom prst="rect">
             <a:avLst/>
@@ -4700,8 +4719,8 @@
         </p:nvSpPr>
         <p:spPr>
           <a:xfrm>
-            <a:off x="704088" y="3867912"/>
-            <a:ext cx="7744968" cy="1024128"/>
+            <a:off x="704088" y="3734997"/>
+            <a:ext cx="7744968" cy="768096"/>
           </a:xfrm>
           <a:prstGeom prst="rect">
             <a:avLst/>
@@ -4721,7 +4740,7 @@
                 </a:solidFill>
                 <a:latin typeface="Fira Sans"/>
               </a:rPr>
-              <a:t>Primera componente: las siete variables de la carrera pesan casi lo mismo (0,29 a 0,34), las de la temporada la mitad (0,19 a 0,23) y la defensa no cuenta: mide cuánta carrera lleva el jugador. Segunda componente: la temporada 1986 pesa positivo (0,24 a 0,39) y la carrera negativo (−0,12 a −0,26): separa a quien rindió este año más de lo que dice su carrera.</a:t>
+              <a:t>Con 16 variables la nube no se puede dibujar, pero el cálculo es el mismo: cada jugador es un punto con 16 coordenadas, se busca la dirección de mayor dispersión, luego la perpendicular que más se dispersa, y así hasta tener 16 componentes, ordenadas de la que más variación conserva a la que menos.</a:t>
             </a:r>
           </a:p>
         </p:txBody>
@@ -4817,14 +4836,14 @@
                 </a:solidFill>
                 <a:latin typeface="Fira Sans"/>
               </a:rPr>
-              <a:t>Los 263 jugadores en dos componentes</a:t>
+              <a:t>Por qué se estandariza</a:t>
             </a:r>
           </a:p>
         </p:txBody>
       </p:sp>
       <p:pic>
         <p:nvPicPr>
-          <p:cNvPr id="4" name="Picture 3" descr="c8_05_jugadores.png"/>
+          <p:cNvPr id="4" name="Picture 3" descr="c8_02_estandarizar.png"/>
           <p:cNvPicPr>
             <a:picLocks noChangeAspect="1"/>
           </p:cNvPicPr>
@@ -4838,8 +4857,8 @@
         </p:blipFill>
         <p:spPr>
           <a:xfrm>
-            <a:off x="2699826" y="1143000"/>
-            <a:ext cx="3744346" cy="2587751"/>
+            <a:off x="2421351" y="1143000"/>
+            <a:ext cx="4301297" cy="2331720"/>
           </a:xfrm>
           <a:prstGeom prst="rect">
             <a:avLst/>
@@ -4854,8 +4873,8 @@
         </p:nvSpPr>
         <p:spPr>
           <a:xfrm>
-            <a:off x="704088" y="3867912"/>
-            <a:ext cx="7744968" cy="1024128"/>
+            <a:off x="704088" y="3611879"/>
+            <a:ext cx="7744968" cy="1280160"/>
           </a:xfrm>
           <a:prstGeom prst="rect">
             <a:avLst/>
@@ -4875,7 +4894,7 @@
                 </a:solidFill>
                 <a:latin typeface="Fira Sans"/>
               </a:rPr>
-              <a:t>Cada punto es un jugador y el color, su salario de 1987, que PCA no usó. El salario crece hacia la derecha (correlación 0,64 con la primera componente) y casi nada hacia arriba (0,11 con la segunda): la carrera pesa en el salario; la última temporada, poco. Dos ejes muestran lo que en 16 variables había que leer coeficiente por coeficiente.</a:t>
+              <a:t>Con las variables en sus unidades, la primera componente es casi solo turnos_carrera, porque su desviación estándar (2.287) es 476 veces la de temporadas (4,8): PCA sigue a la variable que más varía en sus unidades. Con cada variable estandarizada (media 0 y desviación 1, como en las clases 2 y 7) todas parten iguales. El libro recomienda estandarizar, salvo que las variables compartan unidad (James et al., 2013, p. 381).</a:t>
             </a:r>
           </a:p>
         </p:txBody>
@@ -4913,7 +4932,7 @@
             <a:avLst/>
           </a:prstGeom>
           <a:solidFill>
-            <a:srgbClr val="FAFBFC"/>
+            <a:srgbClr val="1D3557"/>
           </a:solidFill>
           <a:ln>
             <a:noFill/>
@@ -4950,8 +4969,8 @@
         </p:nvSpPr>
         <p:spPr>
           <a:xfrm>
-            <a:off x="402336" y="301752"/>
-            <a:ext cx="8348472" cy="795528"/>
+            <a:off x="603504" y="1847088"/>
+            <a:ext cx="7946136" cy="1399032"/>
           </a:xfrm>
           <a:prstGeom prst="rect">
             <a:avLst/>
@@ -4965,71 +4984,24 @@
           <a:lstStyle/>
           <a:p>
             <a:r>
-              <a:rPr sz="2800" b="1">
-                <a:solidFill>
-                  <a:srgbClr val="0F0F0F"/>
-                </a:solidFill>
-                <a:latin typeface="Fira Sans"/>
-              </a:rPr>
-              <a:t>El mismo cálculo con las flores de la clase 2</a:t>
-            </a:r>
-          </a:p>
-        </p:txBody>
-      </p:sp>
-      <p:pic>
-        <p:nvPicPr>
-          <p:cNvPr id="4" name="Picture 3" descr="c8_06_iris.png"/>
-          <p:cNvPicPr>
-            <a:picLocks noChangeAspect="1"/>
-          </p:cNvPicPr>
-          <p:nvPr/>
-        </p:nvPicPr>
-        <p:blipFill>
-          <a:blip r:embed="rId2"/>
-          <a:stretch>
-            <a:fillRect/>
-          </a:stretch>
-        </p:blipFill>
-        <p:spPr>
-          <a:xfrm>
-            <a:off x="2906606" y="1143000"/>
-            <a:ext cx="3330786" cy="2587751"/>
-          </a:xfrm>
-          <a:prstGeom prst="rect">
-            <a:avLst/>
-          </a:prstGeom>
-        </p:spPr>
-      </p:pic>
-      <p:sp>
-        <p:nvSpPr>
-          <p:cNvPr id="5" name="TextBox 4"/>
-          <p:cNvSpPr txBox="1"/>
-          <p:nvPr/>
-        </p:nvSpPr>
-        <p:spPr>
-          <a:xfrm>
-            <a:off x="704088" y="3867912"/>
-            <a:ext cx="7744968" cy="1024128"/>
-          </a:xfrm>
-          <a:prstGeom prst="rect">
-            <a:avLst/>
-          </a:prstGeom>
-          <a:noFill/>
-        </p:spPr>
-        <p:txBody>
-          <a:bodyPr wrap="square">
-            <a:spAutoFit/>
-          </a:bodyPr>
-          <a:lstStyle/>
-          <a:p>
-            <a:r>
-              <a:rPr sz="1300" b="0">
-                <a:solidFill>
-                  <a:srgbClr val="333333"/>
-                </a:solidFill>
-                <a:latin typeface="Fira Sans"/>
-              </a:rPr>
-              <a:t>Las cuatro medidas de iris se resumen en dos componentes que reúnen el 96% de la variación. La primera (73%) pesa casi igual el largo y el ancho del pétalo y el largo del sépalo (0,52 a 0,58): el tamaño de la flor. La segunda (23%) es casi solo el ancho del sépalo (0,92). PCA no conoce la especie y aun así las tres quedan separadas a lo largo de la primera componente.</a:t>
+              <a:rPr sz="3400" b="1">
+                <a:solidFill>
+                  <a:srgbClr val="FFFFFF"/>
+                </a:solidFill>
+                <a:latin typeface="Fira Sans"/>
+              </a:rPr>
+              <a:t>3. Cómo se leen</a:t>
+            </a:r>
+          </a:p>
+          <a:p>
+            <a:r>
+              <a:rPr sz="1800" b="0">
+                <a:solidFill>
+                  <a:srgbClr val="E0A437"/>
+                </a:solidFill>
+                <a:latin typeface="Fira Sans"/>
+              </a:rPr>
+              <a:t>Cuánta variación explica cada componente y de qué está hecha</a:t>
             </a:r>
           </a:p>
         </p:txBody>
@@ -5298,7 +5270,7 @@
             <a:avLst/>
           </a:prstGeom>
           <a:solidFill>
-            <a:srgbClr val="1D3557"/>
+            <a:srgbClr val="FAFBFC"/>
           </a:solidFill>
           <a:ln>
             <a:noFill/>
@@ -5335,8 +5307,8 @@
         </p:nvSpPr>
         <p:spPr>
           <a:xfrm>
-            <a:off x="603504" y="1847088"/>
-            <a:ext cx="7946136" cy="1399032"/>
+            <a:off x="402336" y="301752"/>
+            <a:ext cx="8348472" cy="795528"/>
           </a:xfrm>
           <a:prstGeom prst="rect">
             <a:avLst/>
@@ -5350,24 +5322,71 @@
           <a:lstStyle/>
           <a:p>
             <a:r>
-              <a:rPr sz="3400" b="1">
-                <a:solidFill>
-                  <a:srgbClr val="FFFFFF"/>
-                </a:solidFill>
-                <a:latin typeface="Fira Sans"/>
-              </a:rPr>
-              <a:t>4. Cuándo</a:t>
-            </a:r>
-          </a:p>
-          <a:p>
-            <a:r>
-              <a:rPr sz="1800" b="0">
-                <a:solidFill>
-                  <a:srgbClr val="E0A437"/>
-                </a:solidFill>
-                <a:latin typeface="Fira Sans"/>
-              </a:rPr>
-              <a:t>Cuándo conviene y cuándo no</a:t>
+              <a:rPr sz="2800" b="1">
+                <a:solidFill>
+                  <a:srgbClr val="0F0F0F"/>
+                </a:solidFill>
+                <a:latin typeface="Fira Sans"/>
+              </a:rPr>
+              <a:t>Cuánta variación explica cada componente</a:t>
+            </a:r>
+          </a:p>
+        </p:txBody>
+      </p:sp>
+      <p:pic>
+        <p:nvPicPr>
+          <p:cNvPr id="4" name="Picture 3" descr="c8_03_scree.png"/>
+          <p:cNvPicPr>
+            <a:picLocks noChangeAspect="1"/>
+          </p:cNvPicPr>
+          <p:nvPr/>
+        </p:nvPicPr>
+        <p:blipFill>
+          <a:blip r:embed="rId2"/>
+          <a:stretch>
+            <a:fillRect/>
+          </a:stretch>
+        </p:blipFill>
+        <p:spPr>
+          <a:xfrm>
+            <a:off x="2337301" y="1143000"/>
+            <a:ext cx="4469397" cy="2587752"/>
+          </a:xfrm>
+          <a:prstGeom prst="rect">
+            <a:avLst/>
+          </a:prstGeom>
+        </p:spPr>
+      </p:pic>
+      <p:sp>
+        <p:nvSpPr>
+          <p:cNvPr id="5" name="TextBox 4"/>
+          <p:cNvSpPr txBox="1"/>
+          <p:nvPr/>
+        </p:nvSpPr>
+        <p:spPr>
+          <a:xfrm>
+            <a:off x="704088" y="3867912"/>
+            <a:ext cx="7744968" cy="1024128"/>
+          </a:xfrm>
+          <a:prstGeom prst="rect">
+            <a:avLst/>
+          </a:prstGeom>
+          <a:noFill/>
+        </p:spPr>
+        <p:txBody>
+          <a:bodyPr wrap="square">
+            <a:spAutoFit/>
+          </a:bodyPr>
+          <a:lstStyle/>
+          <a:p>
+            <a:r>
+              <a:rPr sz="1300" b="0">
+                <a:solidFill>
+                  <a:srgbClr val="333333"/>
+                </a:solidFill>
+                <a:latin typeface="Fira Sans"/>
+              </a:rPr>
+              <a:t>La primera componente explica el 45,3% de la variación de las 16 variables; la segunda, el 25,7%; la tercera, el 10,8%. Dos componentes reúnen el 71% y tres, el 82%. Para decidir cuántas conservar, el libro sugiere mirar dónde la curva deja de caer (el codo) y advierte que no hay una regla objetiva: depende del uso (James et al., 2013, p. 384).</a:t>
             </a:r>
           </a:p>
         </p:txBody>
@@ -5463,21 +5482,45 @@
                 </a:solidFill>
                 <a:latin typeface="Fira Sans"/>
               </a:rPr>
-              <a:t>¿Cuándo conviene?</a:t>
-            </a:r>
-          </a:p>
-        </p:txBody>
-      </p:sp>
-      <p:sp>
-        <p:nvSpPr>
-          <p:cNvPr id="4" name="TextBox 3"/>
+              <a:t>De qué está hecha cada componente: los pesos</a:t>
+            </a:r>
+          </a:p>
+        </p:txBody>
+      </p:sp>
+      <p:pic>
+        <p:nvPicPr>
+          <p:cNvPr id="4" name="Picture 3" descr="c8_04_pesos.png"/>
+          <p:cNvPicPr>
+            <a:picLocks noChangeAspect="1"/>
+          </p:cNvPicPr>
+          <p:nvPr/>
+        </p:nvPicPr>
+        <p:blipFill>
+          <a:blip r:embed="rId2"/>
+          <a:stretch>
+            <a:fillRect/>
+          </a:stretch>
+        </p:blipFill>
+        <p:spPr>
+          <a:xfrm>
+            <a:off x="2196563" y="1143000"/>
+            <a:ext cx="4750872" cy="2587752"/>
+          </a:xfrm>
+          <a:prstGeom prst="rect">
+            <a:avLst/>
+          </a:prstGeom>
+        </p:spPr>
+      </p:pic>
+      <p:sp>
+        <p:nvSpPr>
+          <p:cNvPr id="5" name="TextBox 4"/>
           <p:cNvSpPr txBox="1"/>
           <p:nvPr/>
         </p:nvSpPr>
         <p:spPr>
           <a:xfrm>
-            <a:off x="704088" y="1353312"/>
-            <a:ext cx="7744968" cy="3300984"/>
+            <a:off x="704088" y="3867912"/>
+            <a:ext cx="7744968" cy="1024128"/>
           </a:xfrm>
           <a:prstGeom prst="rect">
             <a:avLst/>
@@ -5490,87 +5533,14 @@
           </a:bodyPr>
           <a:lstStyle/>
           <a:p>
-            <a:pPr>
-              <a:lnSpc>
-                <a:spcPct val="112000"/>
-              </a:lnSpc>
-              <a:spcAft>
-                <a:spcPts val="900"/>
-              </a:spcAft>
-            </a:pPr>
-            <a:r>
-              <a:rPr sz="1800" b="1">
-                <a:solidFill>
-                  <a:srgbClr val="E0A437"/>
-                </a:solidFill>
-                <a:latin typeface="Fira Sans"/>
-              </a:rPr>
-              <a:t>▸ </a:t>
-            </a:r>
-            <a:r>
-              <a:rPr sz="1800" b="1">
-                <a:solidFill>
-                  <a:srgbClr val="1D3557"/>
-                </a:solidFill>
-                <a:latin typeface="Fira Sans"/>
-              </a:rPr>
-              <a:t>Con muchas variables numéricas que se correlacionan en bloques, como en la matriz de la clase 7.</a:t>
-            </a:r>
-          </a:p>
-          <a:p>
-            <a:pPr>
-              <a:lnSpc>
-                <a:spcPct val="112000"/>
-              </a:lnSpc>
-              <a:spcAft>
-                <a:spcPts val="900"/>
-              </a:spcAft>
-            </a:pPr>
-            <a:r>
-              <a:rPr sz="1800" b="1">
-                <a:solidFill>
-                  <a:srgbClr val="E0A437"/>
-                </a:solidFill>
-                <a:latin typeface="Fira Sans"/>
-              </a:rPr>
-              <a:t>▸ </a:t>
-            </a:r>
-            <a:r>
-              <a:rPr sz="1800" b="0">
-                <a:solidFill>
-                  <a:srgbClr val="000000"/>
-                </a:solidFill>
-                <a:latin typeface="Fira Sans"/>
-              </a:rPr>
-              <a:t>Para mirar los datos en un plano, o para entregarle a un modelo menos entradas.</a:t>
-            </a:r>
-          </a:p>
-          <a:p>
-            <a:pPr>
-              <a:lnSpc>
-                <a:spcPct val="112000"/>
-              </a:lnSpc>
-              <a:spcAft>
-                <a:spcPts val="900"/>
-              </a:spcAft>
-            </a:pPr>
-            <a:r>
-              <a:rPr sz="1800" b="1">
-                <a:solidFill>
-                  <a:srgbClr val="E0A437"/>
-                </a:solidFill>
-                <a:latin typeface="Fira Sans"/>
-              </a:rPr>
-              <a:t>▸ </a:t>
-            </a:r>
-            <a:r>
-              <a:rPr sz="1800" b="0">
-                <a:solidFill>
-                  <a:srgbClr val="000000"/>
-                </a:solidFill>
-                <a:latin typeface="Fira Sans"/>
-              </a:rPr>
-              <a:t>No aporta si las variables son pocas y distintas entre sí: no hay nada que resumir.</a:t>
+            <a:r>
+              <a:rPr sz="1300" b="0">
+                <a:solidFill>
+                  <a:srgbClr val="333333"/>
+                </a:solidFill>
+                <a:latin typeface="Fira Sans"/>
+              </a:rPr>
+              <a:t>Primera componente: las siete variables de la carrera pesan casi lo mismo (0,29 a 0,34), las de la temporada la mitad (0,19 a 0,23) y la defensa no cuenta: mide cuánta carrera lleva el jugador. Segunda componente: la temporada 1986 pesa positivo (0,24 a 0,39) y la carrera negativo (−0,12 a −0,26): separa a quien rindió este año más de lo que dice su carrera.</a:t>
             </a:r>
           </a:p>
         </p:txBody>
@@ -5666,21 +5636,45 @@
                 </a:solidFill>
                 <a:latin typeface="Fira Sans"/>
               </a:rPr>
-              <a:t>Tres precauciones</a:t>
-            </a:r>
-          </a:p>
-        </p:txBody>
-      </p:sp>
-      <p:sp>
-        <p:nvSpPr>
-          <p:cNvPr id="4" name="TextBox 3"/>
+              <a:t>Los 263 jugadores en dos componentes</a:t>
+            </a:r>
+          </a:p>
+        </p:txBody>
+      </p:sp>
+      <p:pic>
+        <p:nvPicPr>
+          <p:cNvPr id="4" name="Picture 3" descr="c8_05_jugadores.png"/>
+          <p:cNvPicPr>
+            <a:picLocks noChangeAspect="1"/>
+          </p:cNvPicPr>
+          <p:nvPr/>
+        </p:nvPicPr>
+        <p:blipFill>
+          <a:blip r:embed="rId2"/>
+          <a:stretch>
+            <a:fillRect/>
+          </a:stretch>
+        </p:blipFill>
+        <p:spPr>
+          <a:xfrm>
+            <a:off x="2699826" y="1143000"/>
+            <a:ext cx="3744346" cy="2587751"/>
+          </a:xfrm>
+          <a:prstGeom prst="rect">
+            <a:avLst/>
+          </a:prstGeom>
+        </p:spPr>
+      </p:pic>
+      <p:sp>
+        <p:nvSpPr>
+          <p:cNvPr id="5" name="TextBox 4"/>
           <p:cNvSpPr txBox="1"/>
           <p:nvPr/>
         </p:nvSpPr>
         <p:spPr>
           <a:xfrm>
-            <a:off x="704088" y="1353312"/>
-            <a:ext cx="7744968" cy="3300984"/>
+            <a:off x="704088" y="3867912"/>
+            <a:ext cx="7744968" cy="1024128"/>
           </a:xfrm>
           <a:prstGeom prst="rect">
             <a:avLst/>
@@ -5693,87 +5687,14 @@
           </a:bodyPr>
           <a:lstStyle/>
           <a:p>
-            <a:pPr>
-              <a:lnSpc>
-                <a:spcPct val="112000"/>
-              </a:lnSpc>
-              <a:spcAft>
-                <a:spcPts val="900"/>
-              </a:spcAft>
-            </a:pPr>
-            <a:r>
-              <a:rPr sz="1800" b="1">
-                <a:solidFill>
-                  <a:srgbClr val="E0A437"/>
-                </a:solidFill>
-                <a:latin typeface="Fira Sans"/>
-              </a:rPr>
-              <a:t>▸ </a:t>
-            </a:r>
-            <a:r>
-              <a:rPr sz="1800" b="1">
-                <a:solidFill>
-                  <a:srgbClr val="1D3557"/>
-                </a:solidFill>
-                <a:latin typeface="Fira Sans"/>
-              </a:rPr>
-              <a:t>Las variables categóricas (las dummies de la clase 6) no entran bien en el cálculo: se dejan fuera o se tratan aparte.</a:t>
-            </a:r>
-          </a:p>
-          <a:p>
-            <a:pPr>
-              <a:lnSpc>
-                <a:spcPct val="112000"/>
-              </a:lnSpc>
-              <a:spcAft>
-                <a:spcPts val="900"/>
-              </a:spcAft>
-            </a:pPr>
-            <a:r>
-              <a:rPr sz="1800" b="1">
-                <a:solidFill>
-                  <a:srgbClr val="E0A437"/>
-                </a:solidFill>
-                <a:latin typeface="Fira Sans"/>
-              </a:rPr>
-              <a:t>▸ </a:t>
-            </a:r>
-            <a:r>
-              <a:rPr sz="1800" b="0">
-                <a:solidFill>
-                  <a:srgbClr val="000000"/>
-                </a:solidFill>
-                <a:latin typeface="Fira Sans"/>
-              </a:rPr>
-              <a:t>Las componentes no siempre tienen una lectura clara. Aquí sí (la carrera; la temporada frente a la carrera), pero no está garantizado.</a:t>
-            </a:r>
-          </a:p>
-          <a:p>
-            <a:pPr>
-              <a:lnSpc>
-                <a:spcPct val="112000"/>
-              </a:lnSpc>
-              <a:spcAft>
-                <a:spcPts val="900"/>
-              </a:spcAft>
-            </a:pPr>
-            <a:r>
-              <a:rPr sz="1800" b="1">
-                <a:solidFill>
-                  <a:srgbClr val="E0A437"/>
-                </a:solidFill>
-                <a:latin typeface="Fira Sans"/>
-              </a:rPr>
-              <a:t>▸ </a:t>
-            </a:r>
-            <a:r>
-              <a:rPr sz="1800" b="0">
-                <a:solidFill>
-                  <a:srgbClr val="000000"/>
-                </a:solidFill>
-                <a:latin typeface="Fira Sans"/>
-              </a:rPr>
-              <a:t>Es no supervisado: la dirección de más variación no es necesariamente la que mejor predice la respuesta. Ridge y Lasso eligen mirando Y; PCA no la mira.</a:t>
+            <a:r>
+              <a:rPr sz="1300" b="0">
+                <a:solidFill>
+                  <a:srgbClr val="333333"/>
+                </a:solidFill>
+                <a:latin typeface="Fira Sans"/>
+              </a:rPr>
+              <a:t>Cada punto es un jugador y el color, su salario de 1987, que PCA no usó. El salario crece hacia la derecha (correlación 0,64 con la primera componente) y casi nada hacia arriba (0,11 con la segunda): la carrera pesa en el salario; la última temporada, poco. Dos ejes muestran lo que en 16 variables había que leer coeficiente por coeficiente.</a:t>
             </a:r>
           </a:p>
         </p:txBody>
@@ -5869,114 +5790,35 @@
                 </a:solidFill>
                 <a:latin typeface="Fira Sans"/>
               </a:rPr>
-              <a:t>En el código: cinco líneas</a:t>
-            </a:r>
-          </a:p>
-        </p:txBody>
-      </p:sp>
-      <p:sp>
-        <p:nvSpPr>
-          <p:cNvPr id="4" name="Rectangle 3"/>
-          <p:cNvSpPr/>
-          <p:nvPr/>
-        </p:nvSpPr>
-        <p:spPr>
-          <a:xfrm>
-            <a:off x="704088" y="1280160"/>
-            <a:ext cx="7744968" cy="2880360"/>
-          </a:xfrm>
-          <a:prstGeom prst="rect">
-            <a:avLst/>
-          </a:prstGeom>
-          <a:solidFill>
-            <a:srgbClr val="F0F2F5"/>
-          </a:solidFill>
-          <a:ln>
-            <a:solidFill>
-              <a:srgbClr val="D8DDE3"/>
-            </a:solidFill>
-          </a:ln>
-          <a:effectLst/>
-        </p:spPr>
-        <p:style>
-          <a:lnRef idx="1">
-            <a:schemeClr val="accent1"/>
-          </a:lnRef>
-          <a:fillRef idx="3">
-            <a:schemeClr val="accent1"/>
-          </a:fillRef>
-          <a:effectRef idx="2">
-            <a:schemeClr val="accent1"/>
-          </a:effectRef>
-          <a:fontRef idx="minor">
-            <a:schemeClr val="lt1"/>
-          </a:fontRef>
-        </p:style>
-        <p:txBody>
-          <a:bodyPr rtlCol="0" anchor="ctr" wrap="square" lIns="228600" tIns="137160"/>
-          <a:lstStyle/>
-          <a:p>
-            <a:pPr/>
-            <a:r>
-              <a:rPr sz="1500" b="0">
-                <a:solidFill>
-                  <a:srgbClr val="1D3557"/>
-                </a:solidFill>
-                <a:latin typeface="Menlo"/>
-              </a:rPr>
-              <a:t>Z = StandardScaler().fit_transform(X)  # 1. estandarizar</a:t>
-            </a:r>
-          </a:p>
-          <a:p>
-            <a:pPr/>
-            <a:r>
-              <a:rPr sz="1500" b="0">
-                <a:solidFill>
-                  <a:srgbClr val="1D3557"/>
-                </a:solidFill>
-                <a:latin typeface="Menlo"/>
-              </a:rPr>
-              <a:t>pca = PCA().fit(Z)                     # 2. las componentes</a:t>
-            </a:r>
-          </a:p>
-          <a:p>
-            <a:pPr/>
-            <a:r>
-              <a:rPr sz="1500" b="0">
-                <a:solidFill>
-                  <a:srgbClr val="1D3557"/>
-                </a:solidFill>
-                <a:latin typeface="Menlo"/>
-              </a:rPr>
-              <a:t>pca.explained_variance_ratio_          # 3. cuánto explica</a:t>
-            </a:r>
-          </a:p>
-          <a:p>
-            <a:pPr/>
-            <a:r>
-              <a:rPr sz="1500" b="0">
-                <a:solidFill>
-                  <a:srgbClr val="1D3557"/>
-                </a:solidFill>
-                <a:latin typeface="Menlo"/>
-              </a:rPr>
-              <a:t>pca.components_                        # 4. los pesos</a:t>
-            </a:r>
-          </a:p>
-          <a:p>
-            <a:pPr/>
-            <a:r>
-              <a:rPr sz="1500" b="0">
-                <a:solidFill>
-                  <a:srgbClr val="1D3557"/>
-                </a:solidFill>
-                <a:latin typeface="Menlo"/>
-              </a:rPr>
-              <a:t>puntajes = pca.transform(Z)            # 5. los puntajes</a:t>
-            </a:r>
-          </a:p>
-        </p:txBody>
-      </p:sp>
+              <a:t>El mismo cálculo con las flores de la clase 2</a:t>
+            </a:r>
+          </a:p>
+        </p:txBody>
+      </p:sp>
+      <p:pic>
+        <p:nvPicPr>
+          <p:cNvPr id="4" name="Picture 3" descr="c8_06_iris.png"/>
+          <p:cNvPicPr>
+            <a:picLocks noChangeAspect="1"/>
+          </p:cNvPicPr>
+          <p:nvPr/>
+        </p:nvPicPr>
+        <p:blipFill>
+          <a:blip r:embed="rId2"/>
+          <a:stretch>
+            <a:fillRect/>
+          </a:stretch>
+        </p:blipFill>
+        <p:spPr>
+          <a:xfrm>
+            <a:off x="2906606" y="1143000"/>
+            <a:ext cx="3330786" cy="2587751"/>
+          </a:xfrm>
+          <a:prstGeom prst="rect">
+            <a:avLst/>
+          </a:prstGeom>
+        </p:spPr>
+      </p:pic>
       <p:sp>
         <p:nvSpPr>
           <p:cNvPr id="5" name="TextBox 4"/>
@@ -5985,8 +5827,8 @@
         </p:nvSpPr>
         <p:spPr>
           <a:xfrm>
-            <a:off x="704088" y="4389120"/>
-            <a:ext cx="7744968" cy="1097280"/>
+            <a:off x="704088" y="3867912"/>
+            <a:ext cx="7744968" cy="1024128"/>
           </a:xfrm>
           <a:prstGeom prst="rect">
             <a:avLst/>
@@ -5999,31 +5841,14 @@
           </a:bodyPr>
           <a:lstStyle/>
           <a:p>
-            <a:pPr>
-              <a:lnSpc>
-                <a:spcPct val="112000"/>
-              </a:lnSpc>
-              <a:spcAft>
-                <a:spcPts val="900"/>
-              </a:spcAft>
-            </a:pPr>
-            <a:r>
-              <a:rPr sz="1600" b="1">
-                <a:solidFill>
-                  <a:srgbClr val="E0A437"/>
-                </a:solidFill>
-                <a:latin typeface="Fira Sans"/>
-              </a:rPr>
-              <a:t>▸ </a:t>
-            </a:r>
-            <a:r>
-              <a:rPr sz="1600" b="0">
-                <a:solidFill>
-                  <a:srgbClr val="000000"/>
-                </a:solidFill>
-                <a:latin typeface="Fira Sans"/>
-              </a:rPr>
-              <a:t>El ejemplo completo, con las tablas de pesos y los gráficos de la clase, está en el notebook 08_componentes_principales.ipynb.</a:t>
+            <a:r>
+              <a:rPr sz="1300" b="0">
+                <a:solidFill>
+                  <a:srgbClr val="333333"/>
+                </a:solidFill>
+                <a:latin typeface="Fira Sans"/>
+              </a:rPr>
+              <a:t>Las cuatro medidas de iris se resumen en dos componentes que reúnen el 96% de la variación. La primera (73%) pesa casi igual el largo y el ancho del pétalo y el largo del sépalo (0,52 a 0,58): el tamaño de la flor. La segunda (23%) es casi solo el ancho del sépalo (0,92). PCA no conoce la especie y aun así las tres quedan separadas a lo largo de la primera componente.</a:t>
             </a:r>
           </a:p>
         </p:txBody>
@@ -6119,7 +5944,7 @@
                 </a:solidFill>
                 <a:latin typeface="Fira Sans"/>
               </a:rPr>
-              <a:t>5. Cierre del módulo</a:t>
+              <a:t>4. Cuándo</a:t>
             </a:r>
           </a:p>
           <a:p>
@@ -6130,7 +5955,7 @@
                 </a:solidFill>
                 <a:latin typeface="Fira Sans"/>
               </a:rPr>
-              <a:t>Ocho clases, un hilo</a:t>
+              <a:t>Cuándo conviene y cuándo no</a:t>
             </a:r>
           </a:p>
         </p:txBody>
@@ -6226,45 +6051,21 @@
                 </a:solidFill>
                 <a:latin typeface="Fira Sans"/>
               </a:rPr>
-              <a:t>El módulo en una página</a:t>
-            </a:r>
-          </a:p>
-        </p:txBody>
-      </p:sp>
-      <p:pic>
-        <p:nvPicPr>
-          <p:cNvPr id="4" name="Picture 3" descr="c8_07_mapa_modulo.png"/>
-          <p:cNvPicPr>
-            <a:picLocks noChangeAspect="1"/>
-          </p:cNvPicPr>
-          <p:nvPr/>
-        </p:nvPicPr>
-        <p:blipFill>
-          <a:blip r:embed="rId2"/>
-          <a:stretch>
-            <a:fillRect/>
-          </a:stretch>
-        </p:blipFill>
-        <p:spPr>
-          <a:xfrm>
-            <a:off x="1029546" y="1143000"/>
-            <a:ext cx="7084906" cy="3099816"/>
-          </a:xfrm>
-          <a:prstGeom prst="rect">
-            <a:avLst/>
-          </a:prstGeom>
-        </p:spPr>
-      </p:pic>
-      <p:sp>
-        <p:nvSpPr>
-          <p:cNvPr id="5" name="TextBox 4"/>
+              <a:t>¿Cuándo conviene?</a:t>
+            </a:r>
+          </a:p>
+        </p:txBody>
+      </p:sp>
+      <p:sp>
+        <p:nvSpPr>
+          <p:cNvPr id="4" name="TextBox 3"/>
           <p:cNvSpPr txBox="1"/>
           <p:nvPr/>
         </p:nvSpPr>
         <p:spPr>
           <a:xfrm>
-            <a:off x="704088" y="4379976"/>
-            <a:ext cx="7744968" cy="512064"/>
+            <a:off x="704088" y="1353312"/>
+            <a:ext cx="7744968" cy="3300984"/>
           </a:xfrm>
           <a:prstGeom prst="rect">
             <a:avLst/>
@@ -6277,14 +6078,87 @@
           </a:bodyPr>
           <a:lstStyle/>
           <a:p>
-            <a:r>
-              <a:rPr sz="1300" b="0">
-                <a:solidFill>
-                  <a:srgbClr val="333333"/>
-                </a:solidFill>
-                <a:latin typeface="Fira Sans"/>
-              </a:rPr>
-              <a:t>Cada clase dejó una idea. Juntas, son lo que el módulo enseñó: cómo se llega de una pregunta y unos datos a un resultado, y cómo se lee ese resultado con su incertidumbre.</a:t>
+            <a:pPr>
+              <a:lnSpc>
+                <a:spcPct val="112000"/>
+              </a:lnSpc>
+              <a:spcAft>
+                <a:spcPts val="900"/>
+              </a:spcAft>
+            </a:pPr>
+            <a:r>
+              <a:rPr sz="1800" b="1">
+                <a:solidFill>
+                  <a:srgbClr val="E0A437"/>
+                </a:solidFill>
+                <a:latin typeface="Fira Sans"/>
+              </a:rPr>
+              <a:t>▸ </a:t>
+            </a:r>
+            <a:r>
+              <a:rPr sz="1800" b="1">
+                <a:solidFill>
+                  <a:srgbClr val="1D3557"/>
+                </a:solidFill>
+                <a:latin typeface="Fira Sans"/>
+              </a:rPr>
+              <a:t>Con muchas variables numéricas que se correlacionan en bloques, como en la matriz de la clase 7.</a:t>
+            </a:r>
+          </a:p>
+          <a:p>
+            <a:pPr>
+              <a:lnSpc>
+                <a:spcPct val="112000"/>
+              </a:lnSpc>
+              <a:spcAft>
+                <a:spcPts val="900"/>
+              </a:spcAft>
+            </a:pPr>
+            <a:r>
+              <a:rPr sz="1800" b="1">
+                <a:solidFill>
+                  <a:srgbClr val="E0A437"/>
+                </a:solidFill>
+                <a:latin typeface="Fira Sans"/>
+              </a:rPr>
+              <a:t>▸ </a:t>
+            </a:r>
+            <a:r>
+              <a:rPr sz="1800" b="0">
+                <a:solidFill>
+                  <a:srgbClr val="000000"/>
+                </a:solidFill>
+                <a:latin typeface="Fira Sans"/>
+              </a:rPr>
+              <a:t>Para mirar los datos en un plano, o para entregarle a un modelo menos entradas.</a:t>
+            </a:r>
+          </a:p>
+          <a:p>
+            <a:pPr>
+              <a:lnSpc>
+                <a:spcPct val="112000"/>
+              </a:lnSpc>
+              <a:spcAft>
+                <a:spcPts val="900"/>
+              </a:spcAft>
+            </a:pPr>
+            <a:r>
+              <a:rPr sz="1800" b="1">
+                <a:solidFill>
+                  <a:srgbClr val="E0A437"/>
+                </a:solidFill>
+                <a:latin typeface="Fira Sans"/>
+              </a:rPr>
+              <a:t>▸ </a:t>
+            </a:r>
+            <a:r>
+              <a:rPr sz="1800" b="0">
+                <a:solidFill>
+                  <a:srgbClr val="000000"/>
+                </a:solidFill>
+                <a:latin typeface="Fira Sans"/>
+              </a:rPr>
+              <a:t>No aporta si las variables son pocas y distintas entre sí: no hay nada que resumir.</a:t>
             </a:r>
           </a:p>
         </p:txBody>
@@ -6380,7 +6254,7 @@
                 </a:solidFill>
                 <a:latin typeface="Fira Sans"/>
               </a:rPr>
-              <a:t>Lo que sigue en el diplomado</a:t>
+              <a:t>Tres precauciones</a:t>
             </a:r>
           </a:p>
         </p:txBody>
@@ -6431,7 +6305,7 @@
                 </a:solidFill>
                 <a:latin typeface="Fira Sans"/>
               </a:rPr>
-              <a:t>Módulo 2, Visualización e Inteligencia de Negocios: visualización efectiva, narrativas con datos y métricas de negocio.</a:t>
+              <a:t>Las variables categóricas (las dummies de la clase 6) no entran bien en el cálculo: se dejan fuera o se tratan aparte.</a:t>
             </a:r>
           </a:p>
           <a:p>
@@ -6459,7 +6333,7 @@
                 </a:solidFill>
                 <a:latin typeface="Fira Sans"/>
               </a:rPr>
-              <a:t>Módulo 3, Machine Learning para la Toma de Decisiones: aprendizaje supervisado y no supervisado (clustering y PCA en profundidad), evaluación de modelos, redes neuronales y explicabilidad.</a:t>
+              <a:t>Las componentes no siempre tienen una lectura clara. Aquí sí (la carrera; la temporada frente a la carrera), pero no está garantizado.</a:t>
             </a:r>
           </a:p>
           <a:p>
@@ -6487,35 +6361,7 @@
                 </a:solidFill>
                 <a:latin typeface="Fira Sans"/>
               </a:rPr>
-              <a:t>El Capstone continúa en esos módulos: el primer modelo de hoy es el punto de partida.</a:t>
-            </a:r>
-          </a:p>
-          <a:p>
-            <a:pPr>
-              <a:lnSpc>
-                <a:spcPct val="112000"/>
-              </a:lnSpc>
-              <a:spcAft>
-                <a:spcPts val="900"/>
-              </a:spcAft>
-            </a:pPr>
-            <a:r>
-              <a:rPr sz="1800" b="1">
-                <a:solidFill>
-                  <a:srgbClr val="E0A437"/>
-                </a:solidFill>
-                <a:latin typeface="Fira Sans"/>
-              </a:rPr>
-              <a:t>▸ </a:t>
-            </a:r>
-            <a:r>
-              <a:rPr sz="1800" b="0">
-                <a:solidFill>
-                  <a:srgbClr val="000000"/>
-                </a:solidFill>
-                <a:latin typeface="Fira Sans"/>
-              </a:rPr>
-              <a:t>Lo que se lleva de aquí: leer un resultado con su incertidumbre, juzgar un modelo en datos que no vio, y distinguir describir de encontrar una relación.</a:t>
+              <a:t>Es no supervisado: la dirección de más variación no es necesariamente la que mejor predice la respuesta. Ridge y Lasso eligen mirando Y; PCA no la mira.</a:t>
             </a:r>
           </a:p>
         </p:txBody>
@@ -6611,21 +6457,124 @@
                 </a:solidFill>
                 <a:latin typeface="Fira Sans"/>
               </a:rPr>
-              <a:t>Ahora: las presentaciones del avance</a:t>
-            </a:r>
-          </a:p>
-        </p:txBody>
-      </p:sp>
-      <p:sp>
-        <p:nvSpPr>
-          <p:cNvPr id="4" name="TextBox 3"/>
+              <a:t>En el código: cinco líneas</a:t>
+            </a:r>
+          </a:p>
+        </p:txBody>
+      </p:sp>
+      <p:sp>
+        <p:nvSpPr>
+          <p:cNvPr id="4" name="Rectangle 3"/>
+          <p:cNvSpPr/>
+          <p:nvPr/>
+        </p:nvSpPr>
+        <p:spPr>
+          <a:xfrm>
+            <a:off x="704088" y="1280160"/>
+            <a:ext cx="7744968" cy="2880360"/>
+          </a:xfrm>
+          <a:prstGeom prst="rect">
+            <a:avLst/>
+          </a:prstGeom>
+          <a:solidFill>
+            <a:srgbClr val="F0F2F5"/>
+          </a:solidFill>
+          <a:ln>
+            <a:solidFill>
+              <a:srgbClr val="D8DDE3"/>
+            </a:solidFill>
+          </a:ln>
+          <a:effectLst/>
+        </p:spPr>
+        <p:style>
+          <a:lnRef idx="1">
+            <a:schemeClr val="accent1"/>
+          </a:lnRef>
+          <a:fillRef idx="3">
+            <a:schemeClr val="accent1"/>
+          </a:fillRef>
+          <a:effectRef idx="2">
+            <a:schemeClr val="accent1"/>
+          </a:effectRef>
+          <a:fontRef idx="minor">
+            <a:schemeClr val="lt1"/>
+          </a:fontRef>
+        </p:style>
+        <p:txBody>
+          <a:bodyPr rtlCol="0" anchor="ctr" wrap="square" lIns="228600" tIns="137160"/>
+          <a:lstStyle/>
+          <a:p>
+            <a:pPr/>
+            <a:r>
+              <a:rPr sz="1500" b="0">
+                <a:solidFill>
+                  <a:srgbClr val="1D3557"/>
+                </a:solidFill>
+                <a:latin typeface="Menlo"/>
+              </a:rPr>
+              <a:t>Z = StandardScaler().fit_transform(X)  # 1. estandarizar</a:t>
+            </a:r>
+          </a:p>
+          <a:p>
+            <a:pPr/>
+            <a:r>
+              <a:rPr sz="1500" b="0">
+                <a:solidFill>
+                  <a:srgbClr val="1D3557"/>
+                </a:solidFill>
+                <a:latin typeface="Menlo"/>
+              </a:rPr>
+              <a:t>pca = PCA().fit(Z)                     # 2. las componentes</a:t>
+            </a:r>
+          </a:p>
+          <a:p>
+            <a:pPr/>
+            <a:r>
+              <a:rPr sz="1500" b="0">
+                <a:solidFill>
+                  <a:srgbClr val="1D3557"/>
+                </a:solidFill>
+                <a:latin typeface="Menlo"/>
+              </a:rPr>
+              <a:t>pca.explained_variance_ratio_          # 3. cuánto explica</a:t>
+            </a:r>
+          </a:p>
+          <a:p>
+            <a:pPr/>
+            <a:r>
+              <a:rPr sz="1500" b="0">
+                <a:solidFill>
+                  <a:srgbClr val="1D3557"/>
+                </a:solidFill>
+                <a:latin typeface="Menlo"/>
+              </a:rPr>
+              <a:t>pca.components_                        # 4. los pesos</a:t>
+            </a:r>
+          </a:p>
+          <a:p>
+            <a:pPr/>
+            <a:r>
+              <a:rPr sz="1500" b="0">
+                <a:solidFill>
+                  <a:srgbClr val="1D3557"/>
+                </a:solidFill>
+                <a:latin typeface="Menlo"/>
+              </a:rPr>
+              <a:t>puntajes = pca.transform(Z)            # 5. los puntajes</a:t>
+            </a:r>
+          </a:p>
+        </p:txBody>
+      </p:sp>
+      <p:sp>
+        <p:nvSpPr>
+          <p:cNvPr id="5" name="TextBox 4"/>
           <p:cNvSpPr txBox="1"/>
           <p:nvPr/>
         </p:nvSpPr>
         <p:spPr>
           <a:xfrm>
-            <a:off x="704088" y="1353312"/>
-            <a:ext cx="7744968" cy="3300984"/>
+            <a:off x="704088" y="4389120"/>
+            <a:ext cx="7744968" cy="1097280"/>
           </a:xfrm>
           <a:prstGeom prst="rect">
             <a:avLst/>
@@ -6647,7 +6596,7 @@
               </a:spcAft>
             </a:pPr>
             <a:r>
-              <a:rPr sz="1800" b="1">
+              <a:rPr sz="1600" b="1">
                 <a:solidFill>
                   <a:srgbClr val="E0A437"/>
                 </a:solidFill>
@@ -6656,97 +6605,13 @@
               <a:t>▸ </a:t>
             </a:r>
             <a:r>
-              <a:rPr sz="1800" b="1">
-                <a:solidFill>
-                  <a:srgbClr val="1D3557"/>
-                </a:solidFill>
-                <a:latin typeface="Fira Sans"/>
-              </a:rPr>
-              <a:t>Ocho equipos, en el orden en que se ofrezcan. Máximo 10 minutos por equipo; el tiempo se controla. Después, preguntas de la profesora y del curso.</a:t>
-            </a:r>
-          </a:p>
-          <a:p>
-            <a:pPr>
-              <a:lnSpc>
-                <a:spcPct val="112000"/>
-              </a:lnSpc>
-              <a:spcAft>
-                <a:spcPts val="900"/>
-              </a:spcAft>
-            </a:pPr>
-            <a:r>
-              <a:rPr sz="1800" b="1">
-                <a:solidFill>
-                  <a:srgbClr val="E0A437"/>
-                </a:solidFill>
-                <a:latin typeface="Fira Sans"/>
-              </a:rPr>
-              <a:t>▸ </a:t>
-            </a:r>
-            <a:r>
-              <a:rPr sz="1800" b="0">
+              <a:rPr sz="1600" b="0">
                 <a:solidFill>
                   <a:srgbClr val="000000"/>
                 </a:solidFill>
                 <a:latin typeface="Fira Sans"/>
               </a:rPr>
-              <a:t>Se evalúa el avance, no un resultado final: el modelo es un primer intento. La exigencia está en el tiempo, la claridad, la explicación de los gráficos y las relaciones, y en advertir qué falta o qué no tiene sentido.</a:t>
-            </a:r>
-          </a:p>
-          <a:p>
-            <a:pPr>
-              <a:lnSpc>
-                <a:spcPct val="112000"/>
-              </a:lnSpc>
-              <a:spcAft>
-                <a:spcPts val="900"/>
-              </a:spcAft>
-            </a:pPr>
-            <a:r>
-              <a:rPr sz="1800" b="1">
-                <a:solidFill>
-                  <a:srgbClr val="E0A437"/>
-                </a:solidFill>
-                <a:latin typeface="Fira Sans"/>
-              </a:rPr>
-              <a:t>▸ </a:t>
-            </a:r>
-            <a:r>
-              <a:rPr sz="1800" b="0">
-                <a:solidFill>
-                  <a:srgbClr val="000000"/>
-                </a:solidFill>
-                <a:latin typeface="Fira Sans"/>
-              </a:rPr>
-              <a:t>Las slides, en PDF, al Aula hasta las 20:30: un envío por equipo con los nombres.</a:t>
-            </a:r>
-          </a:p>
-          <a:p>
-            <a:pPr>
-              <a:lnSpc>
-                <a:spcPct val="112000"/>
-              </a:lnSpc>
-              <a:spcAft>
-                <a:spcPts val="900"/>
-              </a:spcAft>
-            </a:pPr>
-            <a:r>
-              <a:rPr sz="1800" b="1">
-                <a:solidFill>
-                  <a:srgbClr val="E0A437"/>
-                </a:solidFill>
-                <a:latin typeface="Fira Sans"/>
-              </a:rPr>
-              <a:t>▸ </a:t>
-            </a:r>
-            <a:r>
-              <a:rPr sz="1800" b="0">
-                <a:solidFill>
-                  <a:srgbClr val="000000"/>
-                </a:solidFill>
-                <a:latin typeface="Fira Sans"/>
-              </a:rPr>
-              <a:t>El informe escrito, el viernes 25 de septiembre por el Aula: máximo 7 páginas, con su rúbrica publicada.</a:t>
+              <a:t>El ejemplo completo, con las tablas de pesos y los gráficos de la clase, está en el notebook 08_componentes_principales.ipynb.</a:t>
             </a:r>
           </a:p>
         </p:txBody>
@@ -6784,6 +6649,113 @@
             <a:avLst/>
           </a:prstGeom>
           <a:solidFill>
+            <a:srgbClr val="1D3557"/>
+          </a:solidFill>
+          <a:ln>
+            <a:noFill/>
+          </a:ln>
+          <a:effectLst/>
+        </p:spPr>
+        <p:style>
+          <a:lnRef idx="1">
+            <a:schemeClr val="accent1"/>
+          </a:lnRef>
+          <a:fillRef idx="3">
+            <a:schemeClr val="accent1"/>
+          </a:fillRef>
+          <a:effectRef idx="2">
+            <a:schemeClr val="accent1"/>
+          </a:effectRef>
+          <a:fontRef idx="minor">
+            <a:schemeClr val="lt1"/>
+          </a:fontRef>
+        </p:style>
+        <p:txBody>
+          <a:bodyPr rtlCol="0" anchor="ctr"/>
+          <a:lstStyle/>
+          <a:p>
+            <a:pPr algn="ctr"/>
+          </a:p>
+        </p:txBody>
+      </p:sp>
+      <p:sp>
+        <p:nvSpPr>
+          <p:cNvPr id="3" name="TextBox 2"/>
+          <p:cNvSpPr txBox="1"/>
+          <p:nvPr/>
+        </p:nvSpPr>
+        <p:spPr>
+          <a:xfrm>
+            <a:off x="603504" y="1847088"/>
+            <a:ext cx="7946136" cy="1399032"/>
+          </a:xfrm>
+          <a:prstGeom prst="rect">
+            <a:avLst/>
+          </a:prstGeom>
+          <a:noFill/>
+        </p:spPr>
+        <p:txBody>
+          <a:bodyPr wrap="square">
+            <a:spAutoFit/>
+          </a:bodyPr>
+          <a:lstStyle/>
+          <a:p>
+            <a:r>
+              <a:rPr sz="3400" b="1">
+                <a:solidFill>
+                  <a:srgbClr val="FFFFFF"/>
+                </a:solidFill>
+                <a:latin typeface="Fira Sans"/>
+              </a:rPr>
+              <a:t>5. Cierre del módulo</a:t>
+            </a:r>
+          </a:p>
+          <a:p>
+            <a:r>
+              <a:rPr sz="1800" b="0">
+                <a:solidFill>
+                  <a:srgbClr val="E0A437"/>
+                </a:solidFill>
+                <a:latin typeface="Fira Sans"/>
+              </a:rPr>
+              <a:t>Ocho clases, un hilo</a:t>
+            </a:r>
+          </a:p>
+        </p:txBody>
+      </p:sp>
+    </p:spTree>
+  </p:cSld>
+  <p:clrMapOvr>
+    <a:masterClrMapping/>
+  </p:clrMapOvr>
+</p:sld>
+</file>
+
+<file path=ppt/slides/slide29.xml><?xml version="1.0" encoding="utf-8"?>
+<p:sld xmlns:a="http://schemas.openxmlformats.org/drawingml/2006/main" xmlns:p="http://schemas.openxmlformats.org/presentationml/2006/main" xmlns:r="http://schemas.openxmlformats.org/officeDocument/2006/relationships">
+  <p:cSld>
+    <p:spTree>
+      <p:nvGrpSpPr>
+        <p:cNvPr id="1" name=""/>
+        <p:cNvGrpSpPr/>
+        <p:nvPr/>
+      </p:nvGrpSpPr>
+      <p:grpSpPr/>
+      <p:sp>
+        <p:nvSpPr>
+          <p:cNvPr id="2" name="Rectangle 1"/>
+          <p:cNvSpPr/>
+          <p:nvPr/>
+        </p:nvSpPr>
+        <p:spPr>
+          <a:xfrm>
+            <a:off x="0" y="0"/>
+            <a:ext cx="9144000" cy="5138928"/>
+          </a:xfrm>
+          <a:prstGeom prst="rect">
+            <a:avLst/>
+          </a:prstGeom>
+          <a:solidFill>
             <a:srgbClr val="FAFBFC"/>
           </a:solidFill>
           <a:ln>
@@ -6842,21 +6814,45 @@
                 </a:solidFill>
                 <a:latin typeface="Fira Sans"/>
               </a:rPr>
-              <a:t>Referencias</a:t>
-            </a:r>
-          </a:p>
-        </p:txBody>
-      </p:sp>
-      <p:sp>
-        <p:nvSpPr>
-          <p:cNvPr id="4" name="TextBox 3"/>
+              <a:t>El módulo en una página</a:t>
+            </a:r>
+          </a:p>
+        </p:txBody>
+      </p:sp>
+      <p:pic>
+        <p:nvPicPr>
+          <p:cNvPr id="4" name="Picture 3" descr="c8_07_mapa_modulo.png"/>
+          <p:cNvPicPr>
+            <a:picLocks noChangeAspect="1"/>
+          </p:cNvPicPr>
+          <p:nvPr/>
+        </p:nvPicPr>
+        <p:blipFill>
+          <a:blip r:embed="rId2"/>
+          <a:stretch>
+            <a:fillRect/>
+          </a:stretch>
+        </p:blipFill>
+        <p:spPr>
+          <a:xfrm>
+            <a:off x="1029546" y="1143000"/>
+            <a:ext cx="7084906" cy="3099816"/>
+          </a:xfrm>
+          <a:prstGeom prst="rect">
+            <a:avLst/>
+          </a:prstGeom>
+        </p:spPr>
+      </p:pic>
+      <p:sp>
+        <p:nvSpPr>
+          <p:cNvPr id="5" name="TextBox 4"/>
           <p:cNvSpPr txBox="1"/>
           <p:nvPr/>
         </p:nvSpPr>
         <p:spPr>
           <a:xfrm>
-            <a:off x="704088" y="1234440"/>
-            <a:ext cx="7744968" cy="3566160"/>
+            <a:off x="704088" y="4379976"/>
+            <a:ext cx="7744968" cy="512064"/>
           </a:xfrm>
           <a:prstGeom prst="rect">
             <a:avLst/>
@@ -6869,14 +6865,6 @@
           </a:bodyPr>
           <a:lstStyle/>
           <a:p>
-            <a:pPr>
-              <a:lnSpc>
-                <a:spcPct val="115000"/>
-              </a:lnSpc>
-              <a:spcAft>
-                <a:spcPts val="700"/>
-              </a:spcAft>
-            </a:pPr>
             <a:r>
               <a:rPr sz="1300" b="0">
                 <a:solidFill>
@@ -6884,64 +6872,7 @@
                 </a:solidFill>
                 <a:latin typeface="Fira Sans"/>
               </a:rPr>
-              <a:t>James, G., Witten, D., Hastie, T. y Tibshirani, R. (2013). An Introduction to Statistical Learning. Springer. Sección 10.2, pp. 374 a 385: qué es una componente principal, por qué estandarizar, la proporción de variación explicada y cuántas componentes usar. PDF gratuito en statlearning.com.</a:t>
-            </a:r>
-          </a:p>
-          <a:p>
-            <a:pPr>
-              <a:lnSpc>
-                <a:spcPct val="115000"/>
-              </a:lnSpc>
-              <a:spcAft>
-                <a:spcPts val="700"/>
-              </a:spcAft>
-            </a:pPr>
-            <a:r>
-              <a:rPr sz="1300" b="0">
-                <a:solidFill>
-                  <a:srgbClr val="333333"/>
-                </a:solidFill>
-                <a:latin typeface="Fira Sans"/>
-              </a:rPr>
-              <a:t>VanderPlas, J. (2016). Python Data Science Handbook. O'Reilly. Capítulo "In Depth: Principal Component Analysis", de acceso abierto en jakevdp.github.io/PythonDataScienceHandbook.</a:t>
-            </a:r>
-          </a:p>
-          <a:p>
-            <a:pPr>
-              <a:lnSpc>
-                <a:spcPct val="115000"/>
-              </a:lnSpc>
-              <a:spcAft>
-                <a:spcPts val="700"/>
-              </a:spcAft>
-            </a:pPr>
-            <a:r>
-              <a:rPr sz="1300" b="0">
-                <a:solidFill>
-                  <a:srgbClr val="333333"/>
-                </a:solidFill>
-                <a:latin typeface="Fira Sans"/>
-              </a:rPr>
-              <a:t>Documentación de scikit-learn, sklearn.decomposition.PCA: scikit-learn.org/stable/modules/decomposition.html</a:t>
-            </a:r>
-          </a:p>
-          <a:p>
-            <a:pPr>
-              <a:lnSpc>
-                <a:spcPct val="115000"/>
-              </a:lnSpc>
-              <a:spcAft>
-                <a:spcPts val="700"/>
-              </a:spcAft>
-            </a:pPr>
-            <a:r>
-              <a:rPr sz="1300" b="0">
-                <a:solidFill>
-                  <a:srgbClr val="333333"/>
-                </a:solidFill>
-                <a:latin typeface="Fira Sans"/>
-              </a:rPr>
-              <a:t>Datos: Hitters, del libro de James et al. (statlearning.com), e iris (Fisher, 1936), incluido en scikit-learn.</a:t>
+              <a:t>Cada clase dejó una idea. Juntas, son lo que el módulo enseñó: cómo se llega de una pregunta y unos datos a un resultado, y cómo se lee ese resultado con su incertidumbre.</a:t>
             </a:r>
           </a:p>
         </p:txBody>
@@ -7213,6 +7144,663 @@
 </p:sld>
 </file>
 
+<file path=ppt/slides/slide30.xml><?xml version="1.0" encoding="utf-8"?>
+<p:sld xmlns:a="http://schemas.openxmlformats.org/drawingml/2006/main" xmlns:p="http://schemas.openxmlformats.org/presentationml/2006/main" xmlns:r="http://schemas.openxmlformats.org/officeDocument/2006/relationships">
+  <p:cSld>
+    <p:spTree>
+      <p:nvGrpSpPr>
+        <p:cNvPr id="1" name=""/>
+        <p:cNvGrpSpPr/>
+        <p:nvPr/>
+      </p:nvGrpSpPr>
+      <p:grpSpPr/>
+      <p:sp>
+        <p:nvSpPr>
+          <p:cNvPr id="2" name="Rectangle 1"/>
+          <p:cNvSpPr/>
+          <p:nvPr/>
+        </p:nvSpPr>
+        <p:spPr>
+          <a:xfrm>
+            <a:off x="0" y="0"/>
+            <a:ext cx="9144000" cy="5138928"/>
+          </a:xfrm>
+          <a:prstGeom prst="rect">
+            <a:avLst/>
+          </a:prstGeom>
+          <a:solidFill>
+            <a:srgbClr val="FAFBFC"/>
+          </a:solidFill>
+          <a:ln>
+            <a:noFill/>
+          </a:ln>
+          <a:effectLst/>
+        </p:spPr>
+        <p:style>
+          <a:lnRef idx="1">
+            <a:schemeClr val="accent1"/>
+          </a:lnRef>
+          <a:fillRef idx="3">
+            <a:schemeClr val="accent1"/>
+          </a:fillRef>
+          <a:effectRef idx="2">
+            <a:schemeClr val="accent1"/>
+          </a:effectRef>
+          <a:fontRef idx="minor">
+            <a:schemeClr val="lt1"/>
+          </a:fontRef>
+        </p:style>
+        <p:txBody>
+          <a:bodyPr rtlCol="0" anchor="ctr"/>
+          <a:lstStyle/>
+          <a:p>
+            <a:pPr algn="ctr"/>
+          </a:p>
+        </p:txBody>
+      </p:sp>
+      <p:sp>
+        <p:nvSpPr>
+          <p:cNvPr id="3" name="TextBox 2"/>
+          <p:cNvSpPr txBox="1"/>
+          <p:nvPr/>
+        </p:nvSpPr>
+        <p:spPr>
+          <a:xfrm>
+            <a:off x="402336" y="301752"/>
+            <a:ext cx="8348472" cy="795528"/>
+          </a:xfrm>
+          <a:prstGeom prst="rect">
+            <a:avLst/>
+          </a:prstGeom>
+          <a:noFill/>
+        </p:spPr>
+        <p:txBody>
+          <a:bodyPr wrap="square">
+            <a:spAutoFit/>
+          </a:bodyPr>
+          <a:lstStyle/>
+          <a:p>
+            <a:r>
+              <a:rPr sz="2800" b="1">
+                <a:solidFill>
+                  <a:srgbClr val="0F0F0F"/>
+                </a:solidFill>
+                <a:latin typeface="Fira Sans"/>
+              </a:rPr>
+              <a:t>Lo que sigue en el diplomado</a:t>
+            </a:r>
+          </a:p>
+        </p:txBody>
+      </p:sp>
+      <p:sp>
+        <p:nvSpPr>
+          <p:cNvPr id="4" name="TextBox 3"/>
+          <p:cNvSpPr txBox="1"/>
+          <p:nvPr/>
+        </p:nvSpPr>
+        <p:spPr>
+          <a:xfrm>
+            <a:off x="704088" y="1353312"/>
+            <a:ext cx="7744968" cy="3300984"/>
+          </a:xfrm>
+          <a:prstGeom prst="rect">
+            <a:avLst/>
+          </a:prstGeom>
+          <a:noFill/>
+        </p:spPr>
+        <p:txBody>
+          <a:bodyPr wrap="square">
+            <a:spAutoFit/>
+          </a:bodyPr>
+          <a:lstStyle/>
+          <a:p>
+            <a:pPr>
+              <a:lnSpc>
+                <a:spcPct val="112000"/>
+              </a:lnSpc>
+              <a:spcAft>
+                <a:spcPts val="900"/>
+              </a:spcAft>
+            </a:pPr>
+            <a:r>
+              <a:rPr sz="1800" b="1">
+                <a:solidFill>
+                  <a:srgbClr val="E0A437"/>
+                </a:solidFill>
+                <a:latin typeface="Fira Sans"/>
+              </a:rPr>
+              <a:t>▸ </a:t>
+            </a:r>
+            <a:r>
+              <a:rPr sz="1800" b="1">
+                <a:solidFill>
+                  <a:srgbClr val="1D3557"/>
+                </a:solidFill>
+                <a:latin typeface="Fira Sans"/>
+              </a:rPr>
+              <a:t>Módulo 2, Visualización e Inteligencia de Negocios: visualización efectiva, narrativas con datos y métricas de negocio.</a:t>
+            </a:r>
+          </a:p>
+          <a:p>
+            <a:pPr>
+              <a:lnSpc>
+                <a:spcPct val="112000"/>
+              </a:lnSpc>
+              <a:spcAft>
+                <a:spcPts val="900"/>
+              </a:spcAft>
+            </a:pPr>
+            <a:r>
+              <a:rPr sz="1800" b="1">
+                <a:solidFill>
+                  <a:srgbClr val="E0A437"/>
+                </a:solidFill>
+                <a:latin typeface="Fira Sans"/>
+              </a:rPr>
+              <a:t>▸ </a:t>
+            </a:r>
+            <a:r>
+              <a:rPr sz="1800" b="0">
+                <a:solidFill>
+                  <a:srgbClr val="000000"/>
+                </a:solidFill>
+                <a:latin typeface="Fira Sans"/>
+              </a:rPr>
+              <a:t>Módulo 3, Machine Learning para la Toma de Decisiones: aprendizaje supervisado y no supervisado (clustering y PCA en profundidad), evaluación de modelos, redes neuronales y explicabilidad.</a:t>
+            </a:r>
+          </a:p>
+          <a:p>
+            <a:pPr>
+              <a:lnSpc>
+                <a:spcPct val="112000"/>
+              </a:lnSpc>
+              <a:spcAft>
+                <a:spcPts val="900"/>
+              </a:spcAft>
+            </a:pPr>
+            <a:r>
+              <a:rPr sz="1800" b="1">
+                <a:solidFill>
+                  <a:srgbClr val="E0A437"/>
+                </a:solidFill>
+                <a:latin typeface="Fira Sans"/>
+              </a:rPr>
+              <a:t>▸ </a:t>
+            </a:r>
+            <a:r>
+              <a:rPr sz="1800" b="0">
+                <a:solidFill>
+                  <a:srgbClr val="000000"/>
+                </a:solidFill>
+                <a:latin typeface="Fira Sans"/>
+              </a:rPr>
+              <a:t>El Capstone continúa en esos módulos: el primer modelo de hoy es el punto de partida.</a:t>
+            </a:r>
+          </a:p>
+          <a:p>
+            <a:pPr>
+              <a:lnSpc>
+                <a:spcPct val="112000"/>
+              </a:lnSpc>
+              <a:spcAft>
+                <a:spcPts val="900"/>
+              </a:spcAft>
+            </a:pPr>
+            <a:r>
+              <a:rPr sz="1800" b="1">
+                <a:solidFill>
+                  <a:srgbClr val="E0A437"/>
+                </a:solidFill>
+                <a:latin typeface="Fira Sans"/>
+              </a:rPr>
+              <a:t>▸ </a:t>
+            </a:r>
+            <a:r>
+              <a:rPr sz="1800" b="0">
+                <a:solidFill>
+                  <a:srgbClr val="000000"/>
+                </a:solidFill>
+                <a:latin typeface="Fira Sans"/>
+              </a:rPr>
+              <a:t>Lo que se lleva de aquí: leer un resultado con su incertidumbre, juzgar un modelo en datos que no vio, y distinguir describir de encontrar una relación.</a:t>
+            </a:r>
+          </a:p>
+        </p:txBody>
+      </p:sp>
+    </p:spTree>
+  </p:cSld>
+  <p:clrMapOvr>
+    <a:masterClrMapping/>
+  </p:clrMapOvr>
+</p:sld>
+</file>
+
+<file path=ppt/slides/slide31.xml><?xml version="1.0" encoding="utf-8"?>
+<p:sld xmlns:a="http://schemas.openxmlformats.org/drawingml/2006/main" xmlns:p="http://schemas.openxmlformats.org/presentationml/2006/main" xmlns:r="http://schemas.openxmlformats.org/officeDocument/2006/relationships">
+  <p:cSld>
+    <p:spTree>
+      <p:nvGrpSpPr>
+        <p:cNvPr id="1" name=""/>
+        <p:cNvGrpSpPr/>
+        <p:nvPr/>
+      </p:nvGrpSpPr>
+      <p:grpSpPr/>
+      <p:sp>
+        <p:nvSpPr>
+          <p:cNvPr id="2" name="Rectangle 1"/>
+          <p:cNvSpPr/>
+          <p:nvPr/>
+        </p:nvSpPr>
+        <p:spPr>
+          <a:xfrm>
+            <a:off x="0" y="0"/>
+            <a:ext cx="9144000" cy="5138928"/>
+          </a:xfrm>
+          <a:prstGeom prst="rect">
+            <a:avLst/>
+          </a:prstGeom>
+          <a:solidFill>
+            <a:srgbClr val="FAFBFC"/>
+          </a:solidFill>
+          <a:ln>
+            <a:noFill/>
+          </a:ln>
+          <a:effectLst/>
+        </p:spPr>
+        <p:style>
+          <a:lnRef idx="1">
+            <a:schemeClr val="accent1"/>
+          </a:lnRef>
+          <a:fillRef idx="3">
+            <a:schemeClr val="accent1"/>
+          </a:fillRef>
+          <a:effectRef idx="2">
+            <a:schemeClr val="accent1"/>
+          </a:effectRef>
+          <a:fontRef idx="minor">
+            <a:schemeClr val="lt1"/>
+          </a:fontRef>
+        </p:style>
+        <p:txBody>
+          <a:bodyPr rtlCol="0" anchor="ctr"/>
+          <a:lstStyle/>
+          <a:p>
+            <a:pPr algn="ctr"/>
+          </a:p>
+        </p:txBody>
+      </p:sp>
+      <p:sp>
+        <p:nvSpPr>
+          <p:cNvPr id="3" name="TextBox 2"/>
+          <p:cNvSpPr txBox="1"/>
+          <p:nvPr/>
+        </p:nvSpPr>
+        <p:spPr>
+          <a:xfrm>
+            <a:off x="402336" y="301752"/>
+            <a:ext cx="8348472" cy="795528"/>
+          </a:xfrm>
+          <a:prstGeom prst="rect">
+            <a:avLst/>
+          </a:prstGeom>
+          <a:noFill/>
+        </p:spPr>
+        <p:txBody>
+          <a:bodyPr wrap="square">
+            <a:spAutoFit/>
+          </a:bodyPr>
+          <a:lstStyle/>
+          <a:p>
+            <a:r>
+              <a:rPr sz="2800" b="1">
+                <a:solidFill>
+                  <a:srgbClr val="0F0F0F"/>
+                </a:solidFill>
+                <a:latin typeface="Fira Sans"/>
+              </a:rPr>
+              <a:t>Ahora: las presentaciones del avance</a:t>
+            </a:r>
+          </a:p>
+        </p:txBody>
+      </p:sp>
+      <p:sp>
+        <p:nvSpPr>
+          <p:cNvPr id="4" name="TextBox 3"/>
+          <p:cNvSpPr txBox="1"/>
+          <p:nvPr/>
+        </p:nvSpPr>
+        <p:spPr>
+          <a:xfrm>
+            <a:off x="704088" y="1353312"/>
+            <a:ext cx="7744968" cy="3300984"/>
+          </a:xfrm>
+          <a:prstGeom prst="rect">
+            <a:avLst/>
+          </a:prstGeom>
+          <a:noFill/>
+        </p:spPr>
+        <p:txBody>
+          <a:bodyPr wrap="square">
+            <a:spAutoFit/>
+          </a:bodyPr>
+          <a:lstStyle/>
+          <a:p>
+            <a:pPr>
+              <a:lnSpc>
+                <a:spcPct val="112000"/>
+              </a:lnSpc>
+              <a:spcAft>
+                <a:spcPts val="900"/>
+              </a:spcAft>
+            </a:pPr>
+            <a:r>
+              <a:rPr sz="1800" b="1">
+                <a:solidFill>
+                  <a:srgbClr val="E0A437"/>
+                </a:solidFill>
+                <a:latin typeface="Fira Sans"/>
+              </a:rPr>
+              <a:t>▸ </a:t>
+            </a:r>
+            <a:r>
+              <a:rPr sz="1800" b="1">
+                <a:solidFill>
+                  <a:srgbClr val="1D3557"/>
+                </a:solidFill>
+                <a:latin typeface="Fira Sans"/>
+              </a:rPr>
+              <a:t>Ocho equipos, en el orden en que se ofrezcan. Máximo 10 minutos por equipo; el tiempo se controla. Después, preguntas de la profesora y del curso.</a:t>
+            </a:r>
+          </a:p>
+          <a:p>
+            <a:pPr>
+              <a:lnSpc>
+                <a:spcPct val="112000"/>
+              </a:lnSpc>
+              <a:spcAft>
+                <a:spcPts val="900"/>
+              </a:spcAft>
+            </a:pPr>
+            <a:r>
+              <a:rPr sz="1800" b="1">
+                <a:solidFill>
+                  <a:srgbClr val="E0A437"/>
+                </a:solidFill>
+                <a:latin typeface="Fira Sans"/>
+              </a:rPr>
+              <a:t>▸ </a:t>
+            </a:r>
+            <a:r>
+              <a:rPr sz="1800" b="0">
+                <a:solidFill>
+                  <a:srgbClr val="000000"/>
+                </a:solidFill>
+                <a:latin typeface="Fira Sans"/>
+              </a:rPr>
+              <a:t>Se evalúa el avance, no un resultado final: el modelo es un primer intento. La exigencia está en el tiempo, la claridad, la explicación de los gráficos y las relaciones, y en advertir qué falta o qué no tiene sentido.</a:t>
+            </a:r>
+          </a:p>
+          <a:p>
+            <a:pPr>
+              <a:lnSpc>
+                <a:spcPct val="112000"/>
+              </a:lnSpc>
+              <a:spcAft>
+                <a:spcPts val="900"/>
+              </a:spcAft>
+            </a:pPr>
+            <a:r>
+              <a:rPr sz="1800" b="1">
+                <a:solidFill>
+                  <a:srgbClr val="E0A437"/>
+                </a:solidFill>
+                <a:latin typeface="Fira Sans"/>
+              </a:rPr>
+              <a:t>▸ </a:t>
+            </a:r>
+            <a:r>
+              <a:rPr sz="1800" b="0">
+                <a:solidFill>
+                  <a:srgbClr val="000000"/>
+                </a:solidFill>
+                <a:latin typeface="Fira Sans"/>
+              </a:rPr>
+              <a:t>Las slides, en PDF, al Aula hasta las 20:30: un envío por equipo con los nombres.</a:t>
+            </a:r>
+          </a:p>
+          <a:p>
+            <a:pPr>
+              <a:lnSpc>
+                <a:spcPct val="112000"/>
+              </a:lnSpc>
+              <a:spcAft>
+                <a:spcPts val="900"/>
+              </a:spcAft>
+            </a:pPr>
+            <a:r>
+              <a:rPr sz="1800" b="1">
+                <a:solidFill>
+                  <a:srgbClr val="E0A437"/>
+                </a:solidFill>
+                <a:latin typeface="Fira Sans"/>
+              </a:rPr>
+              <a:t>▸ </a:t>
+            </a:r>
+            <a:r>
+              <a:rPr sz="1800" b="0">
+                <a:solidFill>
+                  <a:srgbClr val="000000"/>
+                </a:solidFill>
+                <a:latin typeface="Fira Sans"/>
+              </a:rPr>
+              <a:t>El informe escrito, el viernes 25 de septiembre por el Aula: máximo 7 páginas, con su rúbrica publicada.</a:t>
+            </a:r>
+          </a:p>
+        </p:txBody>
+      </p:sp>
+    </p:spTree>
+  </p:cSld>
+  <p:clrMapOvr>
+    <a:masterClrMapping/>
+  </p:clrMapOvr>
+</p:sld>
+</file>
+
+<file path=ppt/slides/slide32.xml><?xml version="1.0" encoding="utf-8"?>
+<p:sld xmlns:a="http://schemas.openxmlformats.org/drawingml/2006/main" xmlns:p="http://schemas.openxmlformats.org/presentationml/2006/main" xmlns:r="http://schemas.openxmlformats.org/officeDocument/2006/relationships">
+  <p:cSld>
+    <p:spTree>
+      <p:nvGrpSpPr>
+        <p:cNvPr id="1" name=""/>
+        <p:cNvGrpSpPr/>
+        <p:nvPr/>
+      </p:nvGrpSpPr>
+      <p:grpSpPr/>
+      <p:sp>
+        <p:nvSpPr>
+          <p:cNvPr id="2" name="Rectangle 1"/>
+          <p:cNvSpPr/>
+          <p:nvPr/>
+        </p:nvSpPr>
+        <p:spPr>
+          <a:xfrm>
+            <a:off x="0" y="0"/>
+            <a:ext cx="9144000" cy="5138928"/>
+          </a:xfrm>
+          <a:prstGeom prst="rect">
+            <a:avLst/>
+          </a:prstGeom>
+          <a:solidFill>
+            <a:srgbClr val="FAFBFC"/>
+          </a:solidFill>
+          <a:ln>
+            <a:noFill/>
+          </a:ln>
+          <a:effectLst/>
+        </p:spPr>
+        <p:style>
+          <a:lnRef idx="1">
+            <a:schemeClr val="accent1"/>
+          </a:lnRef>
+          <a:fillRef idx="3">
+            <a:schemeClr val="accent1"/>
+          </a:fillRef>
+          <a:effectRef idx="2">
+            <a:schemeClr val="accent1"/>
+          </a:effectRef>
+          <a:fontRef idx="minor">
+            <a:schemeClr val="lt1"/>
+          </a:fontRef>
+        </p:style>
+        <p:txBody>
+          <a:bodyPr rtlCol="0" anchor="ctr"/>
+          <a:lstStyle/>
+          <a:p>
+            <a:pPr algn="ctr"/>
+          </a:p>
+        </p:txBody>
+      </p:sp>
+      <p:sp>
+        <p:nvSpPr>
+          <p:cNvPr id="3" name="TextBox 2"/>
+          <p:cNvSpPr txBox="1"/>
+          <p:nvPr/>
+        </p:nvSpPr>
+        <p:spPr>
+          <a:xfrm>
+            <a:off x="402336" y="301752"/>
+            <a:ext cx="8348472" cy="795528"/>
+          </a:xfrm>
+          <a:prstGeom prst="rect">
+            <a:avLst/>
+          </a:prstGeom>
+          <a:noFill/>
+        </p:spPr>
+        <p:txBody>
+          <a:bodyPr wrap="square">
+            <a:spAutoFit/>
+          </a:bodyPr>
+          <a:lstStyle/>
+          <a:p>
+            <a:r>
+              <a:rPr sz="2800" b="1">
+                <a:solidFill>
+                  <a:srgbClr val="0F0F0F"/>
+                </a:solidFill>
+                <a:latin typeface="Fira Sans"/>
+              </a:rPr>
+              <a:t>Referencias</a:t>
+            </a:r>
+          </a:p>
+        </p:txBody>
+      </p:sp>
+      <p:sp>
+        <p:nvSpPr>
+          <p:cNvPr id="4" name="TextBox 3"/>
+          <p:cNvSpPr txBox="1"/>
+          <p:nvPr/>
+        </p:nvSpPr>
+        <p:spPr>
+          <a:xfrm>
+            <a:off x="704088" y="1234440"/>
+            <a:ext cx="7744968" cy="3566160"/>
+          </a:xfrm>
+          <a:prstGeom prst="rect">
+            <a:avLst/>
+          </a:prstGeom>
+          <a:noFill/>
+        </p:spPr>
+        <p:txBody>
+          <a:bodyPr wrap="square">
+            <a:spAutoFit/>
+          </a:bodyPr>
+          <a:lstStyle/>
+          <a:p>
+            <a:pPr>
+              <a:lnSpc>
+                <a:spcPct val="115000"/>
+              </a:lnSpc>
+              <a:spcAft>
+                <a:spcPts val="700"/>
+              </a:spcAft>
+            </a:pPr>
+            <a:r>
+              <a:rPr sz="1300" b="0">
+                <a:solidFill>
+                  <a:srgbClr val="333333"/>
+                </a:solidFill>
+                <a:latin typeface="Fira Sans"/>
+              </a:rPr>
+              <a:t>James, G., Witten, D., Hastie, T. y Tibshirani, R. (2013). An Introduction to Statistical Learning. Springer. Sección 10.2, pp. 374 a 385: qué es una componente principal, por qué estandarizar, la proporción de variación explicada y cuántas componentes usar. PDF gratuito en statlearning.com.</a:t>
+            </a:r>
+          </a:p>
+          <a:p>
+            <a:pPr>
+              <a:lnSpc>
+                <a:spcPct val="115000"/>
+              </a:lnSpc>
+              <a:spcAft>
+                <a:spcPts val="700"/>
+              </a:spcAft>
+            </a:pPr>
+            <a:r>
+              <a:rPr sz="1300" b="0">
+                <a:solidFill>
+                  <a:srgbClr val="333333"/>
+                </a:solidFill>
+                <a:latin typeface="Fira Sans"/>
+              </a:rPr>
+              <a:t>VanderPlas, J. (2016). Python Data Science Handbook. O'Reilly. Capítulo "In Depth: Principal Component Analysis", de acceso abierto en jakevdp.github.io/PythonDataScienceHandbook.</a:t>
+            </a:r>
+          </a:p>
+          <a:p>
+            <a:pPr>
+              <a:lnSpc>
+                <a:spcPct val="115000"/>
+              </a:lnSpc>
+              <a:spcAft>
+                <a:spcPts val="700"/>
+              </a:spcAft>
+            </a:pPr>
+            <a:r>
+              <a:rPr sz="1300" b="0">
+                <a:solidFill>
+                  <a:srgbClr val="333333"/>
+                </a:solidFill>
+                <a:latin typeface="Fira Sans"/>
+              </a:rPr>
+              <a:t>Documentación de scikit-learn, sklearn.decomposition.PCA: scikit-learn.org/stable/modules/decomposition.html</a:t>
+            </a:r>
+          </a:p>
+          <a:p>
+            <a:pPr>
+              <a:lnSpc>
+                <a:spcPct val="115000"/>
+              </a:lnSpc>
+              <a:spcAft>
+                <a:spcPts val="700"/>
+              </a:spcAft>
+            </a:pPr>
+            <a:r>
+              <a:rPr sz="1300" b="0">
+                <a:solidFill>
+                  <a:srgbClr val="333333"/>
+                </a:solidFill>
+                <a:latin typeface="Fira Sans"/>
+              </a:rPr>
+              <a:t>Datos: Hitters, del libro de James et al. (statlearning.com), e iris (Fisher, 1936), incluido en scikit-learn.</a:t>
+            </a:r>
+          </a:p>
+        </p:txBody>
+      </p:sp>
+    </p:spTree>
+  </p:cSld>
+  <p:clrMapOvr>
+    <a:masterClrMapping/>
+  </p:clrMapOvr>
+</p:sld>
+</file>
+
 <file path=ppt/slides/slide4.xml><?xml version="1.0" encoding="utf-8"?>
 <p:sld xmlns:a="http://schemas.openxmlformats.org/drawingml/2006/main" xmlns:p="http://schemas.openxmlformats.org/presentationml/2006/main" xmlns:r="http://schemas.openxmlformats.org/officeDocument/2006/relationships">
   <p:cSld>
@@ -7995,7 +8583,7 @@
                 </a:solidFill>
                 <a:latin typeface="Fira Sans"/>
               </a:rPr>
-              <a:t>2. Qué es</a:t>
+              <a:t>2. La idea</a:t>
             </a:r>
           </a:p>
           <a:p>
@@ -8006,7 +8594,7 @@
                 </a:solidFill>
                 <a:latin typeface="Fira Sans"/>
               </a:rPr>
-              <a:t>El análisis de componentes principales</a:t>
+              <a:t>Reemplazar dos variables por una sola; después, 16 por pocas</a:t>
             </a:r>
           </a:p>
         </p:txBody>
@@ -8102,21 +8690,45 @@
                 </a:solidFill>
                 <a:latin typeface="Fira Sans"/>
               </a:rPr>
-              <a:t>¿Qué es una componente principal?</a:t>
-            </a:r>
-          </a:p>
-        </p:txBody>
-      </p:sp>
-      <p:sp>
-        <p:nvSpPr>
-          <p:cNvPr id="4" name="TextBox 3"/>
+              <a:t>Primero: estandarizar las dos variables</a:t>
+            </a:r>
+          </a:p>
+        </p:txBody>
+      </p:sp>
+      <p:pic>
+        <p:nvPicPr>
+          <p:cNvPr id="4" name="Picture 3" descr="c8_00b_estandarizadas.png"/>
+          <p:cNvPicPr>
+            <a:picLocks noChangeAspect="1"/>
+          </p:cNvPicPr>
+          <p:nvPr/>
+        </p:nvPicPr>
+        <p:blipFill>
+          <a:blip r:embed="rId2"/>
+          <a:stretch>
+            <a:fillRect/>
+          </a:stretch>
+        </p:blipFill>
+        <p:spPr>
+          <a:xfrm>
+            <a:off x="3105399" y="1143000"/>
+            <a:ext cx="2933200" cy="3099815"/>
+          </a:xfrm>
+          <a:prstGeom prst="rect">
+            <a:avLst/>
+          </a:prstGeom>
+        </p:spPr>
+      </p:pic>
+      <p:sp>
+        <p:nvSpPr>
+          <p:cNvPr id="5" name="TextBox 4"/>
           <p:cNvSpPr txBox="1"/>
           <p:nvPr/>
         </p:nvSpPr>
         <p:spPr>
           <a:xfrm>
-            <a:off x="704088" y="1353312"/>
-            <a:ext cx="7744968" cy="3300984"/>
+            <a:off x="704088" y="4379976"/>
+            <a:ext cx="7744968" cy="512064"/>
           </a:xfrm>
           <a:prstGeom prst="rect">
             <a:avLst/>
@@ -8129,115 +8741,14 @@
           </a:bodyPr>
           <a:lstStyle/>
           <a:p>
-            <a:pPr>
-              <a:lnSpc>
-                <a:spcPct val="112000"/>
-              </a:lnSpc>
-              <a:spcAft>
-                <a:spcPts val="900"/>
-              </a:spcAft>
-            </a:pPr>
-            <a:r>
-              <a:rPr sz="1800" b="1">
-                <a:solidFill>
-                  <a:srgbClr val="E0A437"/>
-                </a:solidFill>
-                <a:latin typeface="Fira Sans"/>
-              </a:rPr>
-              <a:t>▸ </a:t>
-            </a:r>
-            <a:r>
-              <a:rPr sz="1800" b="1">
-                <a:solidFill>
-                  <a:srgbClr val="1D3557"/>
-                </a:solidFill>
-                <a:latin typeface="Fira Sans"/>
-              </a:rPr>
-              <a:t>Un método que encuentra una representación de los datos con pocas dimensiones y que conserva la mayor parte posible de su variación (James et al., 2013, p. 375).</a:t>
-            </a:r>
-          </a:p>
-          <a:p>
-            <a:pPr>
-              <a:lnSpc>
-                <a:spcPct val="112000"/>
-              </a:lnSpc>
-              <a:spcAft>
-                <a:spcPts val="900"/>
-              </a:spcAft>
-            </a:pPr>
-            <a:r>
-              <a:rPr sz="1800" b="1">
-                <a:solidFill>
-                  <a:srgbClr val="E0A437"/>
-                </a:solidFill>
-                <a:latin typeface="Fira Sans"/>
-              </a:rPr>
-              <a:t>▸ </a:t>
-            </a:r>
-            <a:r>
-              <a:rPr sz="1800" b="0">
-                <a:solidFill>
-                  <a:srgbClr val="000000"/>
-                </a:solidFill>
-                <a:latin typeface="Fira Sans"/>
-              </a:rPr>
-              <a:t>La primera componente es la dirección en que los datos más varían. La segunda, la que más varía entre las perpendiculares a la primera, y así hasta tener tantas componentes como variables.</a:t>
-            </a:r>
-          </a:p>
-          <a:p>
-            <a:pPr>
-              <a:lnSpc>
-                <a:spcPct val="112000"/>
-              </a:lnSpc>
-              <a:spcAft>
-                <a:spcPts val="900"/>
-              </a:spcAft>
-            </a:pPr>
-            <a:r>
-              <a:rPr sz="1800" b="1">
-                <a:solidFill>
-                  <a:srgbClr val="E0A437"/>
-                </a:solidFill>
-                <a:latin typeface="Fira Sans"/>
-              </a:rPr>
-              <a:t>▸ </a:t>
-            </a:r>
-            <a:r>
-              <a:rPr sz="1800" b="0">
-                <a:solidFill>
-                  <a:srgbClr val="000000"/>
-                </a:solidFill>
-                <a:latin typeface="Fira Sans"/>
-              </a:rPr>
-              <a:t>Cada componente es una variable nueva: un puntaje ponderado de las variables originales, con un peso para cada una.</a:t>
-            </a:r>
-          </a:p>
-          <a:p>
-            <a:pPr>
-              <a:lnSpc>
-                <a:spcPct val="112000"/>
-              </a:lnSpc>
-              <a:spcAft>
-                <a:spcPts val="900"/>
-              </a:spcAft>
-            </a:pPr>
-            <a:r>
-              <a:rPr sz="1800" b="1">
-                <a:solidFill>
-                  <a:srgbClr val="E0A437"/>
-                </a:solidFill>
-                <a:latin typeface="Fira Sans"/>
-              </a:rPr>
-              <a:t>▸ </a:t>
-            </a:r>
-            <a:r>
-              <a:rPr sz="1800" b="0">
-                <a:solidFill>
-                  <a:srgbClr val="000000"/>
-                </a:solidFill>
-                <a:latin typeface="Fira Sans"/>
-              </a:rPr>
-              <a:t>No usa ninguna variable de respuesta: es un método no supervisado (James et al., 2013, p. 375).</a:t>
+            <a:r>
+              <a:rPr sz="1300" b="0">
+                <a:solidFill>
+                  <a:srgbClr val="333333"/>
+                </a:solidFill>
+                <a:latin typeface="Fira Sans"/>
+              </a:rPr>
+              <a:t>A cada variable se le resta su media y se divide por su desviación estándar (el puntaje z de la clase 2). Las dos quedan con media 0 y desviación 1, y el centro de la nube en el origen.</a:t>
             </a:r>
           </a:p>
         </p:txBody>

--- a/presentaciones/clase08_componentes_principales.pptx
+++ b/presentaciones/clase08_componentes_principales.pptx
@@ -3629,8 +3629,8 @@
         </p:blipFill>
         <p:spPr>
           <a:xfrm>
-            <a:off x="3152663" y="1143000"/>
-            <a:ext cx="2838672" cy="2843784"/>
+            <a:off x="320040" y="1097280"/>
+            <a:ext cx="3689622" cy="3886200"/>
           </a:xfrm>
           <a:prstGeom prst="rect">
             <a:avLst/>
@@ -3645,8 +3645,8 @@
         </p:nvSpPr>
         <p:spPr>
           <a:xfrm>
-            <a:off x="704088" y="4123944"/>
-            <a:ext cx="7744968" cy="768096"/>
+            <a:off x="4238261" y="1325880"/>
+            <a:ext cx="4585698" cy="3566160"/>
           </a:xfrm>
           <a:prstGeom prst="rect">
             <a:avLst/>
@@ -3659,14 +3659,87 @@
           </a:bodyPr>
           <a:lstStyle/>
           <a:p>
-            <a:r>
-              <a:rPr sz="1300" b="0">
-                <a:solidFill>
-                  <a:srgbClr val="333333"/>
-                </a:solidFill>
-                <a:latin typeface="Fira Sans"/>
-              </a:rPr>
-              <a:t>A cada jugador se le marca el punto más cercano de la diagonal. Su posición sobre ella es un solo número que reemplaza a sus dos valores: A queda en −1,60, B en −0,48 y C en 2,01. Lo que se pierde es la distancia del punto a la recta, que aquí es casi nula.</a:t>
+            <a:pPr>
+              <a:lnSpc>
+                <a:spcPct val="112000"/>
+              </a:lnSpc>
+              <a:spcAft>
+                <a:spcPts val="900"/>
+              </a:spcAft>
+            </a:pPr>
+            <a:r>
+              <a:rPr sz="1500" b="1">
+                <a:solidFill>
+                  <a:srgbClr val="E0A437"/>
+                </a:solidFill>
+                <a:latin typeface="Fira Sans"/>
+              </a:rPr>
+              <a:t>▸ </a:t>
+            </a:r>
+            <a:r>
+              <a:rPr sz="1500" b="1">
+                <a:solidFill>
+                  <a:srgbClr val="1D3557"/>
+                </a:solidFill>
+                <a:latin typeface="Fira Sans"/>
+              </a:rPr>
+              <a:t>La diagonal es una regla: el 0 en el centro de la nube, en las unidades de los ejes, positivo hacia arriba y a la derecha.</a:t>
+            </a:r>
+          </a:p>
+          <a:p>
+            <a:pPr>
+              <a:lnSpc>
+                <a:spcPct val="112000"/>
+              </a:lnSpc>
+              <a:spcAft>
+                <a:spcPts val="900"/>
+              </a:spcAft>
+            </a:pPr>
+            <a:r>
+              <a:rPr sz="1500" b="1">
+                <a:solidFill>
+                  <a:srgbClr val="E0A437"/>
+                </a:solidFill>
+                <a:latin typeface="Fira Sans"/>
+              </a:rPr>
+              <a:t>▸ </a:t>
+            </a:r>
+            <a:r>
+              <a:rPr sz="1500" b="0">
+                <a:solidFill>
+                  <a:srgbClr val="000000"/>
+                </a:solidFill>
+                <a:latin typeface="Fira Sans"/>
+              </a:rPr>
+              <a:t>A cada jugador se le marca el punto de la regla más cercano y se lee el número: A cae en −1,60, B en −0,48 y C en 2,01.</a:t>
+            </a:r>
+          </a:p>
+          <a:p>
+            <a:pPr>
+              <a:lnSpc>
+                <a:spcPct val="112000"/>
+              </a:lnSpc>
+              <a:spcAft>
+                <a:spcPts val="900"/>
+              </a:spcAft>
+            </a:pPr>
+            <a:r>
+              <a:rPr sz="1500" b="1">
+                <a:solidFill>
+                  <a:srgbClr val="E0A437"/>
+                </a:solidFill>
+                <a:latin typeface="Fira Sans"/>
+              </a:rPr>
+              <a:t>▸ </a:t>
+            </a:r>
+            <a:r>
+              <a:rPr sz="1500" b="0">
+                <a:solidFill>
+                  <a:srgbClr val="000000"/>
+                </a:solidFill>
+                <a:latin typeface="Fira Sans"/>
+              </a:rPr>
+              <a:t>Ese número es la variable nueva: reemplaza a los dos valores de cada jugador, sus turnos y sus hits.</a:t>
             </a:r>
           </a:p>
         </p:txBody>
@@ -3783,8 +3856,8 @@
         </p:blipFill>
         <p:spPr>
           <a:xfrm>
-            <a:off x="1779455" y="1143000"/>
-            <a:ext cx="5585089" cy="2843784"/>
+            <a:off x="320040" y="1097280"/>
+            <a:ext cx="3689622" cy="3886200"/>
           </a:xfrm>
           <a:prstGeom prst="rect">
             <a:avLst/>
@@ -3799,8 +3872,8 @@
         </p:nvSpPr>
         <p:spPr>
           <a:xfrm>
-            <a:off x="704088" y="4123944"/>
-            <a:ext cx="7744968" cy="768096"/>
+            <a:off x="4238261" y="1325880"/>
+            <a:ext cx="4585698" cy="3566160"/>
           </a:xfrm>
           <a:prstGeom prst="rect">
             <a:avLst/>
@@ -3813,14 +3886,87 @@
           </a:bodyPr>
           <a:lstStyle/>
           <a:p>
-            <a:r>
-              <a:rPr sz="1300" b="0">
-                <a:solidFill>
-                  <a:srgbClr val="333333"/>
-                </a:solidFill>
-                <a:latin typeface="Fira Sans"/>
-              </a:rPr>
-              <a:t>Se mide con la dispersión de las posiciones a lo largo de cada dirección: 1,41 sobre la diagonal, casi toda la que hay, y 0,07 en su perpendicular. Quedarse con la posición sobre la diagonal conserva el 99,8% de la variación y pierde el 0,2%.</a:t>
+            <a:pPr>
+              <a:lnSpc>
+                <a:spcPct val="112000"/>
+              </a:lnSpc>
+              <a:spcAft>
+                <a:spcPts val="900"/>
+              </a:spcAft>
+            </a:pPr>
+            <a:r>
+              <a:rPr sz="1500" b="1">
+                <a:solidFill>
+                  <a:srgbClr val="E0A437"/>
+                </a:solidFill>
+                <a:latin typeface="Fira Sans"/>
+              </a:rPr>
+              <a:t>▸ </a:t>
+            </a:r>
+            <a:r>
+              <a:rPr sz="1500" b="1">
+                <a:solidFill>
+                  <a:srgbClr val="1D3557"/>
+                </a:solidFill>
+                <a:latin typeface="Fira Sans"/>
+              </a:rPr>
+              <a:t>Para cada dirección que pasa por el centro se mide cuánto se dispersan los puntos a lo largo de ella.</a:t>
+            </a:r>
+          </a:p>
+          <a:p>
+            <a:pPr>
+              <a:lnSpc>
+                <a:spcPct val="112000"/>
+              </a:lnSpc>
+              <a:spcAft>
+                <a:spcPts val="900"/>
+              </a:spcAft>
+            </a:pPr>
+            <a:r>
+              <a:rPr sz="1500" b="1">
+                <a:solidFill>
+                  <a:srgbClr val="E0A437"/>
+                </a:solidFill>
+                <a:latin typeface="Fira Sans"/>
+              </a:rPr>
+              <a:t>▸ </a:t>
+            </a:r>
+            <a:r>
+              <a:rPr sz="1500" b="0">
+                <a:solidFill>
+                  <a:srgbClr val="000000"/>
+                </a:solidFill>
+                <a:latin typeface="Fira Sans"/>
+              </a:rPr>
+              <a:t>Horizontal 1,00; vertical 1,00; diagonal 1,41, la mayor de todas; perpendicular a la diagonal 0,07.</a:t>
+            </a:r>
+          </a:p>
+          <a:p>
+            <a:pPr>
+              <a:lnSpc>
+                <a:spcPct val="112000"/>
+              </a:lnSpc>
+              <a:spcAft>
+                <a:spcPts val="900"/>
+              </a:spcAft>
+            </a:pPr>
+            <a:r>
+              <a:rPr sz="1500" b="1">
+                <a:solidFill>
+                  <a:srgbClr val="E0A437"/>
+                </a:solidFill>
+                <a:latin typeface="Fira Sans"/>
+              </a:rPr>
+              <a:t>▸ </a:t>
+            </a:r>
+            <a:r>
+              <a:rPr sz="1500" b="0">
+                <a:solidFill>
+                  <a:srgbClr val="000000"/>
+                </a:solidFill>
+                <a:latin typeface="Fira Sans"/>
+              </a:rPr>
+              <a:t>Quedarse con la posición sobre la diagonal conserva el 99,8% de la variación de los datos y pierde el 0,2%.</a:t>
             </a:r>
           </a:p>
         </p:txBody>
@@ -3916,7 +4062,7 @@
                 </a:solidFill>
                 <a:latin typeface="Fira Sans"/>
               </a:rPr>
-              <a:t>La diagonal se llama primera componente</a:t>
+              <a:t>Es un cambio de ejes: las dos componentes</a:t>
             </a:r>
           </a:p>
         </p:txBody>
@@ -3937,8 +4083,8 @@
         </p:blipFill>
         <p:spPr>
           <a:xfrm>
-            <a:off x="2622002" y="1143000"/>
-            <a:ext cx="3899995" cy="3099816"/>
+            <a:off x="320040" y="1097280"/>
+            <a:ext cx="4032615" cy="3886200"/>
           </a:xfrm>
           <a:prstGeom prst="rect">
             <a:avLst/>
@@ -3953,8 +4099,8 @@
         </p:nvSpPr>
         <p:spPr>
           <a:xfrm>
-            <a:off x="704088" y="4379976"/>
-            <a:ext cx="7744968" cy="512064"/>
+            <a:off x="4581254" y="1325880"/>
+            <a:ext cx="4242705" cy="3566160"/>
           </a:xfrm>
           <a:prstGeom prst="rect">
             <a:avLst/>
@@ -3967,14 +4113,115 @@
           </a:bodyPr>
           <a:lstStyle/>
           <a:p>
-            <a:r>
-              <a:rPr sz="1300" b="0">
-                <a:solidFill>
-                  <a:srgbClr val="333333"/>
-                </a:solidFill>
-                <a:latin typeface="Fira Sans"/>
-              </a:rPr>
-              <a:t>Ninguna otra dirección conserva más variación que la diagonal: por eso se llama primera componente principal. Su perpendicular, la que conserva el resto, es la segunda.</a:t>
+            <a:pPr>
+              <a:lnSpc>
+                <a:spcPct val="112000"/>
+              </a:lnSpc>
+              <a:spcAft>
+                <a:spcPts val="900"/>
+              </a:spcAft>
+            </a:pPr>
+            <a:r>
+              <a:rPr sz="1500" b="1">
+                <a:solidFill>
+                  <a:srgbClr val="E0A437"/>
+                </a:solidFill>
+                <a:latin typeface="Fira Sans"/>
+              </a:rPr>
+              <a:t>▸ </a:t>
+            </a:r>
+            <a:r>
+              <a:rPr sz="1500" b="1">
+                <a:solidFill>
+                  <a:srgbClr val="1D3557"/>
+                </a:solidFill>
+                <a:latin typeface="Fira Sans"/>
+              </a:rPr>
+              <a:t>Un cambio de sistema de referencia: en vez de turnos y hits, dos ejes nuevos girados 45°, la diagonal y su perpendicular, con el mismo centro.</a:t>
+            </a:r>
+          </a:p>
+          <a:p>
+            <a:pPr>
+              <a:lnSpc>
+                <a:spcPct val="112000"/>
+              </a:lnSpc>
+              <a:spcAft>
+                <a:spcPts val="900"/>
+              </a:spcAft>
+            </a:pPr>
+            <a:r>
+              <a:rPr sz="1500" b="1">
+                <a:solidFill>
+                  <a:srgbClr val="E0A437"/>
+                </a:solidFill>
+                <a:latin typeface="Fira Sans"/>
+              </a:rPr>
+              <a:t>▸ </a:t>
+            </a:r>
+            <a:r>
+              <a:rPr sz="1500" b="0">
+                <a:solidFill>
+                  <a:srgbClr val="000000"/>
+                </a:solidFill>
+                <a:latin typeface="Fira Sans"/>
+              </a:rPr>
+              <a:t>Cada jugador tiene dos coordenadas nuevas. A pasa de (−1,16; −1,11) a (−1,60; 0,03); C, de (1,51; 1,33) a (2,01; −0,13).</a:t>
+            </a:r>
+          </a:p>
+          <a:p>
+            <a:pPr>
+              <a:lnSpc>
+                <a:spcPct val="112000"/>
+              </a:lnSpc>
+              <a:spcAft>
+                <a:spcPts val="900"/>
+              </a:spcAft>
+            </a:pPr>
+            <a:r>
+              <a:rPr sz="1500" b="1">
+                <a:solidFill>
+                  <a:srgbClr val="E0A437"/>
+                </a:solidFill>
+                <a:latin typeface="Fira Sans"/>
+              </a:rPr>
+              <a:t>▸ </a:t>
+            </a:r>
+            <a:r>
+              <a:rPr sz="1500" b="0">
+                <a:solidFill>
+                  <a:srgbClr val="000000"/>
+                </a:solidFill>
+                <a:latin typeface="Fira Sans"/>
+              </a:rPr>
+              <a:t>La segunda coordenada es casi 0 para todos: es lo que se descarta al quedarse con un solo número.</a:t>
+            </a:r>
+          </a:p>
+          <a:p>
+            <a:pPr>
+              <a:lnSpc>
+                <a:spcPct val="112000"/>
+              </a:lnSpc>
+              <a:spcAft>
+                <a:spcPts val="900"/>
+              </a:spcAft>
+            </a:pPr>
+            <a:r>
+              <a:rPr sz="1500" b="1">
+                <a:solidFill>
+                  <a:srgbClr val="E0A437"/>
+                </a:solidFill>
+                <a:latin typeface="Fira Sans"/>
+              </a:rPr>
+              <a:t>▸ </a:t>
+            </a:r>
+            <a:r>
+              <a:rPr sz="1500" b="0">
+                <a:solidFill>
+                  <a:srgbClr val="000000"/>
+                </a:solidFill>
+                <a:latin typeface="Fira Sans"/>
+              </a:rPr>
+              <a:t>El primer eje se llama primera componente principal; el segundo, segunda.</a:t>
             </a:r>
           </a:p>
         </p:txBody>
@@ -4353,7 +4600,7 @@
         <p:spPr>
           <a:xfrm>
             <a:off x="4892040" y="1371600"/>
-            <a:ext cx="3840480" cy="3052511"/>
+            <a:ext cx="3840480" cy="3701041"/>
           </a:xfrm>
           <a:prstGeom prst="rect">
             <a:avLst/>

--- a/presentaciones/clase08_componentes_principales.pptx
+++ b/presentaciones/clase08_componentes_principales.pptx
@@ -37,6 +37,7 @@
     <p:sldId id="285" r:id="rId36"/>
     <p:sldId id="286" r:id="rId37"/>
     <p:sldId id="287" r:id="rId38"/>
+    <p:sldId id="288" r:id="rId39"/>
   </p:sldIdLst>
   <p:sldSz cx="9144000" cy="5138928" type="screen4x3"/>
   <p:notesSz cx="6858000" cy="9144000"/>
@@ -4317,14 +4318,14 @@
                 </a:solidFill>
                 <a:latin typeface="Fira Sans"/>
               </a:rPr>
-              <a:t>En la práctica: un puntaje ponderado por jugador</a:t>
+              <a:t>De dónde sale el 99,8%</a:t>
             </a:r>
           </a:p>
         </p:txBody>
       </p:sp>
       <p:pic>
         <p:nvPicPr>
-          <p:cNvPr id="4" name="Picture 3" descr="c8_01b_puntaje_ponderado.png"/>
+          <p:cNvPr id="4" name="Picture 3" descr="c8_01d_calculo_pve.png"/>
           <p:cNvPicPr>
             <a:picLocks noChangeAspect="1"/>
           </p:cNvPicPr>
@@ -4338,8 +4339,8 @@
         </p:blipFill>
         <p:spPr>
           <a:xfrm>
-            <a:off x="699515" y="1261139"/>
-            <a:ext cx="7744968" cy="2607505"/>
+            <a:off x="1840230" y="1143000"/>
+            <a:ext cx="5463540" cy="2331720"/>
           </a:xfrm>
           <a:prstGeom prst="rect">
             <a:avLst/>
@@ -4354,8 +4355,8 @@
         </p:nvSpPr>
         <p:spPr>
           <a:xfrm>
-            <a:off x="704088" y="4005804"/>
-            <a:ext cx="7744968" cy="768096"/>
+            <a:off x="704088" y="3611879"/>
+            <a:ext cx="7744968" cy="1280160"/>
           </a:xfrm>
           <a:prstGeom prst="rect">
             <a:avLst/>
@@ -4375,7 +4376,7 @@
                 </a:solidFill>
                 <a:latin typeface="Fira Sans"/>
               </a:rPr>
-              <a:t>La posición sobre la diagonal se calcula como un puntaje ponderado, igual que el de la admisión universitaria: cada variable entra con un peso y sale un número por jugador. Aquí los pesos no los fija nadie: se calculan para que ese número separe a los jugadores lo más posible.</a:t>
+              <a:t>La variación de una coordenada se mide con su varianza. Las dos variables estandarizadas tienen varianza 1 y 1: la variación total es 2. Las dos coordenadas nuevas reparten esa misma variación, 1,995 y 0,005, que también suman 2. La parte de la primera es 1,995 / 2 = 99,8%; la de la segunda, 0,005 / 2 = 0,2%. Con 16 variables es lo mismo: la variación total es 16 y cada componente se lleva una parte.</a:t>
             </a:r>
           </a:p>
         </p:txBody>
@@ -4471,121 +4472,14 @@
                 </a:solidFill>
                 <a:latin typeface="Fira Sans"/>
               </a:rPr>
-              <a:t>El análisis de componentes principales</a:t>
-            </a:r>
-          </a:p>
-        </p:txBody>
-      </p:sp>
-      <p:sp>
-        <p:nvSpPr>
-          <p:cNvPr id="4" name="TextBox 3"/>
-          <p:cNvSpPr txBox="1"/>
-          <p:nvPr/>
-        </p:nvSpPr>
-        <p:spPr>
-          <a:xfrm>
-            <a:off x="502920" y="1252728"/>
-            <a:ext cx="4023360" cy="3200400"/>
-          </a:xfrm>
-          <a:prstGeom prst="rect">
-            <a:avLst/>
-          </a:prstGeom>
-          <a:noFill/>
-        </p:spPr>
-        <p:txBody>
-          <a:bodyPr wrap="square">
-            <a:spAutoFit/>
-          </a:bodyPr>
-          <a:lstStyle/>
-          <a:p>
-            <a:pPr>
-              <a:lnSpc>
-                <a:spcPct val="112000"/>
-              </a:lnSpc>
-              <a:spcAft>
-                <a:spcPts val="900"/>
-              </a:spcAft>
-            </a:pPr>
-            <a:r>
-              <a:rPr sz="1500" b="1">
-                <a:solidFill>
-                  <a:srgbClr val="E0A437"/>
-                </a:solidFill>
-                <a:latin typeface="Fira Sans"/>
-              </a:rPr>
-              <a:t>▸ </a:t>
-            </a:r>
-            <a:r>
-              <a:rPr sz="1500" b="1">
-                <a:solidFill>
-                  <a:srgbClr val="1D3557"/>
-                </a:solidFill>
-                <a:latin typeface="Fira Sans"/>
-              </a:rPr>
-              <a:t>Busca la dirección en que los datos más se dispersan (la primera componente), luego la que más se dispersa entre las perpendiculares (la segunda), y así hasta tener tantas como variables.</a:t>
-            </a:r>
-          </a:p>
-          <a:p>
-            <a:pPr>
-              <a:lnSpc>
-                <a:spcPct val="112000"/>
-              </a:lnSpc>
-              <a:spcAft>
-                <a:spcPts val="900"/>
-              </a:spcAft>
-            </a:pPr>
-            <a:r>
-              <a:rPr sz="1500" b="1">
-                <a:solidFill>
-                  <a:srgbClr val="E0A437"/>
-                </a:solidFill>
-                <a:latin typeface="Fira Sans"/>
-              </a:rPr>
-              <a:t>▸ </a:t>
-            </a:r>
-            <a:r>
-              <a:rPr sz="1500" b="0">
-                <a:solidFill>
-                  <a:srgbClr val="000000"/>
-                </a:solidFill>
-                <a:latin typeface="Fira Sans"/>
-              </a:rPr>
-              <a:t>Cada componente es una variable nueva: un puntaje ponderado de las originales, con una parte de la variación total.</a:t>
-            </a:r>
-          </a:p>
-          <a:p>
-            <a:pPr>
-              <a:lnSpc>
-                <a:spcPct val="112000"/>
-              </a:lnSpc>
-              <a:spcAft>
-                <a:spcPts val="900"/>
-              </a:spcAft>
-            </a:pPr>
-            <a:r>
-              <a:rPr sz="1500" b="1">
-                <a:solidFill>
-                  <a:srgbClr val="E0A437"/>
-                </a:solidFill>
-                <a:latin typeface="Fira Sans"/>
-              </a:rPr>
-              <a:t>▸ </a:t>
-            </a:r>
-            <a:r>
-              <a:rPr sz="1500" b="0">
-                <a:solidFill>
-                  <a:srgbClr val="000000"/>
-                </a:solidFill>
-                <a:latin typeface="Fira Sans"/>
-              </a:rPr>
-              <a:t>No usa ninguna respuesta Y: es un método no supervisado (James et al., 2013, p. 375).</a:t>
+              <a:t>En la práctica: un puntaje ponderado por jugador</a:t>
             </a:r>
           </a:p>
         </p:txBody>
       </p:sp>
       <p:pic>
         <p:nvPicPr>
-          <p:cNvPr id="5" name="Picture 4" descr="c8_01c_componentes.png"/>
+          <p:cNvPr id="4" name="Picture 3" descr="c8_01b_puntaje_ponderado.png"/>
           <p:cNvPicPr>
             <a:picLocks noChangeAspect="1"/>
           </p:cNvPicPr>
@@ -4599,14 +4493,48 @@
         </p:blipFill>
         <p:spPr>
           <a:xfrm>
-            <a:off x="4892040" y="1371600"/>
-            <a:ext cx="3840480" cy="3701041"/>
+            <a:off x="699515" y="1261139"/>
+            <a:ext cx="7744968" cy="2607505"/>
           </a:xfrm>
           <a:prstGeom prst="rect">
             <a:avLst/>
           </a:prstGeom>
         </p:spPr>
       </p:pic>
+      <p:sp>
+        <p:nvSpPr>
+          <p:cNvPr id="5" name="TextBox 4"/>
+          <p:cNvSpPr txBox="1"/>
+          <p:nvPr/>
+        </p:nvSpPr>
+        <p:spPr>
+          <a:xfrm>
+            <a:off x="704088" y="4005804"/>
+            <a:ext cx="7744968" cy="768096"/>
+          </a:xfrm>
+          <a:prstGeom prst="rect">
+            <a:avLst/>
+          </a:prstGeom>
+          <a:noFill/>
+        </p:spPr>
+        <p:txBody>
+          <a:bodyPr wrap="square">
+            <a:spAutoFit/>
+          </a:bodyPr>
+          <a:lstStyle/>
+          <a:p>
+            <a:r>
+              <a:rPr sz="1300" b="0">
+                <a:solidFill>
+                  <a:srgbClr val="333333"/>
+                </a:solidFill>
+                <a:latin typeface="Fira Sans"/>
+              </a:rPr>
+              <a:t>La posición sobre la diagonal se calcula como un puntaje ponderado, igual que el de la admisión universitaria: cada variable entra con un peso y sale un número por jugador. Aquí los pesos no los fija nadie: se calculan para que ese número separe a los jugadores lo más posible.</a:t>
+            </a:r>
+          </a:p>
+        </p:txBody>
+      </p:sp>
     </p:spTree>
   </p:cSld>
   <p:clrMapOvr>
@@ -4698,7 +4626,7 @@
                 </a:solidFill>
                 <a:latin typeface="Fira Sans"/>
               </a:rPr>
-              <a:t>¿Para qué sirve?</a:t>
+              <a:t>El análisis de componentes principales</a:t>
             </a:r>
           </a:p>
         </p:txBody>
@@ -4711,8 +4639,8 @@
         </p:nvSpPr>
         <p:spPr>
           <a:xfrm>
-            <a:off x="704088" y="1353312"/>
-            <a:ext cx="7744968" cy="3300984"/>
+            <a:off x="502920" y="1252728"/>
+            <a:ext cx="4023360" cy="3200400"/>
           </a:xfrm>
           <a:prstGeom prst="rect">
             <a:avLst/>
@@ -4734,7 +4662,7 @@
               </a:spcAft>
             </a:pPr>
             <a:r>
-              <a:rPr sz="1800" b="1">
+              <a:rPr sz="1500" b="1">
                 <a:solidFill>
                   <a:srgbClr val="E0A437"/>
                 </a:solidFill>
@@ -4743,13 +4671,13 @@
               <a:t>▸ </a:t>
             </a:r>
             <a:r>
-              <a:rPr sz="1800" b="1">
+              <a:rPr sz="1500" b="1">
                 <a:solidFill>
                   <a:srgbClr val="1D3557"/>
                 </a:solidFill>
                 <a:latin typeface="Fira Sans"/>
               </a:rPr>
-              <a:t>Para mirar los datos: con 16 variables hay 120 gráficos de dispersión posibles; con dos componentes, uno solo.</a:t>
+              <a:t>Busca la dirección en que los datos más se dispersan (la primera componente), luego la que más se dispersa entre las perpendiculares (la segunda), y así hasta tener tantas como variables.</a:t>
             </a:r>
           </a:p>
           <a:p>
@@ -4762,7 +4690,7 @@
               </a:spcAft>
             </a:pPr>
             <a:r>
-              <a:rPr sz="1800" b="1">
+              <a:rPr sz="1500" b="1">
                 <a:solidFill>
                   <a:srgbClr val="E0A437"/>
                 </a:solidFill>
@@ -4771,13 +4699,13 @@
               <a:t>▸ </a:t>
             </a:r>
             <a:r>
-              <a:rPr sz="1800" b="0">
+              <a:rPr sz="1500" b="0">
                 <a:solidFill>
                   <a:srgbClr val="000000"/>
                 </a:solidFill>
                 <a:latin typeface="Fira Sans"/>
               </a:rPr>
-              <a:t>Para entregarle a un modelo menos entradas: las componentes reemplazan a un grupo de variables que se repiten.</a:t>
+              <a:t>Cada componente es una variable nueva: un puntaje ponderado de las originales, con una parte de la variación total.</a:t>
             </a:r>
           </a:p>
           <a:p>
@@ -4790,7 +4718,7 @@
               </a:spcAft>
             </a:pPr>
             <a:r>
-              <a:rPr sz="1800" b="1">
+              <a:rPr sz="1500" b="1">
                 <a:solidFill>
                   <a:srgbClr val="E0A437"/>
                 </a:solidFill>
@@ -4799,45 +4727,41 @@
               <a:t>▸ </a:t>
             </a:r>
             <a:r>
-              <a:rPr sz="1800" b="0">
+              <a:rPr sz="1500" b="0">
                 <a:solidFill>
                   <a:srgbClr val="000000"/>
                 </a:solidFill>
                 <a:latin typeface="Fira Sans"/>
               </a:rPr>
-              <a:t>Para entender de qué está hecha la variación: qué variables se mueven juntas y cuánto pesa cada grupo.</a:t>
-            </a:r>
-          </a:p>
-          <a:p>
-            <a:pPr>
-              <a:lnSpc>
-                <a:spcPct val="112000"/>
-              </a:lnSpc>
-              <a:spcAft>
-                <a:spcPts val="900"/>
-              </a:spcAft>
-            </a:pPr>
-            <a:r>
-              <a:rPr sz="1800" b="1">
-                <a:solidFill>
-                  <a:srgbClr val="E0A437"/>
-                </a:solidFill>
-                <a:latin typeface="Fira Sans"/>
-              </a:rPr>
-              <a:t>▸ </a:t>
-            </a:r>
-            <a:r>
-              <a:rPr sz="1800" b="0">
-                <a:solidFill>
-                  <a:srgbClr val="000000"/>
-                </a:solidFill>
-                <a:latin typeface="Fira Sans"/>
-              </a:rPr>
-              <a:t>Lo que no hace: no elige variables ni las descarta, y no sabe qué se quiere predecir.</a:t>
-            </a:r>
-          </a:p>
-        </p:txBody>
-      </p:sp>
+              <a:t>No usa ninguna respuesta Y: es un método no supervisado (James et al., 2013, p. 375).</a:t>
+            </a:r>
+          </a:p>
+        </p:txBody>
+      </p:sp>
+      <p:pic>
+        <p:nvPicPr>
+          <p:cNvPr id="5" name="Picture 4" descr="c8_01c_componentes.png"/>
+          <p:cNvPicPr>
+            <a:picLocks noChangeAspect="1"/>
+          </p:cNvPicPr>
+          <p:nvPr/>
+        </p:nvPicPr>
+        <p:blipFill>
+          <a:blip r:embed="rId2"/>
+          <a:stretch>
+            <a:fillRect/>
+          </a:stretch>
+        </p:blipFill>
+        <p:spPr>
+          <a:xfrm>
+            <a:off x="4892040" y="1371600"/>
+            <a:ext cx="3840480" cy="3701041"/>
+          </a:xfrm>
+          <a:prstGeom prst="rect">
+            <a:avLst/>
+          </a:prstGeom>
+        </p:spPr>
+      </p:pic>
     </p:spTree>
   </p:cSld>
   <p:clrMapOvr>
@@ -4929,45 +4853,21 @@
                 </a:solidFill>
                 <a:latin typeface="Fira Sans"/>
               </a:rPr>
-              <a:t>Con 16 variables, los mismos pasos</a:t>
-            </a:r>
-          </a:p>
-        </p:txBody>
-      </p:sp>
-      <p:pic>
-        <p:nvPicPr>
-          <p:cNvPr id="4" name="Picture 3" descr="c8_08_pasos.png"/>
-          <p:cNvPicPr>
-            <a:picLocks noChangeAspect="1"/>
-          </p:cNvPicPr>
-          <p:nvPr/>
-        </p:nvPicPr>
-        <p:blipFill>
-          <a:blip r:embed="rId2"/>
-          <a:stretch>
-            <a:fillRect/>
-          </a:stretch>
-        </p:blipFill>
-        <p:spPr>
-          <a:xfrm>
-            <a:off x="699515" y="1531946"/>
-            <a:ext cx="7744968" cy="2065892"/>
-          </a:xfrm>
-          <a:prstGeom prst="rect">
-            <a:avLst/>
-          </a:prstGeom>
-        </p:spPr>
-      </p:pic>
-      <p:sp>
-        <p:nvSpPr>
-          <p:cNvPr id="5" name="TextBox 4"/>
+              <a:t>¿Para qué sirve?</a:t>
+            </a:r>
+          </a:p>
+        </p:txBody>
+      </p:sp>
+      <p:sp>
+        <p:nvSpPr>
+          <p:cNvPr id="4" name="TextBox 3"/>
           <p:cNvSpPr txBox="1"/>
           <p:nvPr/>
         </p:nvSpPr>
         <p:spPr>
           <a:xfrm>
-            <a:off x="704088" y="3734997"/>
-            <a:ext cx="7744968" cy="768096"/>
+            <a:off x="704088" y="1353312"/>
+            <a:ext cx="7744968" cy="3300984"/>
           </a:xfrm>
           <a:prstGeom prst="rect">
             <a:avLst/>
@@ -4980,14 +4880,115 @@
           </a:bodyPr>
           <a:lstStyle/>
           <a:p>
-            <a:r>
-              <a:rPr sz="1300" b="0">
-                <a:solidFill>
-                  <a:srgbClr val="333333"/>
-                </a:solidFill>
-                <a:latin typeface="Fira Sans"/>
-              </a:rPr>
-              <a:t>Con 16 variables la nube no se puede dibujar, pero el cálculo es el mismo: cada jugador es un punto con 16 coordenadas, se busca la dirección de mayor dispersión, luego la perpendicular que más se dispersa, y así hasta tener 16 componentes, ordenadas de la que más variación conserva a la que menos.</a:t>
+            <a:pPr>
+              <a:lnSpc>
+                <a:spcPct val="112000"/>
+              </a:lnSpc>
+              <a:spcAft>
+                <a:spcPts val="900"/>
+              </a:spcAft>
+            </a:pPr>
+            <a:r>
+              <a:rPr sz="1800" b="1">
+                <a:solidFill>
+                  <a:srgbClr val="E0A437"/>
+                </a:solidFill>
+                <a:latin typeface="Fira Sans"/>
+              </a:rPr>
+              <a:t>▸ </a:t>
+            </a:r>
+            <a:r>
+              <a:rPr sz="1800" b="1">
+                <a:solidFill>
+                  <a:srgbClr val="1D3557"/>
+                </a:solidFill>
+                <a:latin typeface="Fira Sans"/>
+              </a:rPr>
+              <a:t>Para mirar los datos: con 16 variables hay 120 gráficos de dispersión posibles; con dos componentes, uno solo.</a:t>
+            </a:r>
+          </a:p>
+          <a:p>
+            <a:pPr>
+              <a:lnSpc>
+                <a:spcPct val="112000"/>
+              </a:lnSpc>
+              <a:spcAft>
+                <a:spcPts val="900"/>
+              </a:spcAft>
+            </a:pPr>
+            <a:r>
+              <a:rPr sz="1800" b="1">
+                <a:solidFill>
+                  <a:srgbClr val="E0A437"/>
+                </a:solidFill>
+                <a:latin typeface="Fira Sans"/>
+              </a:rPr>
+              <a:t>▸ </a:t>
+            </a:r>
+            <a:r>
+              <a:rPr sz="1800" b="0">
+                <a:solidFill>
+                  <a:srgbClr val="000000"/>
+                </a:solidFill>
+                <a:latin typeface="Fira Sans"/>
+              </a:rPr>
+              <a:t>Para entregarle a un modelo menos entradas: las componentes reemplazan a un grupo de variables que se repiten.</a:t>
+            </a:r>
+          </a:p>
+          <a:p>
+            <a:pPr>
+              <a:lnSpc>
+                <a:spcPct val="112000"/>
+              </a:lnSpc>
+              <a:spcAft>
+                <a:spcPts val="900"/>
+              </a:spcAft>
+            </a:pPr>
+            <a:r>
+              <a:rPr sz="1800" b="1">
+                <a:solidFill>
+                  <a:srgbClr val="E0A437"/>
+                </a:solidFill>
+                <a:latin typeface="Fira Sans"/>
+              </a:rPr>
+              <a:t>▸ </a:t>
+            </a:r>
+            <a:r>
+              <a:rPr sz="1800" b="0">
+                <a:solidFill>
+                  <a:srgbClr val="000000"/>
+                </a:solidFill>
+                <a:latin typeface="Fira Sans"/>
+              </a:rPr>
+              <a:t>Para entender de qué está hecha la variación: qué variables se mueven juntas y cuánto pesa cada grupo.</a:t>
+            </a:r>
+          </a:p>
+          <a:p>
+            <a:pPr>
+              <a:lnSpc>
+                <a:spcPct val="112000"/>
+              </a:lnSpc>
+              <a:spcAft>
+                <a:spcPts val="900"/>
+              </a:spcAft>
+            </a:pPr>
+            <a:r>
+              <a:rPr sz="1800" b="1">
+                <a:solidFill>
+                  <a:srgbClr val="E0A437"/>
+                </a:solidFill>
+                <a:latin typeface="Fira Sans"/>
+              </a:rPr>
+              <a:t>▸ </a:t>
+            </a:r>
+            <a:r>
+              <a:rPr sz="1800" b="0">
+                <a:solidFill>
+                  <a:srgbClr val="000000"/>
+                </a:solidFill>
+                <a:latin typeface="Fira Sans"/>
+              </a:rPr>
+              <a:t>Lo que no hace: no elige variables ni las descarta, y no sabe qué se quiere predecir.</a:t>
             </a:r>
           </a:p>
         </p:txBody>
@@ -5083,14 +5084,14 @@
                 </a:solidFill>
                 <a:latin typeface="Fira Sans"/>
               </a:rPr>
-              <a:t>Por qué se estandariza</a:t>
+              <a:t>Con 16 variables, los mismos pasos</a:t>
             </a:r>
           </a:p>
         </p:txBody>
       </p:sp>
       <p:pic>
         <p:nvPicPr>
-          <p:cNvPr id="4" name="Picture 3" descr="c8_02_estandarizar.png"/>
+          <p:cNvPr id="4" name="Picture 3" descr="c8_08_pasos.png"/>
           <p:cNvPicPr>
             <a:picLocks noChangeAspect="1"/>
           </p:cNvPicPr>
@@ -5104,8 +5105,8 @@
         </p:blipFill>
         <p:spPr>
           <a:xfrm>
-            <a:off x="2421351" y="1143000"/>
-            <a:ext cx="4301297" cy="2331720"/>
+            <a:off x="699515" y="1531946"/>
+            <a:ext cx="7744968" cy="2065892"/>
           </a:xfrm>
           <a:prstGeom prst="rect">
             <a:avLst/>
@@ -5120,8 +5121,8 @@
         </p:nvSpPr>
         <p:spPr>
           <a:xfrm>
-            <a:off x="704088" y="3611879"/>
-            <a:ext cx="7744968" cy="1280160"/>
+            <a:off x="704088" y="3734997"/>
+            <a:ext cx="7744968" cy="768096"/>
           </a:xfrm>
           <a:prstGeom prst="rect">
             <a:avLst/>
@@ -5141,7 +5142,7 @@
                 </a:solidFill>
                 <a:latin typeface="Fira Sans"/>
               </a:rPr>
-              <a:t>Con las variables en sus unidades, la primera componente es casi solo turnos_carrera, porque su desviación estándar (2.287) es 476 veces la de temporadas (4,8): PCA sigue a la variable que más varía en sus unidades. Con cada variable estandarizada (media 0 y desviación 1, como en las clases 2 y 7) todas parten iguales. El libro recomienda estandarizar, salvo que las variables compartan unidad (James et al., 2013, p. 381).</a:t>
+              <a:t>Con 16 variables la nube no se puede dibujar, pero el cálculo es el mismo: cada jugador es un punto con 16 coordenadas, se busca la dirección de mayor dispersión, luego la perpendicular que más se dispersa, y así hasta tener 16 componentes, ordenadas de la que más variación conserva a la que menos.</a:t>
             </a:r>
           </a:p>
         </p:txBody>
@@ -5179,7 +5180,7 @@
             <a:avLst/>
           </a:prstGeom>
           <a:solidFill>
-            <a:srgbClr val="1D3557"/>
+            <a:srgbClr val="FAFBFC"/>
           </a:solidFill>
           <a:ln>
             <a:noFill/>
@@ -5216,8 +5217,8 @@
         </p:nvSpPr>
         <p:spPr>
           <a:xfrm>
-            <a:off x="603504" y="1847088"/>
-            <a:ext cx="7946136" cy="1399032"/>
+            <a:off x="402336" y="301752"/>
+            <a:ext cx="8348472" cy="795528"/>
           </a:xfrm>
           <a:prstGeom prst="rect">
             <a:avLst/>
@@ -5231,24 +5232,71 @@
           <a:lstStyle/>
           <a:p>
             <a:r>
-              <a:rPr sz="3400" b="1">
-                <a:solidFill>
-                  <a:srgbClr val="FFFFFF"/>
-                </a:solidFill>
-                <a:latin typeface="Fira Sans"/>
-              </a:rPr>
-              <a:t>3. Cómo se leen</a:t>
-            </a:r>
-          </a:p>
-          <a:p>
-            <a:r>
-              <a:rPr sz="1800" b="0">
-                <a:solidFill>
-                  <a:srgbClr val="E0A437"/>
-                </a:solidFill>
-                <a:latin typeface="Fira Sans"/>
-              </a:rPr>
-              <a:t>Cuánta variación explica cada componente y de qué está hecha</a:t>
+              <a:rPr sz="2800" b="1">
+                <a:solidFill>
+                  <a:srgbClr val="0F0F0F"/>
+                </a:solidFill>
+                <a:latin typeface="Fira Sans"/>
+              </a:rPr>
+              <a:t>Por qué se estandariza</a:t>
+            </a:r>
+          </a:p>
+        </p:txBody>
+      </p:sp>
+      <p:pic>
+        <p:nvPicPr>
+          <p:cNvPr id="4" name="Picture 3" descr="c8_02_estandarizar.png"/>
+          <p:cNvPicPr>
+            <a:picLocks noChangeAspect="1"/>
+          </p:cNvPicPr>
+          <p:nvPr/>
+        </p:nvPicPr>
+        <p:blipFill>
+          <a:blip r:embed="rId2"/>
+          <a:stretch>
+            <a:fillRect/>
+          </a:stretch>
+        </p:blipFill>
+        <p:spPr>
+          <a:xfrm>
+            <a:off x="2421351" y="1143000"/>
+            <a:ext cx="4301297" cy="2331720"/>
+          </a:xfrm>
+          <a:prstGeom prst="rect">
+            <a:avLst/>
+          </a:prstGeom>
+        </p:spPr>
+      </p:pic>
+      <p:sp>
+        <p:nvSpPr>
+          <p:cNvPr id="5" name="TextBox 4"/>
+          <p:cNvSpPr txBox="1"/>
+          <p:nvPr/>
+        </p:nvSpPr>
+        <p:spPr>
+          <a:xfrm>
+            <a:off x="704088" y="3611879"/>
+            <a:ext cx="7744968" cy="1280160"/>
+          </a:xfrm>
+          <a:prstGeom prst="rect">
+            <a:avLst/>
+          </a:prstGeom>
+          <a:noFill/>
+        </p:spPr>
+        <p:txBody>
+          <a:bodyPr wrap="square">
+            <a:spAutoFit/>
+          </a:bodyPr>
+          <a:lstStyle/>
+          <a:p>
+            <a:r>
+              <a:rPr sz="1300" b="0">
+                <a:solidFill>
+                  <a:srgbClr val="333333"/>
+                </a:solidFill>
+                <a:latin typeface="Fira Sans"/>
+              </a:rPr>
+              <a:t>Con las variables en sus unidades, la primera componente es casi solo turnos_carrera, porque su desviación estándar (2.287) es 476 veces la de temporadas (4,8): PCA sigue a la variable que más varía en sus unidades. Con cada variable estandarizada (media 0 y desviación 1, como en las clases 2 y 7) todas parten iguales. Se estandariza salvo que las variables compartan unidad (James et al., 2013, p. 381).</a:t>
             </a:r>
           </a:p>
         </p:txBody>
@@ -5517,7 +5565,7 @@
             <a:avLst/>
           </a:prstGeom>
           <a:solidFill>
-            <a:srgbClr val="FAFBFC"/>
+            <a:srgbClr val="1D3557"/>
           </a:solidFill>
           <a:ln>
             <a:noFill/>
@@ -5554,8 +5602,8 @@
         </p:nvSpPr>
         <p:spPr>
           <a:xfrm>
-            <a:off x="402336" y="301752"/>
-            <a:ext cx="8348472" cy="795528"/>
+            <a:off x="603504" y="1847088"/>
+            <a:ext cx="7946136" cy="1399032"/>
           </a:xfrm>
           <a:prstGeom prst="rect">
             <a:avLst/>
@@ -5569,71 +5617,24 @@
           <a:lstStyle/>
           <a:p>
             <a:r>
-              <a:rPr sz="2800" b="1">
-                <a:solidFill>
-                  <a:srgbClr val="0F0F0F"/>
-                </a:solidFill>
-                <a:latin typeface="Fira Sans"/>
-              </a:rPr>
-              <a:t>Cuánta variación explica cada componente</a:t>
-            </a:r>
-          </a:p>
-        </p:txBody>
-      </p:sp>
-      <p:pic>
-        <p:nvPicPr>
-          <p:cNvPr id="4" name="Picture 3" descr="c8_03_scree.png"/>
-          <p:cNvPicPr>
-            <a:picLocks noChangeAspect="1"/>
-          </p:cNvPicPr>
-          <p:nvPr/>
-        </p:nvPicPr>
-        <p:blipFill>
-          <a:blip r:embed="rId2"/>
-          <a:stretch>
-            <a:fillRect/>
-          </a:stretch>
-        </p:blipFill>
-        <p:spPr>
-          <a:xfrm>
-            <a:off x="2337301" y="1143000"/>
-            <a:ext cx="4469397" cy="2587752"/>
-          </a:xfrm>
-          <a:prstGeom prst="rect">
-            <a:avLst/>
-          </a:prstGeom>
-        </p:spPr>
-      </p:pic>
-      <p:sp>
-        <p:nvSpPr>
-          <p:cNvPr id="5" name="TextBox 4"/>
-          <p:cNvSpPr txBox="1"/>
-          <p:nvPr/>
-        </p:nvSpPr>
-        <p:spPr>
-          <a:xfrm>
-            <a:off x="704088" y="3867912"/>
-            <a:ext cx="7744968" cy="1024128"/>
-          </a:xfrm>
-          <a:prstGeom prst="rect">
-            <a:avLst/>
-          </a:prstGeom>
-          <a:noFill/>
-        </p:spPr>
-        <p:txBody>
-          <a:bodyPr wrap="square">
-            <a:spAutoFit/>
-          </a:bodyPr>
-          <a:lstStyle/>
-          <a:p>
-            <a:r>
-              <a:rPr sz="1300" b="0">
-                <a:solidFill>
-                  <a:srgbClr val="333333"/>
-                </a:solidFill>
-                <a:latin typeface="Fira Sans"/>
-              </a:rPr>
-              <a:t>La primera componente explica el 45,3% de la variación de las 16 variables; la segunda, el 25,7%; la tercera, el 10,8%. Dos componentes reúnen el 71% y tres, el 82%. Para decidir cuántas conservar, el libro sugiere mirar dónde la curva deja de caer (el codo) y advierte que no hay una regla objetiva: depende del uso (James et al., 2013, p. 384).</a:t>
+              <a:rPr sz="3400" b="1">
+                <a:solidFill>
+                  <a:srgbClr val="FFFFFF"/>
+                </a:solidFill>
+                <a:latin typeface="Fira Sans"/>
+              </a:rPr>
+              <a:t>3. Cómo se leen</a:t>
+            </a:r>
+          </a:p>
+          <a:p>
+            <a:r>
+              <a:rPr sz="1800" b="0">
+                <a:solidFill>
+                  <a:srgbClr val="E0A437"/>
+                </a:solidFill>
+                <a:latin typeface="Fira Sans"/>
+              </a:rPr>
+              <a:t>Cuánta variación explica cada componente y de qué está hecha</a:t>
             </a:r>
           </a:p>
         </p:txBody>
@@ -5729,14 +5730,14 @@
                 </a:solidFill>
                 <a:latin typeface="Fira Sans"/>
               </a:rPr>
-              <a:t>De qué está hecha cada componente: los pesos</a:t>
+              <a:t>Cuánta variación explica cada componente</a:t>
             </a:r>
           </a:p>
         </p:txBody>
       </p:sp>
       <p:pic>
         <p:nvPicPr>
-          <p:cNvPr id="4" name="Picture 3" descr="c8_04_pesos.png"/>
+          <p:cNvPr id="4" name="Picture 3" descr="c8_03_scree.png"/>
           <p:cNvPicPr>
             <a:picLocks noChangeAspect="1"/>
           </p:cNvPicPr>
@@ -5750,8 +5751,8 @@
         </p:blipFill>
         <p:spPr>
           <a:xfrm>
-            <a:off x="2196563" y="1143000"/>
-            <a:ext cx="4750872" cy="2587752"/>
+            <a:off x="2337301" y="1143000"/>
+            <a:ext cx="4469397" cy="2587752"/>
           </a:xfrm>
           <a:prstGeom prst="rect">
             <a:avLst/>
@@ -5787,7 +5788,7 @@
                 </a:solidFill>
                 <a:latin typeface="Fira Sans"/>
               </a:rPr>
-              <a:t>Primera componente: las siete variables de la carrera pesan casi lo mismo (0,29 a 0,34), las de la temporada la mitad (0,19 a 0,23) y la defensa no cuenta: mide cuánta carrera lleva el jugador. Segunda componente: la temporada 1986 pesa positivo (0,24 a 0,39) y la carrera negativo (−0,12 a −0,26): separa a quien rindió este año más de lo que dice su carrera.</a:t>
+              <a:t>La primera componente explica el 45,3% de la variación de las 16 variables; la segunda, el 25,7%; la tercera, el 10,8%. Dos componentes reúnen el 71% y tres, el 82%. Para decidir cuántas conservar se mira dónde la curva deja de caer (el codo); no hay una regla objetiva, depende del uso (James et al., 2013, p. 384).</a:t>
             </a:r>
           </a:p>
         </p:txBody>
@@ -5883,14 +5884,14 @@
                 </a:solidFill>
                 <a:latin typeface="Fira Sans"/>
               </a:rPr>
-              <a:t>Los 263 jugadores en dos componentes</a:t>
+              <a:t>De qué está hecha cada componente: los pesos</a:t>
             </a:r>
           </a:p>
         </p:txBody>
       </p:sp>
       <p:pic>
         <p:nvPicPr>
-          <p:cNvPr id="4" name="Picture 3" descr="c8_05_jugadores.png"/>
+          <p:cNvPr id="4" name="Picture 3" descr="c8_04_pesos.png"/>
           <p:cNvPicPr>
             <a:picLocks noChangeAspect="1"/>
           </p:cNvPicPr>
@@ -5904,8 +5905,8 @@
         </p:blipFill>
         <p:spPr>
           <a:xfrm>
-            <a:off x="2699826" y="1143000"/>
-            <a:ext cx="3744346" cy="2587751"/>
+            <a:off x="2196563" y="1143000"/>
+            <a:ext cx="4750872" cy="2587752"/>
           </a:xfrm>
           <a:prstGeom prst="rect">
             <a:avLst/>
@@ -5941,7 +5942,7 @@
                 </a:solidFill>
                 <a:latin typeface="Fira Sans"/>
               </a:rPr>
-              <a:t>Cada punto es un jugador y el color, su salario de 1987, que PCA no usó. El salario crece hacia la derecha (correlación 0,64 con la primera componente) y casi nada hacia arriba (0,11 con la segunda): la carrera pesa en el salario; la última temporada, poco. Dos ejes muestran lo que en 16 variables había que leer coeficiente por coeficiente.</a:t>
+              <a:t>Primera componente: las siete variables de la carrera pesan casi lo mismo (0,29 a 0,34), las de la temporada la mitad (0,19 a 0,23) y la defensa no cuenta: mide cuánta carrera lleva el jugador. Segunda componente: la temporada 1986 pesa positivo (0,24 a 0,39) y la carrera negativo (−0,12 a −0,26): separa a quien rindió este año más de lo que dice su carrera.</a:t>
             </a:r>
           </a:p>
         </p:txBody>
@@ -6037,14 +6038,14 @@
                 </a:solidFill>
                 <a:latin typeface="Fira Sans"/>
               </a:rPr>
-              <a:t>El mismo cálculo con las flores de la clase 2</a:t>
+              <a:t>Los 263 jugadores en dos componentes</a:t>
             </a:r>
           </a:p>
         </p:txBody>
       </p:sp>
       <p:pic>
         <p:nvPicPr>
-          <p:cNvPr id="4" name="Picture 3" descr="c8_06_iris.png"/>
+          <p:cNvPr id="4" name="Picture 3" descr="c8_05_jugadores.png"/>
           <p:cNvPicPr>
             <a:picLocks noChangeAspect="1"/>
           </p:cNvPicPr>
@@ -6058,8 +6059,8 @@
         </p:blipFill>
         <p:spPr>
           <a:xfrm>
-            <a:off x="2906606" y="1143000"/>
-            <a:ext cx="3330786" cy="2587751"/>
+            <a:off x="2699826" y="1143000"/>
+            <a:ext cx="3744346" cy="2587751"/>
           </a:xfrm>
           <a:prstGeom prst="rect">
             <a:avLst/>
@@ -6095,7 +6096,7 @@
                 </a:solidFill>
                 <a:latin typeface="Fira Sans"/>
               </a:rPr>
-              <a:t>Las cuatro medidas de iris se resumen en dos componentes que reúnen el 96% de la variación. La primera (73%) pesa casi igual el largo y el ancho del pétalo y el largo del sépalo (0,52 a 0,58): el tamaño de la flor. La segunda (23%) es casi solo el ancho del sépalo (0,92). PCA no conoce la especie y aun así las tres quedan separadas a lo largo de la primera componente.</a:t>
+              <a:t>Cada punto es un jugador y el color, su salario de 1987, que PCA no usó. El salario crece hacia la derecha (correlación 0,64 con la primera componente) y casi nada hacia arriba (0,11 con la segunda): la carrera pesa en el salario; la última temporada, poco. Dos ejes muestran lo que en 16 variables había que leer coeficiente por coeficiente.</a:t>
             </a:r>
           </a:p>
         </p:txBody>
@@ -6133,7 +6134,7 @@
             <a:avLst/>
           </a:prstGeom>
           <a:solidFill>
-            <a:srgbClr val="1D3557"/>
+            <a:srgbClr val="FAFBFC"/>
           </a:solidFill>
           <a:ln>
             <a:noFill/>
@@ -6170,8 +6171,8 @@
         </p:nvSpPr>
         <p:spPr>
           <a:xfrm>
-            <a:off x="603504" y="1847088"/>
-            <a:ext cx="7946136" cy="1399032"/>
+            <a:off x="402336" y="301752"/>
+            <a:ext cx="8348472" cy="795528"/>
           </a:xfrm>
           <a:prstGeom prst="rect">
             <a:avLst/>
@@ -6185,24 +6186,71 @@
           <a:lstStyle/>
           <a:p>
             <a:r>
-              <a:rPr sz="3400" b="1">
-                <a:solidFill>
-                  <a:srgbClr val="FFFFFF"/>
-                </a:solidFill>
-                <a:latin typeface="Fira Sans"/>
-              </a:rPr>
-              <a:t>4. Cuándo</a:t>
-            </a:r>
-          </a:p>
-          <a:p>
-            <a:r>
-              <a:rPr sz="1800" b="0">
-                <a:solidFill>
-                  <a:srgbClr val="E0A437"/>
-                </a:solidFill>
-                <a:latin typeface="Fira Sans"/>
-              </a:rPr>
-              <a:t>Cuándo conviene y cuándo no</a:t>
+              <a:rPr sz="2800" b="1">
+                <a:solidFill>
+                  <a:srgbClr val="0F0F0F"/>
+                </a:solidFill>
+                <a:latin typeface="Fira Sans"/>
+              </a:rPr>
+              <a:t>El mismo cálculo con las flores de la clase 2</a:t>
+            </a:r>
+          </a:p>
+        </p:txBody>
+      </p:sp>
+      <p:pic>
+        <p:nvPicPr>
+          <p:cNvPr id="4" name="Picture 3" descr="c8_06_iris.png"/>
+          <p:cNvPicPr>
+            <a:picLocks noChangeAspect="1"/>
+          </p:cNvPicPr>
+          <p:nvPr/>
+        </p:nvPicPr>
+        <p:blipFill>
+          <a:blip r:embed="rId2"/>
+          <a:stretch>
+            <a:fillRect/>
+          </a:stretch>
+        </p:blipFill>
+        <p:spPr>
+          <a:xfrm>
+            <a:off x="2906606" y="1143000"/>
+            <a:ext cx="3330786" cy="2587751"/>
+          </a:xfrm>
+          <a:prstGeom prst="rect">
+            <a:avLst/>
+          </a:prstGeom>
+        </p:spPr>
+      </p:pic>
+      <p:sp>
+        <p:nvSpPr>
+          <p:cNvPr id="5" name="TextBox 4"/>
+          <p:cNvSpPr txBox="1"/>
+          <p:nvPr/>
+        </p:nvSpPr>
+        <p:spPr>
+          <a:xfrm>
+            <a:off x="704088" y="3867912"/>
+            <a:ext cx="7744968" cy="1024128"/>
+          </a:xfrm>
+          <a:prstGeom prst="rect">
+            <a:avLst/>
+          </a:prstGeom>
+          <a:noFill/>
+        </p:spPr>
+        <p:txBody>
+          <a:bodyPr wrap="square">
+            <a:spAutoFit/>
+          </a:bodyPr>
+          <a:lstStyle/>
+          <a:p>
+            <a:r>
+              <a:rPr sz="1300" b="0">
+                <a:solidFill>
+                  <a:srgbClr val="333333"/>
+                </a:solidFill>
+                <a:latin typeface="Fira Sans"/>
+              </a:rPr>
+              <a:t>Las cuatro medidas de iris se resumen en dos componentes que reúnen el 96% de la variación. La primera (73%) pesa casi igual el largo y el ancho del pétalo y el largo del sépalo (0,52 a 0,58): el tamaño de la flor. La segunda (23%) es casi solo el ancho del sépalo (0,92). PCA no conoce la especie y aun así las tres quedan separadas a lo largo de la primera componente.</a:t>
             </a:r>
           </a:p>
         </p:txBody>
@@ -6240,7 +6288,7 @@
             <a:avLst/>
           </a:prstGeom>
           <a:solidFill>
-            <a:srgbClr val="FAFBFC"/>
+            <a:srgbClr val="1D3557"/>
           </a:solidFill>
           <a:ln>
             <a:noFill/>
@@ -6277,8 +6325,8 @@
         </p:nvSpPr>
         <p:spPr>
           <a:xfrm>
-            <a:off x="402336" y="301752"/>
-            <a:ext cx="8348472" cy="795528"/>
+            <a:off x="603504" y="1847088"/>
+            <a:ext cx="7946136" cy="1399032"/>
           </a:xfrm>
           <a:prstGeom prst="rect">
             <a:avLst/>
@@ -6292,120 +6340,24 @@
           <a:lstStyle/>
           <a:p>
             <a:r>
-              <a:rPr sz="2800" b="1">
-                <a:solidFill>
-                  <a:srgbClr val="0F0F0F"/>
-                </a:solidFill>
-                <a:latin typeface="Fira Sans"/>
-              </a:rPr>
-              <a:t>¿Cuándo conviene?</a:t>
-            </a:r>
-          </a:p>
-        </p:txBody>
-      </p:sp>
-      <p:sp>
-        <p:nvSpPr>
-          <p:cNvPr id="4" name="TextBox 3"/>
-          <p:cNvSpPr txBox="1"/>
-          <p:nvPr/>
-        </p:nvSpPr>
-        <p:spPr>
-          <a:xfrm>
-            <a:off x="704088" y="1353312"/>
-            <a:ext cx="7744968" cy="3300984"/>
-          </a:xfrm>
-          <a:prstGeom prst="rect">
-            <a:avLst/>
-          </a:prstGeom>
-          <a:noFill/>
-        </p:spPr>
-        <p:txBody>
-          <a:bodyPr wrap="square">
-            <a:spAutoFit/>
-          </a:bodyPr>
-          <a:lstStyle/>
-          <a:p>
-            <a:pPr>
-              <a:lnSpc>
-                <a:spcPct val="112000"/>
-              </a:lnSpc>
-              <a:spcAft>
-                <a:spcPts val="900"/>
-              </a:spcAft>
-            </a:pPr>
-            <a:r>
-              <a:rPr sz="1800" b="1">
+              <a:rPr sz="3400" b="1">
+                <a:solidFill>
+                  <a:srgbClr val="FFFFFF"/>
+                </a:solidFill>
+                <a:latin typeface="Fira Sans"/>
+              </a:rPr>
+              <a:t>4. Cuándo</a:t>
+            </a:r>
+          </a:p>
+          <a:p>
+            <a:r>
+              <a:rPr sz="1800" b="0">
                 <a:solidFill>
                   <a:srgbClr val="E0A437"/>
                 </a:solidFill>
                 <a:latin typeface="Fira Sans"/>
               </a:rPr>
-              <a:t>▸ </a:t>
-            </a:r>
-            <a:r>
-              <a:rPr sz="1800" b="1">
-                <a:solidFill>
-                  <a:srgbClr val="1D3557"/>
-                </a:solidFill>
-                <a:latin typeface="Fira Sans"/>
-              </a:rPr>
-              <a:t>Con muchas variables numéricas que se correlacionan en bloques, como en la matriz de la clase 7.</a:t>
-            </a:r>
-          </a:p>
-          <a:p>
-            <a:pPr>
-              <a:lnSpc>
-                <a:spcPct val="112000"/>
-              </a:lnSpc>
-              <a:spcAft>
-                <a:spcPts val="900"/>
-              </a:spcAft>
-            </a:pPr>
-            <a:r>
-              <a:rPr sz="1800" b="1">
-                <a:solidFill>
-                  <a:srgbClr val="E0A437"/>
-                </a:solidFill>
-                <a:latin typeface="Fira Sans"/>
-              </a:rPr>
-              <a:t>▸ </a:t>
-            </a:r>
-            <a:r>
-              <a:rPr sz="1800" b="0">
-                <a:solidFill>
-                  <a:srgbClr val="000000"/>
-                </a:solidFill>
-                <a:latin typeface="Fira Sans"/>
-              </a:rPr>
-              <a:t>Para mirar los datos en un plano, o para entregarle a un modelo menos entradas.</a:t>
-            </a:r>
-          </a:p>
-          <a:p>
-            <a:pPr>
-              <a:lnSpc>
-                <a:spcPct val="112000"/>
-              </a:lnSpc>
-              <a:spcAft>
-                <a:spcPts val="900"/>
-              </a:spcAft>
-            </a:pPr>
-            <a:r>
-              <a:rPr sz="1800" b="1">
-                <a:solidFill>
-                  <a:srgbClr val="E0A437"/>
-                </a:solidFill>
-                <a:latin typeface="Fira Sans"/>
-              </a:rPr>
-              <a:t>▸ </a:t>
-            </a:r>
-            <a:r>
-              <a:rPr sz="1800" b="0">
-                <a:solidFill>
-                  <a:srgbClr val="000000"/>
-                </a:solidFill>
-                <a:latin typeface="Fira Sans"/>
-              </a:rPr>
-              <a:t>No aporta si las variables son pocas y distintas entre sí: no hay nada que resumir.</a:t>
+              <a:t>Cuándo conviene y cuándo no</a:t>
             </a:r>
           </a:p>
         </p:txBody>
@@ -6501,7 +6453,7 @@
                 </a:solidFill>
                 <a:latin typeface="Fira Sans"/>
               </a:rPr>
-              <a:t>Tres precauciones</a:t>
+              <a:t>¿Cuándo conviene?</a:t>
             </a:r>
           </a:p>
         </p:txBody>
@@ -6552,7 +6504,7 @@
                 </a:solidFill>
                 <a:latin typeface="Fira Sans"/>
               </a:rPr>
-              <a:t>Las variables categóricas (las dummies de la clase 6) no entran bien en el cálculo: se dejan fuera o se tratan aparte.</a:t>
+              <a:t>Con muchas variables numéricas que se correlacionan en bloques, como en la matriz de la clase 7.</a:t>
             </a:r>
           </a:p>
           <a:p>
@@ -6580,7 +6532,7 @@
                 </a:solidFill>
                 <a:latin typeface="Fira Sans"/>
               </a:rPr>
-              <a:t>Las componentes no siempre tienen una lectura clara. Aquí sí (la carrera; la temporada frente a la carrera), pero no está garantizado.</a:t>
+              <a:t>Para mirar los datos en un plano, o para entregarle a un modelo menos entradas.</a:t>
             </a:r>
           </a:p>
           <a:p>
@@ -6608,7 +6560,7 @@
                 </a:solidFill>
                 <a:latin typeface="Fira Sans"/>
               </a:rPr>
-              <a:t>Es no supervisado: la dirección de más variación no es necesariamente la que mejor predice la respuesta. Ridge y Lasso eligen mirando Y; PCA no la mira.</a:t>
+              <a:t>No aporta si las variables son pocas y distintas entre sí: no hay nada que resumir.</a:t>
             </a:r>
           </a:p>
         </p:txBody>
@@ -6704,124 +6656,21 @@
                 </a:solidFill>
                 <a:latin typeface="Fira Sans"/>
               </a:rPr>
-              <a:t>En el código: cinco líneas</a:t>
-            </a:r>
-          </a:p>
-        </p:txBody>
-      </p:sp>
-      <p:sp>
-        <p:nvSpPr>
-          <p:cNvPr id="4" name="Rectangle 3"/>
-          <p:cNvSpPr/>
-          <p:nvPr/>
-        </p:nvSpPr>
-        <p:spPr>
-          <a:xfrm>
-            <a:off x="704088" y="1280160"/>
-            <a:ext cx="7744968" cy="2880360"/>
-          </a:xfrm>
-          <a:prstGeom prst="rect">
-            <a:avLst/>
-          </a:prstGeom>
-          <a:solidFill>
-            <a:srgbClr val="F0F2F5"/>
-          </a:solidFill>
-          <a:ln>
-            <a:solidFill>
-              <a:srgbClr val="D8DDE3"/>
-            </a:solidFill>
-          </a:ln>
-          <a:effectLst/>
-        </p:spPr>
-        <p:style>
-          <a:lnRef idx="1">
-            <a:schemeClr val="accent1"/>
-          </a:lnRef>
-          <a:fillRef idx="3">
-            <a:schemeClr val="accent1"/>
-          </a:fillRef>
-          <a:effectRef idx="2">
-            <a:schemeClr val="accent1"/>
-          </a:effectRef>
-          <a:fontRef idx="minor">
-            <a:schemeClr val="lt1"/>
-          </a:fontRef>
-        </p:style>
-        <p:txBody>
-          <a:bodyPr rtlCol="0" anchor="ctr" wrap="square" lIns="228600" tIns="137160"/>
-          <a:lstStyle/>
-          <a:p>
-            <a:pPr/>
-            <a:r>
-              <a:rPr sz="1500" b="0">
-                <a:solidFill>
-                  <a:srgbClr val="1D3557"/>
-                </a:solidFill>
-                <a:latin typeface="Menlo"/>
-              </a:rPr>
-              <a:t>Z = StandardScaler().fit_transform(X)  # 1. estandarizar</a:t>
-            </a:r>
-          </a:p>
-          <a:p>
-            <a:pPr/>
-            <a:r>
-              <a:rPr sz="1500" b="0">
-                <a:solidFill>
-                  <a:srgbClr val="1D3557"/>
-                </a:solidFill>
-                <a:latin typeface="Menlo"/>
-              </a:rPr>
-              <a:t>pca = PCA().fit(Z)                     # 2. las componentes</a:t>
-            </a:r>
-          </a:p>
-          <a:p>
-            <a:pPr/>
-            <a:r>
-              <a:rPr sz="1500" b="0">
-                <a:solidFill>
-                  <a:srgbClr val="1D3557"/>
-                </a:solidFill>
-                <a:latin typeface="Menlo"/>
-              </a:rPr>
-              <a:t>pca.explained_variance_ratio_          # 3. cuánto explica</a:t>
-            </a:r>
-          </a:p>
-          <a:p>
-            <a:pPr/>
-            <a:r>
-              <a:rPr sz="1500" b="0">
-                <a:solidFill>
-                  <a:srgbClr val="1D3557"/>
-                </a:solidFill>
-                <a:latin typeface="Menlo"/>
-              </a:rPr>
-              <a:t>pca.components_                        # 4. los pesos</a:t>
-            </a:r>
-          </a:p>
-          <a:p>
-            <a:pPr/>
-            <a:r>
-              <a:rPr sz="1500" b="0">
-                <a:solidFill>
-                  <a:srgbClr val="1D3557"/>
-                </a:solidFill>
-                <a:latin typeface="Menlo"/>
-              </a:rPr>
-              <a:t>puntajes = pca.transform(Z)            # 5. los puntajes</a:t>
-            </a:r>
-          </a:p>
-        </p:txBody>
-      </p:sp>
-      <p:sp>
-        <p:nvSpPr>
-          <p:cNvPr id="5" name="TextBox 4"/>
+              <a:t>Tres precauciones</a:t>
+            </a:r>
+          </a:p>
+        </p:txBody>
+      </p:sp>
+      <p:sp>
+        <p:nvSpPr>
+          <p:cNvPr id="4" name="TextBox 3"/>
           <p:cNvSpPr txBox="1"/>
           <p:nvPr/>
         </p:nvSpPr>
         <p:spPr>
           <a:xfrm>
-            <a:off x="704088" y="4389120"/>
-            <a:ext cx="7744968" cy="1097280"/>
+            <a:off x="704088" y="1353312"/>
+            <a:ext cx="7744968" cy="3300984"/>
           </a:xfrm>
           <a:prstGeom prst="rect">
             <a:avLst/>
@@ -6843,7 +6692,7 @@
               </a:spcAft>
             </a:pPr>
             <a:r>
-              <a:rPr sz="1600" b="1">
+              <a:rPr sz="1800" b="1">
                 <a:solidFill>
                   <a:srgbClr val="E0A437"/>
                 </a:solidFill>
@@ -6852,13 +6701,69 @@
               <a:t>▸ </a:t>
             </a:r>
             <a:r>
-              <a:rPr sz="1600" b="0">
+              <a:rPr sz="1800" b="1">
+                <a:solidFill>
+                  <a:srgbClr val="1D3557"/>
+                </a:solidFill>
+                <a:latin typeface="Fira Sans"/>
+              </a:rPr>
+              <a:t>Las variables categóricas (las dummies de la clase 6) no entran bien en el cálculo: se dejan fuera o se tratan aparte.</a:t>
+            </a:r>
+          </a:p>
+          <a:p>
+            <a:pPr>
+              <a:lnSpc>
+                <a:spcPct val="112000"/>
+              </a:lnSpc>
+              <a:spcAft>
+                <a:spcPts val="900"/>
+              </a:spcAft>
+            </a:pPr>
+            <a:r>
+              <a:rPr sz="1800" b="1">
+                <a:solidFill>
+                  <a:srgbClr val="E0A437"/>
+                </a:solidFill>
+                <a:latin typeface="Fira Sans"/>
+              </a:rPr>
+              <a:t>▸ </a:t>
+            </a:r>
+            <a:r>
+              <a:rPr sz="1800" b="0">
                 <a:solidFill>
                   <a:srgbClr val="000000"/>
                 </a:solidFill>
                 <a:latin typeface="Fira Sans"/>
               </a:rPr>
-              <a:t>El ejemplo completo, con las tablas de pesos y los gráficos de la clase, está en el notebook 08_componentes_principales.ipynb.</a:t>
+              <a:t>Las componentes no siempre tienen una lectura clara. Aquí sí (la carrera; la temporada frente a la carrera), pero no está garantizado.</a:t>
+            </a:r>
+          </a:p>
+          <a:p>
+            <a:pPr>
+              <a:lnSpc>
+                <a:spcPct val="112000"/>
+              </a:lnSpc>
+              <a:spcAft>
+                <a:spcPts val="900"/>
+              </a:spcAft>
+            </a:pPr>
+            <a:r>
+              <a:rPr sz="1800" b="1">
+                <a:solidFill>
+                  <a:srgbClr val="E0A437"/>
+                </a:solidFill>
+                <a:latin typeface="Fira Sans"/>
+              </a:rPr>
+              <a:t>▸ </a:t>
+            </a:r>
+            <a:r>
+              <a:rPr sz="1800" b="0">
+                <a:solidFill>
+                  <a:srgbClr val="000000"/>
+                </a:solidFill>
+                <a:latin typeface="Fira Sans"/>
+              </a:rPr>
+              <a:t>Es no supervisado: la dirección de más variación no es necesariamente la que mejor predice la respuesta. Ridge y Lasso eligen mirando Y; PCA no la mira.</a:t>
             </a:r>
           </a:p>
         </p:txBody>
@@ -6896,7 +6801,7 @@
             <a:avLst/>
           </a:prstGeom>
           <a:solidFill>
-            <a:srgbClr val="1D3557"/>
+            <a:srgbClr val="FAFBFC"/>
           </a:solidFill>
           <a:ln>
             <a:noFill/>
@@ -6933,8 +6838,8 @@
         </p:nvSpPr>
         <p:spPr>
           <a:xfrm>
-            <a:off x="603504" y="1847088"/>
-            <a:ext cx="7946136" cy="1399032"/>
+            <a:off x="402336" y="301752"/>
+            <a:ext cx="8348472" cy="795528"/>
           </a:xfrm>
           <a:prstGeom prst="rect">
             <a:avLst/>
@@ -6948,24 +6853,167 @@
           <a:lstStyle/>
           <a:p>
             <a:r>
-              <a:rPr sz="3400" b="1">
-                <a:solidFill>
-                  <a:srgbClr val="FFFFFF"/>
-                </a:solidFill>
-                <a:latin typeface="Fira Sans"/>
-              </a:rPr>
-              <a:t>5. Cierre del módulo</a:t>
-            </a:r>
-          </a:p>
-          <a:p>
-            <a:r>
-              <a:rPr sz="1800" b="0">
+              <a:rPr sz="2800" b="1">
+                <a:solidFill>
+                  <a:srgbClr val="0F0F0F"/>
+                </a:solidFill>
+                <a:latin typeface="Fira Sans"/>
+              </a:rPr>
+              <a:t>En el código: cinco líneas</a:t>
+            </a:r>
+          </a:p>
+        </p:txBody>
+      </p:sp>
+      <p:sp>
+        <p:nvSpPr>
+          <p:cNvPr id="4" name="Rectangle 3"/>
+          <p:cNvSpPr/>
+          <p:nvPr/>
+        </p:nvSpPr>
+        <p:spPr>
+          <a:xfrm>
+            <a:off x="704088" y="1280160"/>
+            <a:ext cx="7744968" cy="2880360"/>
+          </a:xfrm>
+          <a:prstGeom prst="rect">
+            <a:avLst/>
+          </a:prstGeom>
+          <a:solidFill>
+            <a:srgbClr val="F0F2F5"/>
+          </a:solidFill>
+          <a:ln>
+            <a:solidFill>
+              <a:srgbClr val="D8DDE3"/>
+            </a:solidFill>
+          </a:ln>
+          <a:effectLst/>
+        </p:spPr>
+        <p:style>
+          <a:lnRef idx="1">
+            <a:schemeClr val="accent1"/>
+          </a:lnRef>
+          <a:fillRef idx="3">
+            <a:schemeClr val="accent1"/>
+          </a:fillRef>
+          <a:effectRef idx="2">
+            <a:schemeClr val="accent1"/>
+          </a:effectRef>
+          <a:fontRef idx="minor">
+            <a:schemeClr val="lt1"/>
+          </a:fontRef>
+        </p:style>
+        <p:txBody>
+          <a:bodyPr rtlCol="0" anchor="ctr" wrap="square" lIns="228600" tIns="137160"/>
+          <a:lstStyle/>
+          <a:p>
+            <a:pPr/>
+            <a:r>
+              <a:rPr sz="1500" b="0">
+                <a:solidFill>
+                  <a:srgbClr val="1D3557"/>
+                </a:solidFill>
+                <a:latin typeface="Menlo"/>
+              </a:rPr>
+              <a:t>Z = StandardScaler().fit_transform(X)  # 1. estandarizar</a:t>
+            </a:r>
+          </a:p>
+          <a:p>
+            <a:pPr/>
+            <a:r>
+              <a:rPr sz="1500" b="0">
+                <a:solidFill>
+                  <a:srgbClr val="1D3557"/>
+                </a:solidFill>
+                <a:latin typeface="Menlo"/>
+              </a:rPr>
+              <a:t>pca = PCA().fit(Z)                     # 2. las componentes</a:t>
+            </a:r>
+          </a:p>
+          <a:p>
+            <a:pPr/>
+            <a:r>
+              <a:rPr sz="1500" b="0">
+                <a:solidFill>
+                  <a:srgbClr val="1D3557"/>
+                </a:solidFill>
+                <a:latin typeface="Menlo"/>
+              </a:rPr>
+              <a:t>pca.explained_variance_ratio_          # 3. cuánto explica</a:t>
+            </a:r>
+          </a:p>
+          <a:p>
+            <a:pPr/>
+            <a:r>
+              <a:rPr sz="1500" b="0">
+                <a:solidFill>
+                  <a:srgbClr val="1D3557"/>
+                </a:solidFill>
+                <a:latin typeface="Menlo"/>
+              </a:rPr>
+              <a:t>pca.components_                        # 4. los pesos</a:t>
+            </a:r>
+          </a:p>
+          <a:p>
+            <a:pPr/>
+            <a:r>
+              <a:rPr sz="1500" b="0">
+                <a:solidFill>
+                  <a:srgbClr val="1D3557"/>
+                </a:solidFill>
+                <a:latin typeface="Menlo"/>
+              </a:rPr>
+              <a:t>puntajes = pca.transform(Z)            # 5. los puntajes</a:t>
+            </a:r>
+          </a:p>
+        </p:txBody>
+      </p:sp>
+      <p:sp>
+        <p:nvSpPr>
+          <p:cNvPr id="5" name="TextBox 4"/>
+          <p:cNvSpPr txBox="1"/>
+          <p:nvPr/>
+        </p:nvSpPr>
+        <p:spPr>
+          <a:xfrm>
+            <a:off x="704088" y="4389120"/>
+            <a:ext cx="7744968" cy="1097280"/>
+          </a:xfrm>
+          <a:prstGeom prst="rect">
+            <a:avLst/>
+          </a:prstGeom>
+          <a:noFill/>
+        </p:spPr>
+        <p:txBody>
+          <a:bodyPr wrap="square">
+            <a:spAutoFit/>
+          </a:bodyPr>
+          <a:lstStyle/>
+          <a:p>
+            <a:pPr>
+              <a:lnSpc>
+                <a:spcPct val="112000"/>
+              </a:lnSpc>
+              <a:spcAft>
+                <a:spcPts val="900"/>
+              </a:spcAft>
+            </a:pPr>
+            <a:r>
+              <a:rPr sz="1600" b="1">
                 <a:solidFill>
                   <a:srgbClr val="E0A437"/>
                 </a:solidFill>
                 <a:latin typeface="Fira Sans"/>
               </a:rPr>
-              <a:t>Ocho clases, un hilo</a:t>
+              <a:t>▸ </a:t>
+            </a:r>
+            <a:r>
+              <a:rPr sz="1600" b="0">
+                <a:solidFill>
+                  <a:srgbClr val="000000"/>
+                </a:solidFill>
+                <a:latin typeface="Fira Sans"/>
+              </a:rPr>
+              <a:t>El ejemplo completo, con las tablas de pesos y los gráficos de la clase, está en el notebook 08_componentes_principales.ipynb.</a:t>
             </a:r>
           </a:p>
         </p:txBody>
@@ -7003,7 +7051,7 @@
             <a:avLst/>
           </a:prstGeom>
           <a:solidFill>
-            <a:srgbClr val="FAFBFC"/>
+            <a:srgbClr val="1D3557"/>
           </a:solidFill>
           <a:ln>
             <a:noFill/>
@@ -7040,8 +7088,8 @@
         </p:nvSpPr>
         <p:spPr>
           <a:xfrm>
-            <a:off x="402336" y="301752"/>
-            <a:ext cx="8348472" cy="795528"/>
+            <a:off x="603504" y="1847088"/>
+            <a:ext cx="7946136" cy="1399032"/>
           </a:xfrm>
           <a:prstGeom prst="rect">
             <a:avLst/>
@@ -7055,71 +7103,24 @@
           <a:lstStyle/>
           <a:p>
             <a:r>
-              <a:rPr sz="2800" b="1">
-                <a:solidFill>
-                  <a:srgbClr val="0F0F0F"/>
-                </a:solidFill>
-                <a:latin typeface="Fira Sans"/>
-              </a:rPr>
-              <a:t>El módulo en una página</a:t>
-            </a:r>
-          </a:p>
-        </p:txBody>
-      </p:sp>
-      <p:pic>
-        <p:nvPicPr>
-          <p:cNvPr id="4" name="Picture 3" descr="c8_07_mapa_modulo.png"/>
-          <p:cNvPicPr>
-            <a:picLocks noChangeAspect="1"/>
-          </p:cNvPicPr>
-          <p:nvPr/>
-        </p:nvPicPr>
-        <p:blipFill>
-          <a:blip r:embed="rId2"/>
-          <a:stretch>
-            <a:fillRect/>
-          </a:stretch>
-        </p:blipFill>
-        <p:spPr>
-          <a:xfrm>
-            <a:off x="1029546" y="1143000"/>
-            <a:ext cx="7084906" cy="3099816"/>
-          </a:xfrm>
-          <a:prstGeom prst="rect">
-            <a:avLst/>
-          </a:prstGeom>
-        </p:spPr>
-      </p:pic>
-      <p:sp>
-        <p:nvSpPr>
-          <p:cNvPr id="5" name="TextBox 4"/>
-          <p:cNvSpPr txBox="1"/>
-          <p:nvPr/>
-        </p:nvSpPr>
-        <p:spPr>
-          <a:xfrm>
-            <a:off x="704088" y="4379976"/>
-            <a:ext cx="7744968" cy="512064"/>
-          </a:xfrm>
-          <a:prstGeom prst="rect">
-            <a:avLst/>
-          </a:prstGeom>
-          <a:noFill/>
-        </p:spPr>
-        <p:txBody>
-          <a:bodyPr wrap="square">
-            <a:spAutoFit/>
-          </a:bodyPr>
-          <a:lstStyle/>
-          <a:p>
-            <a:r>
-              <a:rPr sz="1300" b="0">
-                <a:solidFill>
-                  <a:srgbClr val="333333"/>
-                </a:solidFill>
-                <a:latin typeface="Fira Sans"/>
-              </a:rPr>
-              <a:t>Cada clase dejó una idea. Juntas, son lo que el módulo enseñó: cómo se llega de una pregunta y unos datos a un resultado, y cómo se lee ese resultado con su incertidumbre.</a:t>
+              <a:rPr sz="3400" b="1">
+                <a:solidFill>
+                  <a:srgbClr val="FFFFFF"/>
+                </a:solidFill>
+                <a:latin typeface="Fira Sans"/>
+              </a:rPr>
+              <a:t>5. Cierre del módulo</a:t>
+            </a:r>
+          </a:p>
+          <a:p>
+            <a:r>
+              <a:rPr sz="1800" b="0">
+                <a:solidFill>
+                  <a:srgbClr val="E0A437"/>
+                </a:solidFill>
+                <a:latin typeface="Fira Sans"/>
+              </a:rPr>
+              <a:t>Ocho clases, un hilo</a:t>
             </a:r>
           </a:p>
         </p:txBody>
@@ -7474,21 +7475,45 @@
                 </a:solidFill>
                 <a:latin typeface="Fira Sans"/>
               </a:rPr>
-              <a:t>Lo que sigue en el diplomado</a:t>
-            </a:r>
-          </a:p>
-        </p:txBody>
-      </p:sp>
-      <p:sp>
-        <p:nvSpPr>
-          <p:cNvPr id="4" name="TextBox 3"/>
+              <a:t>El módulo en una página</a:t>
+            </a:r>
+          </a:p>
+        </p:txBody>
+      </p:sp>
+      <p:pic>
+        <p:nvPicPr>
+          <p:cNvPr id="4" name="Picture 3" descr="c8_07_mapa_modulo.png"/>
+          <p:cNvPicPr>
+            <a:picLocks noChangeAspect="1"/>
+          </p:cNvPicPr>
+          <p:nvPr/>
+        </p:nvPicPr>
+        <p:blipFill>
+          <a:blip r:embed="rId2"/>
+          <a:stretch>
+            <a:fillRect/>
+          </a:stretch>
+        </p:blipFill>
+        <p:spPr>
+          <a:xfrm>
+            <a:off x="1029546" y="1143000"/>
+            <a:ext cx="7084906" cy="3099816"/>
+          </a:xfrm>
+          <a:prstGeom prst="rect">
+            <a:avLst/>
+          </a:prstGeom>
+        </p:spPr>
+      </p:pic>
+      <p:sp>
+        <p:nvSpPr>
+          <p:cNvPr id="5" name="TextBox 4"/>
           <p:cNvSpPr txBox="1"/>
           <p:nvPr/>
         </p:nvSpPr>
         <p:spPr>
           <a:xfrm>
-            <a:off x="704088" y="1353312"/>
-            <a:ext cx="7744968" cy="3300984"/>
+            <a:off x="704088" y="4379976"/>
+            <a:ext cx="7744968" cy="512064"/>
           </a:xfrm>
           <a:prstGeom prst="rect">
             <a:avLst/>
@@ -7501,115 +7526,14 @@
           </a:bodyPr>
           <a:lstStyle/>
           <a:p>
-            <a:pPr>
-              <a:lnSpc>
-                <a:spcPct val="112000"/>
-              </a:lnSpc>
-              <a:spcAft>
-                <a:spcPts val="900"/>
-              </a:spcAft>
-            </a:pPr>
-            <a:r>
-              <a:rPr sz="1800" b="1">
-                <a:solidFill>
-                  <a:srgbClr val="E0A437"/>
-                </a:solidFill>
-                <a:latin typeface="Fira Sans"/>
-              </a:rPr>
-              <a:t>▸ </a:t>
-            </a:r>
-            <a:r>
-              <a:rPr sz="1800" b="1">
-                <a:solidFill>
-                  <a:srgbClr val="1D3557"/>
-                </a:solidFill>
-                <a:latin typeface="Fira Sans"/>
-              </a:rPr>
-              <a:t>Módulo 2, Visualización e Inteligencia de Negocios: visualización efectiva, narrativas con datos y métricas de negocio.</a:t>
-            </a:r>
-          </a:p>
-          <a:p>
-            <a:pPr>
-              <a:lnSpc>
-                <a:spcPct val="112000"/>
-              </a:lnSpc>
-              <a:spcAft>
-                <a:spcPts val="900"/>
-              </a:spcAft>
-            </a:pPr>
-            <a:r>
-              <a:rPr sz="1800" b="1">
-                <a:solidFill>
-                  <a:srgbClr val="E0A437"/>
-                </a:solidFill>
-                <a:latin typeface="Fira Sans"/>
-              </a:rPr>
-              <a:t>▸ </a:t>
-            </a:r>
-            <a:r>
-              <a:rPr sz="1800" b="0">
-                <a:solidFill>
-                  <a:srgbClr val="000000"/>
-                </a:solidFill>
-                <a:latin typeface="Fira Sans"/>
-              </a:rPr>
-              <a:t>Módulo 3, Machine Learning para la Toma de Decisiones: aprendizaje supervisado y no supervisado (clustering y PCA en profundidad), evaluación de modelos, redes neuronales y explicabilidad.</a:t>
-            </a:r>
-          </a:p>
-          <a:p>
-            <a:pPr>
-              <a:lnSpc>
-                <a:spcPct val="112000"/>
-              </a:lnSpc>
-              <a:spcAft>
-                <a:spcPts val="900"/>
-              </a:spcAft>
-            </a:pPr>
-            <a:r>
-              <a:rPr sz="1800" b="1">
-                <a:solidFill>
-                  <a:srgbClr val="E0A437"/>
-                </a:solidFill>
-                <a:latin typeface="Fira Sans"/>
-              </a:rPr>
-              <a:t>▸ </a:t>
-            </a:r>
-            <a:r>
-              <a:rPr sz="1800" b="0">
-                <a:solidFill>
-                  <a:srgbClr val="000000"/>
-                </a:solidFill>
-                <a:latin typeface="Fira Sans"/>
-              </a:rPr>
-              <a:t>El Capstone continúa en esos módulos: el primer modelo de hoy es el punto de partida.</a:t>
-            </a:r>
-          </a:p>
-          <a:p>
-            <a:pPr>
-              <a:lnSpc>
-                <a:spcPct val="112000"/>
-              </a:lnSpc>
-              <a:spcAft>
-                <a:spcPts val="900"/>
-              </a:spcAft>
-            </a:pPr>
-            <a:r>
-              <a:rPr sz="1800" b="1">
-                <a:solidFill>
-                  <a:srgbClr val="E0A437"/>
-                </a:solidFill>
-                <a:latin typeface="Fira Sans"/>
-              </a:rPr>
-              <a:t>▸ </a:t>
-            </a:r>
-            <a:r>
-              <a:rPr sz="1800" b="0">
-                <a:solidFill>
-                  <a:srgbClr val="000000"/>
-                </a:solidFill>
-                <a:latin typeface="Fira Sans"/>
-              </a:rPr>
-              <a:t>Lo que se lleva de aquí: leer un resultado con su incertidumbre, juzgar un modelo en datos que no vio, y distinguir describir de encontrar una relación.</a:t>
+            <a:r>
+              <a:rPr sz="1300" b="0">
+                <a:solidFill>
+                  <a:srgbClr val="333333"/>
+                </a:solidFill>
+                <a:latin typeface="Fira Sans"/>
+              </a:rPr>
+              <a:t>Cada clase dejó una idea. Juntas, son lo que el módulo enseñó: cómo se llega de una pregunta y unos datos a un resultado, y cómo se lee ese resultado con su incertidumbre.</a:t>
             </a:r>
           </a:p>
         </p:txBody>
@@ -7705,7 +7629,7 @@
                 </a:solidFill>
                 <a:latin typeface="Fira Sans"/>
               </a:rPr>
-              <a:t>Ahora: las presentaciones del avance</a:t>
+              <a:t>Lo que sigue en el diplomado</a:t>
             </a:r>
           </a:p>
         </p:txBody>
@@ -7756,7 +7680,7 @@
                 </a:solidFill>
                 <a:latin typeface="Fira Sans"/>
               </a:rPr>
-              <a:t>Ocho equipos, en el orden en que se ofrezcan. Máximo 10 minutos por equipo; el tiempo se controla. Después, preguntas de la profesora y del curso.</a:t>
+              <a:t>Módulo 2, Visualización e Inteligencia de Negocios: visualización efectiva, narrativas con datos y métricas de negocio.</a:t>
             </a:r>
           </a:p>
           <a:p>
@@ -7784,7 +7708,7 @@
                 </a:solidFill>
                 <a:latin typeface="Fira Sans"/>
               </a:rPr>
-              <a:t>Se evalúa el avance, no un resultado final: el modelo es un primer intento. La exigencia está en el tiempo, la claridad, la explicación de los gráficos y las relaciones, y en advertir qué falta o qué no tiene sentido.</a:t>
+              <a:t>Módulo 3, Machine Learning para la Toma de Decisiones: aprendizaje supervisado y no supervisado (clustering y PCA en profundidad), evaluación de modelos, redes neuronales y explicabilidad.</a:t>
             </a:r>
           </a:p>
           <a:p>
@@ -7812,7 +7736,7 @@
                 </a:solidFill>
                 <a:latin typeface="Fira Sans"/>
               </a:rPr>
-              <a:t>Las slides, en PDF, al Aula hasta las 20:30: un envío por equipo con los nombres.</a:t>
+              <a:t>El Capstone continúa en esos módulos: el primer modelo de hoy es el punto de partida.</a:t>
             </a:r>
           </a:p>
           <a:p>
@@ -7840,7 +7764,7 @@
                 </a:solidFill>
                 <a:latin typeface="Fira Sans"/>
               </a:rPr>
-              <a:t>El informe escrito, el viernes 25 de septiembre por el Aula: máximo 7 páginas, con su rúbrica publicada.</a:t>
+              <a:t>Lo que se lleva de aquí: leer un resultado con su incertidumbre, juzgar un modelo en datos que no vio, y distinguir describir de encontrar una relación.</a:t>
             </a:r>
           </a:p>
         </p:txBody>
@@ -7854,6 +7778,237 @@
 </file>
 
 <file path=ppt/slides/slide32.xml><?xml version="1.0" encoding="utf-8"?>
+<p:sld xmlns:a="http://schemas.openxmlformats.org/drawingml/2006/main" xmlns:p="http://schemas.openxmlformats.org/presentationml/2006/main" xmlns:r="http://schemas.openxmlformats.org/officeDocument/2006/relationships">
+  <p:cSld>
+    <p:spTree>
+      <p:nvGrpSpPr>
+        <p:cNvPr id="1" name=""/>
+        <p:cNvGrpSpPr/>
+        <p:nvPr/>
+      </p:nvGrpSpPr>
+      <p:grpSpPr/>
+      <p:sp>
+        <p:nvSpPr>
+          <p:cNvPr id="2" name="Rectangle 1"/>
+          <p:cNvSpPr/>
+          <p:nvPr/>
+        </p:nvSpPr>
+        <p:spPr>
+          <a:xfrm>
+            <a:off x="0" y="0"/>
+            <a:ext cx="9144000" cy="5138928"/>
+          </a:xfrm>
+          <a:prstGeom prst="rect">
+            <a:avLst/>
+          </a:prstGeom>
+          <a:solidFill>
+            <a:srgbClr val="FAFBFC"/>
+          </a:solidFill>
+          <a:ln>
+            <a:noFill/>
+          </a:ln>
+          <a:effectLst/>
+        </p:spPr>
+        <p:style>
+          <a:lnRef idx="1">
+            <a:schemeClr val="accent1"/>
+          </a:lnRef>
+          <a:fillRef idx="3">
+            <a:schemeClr val="accent1"/>
+          </a:fillRef>
+          <a:effectRef idx="2">
+            <a:schemeClr val="accent1"/>
+          </a:effectRef>
+          <a:fontRef idx="minor">
+            <a:schemeClr val="lt1"/>
+          </a:fontRef>
+        </p:style>
+        <p:txBody>
+          <a:bodyPr rtlCol="0" anchor="ctr"/>
+          <a:lstStyle/>
+          <a:p>
+            <a:pPr algn="ctr"/>
+          </a:p>
+        </p:txBody>
+      </p:sp>
+      <p:sp>
+        <p:nvSpPr>
+          <p:cNvPr id="3" name="TextBox 2"/>
+          <p:cNvSpPr txBox="1"/>
+          <p:nvPr/>
+        </p:nvSpPr>
+        <p:spPr>
+          <a:xfrm>
+            <a:off x="402336" y="301752"/>
+            <a:ext cx="8348472" cy="795528"/>
+          </a:xfrm>
+          <a:prstGeom prst="rect">
+            <a:avLst/>
+          </a:prstGeom>
+          <a:noFill/>
+        </p:spPr>
+        <p:txBody>
+          <a:bodyPr wrap="square">
+            <a:spAutoFit/>
+          </a:bodyPr>
+          <a:lstStyle/>
+          <a:p>
+            <a:r>
+              <a:rPr sz="2800" b="1">
+                <a:solidFill>
+                  <a:srgbClr val="0F0F0F"/>
+                </a:solidFill>
+                <a:latin typeface="Fira Sans"/>
+              </a:rPr>
+              <a:t>Ahora: las presentaciones del avance</a:t>
+            </a:r>
+          </a:p>
+        </p:txBody>
+      </p:sp>
+      <p:sp>
+        <p:nvSpPr>
+          <p:cNvPr id="4" name="TextBox 3"/>
+          <p:cNvSpPr txBox="1"/>
+          <p:nvPr/>
+        </p:nvSpPr>
+        <p:spPr>
+          <a:xfrm>
+            <a:off x="704088" y="1353312"/>
+            <a:ext cx="7744968" cy="3300984"/>
+          </a:xfrm>
+          <a:prstGeom prst="rect">
+            <a:avLst/>
+          </a:prstGeom>
+          <a:noFill/>
+        </p:spPr>
+        <p:txBody>
+          <a:bodyPr wrap="square">
+            <a:spAutoFit/>
+          </a:bodyPr>
+          <a:lstStyle/>
+          <a:p>
+            <a:pPr>
+              <a:lnSpc>
+                <a:spcPct val="112000"/>
+              </a:lnSpc>
+              <a:spcAft>
+                <a:spcPts val="900"/>
+              </a:spcAft>
+            </a:pPr>
+            <a:r>
+              <a:rPr sz="1800" b="1">
+                <a:solidFill>
+                  <a:srgbClr val="E0A437"/>
+                </a:solidFill>
+                <a:latin typeface="Fira Sans"/>
+              </a:rPr>
+              <a:t>▸ </a:t>
+            </a:r>
+            <a:r>
+              <a:rPr sz="1800" b="1">
+                <a:solidFill>
+                  <a:srgbClr val="1D3557"/>
+                </a:solidFill>
+                <a:latin typeface="Fira Sans"/>
+              </a:rPr>
+              <a:t>Ocho equipos, en el orden en que se ofrezcan. Máximo 10 minutos por equipo; el tiempo se controla. Después, preguntas de la profesora y del curso.</a:t>
+            </a:r>
+          </a:p>
+          <a:p>
+            <a:pPr>
+              <a:lnSpc>
+                <a:spcPct val="112000"/>
+              </a:lnSpc>
+              <a:spcAft>
+                <a:spcPts val="900"/>
+              </a:spcAft>
+            </a:pPr>
+            <a:r>
+              <a:rPr sz="1800" b="1">
+                <a:solidFill>
+                  <a:srgbClr val="E0A437"/>
+                </a:solidFill>
+                <a:latin typeface="Fira Sans"/>
+              </a:rPr>
+              <a:t>▸ </a:t>
+            </a:r>
+            <a:r>
+              <a:rPr sz="1800" b="0">
+                <a:solidFill>
+                  <a:srgbClr val="000000"/>
+                </a:solidFill>
+                <a:latin typeface="Fira Sans"/>
+              </a:rPr>
+              <a:t>Se evalúa el avance, no un resultado final: el modelo es un primer intento. La exigencia está en el tiempo, la claridad, la explicación de los gráficos y las relaciones, y en advertir qué falta o qué no tiene sentido.</a:t>
+            </a:r>
+          </a:p>
+          <a:p>
+            <a:pPr>
+              <a:lnSpc>
+                <a:spcPct val="112000"/>
+              </a:lnSpc>
+              <a:spcAft>
+                <a:spcPts val="900"/>
+              </a:spcAft>
+            </a:pPr>
+            <a:r>
+              <a:rPr sz="1800" b="1">
+                <a:solidFill>
+                  <a:srgbClr val="E0A437"/>
+                </a:solidFill>
+                <a:latin typeface="Fira Sans"/>
+              </a:rPr>
+              <a:t>▸ </a:t>
+            </a:r>
+            <a:r>
+              <a:rPr sz="1800" b="0">
+                <a:solidFill>
+                  <a:srgbClr val="000000"/>
+                </a:solidFill>
+                <a:latin typeface="Fira Sans"/>
+              </a:rPr>
+              <a:t>Las slides, en PDF, al Aula hasta las 20:30: un envío por equipo con los nombres.</a:t>
+            </a:r>
+          </a:p>
+          <a:p>
+            <a:pPr>
+              <a:lnSpc>
+                <a:spcPct val="112000"/>
+              </a:lnSpc>
+              <a:spcAft>
+                <a:spcPts val="900"/>
+              </a:spcAft>
+            </a:pPr>
+            <a:r>
+              <a:rPr sz="1800" b="1">
+                <a:solidFill>
+                  <a:srgbClr val="E0A437"/>
+                </a:solidFill>
+                <a:latin typeface="Fira Sans"/>
+              </a:rPr>
+              <a:t>▸ </a:t>
+            </a:r>
+            <a:r>
+              <a:rPr sz="1800" b="0">
+                <a:solidFill>
+                  <a:srgbClr val="000000"/>
+                </a:solidFill>
+                <a:latin typeface="Fira Sans"/>
+              </a:rPr>
+              <a:t>El informe escrito, el viernes 25 de septiembre por el Aula: máximo 7 páginas, con su rúbrica publicada.</a:t>
+            </a:r>
+          </a:p>
+        </p:txBody>
+      </p:sp>
+    </p:spTree>
+  </p:cSld>
+  <p:clrMapOvr>
+    <a:masterClrMapping/>
+  </p:clrMapOvr>
+</p:sld>
+</file>
+
+<file path=ppt/slides/slide33.xml><?xml version="1.0" encoding="utf-8"?>
 <p:sld xmlns:a="http://schemas.openxmlformats.org/drawingml/2006/main" xmlns:p="http://schemas.openxmlformats.org/presentationml/2006/main" xmlns:r="http://schemas.openxmlformats.org/officeDocument/2006/relationships">
   <p:cSld>
     <p:spTree>

--- a/presentaciones/clase08_componentes_principales.pptx
+++ b/presentaciones/clase08_componentes_principales.pptx
@@ -4318,14 +4318,14 @@
                 </a:solidFill>
                 <a:latin typeface="Fira Sans"/>
               </a:rPr>
-              <a:t>De dónde sale el 99,8%</a:t>
+              <a:t>En la práctica: un puntaje ponderado por jugador</a:t>
             </a:r>
           </a:p>
         </p:txBody>
       </p:sp>
       <p:pic>
         <p:nvPicPr>
-          <p:cNvPr id="4" name="Picture 3" descr="c8_01d_calculo_pve.png"/>
+          <p:cNvPr id="4" name="Picture 3" descr="c8_01b_puntaje_ponderado.png"/>
           <p:cNvPicPr>
             <a:picLocks noChangeAspect="1"/>
           </p:cNvPicPr>
@@ -4339,8 +4339,8 @@
         </p:blipFill>
         <p:spPr>
           <a:xfrm>
-            <a:off x="1840230" y="1143000"/>
-            <a:ext cx="5463540" cy="2331720"/>
+            <a:off x="699515" y="1261139"/>
+            <a:ext cx="7744968" cy="2607505"/>
           </a:xfrm>
           <a:prstGeom prst="rect">
             <a:avLst/>
@@ -4355,8 +4355,8 @@
         </p:nvSpPr>
         <p:spPr>
           <a:xfrm>
-            <a:off x="704088" y="3611879"/>
-            <a:ext cx="7744968" cy="1280160"/>
+            <a:off x="704088" y="4005804"/>
+            <a:ext cx="7744968" cy="768096"/>
           </a:xfrm>
           <a:prstGeom prst="rect">
             <a:avLst/>
@@ -4376,7 +4376,7 @@
                 </a:solidFill>
                 <a:latin typeface="Fira Sans"/>
               </a:rPr>
-              <a:t>La variación de una coordenada se mide con su varianza. Las dos variables estandarizadas tienen varianza 1 y 1: la variación total es 2. Las dos coordenadas nuevas reparten esa misma variación, 1,995 y 0,005, que también suman 2. La parte de la primera es 1,995 / 2 = 99,8%; la de la segunda, 0,005 / 2 = 0,2%. Con 16 variables es lo mismo: la variación total es 16 y cada componente se lleva una parte.</a:t>
+              <a:t>La posición sobre la diagonal se calcula como un puntaje ponderado, igual que el de la admisión universitaria: cada variable entra con un peso y sale un número por jugador. Aquí los pesos no los fija nadie: se calculan para que ese número separe a los jugadores lo más posible.</a:t>
             </a:r>
           </a:p>
         </p:txBody>
@@ -4472,14 +4472,14 @@
                 </a:solidFill>
                 <a:latin typeface="Fira Sans"/>
               </a:rPr>
-              <a:t>En la práctica: un puntaje ponderado por jugador</a:t>
+              <a:t>De dónde sale el 99,8%</a:t>
             </a:r>
           </a:p>
         </p:txBody>
       </p:sp>
       <p:pic>
         <p:nvPicPr>
-          <p:cNvPr id="4" name="Picture 3" descr="c8_01b_puntaje_ponderado.png"/>
+          <p:cNvPr id="4" name="Picture 3" descr="c8_01d_calculo_pve.png"/>
           <p:cNvPicPr>
             <a:picLocks noChangeAspect="1"/>
           </p:cNvPicPr>
@@ -4493,8 +4493,8 @@
         </p:blipFill>
         <p:spPr>
           <a:xfrm>
-            <a:off x="699515" y="1261139"/>
-            <a:ext cx="7744968" cy="2607505"/>
+            <a:off x="1840230" y="1143000"/>
+            <a:ext cx="5463540" cy="2331720"/>
           </a:xfrm>
           <a:prstGeom prst="rect">
             <a:avLst/>
@@ -4509,8 +4509,8 @@
         </p:nvSpPr>
         <p:spPr>
           <a:xfrm>
-            <a:off x="704088" y="4005804"/>
-            <a:ext cx="7744968" cy="768096"/>
+            <a:off x="704088" y="3611879"/>
+            <a:ext cx="7744968" cy="1280160"/>
           </a:xfrm>
           <a:prstGeom prst="rect">
             <a:avLst/>
@@ -4530,7 +4530,7 @@
                 </a:solidFill>
                 <a:latin typeface="Fira Sans"/>
               </a:rPr>
-              <a:t>La posición sobre la diagonal se calcula como un puntaje ponderado, igual que el de la admisión universitaria: cada variable entra con un peso y sale un número por jugador. Aquí los pesos no los fija nadie: se calculan para que ese número separe a los jugadores lo más posible.</a:t>
+              <a:t>La variación de una coordenada se mide con su varianza. Las dos variables estandarizadas tienen varianza 1 y 1: la variación total es 2. Las dos coordenadas nuevas reparten esa misma variación, 1,995 y 0,005, que también suman 2. La parte de la primera es 1,995 / 2 = 99,8%; la de la segunda, 0,005 / 2 = 0,2%. Con 16 variables es lo mismo: la variación total es 16 y cada componente se lleva una parte.</a:t>
             </a:r>
           </a:p>
         </p:txBody>

--- a/presentaciones/clase08_componentes_principales.pptx
+++ b/presentaciones/clase08_componentes_principales.pptx
@@ -38,6 +38,7 @@
     <p:sldId id="286" r:id="rId37"/>
     <p:sldId id="287" r:id="rId38"/>
     <p:sldId id="288" r:id="rId39"/>
+    <p:sldId id="289" r:id="rId40"/>
   </p:sldIdLst>
   <p:sldSz cx="9144000" cy="5138928" type="screen4x3"/>
   <p:notesSz cx="6858000" cy="9144000"/>
@@ -3836,14 +3837,14 @@
                 </a:solidFill>
                 <a:latin typeface="Fira Sans"/>
               </a:rPr>
-              <a:t>Cuánto se conserva y cuánto se pierde</a:t>
+              <a:t>Es un cambio de ejes: las dos componentes</a:t>
             </a:r>
           </a:p>
         </p:txBody>
       </p:sp>
       <p:pic>
         <p:nvPicPr>
-          <p:cNvPr id="4" name="Picture 3" descr="c8_01_dos_variables.png"/>
+          <p:cNvPr id="4" name="Picture 3" descr="c8_01c_componentes.png"/>
           <p:cNvPicPr>
             <a:picLocks noChangeAspect="1"/>
           </p:cNvPicPr>
@@ -3858,7 +3859,7 @@
         <p:spPr>
           <a:xfrm>
             <a:off x="320040" y="1097280"/>
-            <a:ext cx="3689622" cy="3886200"/>
+            <a:ext cx="4032615" cy="3886200"/>
           </a:xfrm>
           <a:prstGeom prst="rect">
             <a:avLst/>
@@ -3873,8 +3874,8 @@
         </p:nvSpPr>
         <p:spPr>
           <a:xfrm>
-            <a:off x="4238261" y="1325880"/>
-            <a:ext cx="4585698" cy="3566160"/>
+            <a:off x="4581254" y="1325880"/>
+            <a:ext cx="4242705" cy="3566160"/>
           </a:xfrm>
           <a:prstGeom prst="rect">
             <a:avLst/>
@@ -3911,7 +3912,7 @@
                 </a:solidFill>
                 <a:latin typeface="Fira Sans"/>
               </a:rPr>
-              <a:t>Para cada dirección que pasa por el centro se mide cuánto se dispersan los puntos a lo largo de ella.</a:t>
+              <a:t>Un cambio de sistema de referencia: en vez de turnos y hits, dos ejes nuevos girados 45°, la diagonal y su perpendicular, con el mismo centro.</a:t>
             </a:r>
           </a:p>
           <a:p>
@@ -3939,7 +3940,7 @@
                 </a:solidFill>
                 <a:latin typeface="Fira Sans"/>
               </a:rPr>
-              <a:t>Horizontal 1,00; vertical 1,00; diagonal 1,41, la mayor de todas; perpendicular a la diagonal 0,07.</a:t>
+              <a:t>Cada jugador tiene dos coordenadas nuevas. A pasa de (−1,16; −1,11) a (−1,60; 0,03); C, de (1,51; 1,33) a (2,01; −0,13).</a:t>
             </a:r>
           </a:p>
           <a:p>
@@ -3967,7 +3968,35 @@
                 </a:solidFill>
                 <a:latin typeface="Fira Sans"/>
               </a:rPr>
-              <a:t>Quedarse con la posición sobre la diagonal conserva el 99,8% de la variación de los datos y pierde el 0,2%.</a:t>
+              <a:t>La segunda coordenada es casi 0 para todos: es lo que se descarta al quedarse con un solo número.</a:t>
+            </a:r>
+          </a:p>
+          <a:p>
+            <a:pPr>
+              <a:lnSpc>
+                <a:spcPct val="112000"/>
+              </a:lnSpc>
+              <a:spcAft>
+                <a:spcPts val="900"/>
+              </a:spcAft>
+            </a:pPr>
+            <a:r>
+              <a:rPr sz="1500" b="1">
+                <a:solidFill>
+                  <a:srgbClr val="E0A437"/>
+                </a:solidFill>
+                <a:latin typeface="Fira Sans"/>
+              </a:rPr>
+              <a:t>▸ </a:t>
+            </a:r>
+            <a:r>
+              <a:rPr sz="1500" b="0">
+                <a:solidFill>
+                  <a:srgbClr val="000000"/>
+                </a:solidFill>
+                <a:latin typeface="Fira Sans"/>
+              </a:rPr>
+              <a:t>El primer eje se llama primera componente principal; el segundo, segunda.</a:t>
             </a:r>
           </a:p>
         </p:txBody>
@@ -4063,14 +4092,14 @@
                 </a:solidFill>
                 <a:latin typeface="Fira Sans"/>
               </a:rPr>
-              <a:t>Es un cambio de ejes: las dos componentes</a:t>
+              <a:t>En la práctica: un puntaje ponderado por jugador</a:t>
             </a:r>
           </a:p>
         </p:txBody>
       </p:sp>
       <p:pic>
         <p:nvPicPr>
-          <p:cNvPr id="4" name="Picture 3" descr="c8_01c_componentes.png"/>
+          <p:cNvPr id="4" name="Picture 3" descr="c8_01b_puntaje_ponderado.png"/>
           <p:cNvPicPr>
             <a:picLocks noChangeAspect="1"/>
           </p:cNvPicPr>
@@ -4084,8 +4113,8 @@
         </p:blipFill>
         <p:spPr>
           <a:xfrm>
-            <a:off x="320040" y="1097280"/>
-            <a:ext cx="4032615" cy="3886200"/>
+            <a:off x="699515" y="1261139"/>
+            <a:ext cx="7744968" cy="2607505"/>
           </a:xfrm>
           <a:prstGeom prst="rect">
             <a:avLst/>
@@ -4100,8 +4129,8 @@
         </p:nvSpPr>
         <p:spPr>
           <a:xfrm>
-            <a:off x="4581254" y="1325880"/>
-            <a:ext cx="4242705" cy="3566160"/>
+            <a:off x="704088" y="4005804"/>
+            <a:ext cx="7744968" cy="768096"/>
           </a:xfrm>
           <a:prstGeom prst="rect">
             <a:avLst/>
@@ -4114,115 +4143,14 @@
           </a:bodyPr>
           <a:lstStyle/>
           <a:p>
-            <a:pPr>
-              <a:lnSpc>
-                <a:spcPct val="112000"/>
-              </a:lnSpc>
-              <a:spcAft>
-                <a:spcPts val="900"/>
-              </a:spcAft>
-            </a:pPr>
-            <a:r>
-              <a:rPr sz="1500" b="1">
-                <a:solidFill>
-                  <a:srgbClr val="E0A437"/>
-                </a:solidFill>
-                <a:latin typeface="Fira Sans"/>
-              </a:rPr>
-              <a:t>▸ </a:t>
-            </a:r>
-            <a:r>
-              <a:rPr sz="1500" b="1">
-                <a:solidFill>
-                  <a:srgbClr val="1D3557"/>
-                </a:solidFill>
-                <a:latin typeface="Fira Sans"/>
-              </a:rPr>
-              <a:t>Un cambio de sistema de referencia: en vez de turnos y hits, dos ejes nuevos girados 45°, la diagonal y su perpendicular, con el mismo centro.</a:t>
-            </a:r>
-          </a:p>
-          <a:p>
-            <a:pPr>
-              <a:lnSpc>
-                <a:spcPct val="112000"/>
-              </a:lnSpc>
-              <a:spcAft>
-                <a:spcPts val="900"/>
-              </a:spcAft>
-            </a:pPr>
-            <a:r>
-              <a:rPr sz="1500" b="1">
-                <a:solidFill>
-                  <a:srgbClr val="E0A437"/>
-                </a:solidFill>
-                <a:latin typeface="Fira Sans"/>
-              </a:rPr>
-              <a:t>▸ </a:t>
-            </a:r>
-            <a:r>
-              <a:rPr sz="1500" b="0">
-                <a:solidFill>
-                  <a:srgbClr val="000000"/>
-                </a:solidFill>
-                <a:latin typeface="Fira Sans"/>
-              </a:rPr>
-              <a:t>Cada jugador tiene dos coordenadas nuevas. A pasa de (−1,16; −1,11) a (−1,60; 0,03); C, de (1,51; 1,33) a (2,01; −0,13).</a:t>
-            </a:r>
-          </a:p>
-          <a:p>
-            <a:pPr>
-              <a:lnSpc>
-                <a:spcPct val="112000"/>
-              </a:lnSpc>
-              <a:spcAft>
-                <a:spcPts val="900"/>
-              </a:spcAft>
-            </a:pPr>
-            <a:r>
-              <a:rPr sz="1500" b="1">
-                <a:solidFill>
-                  <a:srgbClr val="E0A437"/>
-                </a:solidFill>
-                <a:latin typeface="Fira Sans"/>
-              </a:rPr>
-              <a:t>▸ </a:t>
-            </a:r>
-            <a:r>
-              <a:rPr sz="1500" b="0">
-                <a:solidFill>
-                  <a:srgbClr val="000000"/>
-                </a:solidFill>
-                <a:latin typeface="Fira Sans"/>
-              </a:rPr>
-              <a:t>La segunda coordenada es casi 0 para todos: es lo que se descarta al quedarse con un solo número.</a:t>
-            </a:r>
-          </a:p>
-          <a:p>
-            <a:pPr>
-              <a:lnSpc>
-                <a:spcPct val="112000"/>
-              </a:lnSpc>
-              <a:spcAft>
-                <a:spcPts val="900"/>
-              </a:spcAft>
-            </a:pPr>
-            <a:r>
-              <a:rPr sz="1500" b="1">
-                <a:solidFill>
-                  <a:srgbClr val="E0A437"/>
-                </a:solidFill>
-                <a:latin typeface="Fira Sans"/>
-              </a:rPr>
-              <a:t>▸ </a:t>
-            </a:r>
-            <a:r>
-              <a:rPr sz="1500" b="0">
-                <a:solidFill>
-                  <a:srgbClr val="000000"/>
-                </a:solidFill>
-                <a:latin typeface="Fira Sans"/>
-              </a:rPr>
-              <a:t>El primer eje se llama primera componente principal; el segundo, segunda.</a:t>
+            <a:r>
+              <a:rPr sz="1300" b="0">
+                <a:solidFill>
+                  <a:srgbClr val="333333"/>
+                </a:solidFill>
+                <a:latin typeface="Fira Sans"/>
+              </a:rPr>
+              <a:t>La posición sobre la diagonal se calcula como un puntaje ponderado, igual que el de la admisión universitaria: cada variable entra con un peso y sale un número por jugador. Aquí los pesos no los fija nadie: se calculan para que ese número separe a los jugadores lo más posible.</a:t>
             </a:r>
           </a:p>
         </p:txBody>
@@ -4318,14 +4246,14 @@
                 </a:solidFill>
                 <a:latin typeface="Fira Sans"/>
               </a:rPr>
-              <a:t>En la práctica: un puntaje ponderado por jugador</a:t>
+              <a:t>Cuánto se conserva y cuánto se pierde</a:t>
             </a:r>
           </a:p>
         </p:txBody>
       </p:sp>
       <p:pic>
         <p:nvPicPr>
-          <p:cNvPr id="4" name="Picture 3" descr="c8_01b_puntaje_ponderado.png"/>
+          <p:cNvPr id="4" name="Picture 3" descr="c8_01d_calculo_pve.png"/>
           <p:cNvPicPr>
             <a:picLocks noChangeAspect="1"/>
           </p:cNvPicPr>
@@ -4339,8 +4267,8 @@
         </p:blipFill>
         <p:spPr>
           <a:xfrm>
-            <a:off x="699515" y="1261139"/>
-            <a:ext cx="7744968" cy="2607505"/>
+            <a:off x="1540270" y="1143000"/>
+            <a:ext cx="6063458" cy="2587752"/>
           </a:xfrm>
           <a:prstGeom prst="rect">
             <a:avLst/>
@@ -4355,8 +4283,8 @@
         </p:nvSpPr>
         <p:spPr>
           <a:xfrm>
-            <a:off x="704088" y="4005804"/>
-            <a:ext cx="7744968" cy="768096"/>
+            <a:off x="704088" y="3867912"/>
+            <a:ext cx="7744968" cy="1024128"/>
           </a:xfrm>
           <a:prstGeom prst="rect">
             <a:avLst/>
@@ -4376,7 +4304,7 @@
                 </a:solidFill>
                 <a:latin typeface="Fira Sans"/>
               </a:rPr>
-              <a:t>La posición sobre la diagonal se calcula como un puntaje ponderado, igual que el de la admisión universitaria: cada variable entra con un peso y sale un número por jugador. Aquí los pesos no los fija nadie: se calculan para que ese número separe a los jugadores lo más posible.</a:t>
+              <a:t>Quedarse con la posición sobre la diagonal conserva el 99,8% de la variación de los datos y pierde el 0,2%. Sale de las varianzas: las dos variables estandarizadas tienen 1 y 1 (total 2); las dos coordenadas nuevas reparten esa misma variación, 1,995 y 0,005; 1,995 / 2 = 99,8% y 0,005 / 2 = 0,2%. Con 16 variables, la variación total es 16 y cada componente se lleva una parte.</a:t>
             </a:r>
           </a:p>
         </p:txBody>
@@ -4472,14 +4400,121 @@
                 </a:solidFill>
                 <a:latin typeface="Fira Sans"/>
               </a:rPr>
-              <a:t>De dónde sale el 99,8%</a:t>
+              <a:t>El análisis de componentes principales</a:t>
+            </a:r>
+          </a:p>
+        </p:txBody>
+      </p:sp>
+      <p:sp>
+        <p:nvSpPr>
+          <p:cNvPr id="4" name="TextBox 3"/>
+          <p:cNvSpPr txBox="1"/>
+          <p:nvPr/>
+        </p:nvSpPr>
+        <p:spPr>
+          <a:xfrm>
+            <a:off x="502920" y="1252728"/>
+            <a:ext cx="4023360" cy="3200400"/>
+          </a:xfrm>
+          <a:prstGeom prst="rect">
+            <a:avLst/>
+          </a:prstGeom>
+          <a:noFill/>
+        </p:spPr>
+        <p:txBody>
+          <a:bodyPr wrap="square">
+            <a:spAutoFit/>
+          </a:bodyPr>
+          <a:lstStyle/>
+          <a:p>
+            <a:pPr>
+              <a:lnSpc>
+                <a:spcPct val="112000"/>
+              </a:lnSpc>
+              <a:spcAft>
+                <a:spcPts val="900"/>
+              </a:spcAft>
+            </a:pPr>
+            <a:r>
+              <a:rPr sz="1500" b="1">
+                <a:solidFill>
+                  <a:srgbClr val="E0A437"/>
+                </a:solidFill>
+                <a:latin typeface="Fira Sans"/>
+              </a:rPr>
+              <a:t>▸ </a:t>
+            </a:r>
+            <a:r>
+              <a:rPr sz="1500" b="1">
+                <a:solidFill>
+                  <a:srgbClr val="1D3557"/>
+                </a:solidFill>
+                <a:latin typeface="Fira Sans"/>
+              </a:rPr>
+              <a:t>Busca la dirección en que los datos más se dispersan (la primera componente), luego la que más se dispersa entre las perpendiculares (la segunda), y así hasta tener tantas como variables.</a:t>
+            </a:r>
+          </a:p>
+          <a:p>
+            <a:pPr>
+              <a:lnSpc>
+                <a:spcPct val="112000"/>
+              </a:lnSpc>
+              <a:spcAft>
+                <a:spcPts val="900"/>
+              </a:spcAft>
+            </a:pPr>
+            <a:r>
+              <a:rPr sz="1500" b="1">
+                <a:solidFill>
+                  <a:srgbClr val="E0A437"/>
+                </a:solidFill>
+                <a:latin typeface="Fira Sans"/>
+              </a:rPr>
+              <a:t>▸ </a:t>
+            </a:r>
+            <a:r>
+              <a:rPr sz="1500" b="0">
+                <a:solidFill>
+                  <a:srgbClr val="000000"/>
+                </a:solidFill>
+                <a:latin typeface="Fira Sans"/>
+              </a:rPr>
+              <a:t>Cada componente es una variable nueva: un puntaje ponderado de las originales, con una parte de la variación total.</a:t>
+            </a:r>
+          </a:p>
+          <a:p>
+            <a:pPr>
+              <a:lnSpc>
+                <a:spcPct val="112000"/>
+              </a:lnSpc>
+              <a:spcAft>
+                <a:spcPts val="900"/>
+              </a:spcAft>
+            </a:pPr>
+            <a:r>
+              <a:rPr sz="1500" b="1">
+                <a:solidFill>
+                  <a:srgbClr val="E0A437"/>
+                </a:solidFill>
+                <a:latin typeface="Fira Sans"/>
+              </a:rPr>
+              <a:t>▸ </a:t>
+            </a:r>
+            <a:r>
+              <a:rPr sz="1500" b="0">
+                <a:solidFill>
+                  <a:srgbClr val="000000"/>
+                </a:solidFill>
+                <a:latin typeface="Fira Sans"/>
+              </a:rPr>
+              <a:t>No usa ninguna respuesta Y: es un método no supervisado (James et al., 2013, p. 375).</a:t>
             </a:r>
           </a:p>
         </p:txBody>
       </p:sp>
       <p:pic>
         <p:nvPicPr>
-          <p:cNvPr id="4" name="Picture 3" descr="c8_01d_calculo_pve.png"/>
+          <p:cNvPr id="5" name="Picture 4" descr="c8_01c_componentes.png"/>
           <p:cNvPicPr>
             <a:picLocks noChangeAspect="1"/>
           </p:cNvPicPr>
@@ -4493,48 +4528,14 @@
         </p:blipFill>
         <p:spPr>
           <a:xfrm>
-            <a:off x="1840230" y="1143000"/>
-            <a:ext cx="5463540" cy="2331720"/>
+            <a:off x="4892040" y="1371600"/>
+            <a:ext cx="3840480" cy="3701041"/>
           </a:xfrm>
           <a:prstGeom prst="rect">
             <a:avLst/>
           </a:prstGeom>
         </p:spPr>
       </p:pic>
-      <p:sp>
-        <p:nvSpPr>
-          <p:cNvPr id="5" name="TextBox 4"/>
-          <p:cNvSpPr txBox="1"/>
-          <p:nvPr/>
-        </p:nvSpPr>
-        <p:spPr>
-          <a:xfrm>
-            <a:off x="704088" y="3611879"/>
-            <a:ext cx="7744968" cy="1280160"/>
-          </a:xfrm>
-          <a:prstGeom prst="rect">
-            <a:avLst/>
-          </a:prstGeom>
-          <a:noFill/>
-        </p:spPr>
-        <p:txBody>
-          <a:bodyPr wrap="square">
-            <a:spAutoFit/>
-          </a:bodyPr>
-          <a:lstStyle/>
-          <a:p>
-            <a:r>
-              <a:rPr sz="1300" b="0">
-                <a:solidFill>
-                  <a:srgbClr val="333333"/>
-                </a:solidFill>
-                <a:latin typeface="Fira Sans"/>
-              </a:rPr>
-              <a:t>La variación de una coordenada se mide con su varianza. Las dos variables estandarizadas tienen varianza 1 y 1: la variación total es 2. Las dos coordenadas nuevas reparten esa misma variación, 1,995 y 0,005, que también suman 2. La parte de la primera es 1,995 / 2 = 99,8%; la de la segunda, 0,005 / 2 = 0,2%. Con 16 variables es lo mismo: la variación total es 16 y cada componente se lleva una parte.</a:t>
-            </a:r>
-          </a:p>
-        </p:txBody>
-      </p:sp>
     </p:spTree>
   </p:cSld>
   <p:clrMapOvr>
@@ -4626,7 +4627,7 @@
                 </a:solidFill>
                 <a:latin typeface="Fira Sans"/>
               </a:rPr>
-              <a:t>El análisis de componentes principales</a:t>
+              <a:t>¿Para qué sirve?</a:t>
             </a:r>
           </a:p>
         </p:txBody>
@@ -4639,8 +4640,8 @@
         </p:nvSpPr>
         <p:spPr>
           <a:xfrm>
-            <a:off x="502920" y="1252728"/>
-            <a:ext cx="4023360" cy="3200400"/>
+            <a:off x="704088" y="1353312"/>
+            <a:ext cx="7744968" cy="3300984"/>
           </a:xfrm>
           <a:prstGeom prst="rect">
             <a:avLst/>
@@ -4662,7 +4663,7 @@
               </a:spcAft>
             </a:pPr>
             <a:r>
-              <a:rPr sz="1500" b="1">
+              <a:rPr sz="1800" b="1">
                 <a:solidFill>
                   <a:srgbClr val="E0A437"/>
                 </a:solidFill>
@@ -4671,13 +4672,13 @@
               <a:t>▸ </a:t>
             </a:r>
             <a:r>
-              <a:rPr sz="1500" b="1">
+              <a:rPr sz="1800" b="1">
                 <a:solidFill>
                   <a:srgbClr val="1D3557"/>
                 </a:solidFill>
                 <a:latin typeface="Fira Sans"/>
               </a:rPr>
-              <a:t>Busca la dirección en que los datos más se dispersan (la primera componente), luego la que más se dispersa entre las perpendiculares (la segunda), y así hasta tener tantas como variables.</a:t>
+              <a:t>Para mirar los datos: con 16 variables hay 120 gráficos de dispersión posibles; con dos componentes, uno solo.</a:t>
             </a:r>
           </a:p>
           <a:p>
@@ -4690,7 +4691,7 @@
               </a:spcAft>
             </a:pPr>
             <a:r>
-              <a:rPr sz="1500" b="1">
+              <a:rPr sz="1800" b="1">
                 <a:solidFill>
                   <a:srgbClr val="E0A437"/>
                 </a:solidFill>
@@ -4699,13 +4700,13 @@
               <a:t>▸ </a:t>
             </a:r>
             <a:r>
-              <a:rPr sz="1500" b="0">
+              <a:rPr sz="1800" b="0">
                 <a:solidFill>
                   <a:srgbClr val="000000"/>
                 </a:solidFill>
                 <a:latin typeface="Fira Sans"/>
               </a:rPr>
-              <a:t>Cada componente es una variable nueva: un puntaje ponderado de las originales, con una parte de la variación total.</a:t>
+              <a:t>Para entregarle a un modelo menos entradas: las componentes reemplazan a un grupo de variables que se repiten.</a:t>
             </a:r>
           </a:p>
           <a:p>
@@ -4718,7 +4719,7 @@
               </a:spcAft>
             </a:pPr>
             <a:r>
-              <a:rPr sz="1500" b="1">
+              <a:rPr sz="1800" b="1">
                 <a:solidFill>
                   <a:srgbClr val="E0A437"/>
                 </a:solidFill>
@@ -4727,41 +4728,45 @@
               <a:t>▸ </a:t>
             </a:r>
             <a:r>
-              <a:rPr sz="1500" b="0">
+              <a:rPr sz="1800" b="0">
                 <a:solidFill>
                   <a:srgbClr val="000000"/>
                 </a:solidFill>
                 <a:latin typeface="Fira Sans"/>
               </a:rPr>
-              <a:t>No usa ninguna respuesta Y: es un método no supervisado (James et al., 2013, p. 375).</a:t>
-            </a:r>
-          </a:p>
-        </p:txBody>
-      </p:sp>
-      <p:pic>
-        <p:nvPicPr>
-          <p:cNvPr id="5" name="Picture 4" descr="c8_01c_componentes.png"/>
-          <p:cNvPicPr>
-            <a:picLocks noChangeAspect="1"/>
-          </p:cNvPicPr>
-          <p:nvPr/>
-        </p:nvPicPr>
-        <p:blipFill>
-          <a:blip r:embed="rId2"/>
-          <a:stretch>
-            <a:fillRect/>
-          </a:stretch>
-        </p:blipFill>
-        <p:spPr>
-          <a:xfrm>
-            <a:off x="4892040" y="1371600"/>
-            <a:ext cx="3840480" cy="3701041"/>
-          </a:xfrm>
-          <a:prstGeom prst="rect">
-            <a:avLst/>
-          </a:prstGeom>
-        </p:spPr>
-      </p:pic>
+              <a:t>Para entender de qué está hecha la variación: qué variables se mueven juntas y cuánto pesa cada grupo.</a:t>
+            </a:r>
+          </a:p>
+          <a:p>
+            <a:pPr>
+              <a:lnSpc>
+                <a:spcPct val="112000"/>
+              </a:lnSpc>
+              <a:spcAft>
+                <a:spcPts val="900"/>
+              </a:spcAft>
+            </a:pPr>
+            <a:r>
+              <a:rPr sz="1800" b="1">
+                <a:solidFill>
+                  <a:srgbClr val="E0A437"/>
+                </a:solidFill>
+                <a:latin typeface="Fira Sans"/>
+              </a:rPr>
+              <a:t>▸ </a:t>
+            </a:r>
+            <a:r>
+              <a:rPr sz="1800" b="0">
+                <a:solidFill>
+                  <a:srgbClr val="000000"/>
+                </a:solidFill>
+                <a:latin typeface="Fira Sans"/>
+              </a:rPr>
+              <a:t>Lo que no hace: no elige variables ni las descarta, y no sabe qué se quiere predecir.</a:t>
+            </a:r>
+          </a:p>
+        </p:txBody>
+      </p:sp>
     </p:spTree>
   </p:cSld>
   <p:clrMapOvr>
@@ -4853,21 +4858,45 @@
                 </a:solidFill>
                 <a:latin typeface="Fira Sans"/>
               </a:rPr>
-              <a:t>¿Para qué sirve?</a:t>
-            </a:r>
-          </a:p>
-        </p:txBody>
-      </p:sp>
-      <p:sp>
-        <p:nvSpPr>
-          <p:cNvPr id="4" name="TextBox 3"/>
+              <a:t>Con tres variables: tres ejes, y se decide cuántos conservar</a:t>
+            </a:r>
+          </a:p>
+        </p:txBody>
+      </p:sp>
+      <p:pic>
+        <p:nvPicPr>
+          <p:cNvPr id="4" name="Picture 3" descr="c8_01e_tres_variables.png"/>
+          <p:cNvPicPr>
+            <a:picLocks noChangeAspect="1"/>
+          </p:cNvPicPr>
+          <p:nvPr/>
+        </p:nvPicPr>
+        <p:blipFill>
+          <a:blip r:embed="rId2"/>
+          <a:stretch>
+            <a:fillRect/>
+          </a:stretch>
+        </p:blipFill>
+        <p:spPr>
+          <a:xfrm>
+            <a:off x="1906591" y="1143000"/>
+            <a:ext cx="5330816" cy="2331720"/>
+          </a:xfrm>
+          <a:prstGeom prst="rect">
+            <a:avLst/>
+          </a:prstGeom>
+        </p:spPr>
+      </p:pic>
+      <p:sp>
+        <p:nvSpPr>
+          <p:cNvPr id="5" name="TextBox 4"/>
           <p:cNvSpPr txBox="1"/>
           <p:nvPr/>
         </p:nvSpPr>
         <p:spPr>
           <a:xfrm>
-            <a:off x="704088" y="1353312"/>
-            <a:ext cx="7744968" cy="3300984"/>
+            <a:off x="704088" y="3611879"/>
+            <a:ext cx="7744968" cy="1280160"/>
           </a:xfrm>
           <a:prstGeom prst="rect">
             <a:avLst/>
@@ -4880,115 +4909,14 @@
           </a:bodyPr>
           <a:lstStyle/>
           <a:p>
-            <a:pPr>
-              <a:lnSpc>
-                <a:spcPct val="112000"/>
-              </a:lnSpc>
-              <a:spcAft>
-                <a:spcPts val="900"/>
-              </a:spcAft>
-            </a:pPr>
-            <a:r>
-              <a:rPr sz="1800" b="1">
-                <a:solidFill>
-                  <a:srgbClr val="E0A437"/>
-                </a:solidFill>
-                <a:latin typeface="Fira Sans"/>
-              </a:rPr>
-              <a:t>▸ </a:t>
-            </a:r>
-            <a:r>
-              <a:rPr sz="1800" b="1">
-                <a:solidFill>
-                  <a:srgbClr val="1D3557"/>
-                </a:solidFill>
-                <a:latin typeface="Fira Sans"/>
-              </a:rPr>
-              <a:t>Para mirar los datos: con 16 variables hay 120 gráficos de dispersión posibles; con dos componentes, uno solo.</a:t>
-            </a:r>
-          </a:p>
-          <a:p>
-            <a:pPr>
-              <a:lnSpc>
-                <a:spcPct val="112000"/>
-              </a:lnSpc>
-              <a:spcAft>
-                <a:spcPts val="900"/>
-              </a:spcAft>
-            </a:pPr>
-            <a:r>
-              <a:rPr sz="1800" b="1">
-                <a:solidFill>
-                  <a:srgbClr val="E0A437"/>
-                </a:solidFill>
-                <a:latin typeface="Fira Sans"/>
-              </a:rPr>
-              <a:t>▸ </a:t>
-            </a:r>
-            <a:r>
-              <a:rPr sz="1800" b="0">
-                <a:solidFill>
-                  <a:srgbClr val="000000"/>
-                </a:solidFill>
-                <a:latin typeface="Fira Sans"/>
-              </a:rPr>
-              <a:t>Para entregarle a un modelo menos entradas: las componentes reemplazan a un grupo de variables que se repiten.</a:t>
-            </a:r>
-          </a:p>
-          <a:p>
-            <a:pPr>
-              <a:lnSpc>
-                <a:spcPct val="112000"/>
-              </a:lnSpc>
-              <a:spcAft>
-                <a:spcPts val="900"/>
-              </a:spcAft>
-            </a:pPr>
-            <a:r>
-              <a:rPr sz="1800" b="1">
-                <a:solidFill>
-                  <a:srgbClr val="E0A437"/>
-                </a:solidFill>
-                <a:latin typeface="Fira Sans"/>
-              </a:rPr>
-              <a:t>▸ </a:t>
-            </a:r>
-            <a:r>
-              <a:rPr sz="1800" b="0">
-                <a:solidFill>
-                  <a:srgbClr val="000000"/>
-                </a:solidFill>
-                <a:latin typeface="Fira Sans"/>
-              </a:rPr>
-              <a:t>Para entender de qué está hecha la variación: qué variables se mueven juntas y cuánto pesa cada grupo.</a:t>
-            </a:r>
-          </a:p>
-          <a:p>
-            <a:pPr>
-              <a:lnSpc>
-                <a:spcPct val="112000"/>
-              </a:lnSpc>
-              <a:spcAft>
-                <a:spcPts val="900"/>
-              </a:spcAft>
-            </a:pPr>
-            <a:r>
-              <a:rPr sz="1800" b="1">
-                <a:solidFill>
-                  <a:srgbClr val="E0A437"/>
-                </a:solidFill>
-                <a:latin typeface="Fira Sans"/>
-              </a:rPr>
-              <a:t>▸ </a:t>
-            </a:r>
-            <a:r>
-              <a:rPr sz="1800" b="0">
-                <a:solidFill>
-                  <a:srgbClr val="000000"/>
-                </a:solidFill>
-                <a:latin typeface="Fira Sans"/>
-              </a:rPr>
-              <a:t>Lo que no hace: no elige variables ni las descarta, y no sabe qué se quiere predecir.</a:t>
+            <a:r>
+              <a:rPr sz="1300" b="0">
+                <a:solidFill>
+                  <a:srgbClr val="333333"/>
+                </a:solidFill>
+                <a:latin typeface="Fira Sans"/>
+              </a:rPr>
+              <a:t>Siempre salen tantos ejes como variables. Aquí se agrega una tercera que no tiene que ver con las otras dos, los outs de defensa: el primer eje junta turnos y hits (66,7%), el segundo es la defensa (33,1%) y el tercero, la diferencia entre turnos y hits, casi nada (0,2%). Con dos ejes se conserva el 99,8% y el tercero se descarta. Si las tres variables dijeran cosas distintas, harían falta los tres.</a:t>
             </a:r>
           </a:p>
         </p:txBody>
@@ -5730,14 +5658,14 @@
                 </a:solidFill>
                 <a:latin typeface="Fira Sans"/>
               </a:rPr>
-              <a:t>Cuánta variación explica cada componente</a:t>
+              <a:t>Cuánto explica cada componente: el codo</a:t>
             </a:r>
           </a:p>
         </p:txBody>
       </p:sp>
       <p:pic>
         <p:nvPicPr>
-          <p:cNvPr id="4" name="Picture 3" descr="c8_03_scree.png"/>
+          <p:cNvPr id="4" name="Picture 3" descr="c8_03a_codo.png"/>
           <p:cNvPicPr>
             <a:picLocks noChangeAspect="1"/>
           </p:cNvPicPr>
@@ -5751,8 +5679,8 @@
         </p:blipFill>
         <p:spPr>
           <a:xfrm>
-            <a:off x="2337301" y="1143000"/>
-            <a:ext cx="4469397" cy="2587752"/>
+            <a:off x="2076158" y="1143000"/>
+            <a:ext cx="4991682" cy="2843784"/>
           </a:xfrm>
           <a:prstGeom prst="rect">
             <a:avLst/>
@@ -5767,8 +5695,8 @@
         </p:nvSpPr>
         <p:spPr>
           <a:xfrm>
-            <a:off x="704088" y="3867912"/>
-            <a:ext cx="7744968" cy="1024128"/>
+            <a:off x="704088" y="4123944"/>
+            <a:ext cx="7744968" cy="768096"/>
           </a:xfrm>
           <a:prstGeom prst="rect">
             <a:avLst/>
@@ -5788,7 +5716,7 @@
                 </a:solidFill>
                 <a:latin typeface="Fira Sans"/>
               </a:rPr>
-              <a:t>La primera componente explica el 45,3% de la variación de las 16 variables; la segunda, el 25,7%; la tercera, el 10,8%. Dos componentes reúnen el 71% y tres, el 82%. Para decidir cuántas conservar se mira dónde la curva deja de caer (el codo); no hay una regla objetiva, depende del uso (James et al., 2013, p. 384).</a:t>
+              <a:t>Las barras caen fuerte al principio (45,3%, 25,7%, 10,8%) y desde la cuarta quedan casi planas (5,4%, 4,4%, 3,2%...). Ese quiebre es el codo. Se conservan las componentes de antes del codo, que son las que explican mucho cada una: aquí, dos o tres.</a:t>
             </a:r>
           </a:p>
         </p:txBody>
@@ -5884,14 +5812,14 @@
                 </a:solidFill>
                 <a:latin typeface="Fira Sans"/>
               </a:rPr>
-              <a:t>De qué está hecha cada componente: los pesos</a:t>
+              <a:t>¿Con cuántas quedarse?</a:t>
             </a:r>
           </a:p>
         </p:txBody>
       </p:sp>
       <p:pic>
         <p:nvPicPr>
-          <p:cNvPr id="4" name="Picture 3" descr="c8_04_pesos.png"/>
+          <p:cNvPr id="4" name="Picture 3" descr="c8_03b_acumulado.png"/>
           <p:cNvPicPr>
             <a:picLocks noChangeAspect="1"/>
           </p:cNvPicPr>
@@ -5905,8 +5833,8 @@
         </p:blipFill>
         <p:spPr>
           <a:xfrm>
-            <a:off x="2196563" y="1143000"/>
-            <a:ext cx="4750872" cy="2587752"/>
+            <a:off x="2233760" y="1143000"/>
+            <a:ext cx="4676478" cy="2587752"/>
           </a:xfrm>
           <a:prstGeom prst="rect">
             <a:avLst/>
@@ -5942,7 +5870,7 @@
                 </a:solidFill>
                 <a:latin typeface="Fira Sans"/>
               </a:rPr>
-              <a:t>Primera componente: las siete variables de la carrera pesan casi lo mismo (0,29 a 0,34), las de la temporada la mitad (0,19 a 0,23) y la defensa no cuenta: mide cuánta carrera lleva el jugador. Segunda componente: la temporada 1986 pesa positivo (0,24 a 0,39) y la carrera negativo (−0,12 a −0,26): separa a quien rindió este año más de lo que dice su carrera.</a:t>
+              <a:t>El acumulado dice cuánto se conserva con cada cantidad: con dos componentes, el 71%; con tres, el 82%; con cinco, el 92%; con diez, el 99%. Conservar diez de dieciséis casi no reduce nada: el codo sugiere dos o tres. No hay una regla objetiva: depende de cuánta variación se acepte perder y para qué se usen las componentes (James et al., 2013, p. 384).</a:t>
             </a:r>
           </a:p>
         </p:txBody>
@@ -6038,14 +5966,14 @@
                 </a:solidFill>
                 <a:latin typeface="Fira Sans"/>
               </a:rPr>
-              <a:t>Los 263 jugadores en dos componentes</a:t>
+              <a:t>De qué está hecha cada componente: los pesos</a:t>
             </a:r>
           </a:p>
         </p:txBody>
       </p:sp>
       <p:pic>
         <p:nvPicPr>
-          <p:cNvPr id="4" name="Picture 3" descr="c8_05_jugadores.png"/>
+          <p:cNvPr id="4" name="Picture 3" descr="c8_04_pesos.png"/>
           <p:cNvPicPr>
             <a:picLocks noChangeAspect="1"/>
           </p:cNvPicPr>
@@ -6059,8 +5987,8 @@
         </p:blipFill>
         <p:spPr>
           <a:xfrm>
-            <a:off x="2699826" y="1143000"/>
-            <a:ext cx="3744346" cy="2587751"/>
+            <a:off x="2196563" y="1143000"/>
+            <a:ext cx="4750872" cy="2587752"/>
           </a:xfrm>
           <a:prstGeom prst="rect">
             <a:avLst/>
@@ -6096,7 +6024,7 @@
                 </a:solidFill>
                 <a:latin typeface="Fira Sans"/>
               </a:rPr>
-              <a:t>Cada punto es un jugador y el color, su salario de 1987, que PCA no usó. El salario crece hacia la derecha (correlación 0,64 con la primera componente) y casi nada hacia arriba (0,11 con la segunda): la carrera pesa en el salario; la última temporada, poco. Dos ejes muestran lo que en 16 variables había que leer coeficiente por coeficiente.</a:t>
+              <a:t>Primera componente: las siete variables de la carrera pesan casi lo mismo (0,29 a 0,34), las de la temporada la mitad (0,19 a 0,23) y la defensa no cuenta: mide cuánta carrera lleva el jugador. Segunda componente: la temporada 1986 pesa positivo (0,24 a 0,39) y la carrera negativo (−0,12 a −0,26): separa a quien rindió este año más de lo que dice su carrera.</a:t>
             </a:r>
           </a:p>
         </p:txBody>
@@ -6192,14 +6120,14 @@
                 </a:solidFill>
                 <a:latin typeface="Fira Sans"/>
               </a:rPr>
-              <a:t>El mismo cálculo con las flores de la clase 2</a:t>
+              <a:t>Los 263 jugadores en dos componentes</a:t>
             </a:r>
           </a:p>
         </p:txBody>
       </p:sp>
       <p:pic>
         <p:nvPicPr>
-          <p:cNvPr id="4" name="Picture 3" descr="c8_06_iris.png"/>
+          <p:cNvPr id="4" name="Picture 3" descr="c8_05_jugadores.png"/>
           <p:cNvPicPr>
             <a:picLocks noChangeAspect="1"/>
           </p:cNvPicPr>
@@ -6213,8 +6141,8 @@
         </p:blipFill>
         <p:spPr>
           <a:xfrm>
-            <a:off x="2906606" y="1143000"/>
-            <a:ext cx="3330786" cy="2587751"/>
+            <a:off x="2699826" y="1143000"/>
+            <a:ext cx="3744346" cy="2587751"/>
           </a:xfrm>
           <a:prstGeom prst="rect">
             <a:avLst/>
@@ -6250,7 +6178,7 @@
                 </a:solidFill>
                 <a:latin typeface="Fira Sans"/>
               </a:rPr>
-              <a:t>Las cuatro medidas de iris se resumen en dos componentes que reúnen el 96% de la variación. La primera (73%) pesa casi igual el largo y el ancho del pétalo y el largo del sépalo (0,52 a 0,58): el tamaño de la flor. La segunda (23%) es casi solo el ancho del sépalo (0,92). PCA no conoce la especie y aun así las tres quedan separadas a lo largo de la primera componente.</a:t>
+              <a:t>Cada punto es un jugador y el color, su salario de 1987, que PCA no usó. El salario crece hacia la derecha (correlación 0,64 con la primera componente) y casi nada hacia arriba (0,11 con la segunda): la carrera pesa en el salario; la última temporada, poco. Dos ejes muestran lo que en 16 variables había que leer coeficiente por coeficiente.</a:t>
             </a:r>
           </a:p>
         </p:txBody>
@@ -6288,7 +6216,7 @@
             <a:avLst/>
           </a:prstGeom>
           <a:solidFill>
-            <a:srgbClr val="1D3557"/>
+            <a:srgbClr val="FAFBFC"/>
           </a:solidFill>
           <a:ln>
             <a:noFill/>
@@ -6325,8 +6253,8 @@
         </p:nvSpPr>
         <p:spPr>
           <a:xfrm>
-            <a:off x="603504" y="1847088"/>
-            <a:ext cx="7946136" cy="1399032"/>
+            <a:off x="402336" y="301752"/>
+            <a:ext cx="8348472" cy="795528"/>
           </a:xfrm>
           <a:prstGeom prst="rect">
             <a:avLst/>
@@ -6340,24 +6268,71 @@
           <a:lstStyle/>
           <a:p>
             <a:r>
-              <a:rPr sz="3400" b="1">
-                <a:solidFill>
-                  <a:srgbClr val="FFFFFF"/>
-                </a:solidFill>
-                <a:latin typeface="Fira Sans"/>
-              </a:rPr>
-              <a:t>4. Cuándo</a:t>
-            </a:r>
-          </a:p>
-          <a:p>
-            <a:r>
-              <a:rPr sz="1800" b="0">
-                <a:solidFill>
-                  <a:srgbClr val="E0A437"/>
-                </a:solidFill>
-                <a:latin typeface="Fira Sans"/>
-              </a:rPr>
-              <a:t>Cuándo conviene y cuándo no</a:t>
+              <a:rPr sz="2800" b="1">
+                <a:solidFill>
+                  <a:srgbClr val="0F0F0F"/>
+                </a:solidFill>
+                <a:latin typeface="Fira Sans"/>
+              </a:rPr>
+              <a:t>El mismo cálculo con las flores de la clase 2</a:t>
+            </a:r>
+          </a:p>
+        </p:txBody>
+      </p:sp>
+      <p:pic>
+        <p:nvPicPr>
+          <p:cNvPr id="4" name="Picture 3" descr="c8_06_iris.png"/>
+          <p:cNvPicPr>
+            <a:picLocks noChangeAspect="1"/>
+          </p:cNvPicPr>
+          <p:nvPr/>
+        </p:nvPicPr>
+        <p:blipFill>
+          <a:blip r:embed="rId2"/>
+          <a:stretch>
+            <a:fillRect/>
+          </a:stretch>
+        </p:blipFill>
+        <p:spPr>
+          <a:xfrm>
+            <a:off x="2906606" y="1143000"/>
+            <a:ext cx="3330786" cy="2587751"/>
+          </a:xfrm>
+          <a:prstGeom prst="rect">
+            <a:avLst/>
+          </a:prstGeom>
+        </p:spPr>
+      </p:pic>
+      <p:sp>
+        <p:nvSpPr>
+          <p:cNvPr id="5" name="TextBox 4"/>
+          <p:cNvSpPr txBox="1"/>
+          <p:nvPr/>
+        </p:nvSpPr>
+        <p:spPr>
+          <a:xfrm>
+            <a:off x="704088" y="3867912"/>
+            <a:ext cx="7744968" cy="1024128"/>
+          </a:xfrm>
+          <a:prstGeom prst="rect">
+            <a:avLst/>
+          </a:prstGeom>
+          <a:noFill/>
+        </p:spPr>
+        <p:txBody>
+          <a:bodyPr wrap="square">
+            <a:spAutoFit/>
+          </a:bodyPr>
+          <a:lstStyle/>
+          <a:p>
+            <a:r>
+              <a:rPr sz="1300" b="0">
+                <a:solidFill>
+                  <a:srgbClr val="333333"/>
+                </a:solidFill>
+                <a:latin typeface="Fira Sans"/>
+              </a:rPr>
+              <a:t>Las cuatro medidas de iris se resumen en dos componentes que reúnen el 96% de la variación. La primera (73%) pesa casi igual el largo y el ancho del pétalo y el largo del sépalo (0,52 a 0,58): el tamaño de la flor. La segunda (23%) es casi solo el ancho del sépalo (0,92). PCA no conoce la especie y aun así las tres quedan separadas a lo largo de la primera componente.</a:t>
             </a:r>
           </a:p>
         </p:txBody>
@@ -6395,7 +6370,7 @@
             <a:avLst/>
           </a:prstGeom>
           <a:solidFill>
-            <a:srgbClr val="FAFBFC"/>
+            <a:srgbClr val="1D3557"/>
           </a:solidFill>
           <a:ln>
             <a:noFill/>
@@ -6432,8 +6407,8 @@
         </p:nvSpPr>
         <p:spPr>
           <a:xfrm>
-            <a:off x="402336" y="301752"/>
-            <a:ext cx="8348472" cy="795528"/>
+            <a:off x="603504" y="1847088"/>
+            <a:ext cx="7946136" cy="1399032"/>
           </a:xfrm>
           <a:prstGeom prst="rect">
             <a:avLst/>
@@ -6447,120 +6422,24 @@
           <a:lstStyle/>
           <a:p>
             <a:r>
-              <a:rPr sz="2800" b="1">
-                <a:solidFill>
-                  <a:srgbClr val="0F0F0F"/>
-                </a:solidFill>
-                <a:latin typeface="Fira Sans"/>
-              </a:rPr>
-              <a:t>¿Cuándo conviene?</a:t>
-            </a:r>
-          </a:p>
-        </p:txBody>
-      </p:sp>
-      <p:sp>
-        <p:nvSpPr>
-          <p:cNvPr id="4" name="TextBox 3"/>
-          <p:cNvSpPr txBox="1"/>
-          <p:nvPr/>
-        </p:nvSpPr>
-        <p:spPr>
-          <a:xfrm>
-            <a:off x="704088" y="1353312"/>
-            <a:ext cx="7744968" cy="3300984"/>
-          </a:xfrm>
-          <a:prstGeom prst="rect">
-            <a:avLst/>
-          </a:prstGeom>
-          <a:noFill/>
-        </p:spPr>
-        <p:txBody>
-          <a:bodyPr wrap="square">
-            <a:spAutoFit/>
-          </a:bodyPr>
-          <a:lstStyle/>
-          <a:p>
-            <a:pPr>
-              <a:lnSpc>
-                <a:spcPct val="112000"/>
-              </a:lnSpc>
-              <a:spcAft>
-                <a:spcPts val="900"/>
-              </a:spcAft>
-            </a:pPr>
-            <a:r>
-              <a:rPr sz="1800" b="1">
+              <a:rPr sz="3400" b="1">
+                <a:solidFill>
+                  <a:srgbClr val="FFFFFF"/>
+                </a:solidFill>
+                <a:latin typeface="Fira Sans"/>
+              </a:rPr>
+              <a:t>4. Cuándo</a:t>
+            </a:r>
+          </a:p>
+          <a:p>
+            <a:r>
+              <a:rPr sz="1800" b="0">
                 <a:solidFill>
                   <a:srgbClr val="E0A437"/>
                 </a:solidFill>
                 <a:latin typeface="Fira Sans"/>
               </a:rPr>
-              <a:t>▸ </a:t>
-            </a:r>
-            <a:r>
-              <a:rPr sz="1800" b="1">
-                <a:solidFill>
-                  <a:srgbClr val="1D3557"/>
-                </a:solidFill>
-                <a:latin typeface="Fira Sans"/>
-              </a:rPr>
-              <a:t>Con muchas variables numéricas que se correlacionan en bloques, como en la matriz de la clase 7.</a:t>
-            </a:r>
-          </a:p>
-          <a:p>
-            <a:pPr>
-              <a:lnSpc>
-                <a:spcPct val="112000"/>
-              </a:lnSpc>
-              <a:spcAft>
-                <a:spcPts val="900"/>
-              </a:spcAft>
-            </a:pPr>
-            <a:r>
-              <a:rPr sz="1800" b="1">
-                <a:solidFill>
-                  <a:srgbClr val="E0A437"/>
-                </a:solidFill>
-                <a:latin typeface="Fira Sans"/>
-              </a:rPr>
-              <a:t>▸ </a:t>
-            </a:r>
-            <a:r>
-              <a:rPr sz="1800" b="0">
-                <a:solidFill>
-                  <a:srgbClr val="000000"/>
-                </a:solidFill>
-                <a:latin typeface="Fira Sans"/>
-              </a:rPr>
-              <a:t>Para mirar los datos en un plano, o para entregarle a un modelo menos entradas.</a:t>
-            </a:r>
-          </a:p>
-          <a:p>
-            <a:pPr>
-              <a:lnSpc>
-                <a:spcPct val="112000"/>
-              </a:lnSpc>
-              <a:spcAft>
-                <a:spcPts val="900"/>
-              </a:spcAft>
-            </a:pPr>
-            <a:r>
-              <a:rPr sz="1800" b="1">
-                <a:solidFill>
-                  <a:srgbClr val="E0A437"/>
-                </a:solidFill>
-                <a:latin typeface="Fira Sans"/>
-              </a:rPr>
-              <a:t>▸ </a:t>
-            </a:r>
-            <a:r>
-              <a:rPr sz="1800" b="0">
-                <a:solidFill>
-                  <a:srgbClr val="000000"/>
-                </a:solidFill>
-                <a:latin typeface="Fira Sans"/>
-              </a:rPr>
-              <a:t>No aporta si las variables son pocas y distintas entre sí: no hay nada que resumir.</a:t>
+              <a:t>Cuándo conviene y cuándo no</a:t>
             </a:r>
           </a:p>
         </p:txBody>
@@ -6656,7 +6535,7 @@
                 </a:solidFill>
                 <a:latin typeface="Fira Sans"/>
               </a:rPr>
-              <a:t>Tres precauciones</a:t>
+              <a:t>¿Cuándo conviene?</a:t>
             </a:r>
           </a:p>
         </p:txBody>
@@ -6707,7 +6586,7 @@
                 </a:solidFill>
                 <a:latin typeface="Fira Sans"/>
               </a:rPr>
-              <a:t>Las variables categóricas (las dummies de la clase 6) no entran bien en el cálculo: se dejan fuera o se tratan aparte.</a:t>
+              <a:t>Con muchas variables numéricas que se correlacionan en bloques, como en la matriz de la clase 7.</a:t>
             </a:r>
           </a:p>
           <a:p>
@@ -6735,7 +6614,7 @@
                 </a:solidFill>
                 <a:latin typeface="Fira Sans"/>
               </a:rPr>
-              <a:t>Las componentes no siempre tienen una lectura clara. Aquí sí (la carrera; la temporada frente a la carrera), pero no está garantizado.</a:t>
+              <a:t>Para mirar los datos en un plano, o para entregarle a un modelo menos entradas.</a:t>
             </a:r>
           </a:p>
           <a:p>
@@ -6763,7 +6642,7 @@
                 </a:solidFill>
                 <a:latin typeface="Fira Sans"/>
               </a:rPr>
-              <a:t>Es no supervisado: la dirección de más variación no es necesariamente la que mejor predice la respuesta. Ridge y Lasso eligen mirando Y; PCA no la mira.</a:t>
+              <a:t>No aporta si las variables son pocas y distintas entre sí: no hay nada que resumir.</a:t>
             </a:r>
           </a:p>
         </p:txBody>
@@ -6859,124 +6738,21 @@
                 </a:solidFill>
                 <a:latin typeface="Fira Sans"/>
               </a:rPr>
-              <a:t>En el código: cinco líneas</a:t>
-            </a:r>
-          </a:p>
-        </p:txBody>
-      </p:sp>
-      <p:sp>
-        <p:nvSpPr>
-          <p:cNvPr id="4" name="Rectangle 3"/>
-          <p:cNvSpPr/>
-          <p:nvPr/>
-        </p:nvSpPr>
-        <p:spPr>
-          <a:xfrm>
-            <a:off x="704088" y="1280160"/>
-            <a:ext cx="7744968" cy="2880360"/>
-          </a:xfrm>
-          <a:prstGeom prst="rect">
-            <a:avLst/>
-          </a:prstGeom>
-          <a:solidFill>
-            <a:srgbClr val="F0F2F5"/>
-          </a:solidFill>
-          <a:ln>
-            <a:solidFill>
-              <a:srgbClr val="D8DDE3"/>
-            </a:solidFill>
-          </a:ln>
-          <a:effectLst/>
-        </p:spPr>
-        <p:style>
-          <a:lnRef idx="1">
-            <a:schemeClr val="accent1"/>
-          </a:lnRef>
-          <a:fillRef idx="3">
-            <a:schemeClr val="accent1"/>
-          </a:fillRef>
-          <a:effectRef idx="2">
-            <a:schemeClr val="accent1"/>
-          </a:effectRef>
-          <a:fontRef idx="minor">
-            <a:schemeClr val="lt1"/>
-          </a:fontRef>
-        </p:style>
-        <p:txBody>
-          <a:bodyPr rtlCol="0" anchor="ctr" wrap="square" lIns="228600" tIns="137160"/>
-          <a:lstStyle/>
-          <a:p>
-            <a:pPr/>
-            <a:r>
-              <a:rPr sz="1500" b="0">
-                <a:solidFill>
-                  <a:srgbClr val="1D3557"/>
-                </a:solidFill>
-                <a:latin typeface="Menlo"/>
-              </a:rPr>
-              <a:t>Z = StandardScaler().fit_transform(X)  # 1. estandarizar</a:t>
-            </a:r>
-          </a:p>
-          <a:p>
-            <a:pPr/>
-            <a:r>
-              <a:rPr sz="1500" b="0">
-                <a:solidFill>
-                  <a:srgbClr val="1D3557"/>
-                </a:solidFill>
-                <a:latin typeface="Menlo"/>
-              </a:rPr>
-              <a:t>pca = PCA().fit(Z)                     # 2. las componentes</a:t>
-            </a:r>
-          </a:p>
-          <a:p>
-            <a:pPr/>
-            <a:r>
-              <a:rPr sz="1500" b="0">
-                <a:solidFill>
-                  <a:srgbClr val="1D3557"/>
-                </a:solidFill>
-                <a:latin typeface="Menlo"/>
-              </a:rPr>
-              <a:t>pca.explained_variance_ratio_          # 3. cuánto explica</a:t>
-            </a:r>
-          </a:p>
-          <a:p>
-            <a:pPr/>
-            <a:r>
-              <a:rPr sz="1500" b="0">
-                <a:solidFill>
-                  <a:srgbClr val="1D3557"/>
-                </a:solidFill>
-                <a:latin typeface="Menlo"/>
-              </a:rPr>
-              <a:t>pca.components_                        # 4. los pesos</a:t>
-            </a:r>
-          </a:p>
-          <a:p>
-            <a:pPr/>
-            <a:r>
-              <a:rPr sz="1500" b="0">
-                <a:solidFill>
-                  <a:srgbClr val="1D3557"/>
-                </a:solidFill>
-                <a:latin typeface="Menlo"/>
-              </a:rPr>
-              <a:t>puntajes = pca.transform(Z)            # 5. los puntajes</a:t>
-            </a:r>
-          </a:p>
-        </p:txBody>
-      </p:sp>
-      <p:sp>
-        <p:nvSpPr>
-          <p:cNvPr id="5" name="TextBox 4"/>
+              <a:t>Tres precauciones</a:t>
+            </a:r>
+          </a:p>
+        </p:txBody>
+      </p:sp>
+      <p:sp>
+        <p:nvSpPr>
+          <p:cNvPr id="4" name="TextBox 3"/>
           <p:cNvSpPr txBox="1"/>
           <p:nvPr/>
         </p:nvSpPr>
         <p:spPr>
           <a:xfrm>
-            <a:off x="704088" y="4389120"/>
-            <a:ext cx="7744968" cy="1097280"/>
+            <a:off x="704088" y="1353312"/>
+            <a:ext cx="7744968" cy="3300984"/>
           </a:xfrm>
           <a:prstGeom prst="rect">
             <a:avLst/>
@@ -6998,7 +6774,7 @@
               </a:spcAft>
             </a:pPr>
             <a:r>
-              <a:rPr sz="1600" b="1">
+              <a:rPr sz="1800" b="1">
                 <a:solidFill>
                   <a:srgbClr val="E0A437"/>
                 </a:solidFill>
@@ -7007,13 +6783,69 @@
               <a:t>▸ </a:t>
             </a:r>
             <a:r>
-              <a:rPr sz="1600" b="0">
+              <a:rPr sz="1800" b="1">
+                <a:solidFill>
+                  <a:srgbClr val="1D3557"/>
+                </a:solidFill>
+                <a:latin typeface="Fira Sans"/>
+              </a:rPr>
+              <a:t>Las variables categóricas (las dummies de la clase 6) no entran bien en el cálculo: se dejan fuera o se tratan aparte.</a:t>
+            </a:r>
+          </a:p>
+          <a:p>
+            <a:pPr>
+              <a:lnSpc>
+                <a:spcPct val="112000"/>
+              </a:lnSpc>
+              <a:spcAft>
+                <a:spcPts val="900"/>
+              </a:spcAft>
+            </a:pPr>
+            <a:r>
+              <a:rPr sz="1800" b="1">
+                <a:solidFill>
+                  <a:srgbClr val="E0A437"/>
+                </a:solidFill>
+                <a:latin typeface="Fira Sans"/>
+              </a:rPr>
+              <a:t>▸ </a:t>
+            </a:r>
+            <a:r>
+              <a:rPr sz="1800" b="0">
                 <a:solidFill>
                   <a:srgbClr val="000000"/>
                 </a:solidFill>
                 <a:latin typeface="Fira Sans"/>
               </a:rPr>
-              <a:t>El ejemplo completo, con las tablas de pesos y los gráficos de la clase, está en el notebook 08_componentes_principales.ipynb.</a:t>
+              <a:t>Las componentes no siempre tienen una lectura clara. Aquí sí (la carrera; la temporada frente a la carrera), pero no está garantizado.</a:t>
+            </a:r>
+          </a:p>
+          <a:p>
+            <a:pPr>
+              <a:lnSpc>
+                <a:spcPct val="112000"/>
+              </a:lnSpc>
+              <a:spcAft>
+                <a:spcPts val="900"/>
+              </a:spcAft>
+            </a:pPr>
+            <a:r>
+              <a:rPr sz="1800" b="1">
+                <a:solidFill>
+                  <a:srgbClr val="E0A437"/>
+                </a:solidFill>
+                <a:latin typeface="Fira Sans"/>
+              </a:rPr>
+              <a:t>▸ </a:t>
+            </a:r>
+            <a:r>
+              <a:rPr sz="1800" b="0">
+                <a:solidFill>
+                  <a:srgbClr val="000000"/>
+                </a:solidFill>
+                <a:latin typeface="Fira Sans"/>
+              </a:rPr>
+              <a:t>Es no supervisado: la dirección de más variación no es necesariamente la que mejor predice la respuesta. Ridge y Lasso eligen mirando Y; PCA no la mira.</a:t>
             </a:r>
           </a:p>
         </p:txBody>
@@ -7051,7 +6883,7 @@
             <a:avLst/>
           </a:prstGeom>
           <a:solidFill>
-            <a:srgbClr val="1D3557"/>
+            <a:srgbClr val="FAFBFC"/>
           </a:solidFill>
           <a:ln>
             <a:noFill/>
@@ -7088,8 +6920,8 @@
         </p:nvSpPr>
         <p:spPr>
           <a:xfrm>
-            <a:off x="603504" y="1847088"/>
-            <a:ext cx="7946136" cy="1399032"/>
+            <a:off x="402336" y="301752"/>
+            <a:ext cx="8348472" cy="795528"/>
           </a:xfrm>
           <a:prstGeom prst="rect">
             <a:avLst/>
@@ -7103,24 +6935,167 @@
           <a:lstStyle/>
           <a:p>
             <a:r>
-              <a:rPr sz="3400" b="1">
-                <a:solidFill>
-                  <a:srgbClr val="FFFFFF"/>
-                </a:solidFill>
-                <a:latin typeface="Fira Sans"/>
-              </a:rPr>
-              <a:t>5. Cierre del módulo</a:t>
-            </a:r>
-          </a:p>
-          <a:p>
-            <a:r>
-              <a:rPr sz="1800" b="0">
+              <a:rPr sz="2800" b="1">
+                <a:solidFill>
+                  <a:srgbClr val="0F0F0F"/>
+                </a:solidFill>
+                <a:latin typeface="Fira Sans"/>
+              </a:rPr>
+              <a:t>En el código: cinco líneas</a:t>
+            </a:r>
+          </a:p>
+        </p:txBody>
+      </p:sp>
+      <p:sp>
+        <p:nvSpPr>
+          <p:cNvPr id="4" name="Rectangle 3"/>
+          <p:cNvSpPr/>
+          <p:nvPr/>
+        </p:nvSpPr>
+        <p:spPr>
+          <a:xfrm>
+            <a:off x="704088" y="1280160"/>
+            <a:ext cx="7744968" cy="2880360"/>
+          </a:xfrm>
+          <a:prstGeom prst="rect">
+            <a:avLst/>
+          </a:prstGeom>
+          <a:solidFill>
+            <a:srgbClr val="F0F2F5"/>
+          </a:solidFill>
+          <a:ln>
+            <a:solidFill>
+              <a:srgbClr val="D8DDE3"/>
+            </a:solidFill>
+          </a:ln>
+          <a:effectLst/>
+        </p:spPr>
+        <p:style>
+          <a:lnRef idx="1">
+            <a:schemeClr val="accent1"/>
+          </a:lnRef>
+          <a:fillRef idx="3">
+            <a:schemeClr val="accent1"/>
+          </a:fillRef>
+          <a:effectRef idx="2">
+            <a:schemeClr val="accent1"/>
+          </a:effectRef>
+          <a:fontRef idx="minor">
+            <a:schemeClr val="lt1"/>
+          </a:fontRef>
+        </p:style>
+        <p:txBody>
+          <a:bodyPr rtlCol="0" anchor="ctr" wrap="square" lIns="228600" tIns="137160"/>
+          <a:lstStyle/>
+          <a:p>
+            <a:pPr/>
+            <a:r>
+              <a:rPr sz="1500" b="0">
+                <a:solidFill>
+                  <a:srgbClr val="1D3557"/>
+                </a:solidFill>
+                <a:latin typeface="Menlo"/>
+              </a:rPr>
+              <a:t>Z = StandardScaler().fit_transform(X)  # 1. estandarizar</a:t>
+            </a:r>
+          </a:p>
+          <a:p>
+            <a:pPr/>
+            <a:r>
+              <a:rPr sz="1500" b="0">
+                <a:solidFill>
+                  <a:srgbClr val="1D3557"/>
+                </a:solidFill>
+                <a:latin typeface="Menlo"/>
+              </a:rPr>
+              <a:t>pca = PCA().fit(Z)                     # 2. las componentes</a:t>
+            </a:r>
+          </a:p>
+          <a:p>
+            <a:pPr/>
+            <a:r>
+              <a:rPr sz="1500" b="0">
+                <a:solidFill>
+                  <a:srgbClr val="1D3557"/>
+                </a:solidFill>
+                <a:latin typeface="Menlo"/>
+              </a:rPr>
+              <a:t>pca.explained_variance_ratio_          # 3. cuánto explica</a:t>
+            </a:r>
+          </a:p>
+          <a:p>
+            <a:pPr/>
+            <a:r>
+              <a:rPr sz="1500" b="0">
+                <a:solidFill>
+                  <a:srgbClr val="1D3557"/>
+                </a:solidFill>
+                <a:latin typeface="Menlo"/>
+              </a:rPr>
+              <a:t>pca.components_                        # 4. los pesos</a:t>
+            </a:r>
+          </a:p>
+          <a:p>
+            <a:pPr/>
+            <a:r>
+              <a:rPr sz="1500" b="0">
+                <a:solidFill>
+                  <a:srgbClr val="1D3557"/>
+                </a:solidFill>
+                <a:latin typeface="Menlo"/>
+              </a:rPr>
+              <a:t>puntajes = pca.transform(Z)            # 5. los puntajes</a:t>
+            </a:r>
+          </a:p>
+        </p:txBody>
+      </p:sp>
+      <p:sp>
+        <p:nvSpPr>
+          <p:cNvPr id="5" name="TextBox 4"/>
+          <p:cNvSpPr txBox="1"/>
+          <p:nvPr/>
+        </p:nvSpPr>
+        <p:spPr>
+          <a:xfrm>
+            <a:off x="704088" y="4389120"/>
+            <a:ext cx="7744968" cy="1097280"/>
+          </a:xfrm>
+          <a:prstGeom prst="rect">
+            <a:avLst/>
+          </a:prstGeom>
+          <a:noFill/>
+        </p:spPr>
+        <p:txBody>
+          <a:bodyPr wrap="square">
+            <a:spAutoFit/>
+          </a:bodyPr>
+          <a:lstStyle/>
+          <a:p>
+            <a:pPr>
+              <a:lnSpc>
+                <a:spcPct val="112000"/>
+              </a:lnSpc>
+              <a:spcAft>
+                <a:spcPts val="900"/>
+              </a:spcAft>
+            </a:pPr>
+            <a:r>
+              <a:rPr sz="1600" b="1">
                 <a:solidFill>
                   <a:srgbClr val="E0A437"/>
                 </a:solidFill>
                 <a:latin typeface="Fira Sans"/>
               </a:rPr>
-              <a:t>Ocho clases, un hilo</a:t>
+              <a:t>▸ </a:t>
+            </a:r>
+            <a:r>
+              <a:rPr sz="1600" b="0">
+                <a:solidFill>
+                  <a:srgbClr val="000000"/>
+                </a:solidFill>
+                <a:latin typeface="Fira Sans"/>
+              </a:rPr>
+              <a:t>El ejemplo completo, con las tablas de pesos y los gráficos de la clase, está en el notebook 08_componentes_principales.ipynb.</a:t>
             </a:r>
           </a:p>
         </p:txBody>
@@ -7417,7 +7392,7 @@
             <a:avLst/>
           </a:prstGeom>
           <a:solidFill>
-            <a:srgbClr val="FAFBFC"/>
+            <a:srgbClr val="1D3557"/>
           </a:solidFill>
           <a:ln>
             <a:noFill/>
@@ -7454,8 +7429,8 @@
         </p:nvSpPr>
         <p:spPr>
           <a:xfrm>
-            <a:off x="402336" y="301752"/>
-            <a:ext cx="8348472" cy="795528"/>
+            <a:off x="603504" y="1847088"/>
+            <a:ext cx="7946136" cy="1399032"/>
           </a:xfrm>
           <a:prstGeom prst="rect">
             <a:avLst/>
@@ -7469,71 +7444,24 @@
           <a:lstStyle/>
           <a:p>
             <a:r>
-              <a:rPr sz="2800" b="1">
-                <a:solidFill>
-                  <a:srgbClr val="0F0F0F"/>
-                </a:solidFill>
-                <a:latin typeface="Fira Sans"/>
-              </a:rPr>
-              <a:t>El módulo en una página</a:t>
-            </a:r>
-          </a:p>
-        </p:txBody>
-      </p:sp>
-      <p:pic>
-        <p:nvPicPr>
-          <p:cNvPr id="4" name="Picture 3" descr="c8_07_mapa_modulo.png"/>
-          <p:cNvPicPr>
-            <a:picLocks noChangeAspect="1"/>
-          </p:cNvPicPr>
-          <p:nvPr/>
-        </p:nvPicPr>
-        <p:blipFill>
-          <a:blip r:embed="rId2"/>
-          <a:stretch>
-            <a:fillRect/>
-          </a:stretch>
-        </p:blipFill>
-        <p:spPr>
-          <a:xfrm>
-            <a:off x="1029546" y="1143000"/>
-            <a:ext cx="7084906" cy="3099816"/>
-          </a:xfrm>
-          <a:prstGeom prst="rect">
-            <a:avLst/>
-          </a:prstGeom>
-        </p:spPr>
-      </p:pic>
-      <p:sp>
-        <p:nvSpPr>
-          <p:cNvPr id="5" name="TextBox 4"/>
-          <p:cNvSpPr txBox="1"/>
-          <p:nvPr/>
-        </p:nvSpPr>
-        <p:spPr>
-          <a:xfrm>
-            <a:off x="704088" y="4379976"/>
-            <a:ext cx="7744968" cy="512064"/>
-          </a:xfrm>
-          <a:prstGeom prst="rect">
-            <a:avLst/>
-          </a:prstGeom>
-          <a:noFill/>
-        </p:spPr>
-        <p:txBody>
-          <a:bodyPr wrap="square">
-            <a:spAutoFit/>
-          </a:bodyPr>
-          <a:lstStyle/>
-          <a:p>
-            <a:r>
-              <a:rPr sz="1300" b="0">
-                <a:solidFill>
-                  <a:srgbClr val="333333"/>
-                </a:solidFill>
-                <a:latin typeface="Fira Sans"/>
-              </a:rPr>
-              <a:t>Cada clase dejó una idea. Juntas, son lo que el módulo enseñó: cómo se llega de una pregunta y unos datos a un resultado, y cómo se lee ese resultado con su incertidumbre.</a:t>
+              <a:rPr sz="3400" b="1">
+                <a:solidFill>
+                  <a:srgbClr val="FFFFFF"/>
+                </a:solidFill>
+                <a:latin typeface="Fira Sans"/>
+              </a:rPr>
+              <a:t>5. Cierre del módulo</a:t>
+            </a:r>
+          </a:p>
+          <a:p>
+            <a:r>
+              <a:rPr sz="1800" b="0">
+                <a:solidFill>
+                  <a:srgbClr val="E0A437"/>
+                </a:solidFill>
+                <a:latin typeface="Fira Sans"/>
+              </a:rPr>
+              <a:t>Ocho clases, un hilo</a:t>
             </a:r>
           </a:p>
         </p:txBody>
@@ -7629,21 +7557,45 @@
                 </a:solidFill>
                 <a:latin typeface="Fira Sans"/>
               </a:rPr>
-              <a:t>Lo que sigue en el diplomado</a:t>
-            </a:r>
-          </a:p>
-        </p:txBody>
-      </p:sp>
-      <p:sp>
-        <p:nvSpPr>
-          <p:cNvPr id="4" name="TextBox 3"/>
+              <a:t>El módulo en una página</a:t>
+            </a:r>
+          </a:p>
+        </p:txBody>
+      </p:sp>
+      <p:pic>
+        <p:nvPicPr>
+          <p:cNvPr id="4" name="Picture 3" descr="c8_07_mapa_modulo.png"/>
+          <p:cNvPicPr>
+            <a:picLocks noChangeAspect="1"/>
+          </p:cNvPicPr>
+          <p:nvPr/>
+        </p:nvPicPr>
+        <p:blipFill>
+          <a:blip r:embed="rId2"/>
+          <a:stretch>
+            <a:fillRect/>
+          </a:stretch>
+        </p:blipFill>
+        <p:spPr>
+          <a:xfrm>
+            <a:off x="1029546" y="1143000"/>
+            <a:ext cx="7084906" cy="3099816"/>
+          </a:xfrm>
+          <a:prstGeom prst="rect">
+            <a:avLst/>
+          </a:prstGeom>
+        </p:spPr>
+      </p:pic>
+      <p:sp>
+        <p:nvSpPr>
+          <p:cNvPr id="5" name="TextBox 4"/>
           <p:cNvSpPr txBox="1"/>
           <p:nvPr/>
         </p:nvSpPr>
         <p:spPr>
           <a:xfrm>
-            <a:off x="704088" y="1353312"/>
-            <a:ext cx="7744968" cy="3300984"/>
+            <a:off x="704088" y="4379976"/>
+            <a:ext cx="7744968" cy="512064"/>
           </a:xfrm>
           <a:prstGeom prst="rect">
             <a:avLst/>
@@ -7656,115 +7608,14 @@
           </a:bodyPr>
           <a:lstStyle/>
           <a:p>
-            <a:pPr>
-              <a:lnSpc>
-                <a:spcPct val="112000"/>
-              </a:lnSpc>
-              <a:spcAft>
-                <a:spcPts val="900"/>
-              </a:spcAft>
-            </a:pPr>
-            <a:r>
-              <a:rPr sz="1800" b="1">
-                <a:solidFill>
-                  <a:srgbClr val="E0A437"/>
-                </a:solidFill>
-                <a:latin typeface="Fira Sans"/>
-              </a:rPr>
-              <a:t>▸ </a:t>
-            </a:r>
-            <a:r>
-              <a:rPr sz="1800" b="1">
-                <a:solidFill>
-                  <a:srgbClr val="1D3557"/>
-                </a:solidFill>
-                <a:latin typeface="Fira Sans"/>
-              </a:rPr>
-              <a:t>Módulo 2, Visualización e Inteligencia de Negocios: visualización efectiva, narrativas con datos y métricas de negocio.</a:t>
-            </a:r>
-          </a:p>
-          <a:p>
-            <a:pPr>
-              <a:lnSpc>
-                <a:spcPct val="112000"/>
-              </a:lnSpc>
-              <a:spcAft>
-                <a:spcPts val="900"/>
-              </a:spcAft>
-            </a:pPr>
-            <a:r>
-              <a:rPr sz="1800" b="1">
-                <a:solidFill>
-                  <a:srgbClr val="E0A437"/>
-                </a:solidFill>
-                <a:latin typeface="Fira Sans"/>
-              </a:rPr>
-              <a:t>▸ </a:t>
-            </a:r>
-            <a:r>
-              <a:rPr sz="1800" b="0">
-                <a:solidFill>
-                  <a:srgbClr val="000000"/>
-                </a:solidFill>
-                <a:latin typeface="Fira Sans"/>
-              </a:rPr>
-              <a:t>Módulo 3, Machine Learning para la Toma de Decisiones: aprendizaje supervisado y no supervisado (clustering y PCA en profundidad), evaluación de modelos, redes neuronales y explicabilidad.</a:t>
-            </a:r>
-          </a:p>
-          <a:p>
-            <a:pPr>
-              <a:lnSpc>
-                <a:spcPct val="112000"/>
-              </a:lnSpc>
-              <a:spcAft>
-                <a:spcPts val="900"/>
-              </a:spcAft>
-            </a:pPr>
-            <a:r>
-              <a:rPr sz="1800" b="1">
-                <a:solidFill>
-                  <a:srgbClr val="E0A437"/>
-                </a:solidFill>
-                <a:latin typeface="Fira Sans"/>
-              </a:rPr>
-              <a:t>▸ </a:t>
-            </a:r>
-            <a:r>
-              <a:rPr sz="1800" b="0">
-                <a:solidFill>
-                  <a:srgbClr val="000000"/>
-                </a:solidFill>
-                <a:latin typeface="Fira Sans"/>
-              </a:rPr>
-              <a:t>El Capstone continúa en esos módulos: el primer modelo de hoy es el punto de partida.</a:t>
-            </a:r>
-          </a:p>
-          <a:p>
-            <a:pPr>
-              <a:lnSpc>
-                <a:spcPct val="112000"/>
-              </a:lnSpc>
-              <a:spcAft>
-                <a:spcPts val="900"/>
-              </a:spcAft>
-            </a:pPr>
-            <a:r>
-              <a:rPr sz="1800" b="1">
-                <a:solidFill>
-                  <a:srgbClr val="E0A437"/>
-                </a:solidFill>
-                <a:latin typeface="Fira Sans"/>
-              </a:rPr>
-              <a:t>▸ </a:t>
-            </a:r>
-            <a:r>
-              <a:rPr sz="1800" b="0">
-                <a:solidFill>
-                  <a:srgbClr val="000000"/>
-                </a:solidFill>
-                <a:latin typeface="Fira Sans"/>
-              </a:rPr>
-              <a:t>Lo que se lleva de aquí: leer un resultado con su incertidumbre, juzgar un modelo en datos que no vio, y distinguir describir de encontrar una relación.</a:t>
+            <a:r>
+              <a:rPr sz="1300" b="0">
+                <a:solidFill>
+                  <a:srgbClr val="333333"/>
+                </a:solidFill>
+                <a:latin typeface="Fira Sans"/>
+              </a:rPr>
+              <a:t>Cada clase dejó una idea. Juntas, son lo que el módulo enseñó: cómo se llega de una pregunta y unos datos a un resultado, y cómo se lee ese resultado con su incertidumbre.</a:t>
             </a:r>
           </a:p>
         </p:txBody>
@@ -7860,7 +7711,7 @@
                 </a:solidFill>
                 <a:latin typeface="Fira Sans"/>
               </a:rPr>
-              <a:t>Ahora: las presentaciones del avance</a:t>
+              <a:t>Lo que sigue en el diplomado</a:t>
             </a:r>
           </a:p>
         </p:txBody>
@@ -7911,7 +7762,7 @@
                 </a:solidFill>
                 <a:latin typeface="Fira Sans"/>
               </a:rPr>
-              <a:t>Ocho equipos, en el orden en que se ofrezcan. Máximo 10 minutos por equipo; el tiempo se controla. Después, preguntas de la profesora y del curso.</a:t>
+              <a:t>Módulo 2, Visualización e Inteligencia de Negocios: visualización efectiva, narrativas con datos y métricas de negocio.</a:t>
             </a:r>
           </a:p>
           <a:p>
@@ -7939,7 +7790,7 @@
                 </a:solidFill>
                 <a:latin typeface="Fira Sans"/>
               </a:rPr>
-              <a:t>Se evalúa el avance, no un resultado final: el modelo es un primer intento. La exigencia está en el tiempo, la claridad, la explicación de los gráficos y las relaciones, y en advertir qué falta o qué no tiene sentido.</a:t>
+              <a:t>Módulo 3, Machine Learning para la Toma de Decisiones: aprendizaje supervisado y no supervisado (clustering y PCA en profundidad), evaluación de modelos, redes neuronales y explicabilidad.</a:t>
             </a:r>
           </a:p>
           <a:p>
@@ -7967,7 +7818,7 @@
                 </a:solidFill>
                 <a:latin typeface="Fira Sans"/>
               </a:rPr>
-              <a:t>Las slides, en PDF, al Aula hasta las 20:30: un envío por equipo con los nombres.</a:t>
+              <a:t>El Capstone continúa en esos módulos: el primer modelo de hoy es el punto de partida.</a:t>
             </a:r>
           </a:p>
           <a:p>
@@ -7995,7 +7846,7 @@
                 </a:solidFill>
                 <a:latin typeface="Fira Sans"/>
               </a:rPr>
-              <a:t>El informe escrito, el viernes 25 de septiembre por el Aula: máximo 7 páginas, con su rúbrica publicada.</a:t>
+              <a:t>Lo que se lleva de aquí: leer un resultado con su incertidumbre, juzgar un modelo en datos que no vio, y distinguir describir de encontrar una relación.</a:t>
             </a:r>
           </a:p>
         </p:txBody>
@@ -8009,6 +7860,237 @@
 </file>
 
 <file path=ppt/slides/slide33.xml><?xml version="1.0" encoding="utf-8"?>
+<p:sld xmlns:a="http://schemas.openxmlformats.org/drawingml/2006/main" xmlns:p="http://schemas.openxmlformats.org/presentationml/2006/main" xmlns:r="http://schemas.openxmlformats.org/officeDocument/2006/relationships">
+  <p:cSld>
+    <p:spTree>
+      <p:nvGrpSpPr>
+        <p:cNvPr id="1" name=""/>
+        <p:cNvGrpSpPr/>
+        <p:nvPr/>
+      </p:nvGrpSpPr>
+      <p:grpSpPr/>
+      <p:sp>
+        <p:nvSpPr>
+          <p:cNvPr id="2" name="Rectangle 1"/>
+          <p:cNvSpPr/>
+          <p:nvPr/>
+        </p:nvSpPr>
+        <p:spPr>
+          <a:xfrm>
+            <a:off x="0" y="0"/>
+            <a:ext cx="9144000" cy="5138928"/>
+          </a:xfrm>
+          <a:prstGeom prst="rect">
+            <a:avLst/>
+          </a:prstGeom>
+          <a:solidFill>
+            <a:srgbClr val="FAFBFC"/>
+          </a:solidFill>
+          <a:ln>
+            <a:noFill/>
+          </a:ln>
+          <a:effectLst/>
+        </p:spPr>
+        <p:style>
+          <a:lnRef idx="1">
+            <a:schemeClr val="accent1"/>
+          </a:lnRef>
+          <a:fillRef idx="3">
+            <a:schemeClr val="accent1"/>
+          </a:fillRef>
+          <a:effectRef idx="2">
+            <a:schemeClr val="accent1"/>
+          </a:effectRef>
+          <a:fontRef idx="minor">
+            <a:schemeClr val="lt1"/>
+          </a:fontRef>
+        </p:style>
+        <p:txBody>
+          <a:bodyPr rtlCol="0" anchor="ctr"/>
+          <a:lstStyle/>
+          <a:p>
+            <a:pPr algn="ctr"/>
+          </a:p>
+        </p:txBody>
+      </p:sp>
+      <p:sp>
+        <p:nvSpPr>
+          <p:cNvPr id="3" name="TextBox 2"/>
+          <p:cNvSpPr txBox="1"/>
+          <p:nvPr/>
+        </p:nvSpPr>
+        <p:spPr>
+          <a:xfrm>
+            <a:off x="402336" y="301752"/>
+            <a:ext cx="8348472" cy="795528"/>
+          </a:xfrm>
+          <a:prstGeom prst="rect">
+            <a:avLst/>
+          </a:prstGeom>
+          <a:noFill/>
+        </p:spPr>
+        <p:txBody>
+          <a:bodyPr wrap="square">
+            <a:spAutoFit/>
+          </a:bodyPr>
+          <a:lstStyle/>
+          <a:p>
+            <a:r>
+              <a:rPr sz="2800" b="1">
+                <a:solidFill>
+                  <a:srgbClr val="0F0F0F"/>
+                </a:solidFill>
+                <a:latin typeface="Fira Sans"/>
+              </a:rPr>
+              <a:t>Ahora: las presentaciones del avance</a:t>
+            </a:r>
+          </a:p>
+        </p:txBody>
+      </p:sp>
+      <p:sp>
+        <p:nvSpPr>
+          <p:cNvPr id="4" name="TextBox 3"/>
+          <p:cNvSpPr txBox="1"/>
+          <p:nvPr/>
+        </p:nvSpPr>
+        <p:spPr>
+          <a:xfrm>
+            <a:off x="704088" y="1353312"/>
+            <a:ext cx="7744968" cy="3300984"/>
+          </a:xfrm>
+          <a:prstGeom prst="rect">
+            <a:avLst/>
+          </a:prstGeom>
+          <a:noFill/>
+        </p:spPr>
+        <p:txBody>
+          <a:bodyPr wrap="square">
+            <a:spAutoFit/>
+          </a:bodyPr>
+          <a:lstStyle/>
+          <a:p>
+            <a:pPr>
+              <a:lnSpc>
+                <a:spcPct val="112000"/>
+              </a:lnSpc>
+              <a:spcAft>
+                <a:spcPts val="900"/>
+              </a:spcAft>
+            </a:pPr>
+            <a:r>
+              <a:rPr sz="1800" b="1">
+                <a:solidFill>
+                  <a:srgbClr val="E0A437"/>
+                </a:solidFill>
+                <a:latin typeface="Fira Sans"/>
+              </a:rPr>
+              <a:t>▸ </a:t>
+            </a:r>
+            <a:r>
+              <a:rPr sz="1800" b="1">
+                <a:solidFill>
+                  <a:srgbClr val="1D3557"/>
+                </a:solidFill>
+                <a:latin typeface="Fira Sans"/>
+              </a:rPr>
+              <a:t>Ocho equipos, en el orden en que se ofrezcan. Máximo 10 minutos por equipo; el tiempo se controla. Después, preguntas de la profesora y del curso.</a:t>
+            </a:r>
+          </a:p>
+          <a:p>
+            <a:pPr>
+              <a:lnSpc>
+                <a:spcPct val="112000"/>
+              </a:lnSpc>
+              <a:spcAft>
+                <a:spcPts val="900"/>
+              </a:spcAft>
+            </a:pPr>
+            <a:r>
+              <a:rPr sz="1800" b="1">
+                <a:solidFill>
+                  <a:srgbClr val="E0A437"/>
+                </a:solidFill>
+                <a:latin typeface="Fira Sans"/>
+              </a:rPr>
+              <a:t>▸ </a:t>
+            </a:r>
+            <a:r>
+              <a:rPr sz="1800" b="0">
+                <a:solidFill>
+                  <a:srgbClr val="000000"/>
+                </a:solidFill>
+                <a:latin typeface="Fira Sans"/>
+              </a:rPr>
+              <a:t>Se evalúa el avance, no un resultado final: el modelo es un primer intento. La exigencia está en el tiempo, la claridad, la explicación de los gráficos y las relaciones, y en advertir qué falta o qué no tiene sentido.</a:t>
+            </a:r>
+          </a:p>
+          <a:p>
+            <a:pPr>
+              <a:lnSpc>
+                <a:spcPct val="112000"/>
+              </a:lnSpc>
+              <a:spcAft>
+                <a:spcPts val="900"/>
+              </a:spcAft>
+            </a:pPr>
+            <a:r>
+              <a:rPr sz="1800" b="1">
+                <a:solidFill>
+                  <a:srgbClr val="E0A437"/>
+                </a:solidFill>
+                <a:latin typeface="Fira Sans"/>
+              </a:rPr>
+              <a:t>▸ </a:t>
+            </a:r>
+            <a:r>
+              <a:rPr sz="1800" b="0">
+                <a:solidFill>
+                  <a:srgbClr val="000000"/>
+                </a:solidFill>
+                <a:latin typeface="Fira Sans"/>
+              </a:rPr>
+              <a:t>Las slides, en PDF, al Aula hasta las 20:30: un envío por equipo con los nombres.</a:t>
+            </a:r>
+          </a:p>
+          <a:p>
+            <a:pPr>
+              <a:lnSpc>
+                <a:spcPct val="112000"/>
+              </a:lnSpc>
+              <a:spcAft>
+                <a:spcPts val="900"/>
+              </a:spcAft>
+            </a:pPr>
+            <a:r>
+              <a:rPr sz="1800" b="1">
+                <a:solidFill>
+                  <a:srgbClr val="E0A437"/>
+                </a:solidFill>
+                <a:latin typeface="Fira Sans"/>
+              </a:rPr>
+              <a:t>▸ </a:t>
+            </a:r>
+            <a:r>
+              <a:rPr sz="1800" b="0">
+                <a:solidFill>
+                  <a:srgbClr val="000000"/>
+                </a:solidFill>
+                <a:latin typeface="Fira Sans"/>
+              </a:rPr>
+              <a:t>El informe escrito, el viernes 25 de septiembre por el Aula: máximo 7 páginas, con su rúbrica publicada.</a:t>
+            </a:r>
+          </a:p>
+        </p:txBody>
+      </p:sp>
+    </p:spTree>
+  </p:cSld>
+  <p:clrMapOvr>
+    <a:masterClrMapping/>
+  </p:clrMapOvr>
+</p:sld>
+</file>
+
+<file path=ppt/slides/slide34.xml><?xml version="1.0" encoding="utf-8"?>
 <p:sld xmlns:a="http://schemas.openxmlformats.org/drawingml/2006/main" xmlns:p="http://schemas.openxmlformats.org/presentationml/2006/main" xmlns:r="http://schemas.openxmlformats.org/officeDocument/2006/relationships">
   <p:cSld>
     <p:spTree>

--- a/presentaciones/clase08_componentes_principales.pptx
+++ b/presentaciones/clase08_componentes_principales.pptx
@@ -39,6 +39,7 @@
     <p:sldId id="287" r:id="rId38"/>
     <p:sldId id="288" r:id="rId39"/>
     <p:sldId id="289" r:id="rId40"/>
+    <p:sldId id="290" r:id="rId41"/>
   </p:sldIdLst>
   <p:sldSz cx="9144000" cy="5138928" type="screen4x3"/>
   <p:notesSz cx="6858000" cy="9144000"/>
@@ -4113,8 +4114,8 @@
         </p:blipFill>
         <p:spPr>
           <a:xfrm>
-            <a:off x="699515" y="1261139"/>
-            <a:ext cx="7744968" cy="2607505"/>
+            <a:off x="1099936" y="1143000"/>
+            <a:ext cx="6944127" cy="2587752"/>
           </a:xfrm>
           <a:prstGeom prst="rect">
             <a:avLst/>
@@ -4129,8 +4130,8 @@
         </p:nvSpPr>
         <p:spPr>
           <a:xfrm>
-            <a:off x="704088" y="4005804"/>
-            <a:ext cx="7744968" cy="768096"/>
+            <a:off x="704088" y="3867912"/>
+            <a:ext cx="7744968" cy="1024128"/>
           </a:xfrm>
           <a:prstGeom prst="rect">
             <a:avLst/>
@@ -4150,7 +4151,7 @@
                 </a:solidFill>
                 <a:latin typeface="Fira Sans"/>
               </a:rPr>
-              <a:t>La posición sobre la diagonal se calcula como un puntaje ponderado, igual que el de la admisión universitaria: cada variable entra con un peso y sale un número por jugador. Aquí los pesos no los fija nadie: se calculan para que ese número separe a los jugadores lo más posible.</a:t>
+              <a:t>Un puntaje ponderado, como el de la admisión universitaria: cada variable entra con un peso y sale un número por jugador. Los pesos son la dirección de la diagonal: un paso de 1 sobre ella avanza 0,707 en turnos y 0,707 en hits. Por eso no los fija nadie: los fija la dirección en que los puntos más se dispersan.</a:t>
             </a:r>
           </a:p>
         </p:txBody>
@@ -5966,14 +5967,14 @@
                 </a:solidFill>
                 <a:latin typeface="Fira Sans"/>
               </a:rPr>
-              <a:t>De qué está hecha cada componente: los pesos</a:t>
+              <a:t>De dónde salen los pesos</a:t>
             </a:r>
           </a:p>
         </p:txBody>
       </p:sp>
       <p:pic>
         <p:nvPicPr>
-          <p:cNvPr id="4" name="Picture 3" descr="c8_04_pesos.png"/>
+          <p:cNvPr id="4" name="Picture 3" descr="c8_04a_direccion.png"/>
           <p:cNvPicPr>
             <a:picLocks noChangeAspect="1"/>
           </p:cNvPicPr>
@@ -5987,8 +5988,8 @@
         </p:blipFill>
         <p:spPr>
           <a:xfrm>
-            <a:off x="2196563" y="1143000"/>
-            <a:ext cx="4750872" cy="2587752"/>
+            <a:off x="699515" y="1153192"/>
+            <a:ext cx="7744968" cy="3079431"/>
           </a:xfrm>
           <a:prstGeom prst="rect">
             <a:avLst/>
@@ -6003,8 +6004,8 @@
         </p:nvSpPr>
         <p:spPr>
           <a:xfrm>
-            <a:off x="704088" y="3867912"/>
-            <a:ext cx="7744968" cy="1024128"/>
+            <a:off x="704088" y="4369783"/>
+            <a:ext cx="7744968" cy="512064"/>
           </a:xfrm>
           <a:prstGeom prst="rect">
             <a:avLst/>
@@ -6024,7 +6025,7 @@
                 </a:solidFill>
                 <a:latin typeface="Fira Sans"/>
               </a:rPr>
-              <a:t>Primera componente: las siete variables de la carrera pesan casi lo mismo (0,29 a 0,34), las de la temporada la mitad (0,19 a 0,23) y la defensa no cuenta: mide cuánta carrera lleva el jugador. Segunda componente: la temporada 1986 pesa positivo (0,24 a 0,39) y la carrera negativo (−0,12 a −0,26): separa a quien rindió este año más de lo que dice su carrera.</a:t>
+              <a:t>Los pesos de una componente son la dirección de su eje: cuánto avanza cada variable en un paso de 1 sobre él. Con dos variables, 0,707 y 0,707; con dieciséis, dieciséis pesos cuyos cuadrados suman 1.</a:t>
             </a:r>
           </a:p>
         </p:txBody>
@@ -6120,14 +6121,14 @@
                 </a:solidFill>
                 <a:latin typeface="Fira Sans"/>
               </a:rPr>
-              <a:t>Los 263 jugadores en dos componentes</a:t>
+              <a:t>De qué está hecha cada componente: los pesos</a:t>
             </a:r>
           </a:p>
         </p:txBody>
       </p:sp>
       <p:pic>
         <p:nvPicPr>
-          <p:cNvPr id="4" name="Picture 3" descr="c8_05_jugadores.png"/>
+          <p:cNvPr id="4" name="Picture 3" descr="c8_04_pesos.png"/>
           <p:cNvPicPr>
             <a:picLocks noChangeAspect="1"/>
           </p:cNvPicPr>
@@ -6141,8 +6142,8 @@
         </p:blipFill>
         <p:spPr>
           <a:xfrm>
-            <a:off x="2699826" y="1143000"/>
-            <a:ext cx="3744346" cy="2587751"/>
+            <a:off x="1433764" y="1143000"/>
+            <a:ext cx="6276471" cy="2843784"/>
           </a:xfrm>
           <a:prstGeom prst="rect">
             <a:avLst/>
@@ -6157,8 +6158,8 @@
         </p:nvSpPr>
         <p:spPr>
           <a:xfrm>
-            <a:off x="704088" y="3867912"/>
-            <a:ext cx="7744968" cy="1024128"/>
+            <a:off x="704088" y="4123944"/>
+            <a:ext cx="7744968" cy="768096"/>
           </a:xfrm>
           <a:prstGeom prst="rect">
             <a:avLst/>
@@ -6178,7 +6179,7 @@
                 </a:solidFill>
                 <a:latin typeface="Fira Sans"/>
               </a:rPr>
-              <a:t>Cada punto es un jugador y el color, su salario de 1987, que PCA no usó. El salario crece hacia la derecha (correlación 0,64 con la primera componente) y casi nada hacia arriba (0,11 con la segunda): la carrera pesa en el salario; la última temporada, poco. Dos ejes muestran lo que en 16 variables había que leer coeficiente por coeficiente.</a:t>
+              <a:t>1.ª componente: la carrera pesa 0,29 a 0,34, la temporada 1986 la mitad (0,19 a 0,23) y la defensa nada: cuánta carrera lleva el jugador. 2.ª: la temporada positiva (0,24 a 0,39) y la carrera negativa (−0,12 a −0,26): quien rindió este año más de lo que dice su carrera.</a:t>
             </a:r>
           </a:p>
         </p:txBody>
@@ -6274,14 +6275,14 @@
                 </a:solidFill>
                 <a:latin typeface="Fira Sans"/>
               </a:rPr>
-              <a:t>El mismo cálculo con las flores de la clase 2</a:t>
+              <a:t>Los 263 jugadores en dos componentes</a:t>
             </a:r>
           </a:p>
         </p:txBody>
       </p:sp>
       <p:pic>
         <p:nvPicPr>
-          <p:cNvPr id="4" name="Picture 3" descr="c8_06_iris.png"/>
+          <p:cNvPr id="4" name="Picture 3" descr="c8_05_jugadores.png"/>
           <p:cNvPicPr>
             <a:picLocks noChangeAspect="1"/>
           </p:cNvPicPr>
@@ -6295,8 +6296,8 @@
         </p:blipFill>
         <p:spPr>
           <a:xfrm>
-            <a:off x="2906606" y="1143000"/>
-            <a:ext cx="3330786" cy="2587751"/>
+            <a:off x="2699826" y="1143000"/>
+            <a:ext cx="3744346" cy="2587751"/>
           </a:xfrm>
           <a:prstGeom prst="rect">
             <a:avLst/>
@@ -6332,7 +6333,7 @@
                 </a:solidFill>
                 <a:latin typeface="Fira Sans"/>
               </a:rPr>
-              <a:t>Las cuatro medidas de iris se resumen en dos componentes que reúnen el 96% de la variación. La primera (73%) pesa casi igual el largo y el ancho del pétalo y el largo del sépalo (0,52 a 0,58): el tamaño de la flor. La segunda (23%) es casi solo el ancho del sépalo (0,92). PCA no conoce la especie y aun así las tres quedan separadas a lo largo de la primera componente.</a:t>
+              <a:t>Cada punto es un jugador y el color, su salario de 1987, que PCA no usó. El salario crece hacia la derecha (correlación 0,64 con la primera componente) y casi nada hacia arriba (0,11 con la segunda): la carrera pesa en el salario; la última temporada, poco. Dos ejes muestran lo que en 16 variables había que leer coeficiente por coeficiente.</a:t>
             </a:r>
           </a:p>
         </p:txBody>
@@ -6370,7 +6371,7 @@
             <a:avLst/>
           </a:prstGeom>
           <a:solidFill>
-            <a:srgbClr val="1D3557"/>
+            <a:srgbClr val="FAFBFC"/>
           </a:solidFill>
           <a:ln>
             <a:noFill/>
@@ -6407,8 +6408,8 @@
         </p:nvSpPr>
         <p:spPr>
           <a:xfrm>
-            <a:off x="603504" y="1847088"/>
-            <a:ext cx="7946136" cy="1399032"/>
+            <a:off x="402336" y="301752"/>
+            <a:ext cx="8348472" cy="795528"/>
           </a:xfrm>
           <a:prstGeom prst="rect">
             <a:avLst/>
@@ -6422,24 +6423,71 @@
           <a:lstStyle/>
           <a:p>
             <a:r>
-              <a:rPr sz="3400" b="1">
-                <a:solidFill>
-                  <a:srgbClr val="FFFFFF"/>
-                </a:solidFill>
-                <a:latin typeface="Fira Sans"/>
-              </a:rPr>
-              <a:t>4. Cuándo</a:t>
-            </a:r>
-          </a:p>
-          <a:p>
-            <a:r>
-              <a:rPr sz="1800" b="0">
-                <a:solidFill>
-                  <a:srgbClr val="E0A437"/>
-                </a:solidFill>
-                <a:latin typeface="Fira Sans"/>
-              </a:rPr>
-              <a:t>Cuándo conviene y cuándo no</a:t>
+              <a:rPr sz="2800" b="1">
+                <a:solidFill>
+                  <a:srgbClr val="0F0F0F"/>
+                </a:solidFill>
+                <a:latin typeface="Fira Sans"/>
+              </a:rPr>
+              <a:t>El mismo cálculo con iris (clase 2)</a:t>
+            </a:r>
+          </a:p>
+        </p:txBody>
+      </p:sp>
+      <p:pic>
+        <p:nvPicPr>
+          <p:cNvPr id="4" name="Picture 3" descr="c8_06_iris.png"/>
+          <p:cNvPicPr>
+            <a:picLocks noChangeAspect="1"/>
+          </p:cNvPicPr>
+          <p:nvPr/>
+        </p:nvPicPr>
+        <p:blipFill>
+          <a:blip r:embed="rId2"/>
+          <a:stretch>
+            <a:fillRect/>
+          </a:stretch>
+        </p:blipFill>
+        <p:spPr>
+          <a:xfrm>
+            <a:off x="780288" y="1143000"/>
+            <a:ext cx="7583423" cy="2843784"/>
+          </a:xfrm>
+          <a:prstGeom prst="rect">
+            <a:avLst/>
+          </a:prstGeom>
+        </p:spPr>
+      </p:pic>
+      <p:sp>
+        <p:nvSpPr>
+          <p:cNvPr id="5" name="TextBox 4"/>
+          <p:cNvSpPr txBox="1"/>
+          <p:nvPr/>
+        </p:nvSpPr>
+        <p:spPr>
+          <a:xfrm>
+            <a:off x="704088" y="4123944"/>
+            <a:ext cx="7744968" cy="768096"/>
+          </a:xfrm>
+          <a:prstGeom prst="rect">
+            <a:avLst/>
+          </a:prstGeom>
+          <a:noFill/>
+        </p:spPr>
+        <p:txBody>
+          <a:bodyPr wrap="square">
+            <a:spAutoFit/>
+          </a:bodyPr>
+          <a:lstStyle/>
+          <a:p>
+            <a:r>
+              <a:rPr sz="1300" b="0">
+                <a:solidFill>
+                  <a:srgbClr val="333333"/>
+                </a:solidFill>
+                <a:latin typeface="Fira Sans"/>
+              </a:rPr>
+              <a:t>Las cuatro medidas se resumen en dos componentes con el 96% de la variación. Los pesos (izquierda) dicen qué es cada eje: el tamaño de la flor y el ancho del sépalo. Sin conocer la especie, las tres quedan separadas a lo largo del primero.</a:t>
             </a:r>
           </a:p>
         </p:txBody>
@@ -6477,7 +6525,7 @@
             <a:avLst/>
           </a:prstGeom>
           <a:solidFill>
-            <a:srgbClr val="FAFBFC"/>
+            <a:srgbClr val="1D3557"/>
           </a:solidFill>
           <a:ln>
             <a:noFill/>
@@ -6514,8 +6562,8 @@
         </p:nvSpPr>
         <p:spPr>
           <a:xfrm>
-            <a:off x="402336" y="301752"/>
-            <a:ext cx="8348472" cy="795528"/>
+            <a:off x="603504" y="1847088"/>
+            <a:ext cx="7946136" cy="1399032"/>
           </a:xfrm>
           <a:prstGeom prst="rect">
             <a:avLst/>
@@ -6529,120 +6577,24 @@
           <a:lstStyle/>
           <a:p>
             <a:r>
-              <a:rPr sz="2800" b="1">
-                <a:solidFill>
-                  <a:srgbClr val="0F0F0F"/>
-                </a:solidFill>
-                <a:latin typeface="Fira Sans"/>
-              </a:rPr>
-              <a:t>¿Cuándo conviene?</a:t>
-            </a:r>
-          </a:p>
-        </p:txBody>
-      </p:sp>
-      <p:sp>
-        <p:nvSpPr>
-          <p:cNvPr id="4" name="TextBox 3"/>
-          <p:cNvSpPr txBox="1"/>
-          <p:nvPr/>
-        </p:nvSpPr>
-        <p:spPr>
-          <a:xfrm>
-            <a:off x="704088" y="1353312"/>
-            <a:ext cx="7744968" cy="3300984"/>
-          </a:xfrm>
-          <a:prstGeom prst="rect">
-            <a:avLst/>
-          </a:prstGeom>
-          <a:noFill/>
-        </p:spPr>
-        <p:txBody>
-          <a:bodyPr wrap="square">
-            <a:spAutoFit/>
-          </a:bodyPr>
-          <a:lstStyle/>
-          <a:p>
-            <a:pPr>
-              <a:lnSpc>
-                <a:spcPct val="112000"/>
-              </a:lnSpc>
-              <a:spcAft>
-                <a:spcPts val="900"/>
-              </a:spcAft>
-            </a:pPr>
-            <a:r>
-              <a:rPr sz="1800" b="1">
+              <a:rPr sz="3400" b="1">
+                <a:solidFill>
+                  <a:srgbClr val="FFFFFF"/>
+                </a:solidFill>
+                <a:latin typeface="Fira Sans"/>
+              </a:rPr>
+              <a:t>4. Cuándo</a:t>
+            </a:r>
+          </a:p>
+          <a:p>
+            <a:r>
+              <a:rPr sz="1800" b="0">
                 <a:solidFill>
                   <a:srgbClr val="E0A437"/>
                 </a:solidFill>
                 <a:latin typeface="Fira Sans"/>
               </a:rPr>
-              <a:t>▸ </a:t>
-            </a:r>
-            <a:r>
-              <a:rPr sz="1800" b="1">
-                <a:solidFill>
-                  <a:srgbClr val="1D3557"/>
-                </a:solidFill>
-                <a:latin typeface="Fira Sans"/>
-              </a:rPr>
-              <a:t>Con muchas variables numéricas que se correlacionan en bloques, como en la matriz de la clase 7.</a:t>
-            </a:r>
-          </a:p>
-          <a:p>
-            <a:pPr>
-              <a:lnSpc>
-                <a:spcPct val="112000"/>
-              </a:lnSpc>
-              <a:spcAft>
-                <a:spcPts val="900"/>
-              </a:spcAft>
-            </a:pPr>
-            <a:r>
-              <a:rPr sz="1800" b="1">
-                <a:solidFill>
-                  <a:srgbClr val="E0A437"/>
-                </a:solidFill>
-                <a:latin typeface="Fira Sans"/>
-              </a:rPr>
-              <a:t>▸ </a:t>
-            </a:r>
-            <a:r>
-              <a:rPr sz="1800" b="0">
-                <a:solidFill>
-                  <a:srgbClr val="000000"/>
-                </a:solidFill>
-                <a:latin typeface="Fira Sans"/>
-              </a:rPr>
-              <a:t>Para mirar los datos en un plano, o para entregarle a un modelo menos entradas.</a:t>
-            </a:r>
-          </a:p>
-          <a:p>
-            <a:pPr>
-              <a:lnSpc>
-                <a:spcPct val="112000"/>
-              </a:lnSpc>
-              <a:spcAft>
-                <a:spcPts val="900"/>
-              </a:spcAft>
-            </a:pPr>
-            <a:r>
-              <a:rPr sz="1800" b="1">
-                <a:solidFill>
-                  <a:srgbClr val="E0A437"/>
-                </a:solidFill>
-                <a:latin typeface="Fira Sans"/>
-              </a:rPr>
-              <a:t>▸ </a:t>
-            </a:r>
-            <a:r>
-              <a:rPr sz="1800" b="0">
-                <a:solidFill>
-                  <a:srgbClr val="000000"/>
-                </a:solidFill>
-                <a:latin typeface="Fira Sans"/>
-              </a:rPr>
-              <a:t>No aporta si las variables son pocas y distintas entre sí: no hay nada que resumir.</a:t>
+              <a:t>Cuándo conviene y cuándo no</a:t>
             </a:r>
           </a:p>
         </p:txBody>
@@ -6738,7 +6690,7 @@
                 </a:solidFill>
                 <a:latin typeface="Fira Sans"/>
               </a:rPr>
-              <a:t>Tres precauciones</a:t>
+              <a:t>¿Cuándo conviene?</a:t>
             </a:r>
           </a:p>
         </p:txBody>
@@ -6789,7 +6741,7 @@
                 </a:solidFill>
                 <a:latin typeface="Fira Sans"/>
               </a:rPr>
-              <a:t>Las variables categóricas (las dummies de la clase 6) no entran bien en el cálculo: se dejan fuera o se tratan aparte.</a:t>
+              <a:t>Con muchas variables numéricas que se correlacionan en bloques, como en la matriz de la clase 7.</a:t>
             </a:r>
           </a:p>
           <a:p>
@@ -6817,7 +6769,7 @@
                 </a:solidFill>
                 <a:latin typeface="Fira Sans"/>
               </a:rPr>
-              <a:t>Las componentes no siempre tienen una lectura clara. Aquí sí (la carrera; la temporada frente a la carrera), pero no está garantizado.</a:t>
+              <a:t>Para mirar los datos en un plano, o para entregarle a un modelo menos entradas.</a:t>
             </a:r>
           </a:p>
           <a:p>
@@ -6845,7 +6797,7 @@
                 </a:solidFill>
                 <a:latin typeface="Fira Sans"/>
               </a:rPr>
-              <a:t>Es no supervisado: la dirección de más variación no es necesariamente la que mejor predice la respuesta. Ridge y Lasso eligen mirando Y; PCA no la mira.</a:t>
+              <a:t>No aporta si las variables son pocas y distintas entre sí: no hay nada que resumir.</a:t>
             </a:r>
           </a:p>
         </p:txBody>
@@ -6941,124 +6893,21 @@
                 </a:solidFill>
                 <a:latin typeface="Fira Sans"/>
               </a:rPr>
-              <a:t>En el código: cinco líneas</a:t>
-            </a:r>
-          </a:p>
-        </p:txBody>
-      </p:sp>
-      <p:sp>
-        <p:nvSpPr>
-          <p:cNvPr id="4" name="Rectangle 3"/>
-          <p:cNvSpPr/>
-          <p:nvPr/>
-        </p:nvSpPr>
-        <p:spPr>
-          <a:xfrm>
-            <a:off x="704088" y="1280160"/>
-            <a:ext cx="7744968" cy="2880360"/>
-          </a:xfrm>
-          <a:prstGeom prst="rect">
-            <a:avLst/>
-          </a:prstGeom>
-          <a:solidFill>
-            <a:srgbClr val="F0F2F5"/>
-          </a:solidFill>
-          <a:ln>
-            <a:solidFill>
-              <a:srgbClr val="D8DDE3"/>
-            </a:solidFill>
-          </a:ln>
-          <a:effectLst/>
-        </p:spPr>
-        <p:style>
-          <a:lnRef idx="1">
-            <a:schemeClr val="accent1"/>
-          </a:lnRef>
-          <a:fillRef idx="3">
-            <a:schemeClr val="accent1"/>
-          </a:fillRef>
-          <a:effectRef idx="2">
-            <a:schemeClr val="accent1"/>
-          </a:effectRef>
-          <a:fontRef idx="minor">
-            <a:schemeClr val="lt1"/>
-          </a:fontRef>
-        </p:style>
-        <p:txBody>
-          <a:bodyPr rtlCol="0" anchor="ctr" wrap="square" lIns="228600" tIns="137160"/>
-          <a:lstStyle/>
-          <a:p>
-            <a:pPr/>
-            <a:r>
-              <a:rPr sz="1500" b="0">
-                <a:solidFill>
-                  <a:srgbClr val="1D3557"/>
-                </a:solidFill>
-                <a:latin typeface="Menlo"/>
-              </a:rPr>
-              <a:t>Z = StandardScaler().fit_transform(X)  # 1. estandarizar</a:t>
-            </a:r>
-          </a:p>
-          <a:p>
-            <a:pPr/>
-            <a:r>
-              <a:rPr sz="1500" b="0">
-                <a:solidFill>
-                  <a:srgbClr val="1D3557"/>
-                </a:solidFill>
-                <a:latin typeface="Menlo"/>
-              </a:rPr>
-              <a:t>pca = PCA().fit(Z)                     # 2. las componentes</a:t>
-            </a:r>
-          </a:p>
-          <a:p>
-            <a:pPr/>
-            <a:r>
-              <a:rPr sz="1500" b="0">
-                <a:solidFill>
-                  <a:srgbClr val="1D3557"/>
-                </a:solidFill>
-                <a:latin typeface="Menlo"/>
-              </a:rPr>
-              <a:t>pca.explained_variance_ratio_          # 3. cuánto explica</a:t>
-            </a:r>
-          </a:p>
-          <a:p>
-            <a:pPr/>
-            <a:r>
-              <a:rPr sz="1500" b="0">
-                <a:solidFill>
-                  <a:srgbClr val="1D3557"/>
-                </a:solidFill>
-                <a:latin typeface="Menlo"/>
-              </a:rPr>
-              <a:t>pca.components_                        # 4. los pesos</a:t>
-            </a:r>
-          </a:p>
-          <a:p>
-            <a:pPr/>
-            <a:r>
-              <a:rPr sz="1500" b="0">
-                <a:solidFill>
-                  <a:srgbClr val="1D3557"/>
-                </a:solidFill>
-                <a:latin typeface="Menlo"/>
-              </a:rPr>
-              <a:t>puntajes = pca.transform(Z)            # 5. los puntajes</a:t>
-            </a:r>
-          </a:p>
-        </p:txBody>
-      </p:sp>
-      <p:sp>
-        <p:nvSpPr>
-          <p:cNvPr id="5" name="TextBox 4"/>
+              <a:t>Tres precauciones</a:t>
+            </a:r>
+          </a:p>
+        </p:txBody>
+      </p:sp>
+      <p:sp>
+        <p:nvSpPr>
+          <p:cNvPr id="4" name="TextBox 3"/>
           <p:cNvSpPr txBox="1"/>
           <p:nvPr/>
         </p:nvSpPr>
         <p:spPr>
           <a:xfrm>
-            <a:off x="704088" y="4389120"/>
-            <a:ext cx="7744968" cy="1097280"/>
+            <a:off x="704088" y="1353312"/>
+            <a:ext cx="7744968" cy="3300984"/>
           </a:xfrm>
           <a:prstGeom prst="rect">
             <a:avLst/>
@@ -7080,7 +6929,7 @@
               </a:spcAft>
             </a:pPr>
             <a:r>
-              <a:rPr sz="1600" b="1">
+              <a:rPr sz="1800" b="1">
                 <a:solidFill>
                   <a:srgbClr val="E0A437"/>
                 </a:solidFill>
@@ -7089,13 +6938,69 @@
               <a:t>▸ </a:t>
             </a:r>
             <a:r>
-              <a:rPr sz="1600" b="0">
+              <a:rPr sz="1800" b="1">
+                <a:solidFill>
+                  <a:srgbClr val="1D3557"/>
+                </a:solidFill>
+                <a:latin typeface="Fira Sans"/>
+              </a:rPr>
+              <a:t>Las variables categóricas (las dummies de la clase 6) no entran bien en el cálculo: se dejan fuera o se tratan aparte.</a:t>
+            </a:r>
+          </a:p>
+          <a:p>
+            <a:pPr>
+              <a:lnSpc>
+                <a:spcPct val="112000"/>
+              </a:lnSpc>
+              <a:spcAft>
+                <a:spcPts val="900"/>
+              </a:spcAft>
+            </a:pPr>
+            <a:r>
+              <a:rPr sz="1800" b="1">
+                <a:solidFill>
+                  <a:srgbClr val="E0A437"/>
+                </a:solidFill>
+                <a:latin typeface="Fira Sans"/>
+              </a:rPr>
+              <a:t>▸ </a:t>
+            </a:r>
+            <a:r>
+              <a:rPr sz="1800" b="0">
                 <a:solidFill>
                   <a:srgbClr val="000000"/>
                 </a:solidFill>
                 <a:latin typeface="Fira Sans"/>
               </a:rPr>
-              <a:t>El ejemplo completo, con las tablas de pesos y los gráficos de la clase, está en el notebook 08_componentes_principales.ipynb.</a:t>
+              <a:t>Las componentes no siempre tienen una lectura clara. Aquí sí (la carrera; la temporada frente a la carrera), pero no está garantizado.</a:t>
+            </a:r>
+          </a:p>
+          <a:p>
+            <a:pPr>
+              <a:lnSpc>
+                <a:spcPct val="112000"/>
+              </a:lnSpc>
+              <a:spcAft>
+                <a:spcPts val="900"/>
+              </a:spcAft>
+            </a:pPr>
+            <a:r>
+              <a:rPr sz="1800" b="1">
+                <a:solidFill>
+                  <a:srgbClr val="E0A437"/>
+                </a:solidFill>
+                <a:latin typeface="Fira Sans"/>
+              </a:rPr>
+              <a:t>▸ </a:t>
+            </a:r>
+            <a:r>
+              <a:rPr sz="1800" b="0">
+                <a:solidFill>
+                  <a:srgbClr val="000000"/>
+                </a:solidFill>
+                <a:latin typeface="Fira Sans"/>
+              </a:rPr>
+              <a:t>Es no supervisado: la dirección de más variación no es necesariamente la que mejor predice la respuesta. Ridge y Lasso eligen mirando Y; PCA no la mira.</a:t>
             </a:r>
           </a:p>
         </p:txBody>
@@ -7392,7 +7297,7 @@
             <a:avLst/>
           </a:prstGeom>
           <a:solidFill>
-            <a:srgbClr val="1D3557"/>
+            <a:srgbClr val="FAFBFC"/>
           </a:solidFill>
           <a:ln>
             <a:noFill/>
@@ -7429,8 +7334,8 @@
         </p:nvSpPr>
         <p:spPr>
           <a:xfrm>
-            <a:off x="603504" y="1847088"/>
-            <a:ext cx="7946136" cy="1399032"/>
+            <a:off x="402336" y="301752"/>
+            <a:ext cx="8348472" cy="795528"/>
           </a:xfrm>
           <a:prstGeom prst="rect">
             <a:avLst/>
@@ -7444,24 +7349,167 @@
           <a:lstStyle/>
           <a:p>
             <a:r>
-              <a:rPr sz="3400" b="1">
-                <a:solidFill>
-                  <a:srgbClr val="FFFFFF"/>
-                </a:solidFill>
-                <a:latin typeface="Fira Sans"/>
-              </a:rPr>
-              <a:t>5. Cierre del módulo</a:t>
-            </a:r>
-          </a:p>
-          <a:p>
-            <a:r>
-              <a:rPr sz="1800" b="0">
+              <a:rPr sz="2800" b="1">
+                <a:solidFill>
+                  <a:srgbClr val="0F0F0F"/>
+                </a:solidFill>
+                <a:latin typeface="Fira Sans"/>
+              </a:rPr>
+              <a:t>En el código: cinco líneas</a:t>
+            </a:r>
+          </a:p>
+        </p:txBody>
+      </p:sp>
+      <p:sp>
+        <p:nvSpPr>
+          <p:cNvPr id="4" name="Rectangle 3"/>
+          <p:cNvSpPr/>
+          <p:nvPr/>
+        </p:nvSpPr>
+        <p:spPr>
+          <a:xfrm>
+            <a:off x="704088" y="1280160"/>
+            <a:ext cx="7744968" cy="2880360"/>
+          </a:xfrm>
+          <a:prstGeom prst="rect">
+            <a:avLst/>
+          </a:prstGeom>
+          <a:solidFill>
+            <a:srgbClr val="F0F2F5"/>
+          </a:solidFill>
+          <a:ln>
+            <a:solidFill>
+              <a:srgbClr val="D8DDE3"/>
+            </a:solidFill>
+          </a:ln>
+          <a:effectLst/>
+        </p:spPr>
+        <p:style>
+          <a:lnRef idx="1">
+            <a:schemeClr val="accent1"/>
+          </a:lnRef>
+          <a:fillRef idx="3">
+            <a:schemeClr val="accent1"/>
+          </a:fillRef>
+          <a:effectRef idx="2">
+            <a:schemeClr val="accent1"/>
+          </a:effectRef>
+          <a:fontRef idx="minor">
+            <a:schemeClr val="lt1"/>
+          </a:fontRef>
+        </p:style>
+        <p:txBody>
+          <a:bodyPr rtlCol="0" anchor="ctr" wrap="square" lIns="228600" tIns="137160"/>
+          <a:lstStyle/>
+          <a:p>
+            <a:pPr/>
+            <a:r>
+              <a:rPr sz="1500" b="0">
+                <a:solidFill>
+                  <a:srgbClr val="1D3557"/>
+                </a:solidFill>
+                <a:latin typeface="Menlo"/>
+              </a:rPr>
+              <a:t>Z = StandardScaler().fit_transform(X)  # 1. estandarizar</a:t>
+            </a:r>
+          </a:p>
+          <a:p>
+            <a:pPr/>
+            <a:r>
+              <a:rPr sz="1500" b="0">
+                <a:solidFill>
+                  <a:srgbClr val="1D3557"/>
+                </a:solidFill>
+                <a:latin typeface="Menlo"/>
+              </a:rPr>
+              <a:t>pca = PCA().fit(Z)                     # 2. las componentes</a:t>
+            </a:r>
+          </a:p>
+          <a:p>
+            <a:pPr/>
+            <a:r>
+              <a:rPr sz="1500" b="0">
+                <a:solidFill>
+                  <a:srgbClr val="1D3557"/>
+                </a:solidFill>
+                <a:latin typeface="Menlo"/>
+              </a:rPr>
+              <a:t>pca.explained_variance_ratio_          # 3. cuánto explica</a:t>
+            </a:r>
+          </a:p>
+          <a:p>
+            <a:pPr/>
+            <a:r>
+              <a:rPr sz="1500" b="0">
+                <a:solidFill>
+                  <a:srgbClr val="1D3557"/>
+                </a:solidFill>
+                <a:latin typeface="Menlo"/>
+              </a:rPr>
+              <a:t>pca.components_                        # 4. los pesos</a:t>
+            </a:r>
+          </a:p>
+          <a:p>
+            <a:pPr/>
+            <a:r>
+              <a:rPr sz="1500" b="0">
+                <a:solidFill>
+                  <a:srgbClr val="1D3557"/>
+                </a:solidFill>
+                <a:latin typeface="Menlo"/>
+              </a:rPr>
+              <a:t>puntajes = pca.transform(Z)            # 5. los puntajes</a:t>
+            </a:r>
+          </a:p>
+        </p:txBody>
+      </p:sp>
+      <p:sp>
+        <p:nvSpPr>
+          <p:cNvPr id="5" name="TextBox 4"/>
+          <p:cNvSpPr txBox="1"/>
+          <p:nvPr/>
+        </p:nvSpPr>
+        <p:spPr>
+          <a:xfrm>
+            <a:off x="704088" y="4389120"/>
+            <a:ext cx="7744968" cy="1097280"/>
+          </a:xfrm>
+          <a:prstGeom prst="rect">
+            <a:avLst/>
+          </a:prstGeom>
+          <a:noFill/>
+        </p:spPr>
+        <p:txBody>
+          <a:bodyPr wrap="square">
+            <a:spAutoFit/>
+          </a:bodyPr>
+          <a:lstStyle/>
+          <a:p>
+            <a:pPr>
+              <a:lnSpc>
+                <a:spcPct val="112000"/>
+              </a:lnSpc>
+              <a:spcAft>
+                <a:spcPts val="900"/>
+              </a:spcAft>
+            </a:pPr>
+            <a:r>
+              <a:rPr sz="1600" b="1">
                 <a:solidFill>
                   <a:srgbClr val="E0A437"/>
                 </a:solidFill>
                 <a:latin typeface="Fira Sans"/>
               </a:rPr>
-              <a:t>Ocho clases, un hilo</a:t>
+              <a:t>▸ </a:t>
+            </a:r>
+            <a:r>
+              <a:rPr sz="1600" b="0">
+                <a:solidFill>
+                  <a:srgbClr val="000000"/>
+                </a:solidFill>
+                <a:latin typeface="Fira Sans"/>
+              </a:rPr>
+              <a:t>El ejemplo completo, con las tablas de pesos y los gráficos de la clase, está en el notebook 08_componentes_principales.ipynb.</a:t>
             </a:r>
           </a:p>
         </p:txBody>
@@ -7499,7 +7547,7 @@
             <a:avLst/>
           </a:prstGeom>
           <a:solidFill>
-            <a:srgbClr val="FAFBFC"/>
+            <a:srgbClr val="1D3557"/>
           </a:solidFill>
           <a:ln>
             <a:noFill/>
@@ -7536,8 +7584,8 @@
         </p:nvSpPr>
         <p:spPr>
           <a:xfrm>
-            <a:off x="402336" y="301752"/>
-            <a:ext cx="8348472" cy="795528"/>
+            <a:off x="603504" y="1847088"/>
+            <a:ext cx="7946136" cy="1399032"/>
           </a:xfrm>
           <a:prstGeom prst="rect">
             <a:avLst/>
@@ -7551,71 +7599,24 @@
           <a:lstStyle/>
           <a:p>
             <a:r>
-              <a:rPr sz="2800" b="1">
-                <a:solidFill>
-                  <a:srgbClr val="0F0F0F"/>
-                </a:solidFill>
-                <a:latin typeface="Fira Sans"/>
-              </a:rPr>
-              <a:t>El módulo en una página</a:t>
-            </a:r>
-          </a:p>
-        </p:txBody>
-      </p:sp>
-      <p:pic>
-        <p:nvPicPr>
-          <p:cNvPr id="4" name="Picture 3" descr="c8_07_mapa_modulo.png"/>
-          <p:cNvPicPr>
-            <a:picLocks noChangeAspect="1"/>
-          </p:cNvPicPr>
-          <p:nvPr/>
-        </p:nvPicPr>
-        <p:blipFill>
-          <a:blip r:embed="rId2"/>
-          <a:stretch>
-            <a:fillRect/>
-          </a:stretch>
-        </p:blipFill>
-        <p:spPr>
-          <a:xfrm>
-            <a:off x="1029546" y="1143000"/>
-            <a:ext cx="7084906" cy="3099816"/>
-          </a:xfrm>
-          <a:prstGeom prst="rect">
-            <a:avLst/>
-          </a:prstGeom>
-        </p:spPr>
-      </p:pic>
-      <p:sp>
-        <p:nvSpPr>
-          <p:cNvPr id="5" name="TextBox 4"/>
-          <p:cNvSpPr txBox="1"/>
-          <p:nvPr/>
-        </p:nvSpPr>
-        <p:spPr>
-          <a:xfrm>
-            <a:off x="704088" y="4379976"/>
-            <a:ext cx="7744968" cy="512064"/>
-          </a:xfrm>
-          <a:prstGeom prst="rect">
-            <a:avLst/>
-          </a:prstGeom>
-          <a:noFill/>
-        </p:spPr>
-        <p:txBody>
-          <a:bodyPr wrap="square">
-            <a:spAutoFit/>
-          </a:bodyPr>
-          <a:lstStyle/>
-          <a:p>
-            <a:r>
-              <a:rPr sz="1300" b="0">
-                <a:solidFill>
-                  <a:srgbClr val="333333"/>
-                </a:solidFill>
-                <a:latin typeface="Fira Sans"/>
-              </a:rPr>
-              <a:t>Cada clase dejó una idea. Juntas, son lo que el módulo enseñó: cómo se llega de una pregunta y unos datos a un resultado, y cómo se lee ese resultado con su incertidumbre.</a:t>
+              <a:rPr sz="3400" b="1">
+                <a:solidFill>
+                  <a:srgbClr val="FFFFFF"/>
+                </a:solidFill>
+                <a:latin typeface="Fira Sans"/>
+              </a:rPr>
+              <a:t>5. Cierre del módulo</a:t>
+            </a:r>
+          </a:p>
+          <a:p>
+            <a:r>
+              <a:rPr sz="1800" b="0">
+                <a:solidFill>
+                  <a:srgbClr val="E0A437"/>
+                </a:solidFill>
+                <a:latin typeface="Fira Sans"/>
+              </a:rPr>
+              <a:t>Ocho clases, un hilo</a:t>
             </a:r>
           </a:p>
         </p:txBody>
@@ -7711,21 +7712,45 @@
                 </a:solidFill>
                 <a:latin typeface="Fira Sans"/>
               </a:rPr>
-              <a:t>Lo que sigue en el diplomado</a:t>
-            </a:r>
-          </a:p>
-        </p:txBody>
-      </p:sp>
-      <p:sp>
-        <p:nvSpPr>
-          <p:cNvPr id="4" name="TextBox 3"/>
+              <a:t>El módulo en una página</a:t>
+            </a:r>
+          </a:p>
+        </p:txBody>
+      </p:sp>
+      <p:pic>
+        <p:nvPicPr>
+          <p:cNvPr id="4" name="Picture 3" descr="c8_07_mapa_modulo.png"/>
+          <p:cNvPicPr>
+            <a:picLocks noChangeAspect="1"/>
+          </p:cNvPicPr>
+          <p:nvPr/>
+        </p:nvPicPr>
+        <p:blipFill>
+          <a:blip r:embed="rId2"/>
+          <a:stretch>
+            <a:fillRect/>
+          </a:stretch>
+        </p:blipFill>
+        <p:spPr>
+          <a:xfrm>
+            <a:off x="1029546" y="1143000"/>
+            <a:ext cx="7084906" cy="3099816"/>
+          </a:xfrm>
+          <a:prstGeom prst="rect">
+            <a:avLst/>
+          </a:prstGeom>
+        </p:spPr>
+      </p:pic>
+      <p:sp>
+        <p:nvSpPr>
+          <p:cNvPr id="5" name="TextBox 4"/>
           <p:cNvSpPr txBox="1"/>
           <p:nvPr/>
         </p:nvSpPr>
         <p:spPr>
           <a:xfrm>
-            <a:off x="704088" y="1353312"/>
-            <a:ext cx="7744968" cy="3300984"/>
+            <a:off x="704088" y="4379976"/>
+            <a:ext cx="7744968" cy="512064"/>
           </a:xfrm>
           <a:prstGeom prst="rect">
             <a:avLst/>
@@ -7738,115 +7763,14 @@
           </a:bodyPr>
           <a:lstStyle/>
           <a:p>
-            <a:pPr>
-              <a:lnSpc>
-                <a:spcPct val="112000"/>
-              </a:lnSpc>
-              <a:spcAft>
-                <a:spcPts val="900"/>
-              </a:spcAft>
-            </a:pPr>
-            <a:r>
-              <a:rPr sz="1800" b="1">
-                <a:solidFill>
-                  <a:srgbClr val="E0A437"/>
-                </a:solidFill>
-                <a:latin typeface="Fira Sans"/>
-              </a:rPr>
-              <a:t>▸ </a:t>
-            </a:r>
-            <a:r>
-              <a:rPr sz="1800" b="1">
-                <a:solidFill>
-                  <a:srgbClr val="1D3557"/>
-                </a:solidFill>
-                <a:latin typeface="Fira Sans"/>
-              </a:rPr>
-              <a:t>Módulo 2, Visualización e Inteligencia de Negocios: visualización efectiva, narrativas con datos y métricas de negocio.</a:t>
-            </a:r>
-          </a:p>
-          <a:p>
-            <a:pPr>
-              <a:lnSpc>
-                <a:spcPct val="112000"/>
-              </a:lnSpc>
-              <a:spcAft>
-                <a:spcPts val="900"/>
-              </a:spcAft>
-            </a:pPr>
-            <a:r>
-              <a:rPr sz="1800" b="1">
-                <a:solidFill>
-                  <a:srgbClr val="E0A437"/>
-                </a:solidFill>
-                <a:latin typeface="Fira Sans"/>
-              </a:rPr>
-              <a:t>▸ </a:t>
-            </a:r>
-            <a:r>
-              <a:rPr sz="1800" b="0">
-                <a:solidFill>
-                  <a:srgbClr val="000000"/>
-                </a:solidFill>
-                <a:latin typeface="Fira Sans"/>
-              </a:rPr>
-              <a:t>Módulo 3, Machine Learning para la Toma de Decisiones: aprendizaje supervisado y no supervisado (clustering y PCA en profundidad), evaluación de modelos, redes neuronales y explicabilidad.</a:t>
-            </a:r>
-          </a:p>
-          <a:p>
-            <a:pPr>
-              <a:lnSpc>
-                <a:spcPct val="112000"/>
-              </a:lnSpc>
-              <a:spcAft>
-                <a:spcPts val="900"/>
-              </a:spcAft>
-            </a:pPr>
-            <a:r>
-              <a:rPr sz="1800" b="1">
-                <a:solidFill>
-                  <a:srgbClr val="E0A437"/>
-                </a:solidFill>
-                <a:latin typeface="Fira Sans"/>
-              </a:rPr>
-              <a:t>▸ </a:t>
-            </a:r>
-            <a:r>
-              <a:rPr sz="1800" b="0">
-                <a:solidFill>
-                  <a:srgbClr val="000000"/>
-                </a:solidFill>
-                <a:latin typeface="Fira Sans"/>
-              </a:rPr>
-              <a:t>El Capstone continúa en esos módulos: el primer modelo de hoy es el punto de partida.</a:t>
-            </a:r>
-          </a:p>
-          <a:p>
-            <a:pPr>
-              <a:lnSpc>
-                <a:spcPct val="112000"/>
-              </a:lnSpc>
-              <a:spcAft>
-                <a:spcPts val="900"/>
-              </a:spcAft>
-            </a:pPr>
-            <a:r>
-              <a:rPr sz="1800" b="1">
-                <a:solidFill>
-                  <a:srgbClr val="E0A437"/>
-                </a:solidFill>
-                <a:latin typeface="Fira Sans"/>
-              </a:rPr>
-              <a:t>▸ </a:t>
-            </a:r>
-            <a:r>
-              <a:rPr sz="1800" b="0">
-                <a:solidFill>
-                  <a:srgbClr val="000000"/>
-                </a:solidFill>
-                <a:latin typeface="Fira Sans"/>
-              </a:rPr>
-              <a:t>Lo que se lleva de aquí: leer un resultado con su incertidumbre, juzgar un modelo en datos que no vio, y distinguir describir de encontrar una relación.</a:t>
+            <a:r>
+              <a:rPr sz="1300" b="0">
+                <a:solidFill>
+                  <a:srgbClr val="333333"/>
+                </a:solidFill>
+                <a:latin typeface="Fira Sans"/>
+              </a:rPr>
+              <a:t>Cada clase dejó una idea. Juntas, son lo que el módulo enseñó: cómo se llega de una pregunta y unos datos a un resultado, y cómo se lee ese resultado con su incertidumbre.</a:t>
             </a:r>
           </a:p>
         </p:txBody>
@@ -7942,7 +7866,7 @@
                 </a:solidFill>
                 <a:latin typeface="Fira Sans"/>
               </a:rPr>
-              <a:t>Ahora: las presentaciones del avance</a:t>
+              <a:t>Lo que sigue en el diplomado</a:t>
             </a:r>
           </a:p>
         </p:txBody>
@@ -7993,7 +7917,7 @@
                 </a:solidFill>
                 <a:latin typeface="Fira Sans"/>
               </a:rPr>
-              <a:t>Ocho equipos, en el orden en que se ofrezcan. Máximo 10 minutos por equipo; el tiempo se controla. Después, preguntas de la profesora y del curso.</a:t>
+              <a:t>Módulo 2, Visualización e Inteligencia de Negocios: visualización efectiva, narrativas con datos y métricas de negocio.</a:t>
             </a:r>
           </a:p>
           <a:p>
@@ -8021,7 +7945,7 @@
                 </a:solidFill>
                 <a:latin typeface="Fira Sans"/>
               </a:rPr>
-              <a:t>Se evalúa el avance, no un resultado final: el modelo es un primer intento. La exigencia está en el tiempo, la claridad, la explicación de los gráficos y las relaciones, y en advertir qué falta o qué no tiene sentido.</a:t>
+              <a:t>Módulo 3, Machine Learning para la Toma de Decisiones: aprendizaje supervisado y no supervisado (clustering y PCA en profundidad), evaluación de modelos, redes neuronales y explicabilidad.</a:t>
             </a:r>
           </a:p>
           <a:p>
@@ -8049,7 +7973,7 @@
                 </a:solidFill>
                 <a:latin typeface="Fira Sans"/>
               </a:rPr>
-              <a:t>Las slides, en PDF, al Aula hasta las 20:30: un envío por equipo con los nombres.</a:t>
+              <a:t>El Capstone continúa en esos módulos: el primer modelo de hoy es el punto de partida.</a:t>
             </a:r>
           </a:p>
           <a:p>
@@ -8077,7 +8001,7 @@
                 </a:solidFill>
                 <a:latin typeface="Fira Sans"/>
               </a:rPr>
-              <a:t>El informe escrito, el viernes 25 de septiembre por el Aula: máximo 7 páginas, con su rúbrica publicada.</a:t>
+              <a:t>Lo que se lleva de aquí: leer un resultado con su incertidumbre, juzgar un modelo en datos que no vio, y distinguir describir de encontrar una relación.</a:t>
             </a:r>
           </a:p>
         </p:txBody>
@@ -8091,6 +8015,237 @@
 </file>
 
 <file path=ppt/slides/slide34.xml><?xml version="1.0" encoding="utf-8"?>
+<p:sld xmlns:a="http://schemas.openxmlformats.org/drawingml/2006/main" xmlns:p="http://schemas.openxmlformats.org/presentationml/2006/main" xmlns:r="http://schemas.openxmlformats.org/officeDocument/2006/relationships">
+  <p:cSld>
+    <p:spTree>
+      <p:nvGrpSpPr>
+        <p:cNvPr id="1" name=""/>
+        <p:cNvGrpSpPr/>
+        <p:nvPr/>
+      </p:nvGrpSpPr>
+      <p:grpSpPr/>
+      <p:sp>
+        <p:nvSpPr>
+          <p:cNvPr id="2" name="Rectangle 1"/>
+          <p:cNvSpPr/>
+          <p:nvPr/>
+        </p:nvSpPr>
+        <p:spPr>
+          <a:xfrm>
+            <a:off x="0" y="0"/>
+            <a:ext cx="9144000" cy="5138928"/>
+          </a:xfrm>
+          <a:prstGeom prst="rect">
+            <a:avLst/>
+          </a:prstGeom>
+          <a:solidFill>
+            <a:srgbClr val="FAFBFC"/>
+          </a:solidFill>
+          <a:ln>
+            <a:noFill/>
+          </a:ln>
+          <a:effectLst/>
+        </p:spPr>
+        <p:style>
+          <a:lnRef idx="1">
+            <a:schemeClr val="accent1"/>
+          </a:lnRef>
+          <a:fillRef idx="3">
+            <a:schemeClr val="accent1"/>
+          </a:fillRef>
+          <a:effectRef idx="2">
+            <a:schemeClr val="accent1"/>
+          </a:effectRef>
+          <a:fontRef idx="minor">
+            <a:schemeClr val="lt1"/>
+          </a:fontRef>
+        </p:style>
+        <p:txBody>
+          <a:bodyPr rtlCol="0" anchor="ctr"/>
+          <a:lstStyle/>
+          <a:p>
+            <a:pPr algn="ctr"/>
+          </a:p>
+        </p:txBody>
+      </p:sp>
+      <p:sp>
+        <p:nvSpPr>
+          <p:cNvPr id="3" name="TextBox 2"/>
+          <p:cNvSpPr txBox="1"/>
+          <p:nvPr/>
+        </p:nvSpPr>
+        <p:spPr>
+          <a:xfrm>
+            <a:off x="402336" y="301752"/>
+            <a:ext cx="8348472" cy="795528"/>
+          </a:xfrm>
+          <a:prstGeom prst="rect">
+            <a:avLst/>
+          </a:prstGeom>
+          <a:noFill/>
+        </p:spPr>
+        <p:txBody>
+          <a:bodyPr wrap="square">
+            <a:spAutoFit/>
+          </a:bodyPr>
+          <a:lstStyle/>
+          <a:p>
+            <a:r>
+              <a:rPr sz="2800" b="1">
+                <a:solidFill>
+                  <a:srgbClr val="0F0F0F"/>
+                </a:solidFill>
+                <a:latin typeface="Fira Sans"/>
+              </a:rPr>
+              <a:t>Ahora: las presentaciones del avance</a:t>
+            </a:r>
+          </a:p>
+        </p:txBody>
+      </p:sp>
+      <p:sp>
+        <p:nvSpPr>
+          <p:cNvPr id="4" name="TextBox 3"/>
+          <p:cNvSpPr txBox="1"/>
+          <p:nvPr/>
+        </p:nvSpPr>
+        <p:spPr>
+          <a:xfrm>
+            <a:off x="704088" y="1353312"/>
+            <a:ext cx="7744968" cy="3300984"/>
+          </a:xfrm>
+          <a:prstGeom prst="rect">
+            <a:avLst/>
+          </a:prstGeom>
+          <a:noFill/>
+        </p:spPr>
+        <p:txBody>
+          <a:bodyPr wrap="square">
+            <a:spAutoFit/>
+          </a:bodyPr>
+          <a:lstStyle/>
+          <a:p>
+            <a:pPr>
+              <a:lnSpc>
+                <a:spcPct val="112000"/>
+              </a:lnSpc>
+              <a:spcAft>
+                <a:spcPts val="900"/>
+              </a:spcAft>
+            </a:pPr>
+            <a:r>
+              <a:rPr sz="1800" b="1">
+                <a:solidFill>
+                  <a:srgbClr val="E0A437"/>
+                </a:solidFill>
+                <a:latin typeface="Fira Sans"/>
+              </a:rPr>
+              <a:t>▸ </a:t>
+            </a:r>
+            <a:r>
+              <a:rPr sz="1800" b="1">
+                <a:solidFill>
+                  <a:srgbClr val="1D3557"/>
+                </a:solidFill>
+                <a:latin typeface="Fira Sans"/>
+              </a:rPr>
+              <a:t>Ocho equipos, en el orden en que se ofrezcan. Máximo 10 minutos por equipo; el tiempo se controla. Después, preguntas de la profesora y del curso.</a:t>
+            </a:r>
+          </a:p>
+          <a:p>
+            <a:pPr>
+              <a:lnSpc>
+                <a:spcPct val="112000"/>
+              </a:lnSpc>
+              <a:spcAft>
+                <a:spcPts val="900"/>
+              </a:spcAft>
+            </a:pPr>
+            <a:r>
+              <a:rPr sz="1800" b="1">
+                <a:solidFill>
+                  <a:srgbClr val="E0A437"/>
+                </a:solidFill>
+                <a:latin typeface="Fira Sans"/>
+              </a:rPr>
+              <a:t>▸ </a:t>
+            </a:r>
+            <a:r>
+              <a:rPr sz="1800" b="0">
+                <a:solidFill>
+                  <a:srgbClr val="000000"/>
+                </a:solidFill>
+                <a:latin typeface="Fira Sans"/>
+              </a:rPr>
+              <a:t>Se evalúa el avance, no un resultado final: el modelo es un primer intento. La exigencia está en el tiempo, la claridad, la explicación de los gráficos y las relaciones, y en advertir qué falta o qué no tiene sentido.</a:t>
+            </a:r>
+          </a:p>
+          <a:p>
+            <a:pPr>
+              <a:lnSpc>
+                <a:spcPct val="112000"/>
+              </a:lnSpc>
+              <a:spcAft>
+                <a:spcPts val="900"/>
+              </a:spcAft>
+            </a:pPr>
+            <a:r>
+              <a:rPr sz="1800" b="1">
+                <a:solidFill>
+                  <a:srgbClr val="E0A437"/>
+                </a:solidFill>
+                <a:latin typeface="Fira Sans"/>
+              </a:rPr>
+              <a:t>▸ </a:t>
+            </a:r>
+            <a:r>
+              <a:rPr sz="1800" b="0">
+                <a:solidFill>
+                  <a:srgbClr val="000000"/>
+                </a:solidFill>
+                <a:latin typeface="Fira Sans"/>
+              </a:rPr>
+              <a:t>Las slides, en PDF, al Aula hasta las 20:30: un envío por equipo con los nombres.</a:t>
+            </a:r>
+          </a:p>
+          <a:p>
+            <a:pPr>
+              <a:lnSpc>
+                <a:spcPct val="112000"/>
+              </a:lnSpc>
+              <a:spcAft>
+                <a:spcPts val="900"/>
+              </a:spcAft>
+            </a:pPr>
+            <a:r>
+              <a:rPr sz="1800" b="1">
+                <a:solidFill>
+                  <a:srgbClr val="E0A437"/>
+                </a:solidFill>
+                <a:latin typeface="Fira Sans"/>
+              </a:rPr>
+              <a:t>▸ </a:t>
+            </a:r>
+            <a:r>
+              <a:rPr sz="1800" b="0">
+                <a:solidFill>
+                  <a:srgbClr val="000000"/>
+                </a:solidFill>
+                <a:latin typeface="Fira Sans"/>
+              </a:rPr>
+              <a:t>El informe escrito, el viernes 25 de septiembre por el Aula: máximo 7 páginas, con su rúbrica publicada.</a:t>
+            </a:r>
+          </a:p>
+        </p:txBody>
+      </p:sp>
+    </p:spTree>
+  </p:cSld>
+  <p:clrMapOvr>
+    <a:masterClrMapping/>
+  </p:clrMapOvr>
+</p:sld>
+</file>
+
+<file path=ppt/slides/slide35.xml><?xml version="1.0" encoding="utf-8"?>
 <p:sld xmlns:a="http://schemas.openxmlformats.org/drawingml/2006/main" xmlns:p="http://schemas.openxmlformats.org/presentationml/2006/main" xmlns:r="http://schemas.openxmlformats.org/officeDocument/2006/relationships">
   <p:cSld>
     <p:spTree>

--- a/presentaciones/clase08_componentes_principales.pptx
+++ b/presentaciones/clase08_componentes_principales.pptx
@@ -6429,14 +6429,14 @@
                 </a:solidFill>
                 <a:latin typeface="Fira Sans"/>
               </a:rPr>
-              <a:t>El mismo cálculo con iris (clase 2)</a:t>
+              <a:t>El salario con pocas componentes</a:t>
             </a:r>
           </a:p>
         </p:txBody>
       </p:sp>
       <p:pic>
         <p:nvPicPr>
-          <p:cNvPr id="4" name="Picture 3" descr="c8_06_iris.png"/>
+          <p:cNvPr id="4" name="Picture 3" descr="c8_09_pcr.png"/>
           <p:cNvPicPr>
             <a:picLocks noChangeAspect="1"/>
           </p:cNvPicPr>
@@ -6450,8 +6450,8 @@
         </p:blipFill>
         <p:spPr>
           <a:xfrm>
-            <a:off x="780288" y="1143000"/>
-            <a:ext cx="7583423" cy="2843784"/>
+            <a:off x="320040" y="1097280"/>
+            <a:ext cx="3567691" cy="3886200"/>
           </a:xfrm>
           <a:prstGeom prst="rect">
             <a:avLst/>
@@ -6466,8 +6466,8 @@
         </p:nvSpPr>
         <p:spPr>
           <a:xfrm>
-            <a:off x="704088" y="4123944"/>
-            <a:ext cx="7744968" cy="768096"/>
+            <a:off x="4116330" y="1325880"/>
+            <a:ext cx="4707629" cy="3566160"/>
           </a:xfrm>
           <a:prstGeom prst="rect">
             <a:avLst/>
@@ -6480,14 +6480,87 @@
           </a:bodyPr>
           <a:lstStyle/>
           <a:p>
-            <a:r>
-              <a:rPr sz="1300" b="0">
-                <a:solidFill>
-                  <a:srgbClr val="333333"/>
-                </a:solidFill>
-                <a:latin typeface="Fira Sans"/>
-              </a:rPr>
-              <a:t>Las cuatro medidas se resumen en dos componentes con el 96% de la variación. Los pesos (izquierda) dicen qué es cada eje: el tamaño de la flor y el ancho del sépalo. Sin conocer la especie, las tres quedan separadas a lo largo del primero.</a:t>
+            <a:pPr>
+              <a:lnSpc>
+                <a:spcPct val="112000"/>
+              </a:lnSpc>
+              <a:spcAft>
+                <a:spcPts val="900"/>
+              </a:spcAft>
+            </a:pPr>
+            <a:r>
+              <a:rPr sz="1500" b="1">
+                <a:solidFill>
+                  <a:srgbClr val="E0A437"/>
+                </a:solidFill>
+                <a:latin typeface="Fira Sans"/>
+              </a:rPr>
+              <a:t>▸ </a:t>
+            </a:r>
+            <a:r>
+              <a:rPr sz="1500" b="1">
+                <a:solidFill>
+                  <a:srgbClr val="1D3557"/>
+                </a:solidFill>
+                <a:latin typeface="Fira Sans"/>
+              </a:rPr>
+              <a:t>Con el reparto de la clase 7 (131 y 132 jugadores), el salario se predice con las primeras k componentes. Con 1, 2 o 3, el error de prueba es 321.</a:t>
+            </a:r>
+          </a:p>
+          <a:p>
+            <a:pPr>
+              <a:lnSpc>
+                <a:spcPct val="112000"/>
+              </a:lnSpc>
+              <a:spcAft>
+                <a:spcPts val="900"/>
+              </a:spcAft>
+            </a:pPr>
+            <a:r>
+              <a:rPr sz="1500" b="1">
+                <a:solidFill>
+                  <a:srgbClr val="E0A437"/>
+                </a:solidFill>
+                <a:latin typeface="Fira Sans"/>
+              </a:rPr>
+              <a:t>▸ </a:t>
+            </a:r>
+            <a:r>
+              <a:rPr sz="1500" b="0">
+                <a:solidFill>
+                  <a:srgbClr val="000000"/>
+                </a:solidFill>
+                <a:latin typeface="Fira Sans"/>
+              </a:rPr>
+              <a:t>Mínimos cuadrados con las mismas 16 variables da 347 y con las 19, 342; Lasso 325 y Ridge 316.</a:t>
+            </a:r>
+          </a:p>
+          <a:p>
+            <a:pPr>
+              <a:lnSpc>
+                <a:spcPct val="112000"/>
+              </a:lnSpc>
+              <a:spcAft>
+                <a:spcPts val="900"/>
+              </a:spcAft>
+            </a:pPr>
+            <a:r>
+              <a:rPr sz="1500" b="1">
+                <a:solidFill>
+                  <a:srgbClr val="E0A437"/>
+                </a:solidFill>
+                <a:latin typeface="Fira Sans"/>
+              </a:rPr>
+              <a:t>▸ </a:t>
+            </a:r>
+            <a:r>
+              <a:rPr sz="1500" b="0">
+                <a:solidFill>
+                  <a:srgbClr val="000000"/>
+                </a:solidFill>
+                <a:latin typeface="Fira Sans"/>
+              </a:rPr>
+              <a:t>Dos números por jugador predicen casi tan bien como el mejor modelo de la clase 7 (en 20 repartos le gana a mínimos cuadrados en 17): es la regresión sobre componentes principales (James et al., 2013, sección 6.3.1).</a:t>
             </a:r>
           </a:p>
         </p:txBody>
@@ -8370,7 +8443,7 @@
                 </a:solidFill>
                 <a:latin typeface="Fira Sans"/>
               </a:rPr>
-              <a:t>James, G., Witten, D., Hastie, T. y Tibshirani, R. (2013). An Introduction to Statistical Learning. Springer. Sección 10.2, pp. 374 a 385: qué es una componente principal, por qué estandarizar, la proporción de variación explicada y cuántas componentes usar. PDF gratuito en statlearning.com.</a:t>
+              <a:t>James, G., Witten, D., Hastie, T. y Tibshirani, R. (2013). An Introduction to Statistical Learning. Springer. Sección 10.2, pp. 374 a 385: qué es una componente principal, por qué estandarizar, la proporción de variación explicada y cuántas componentes usar; sección 6.3.1, regresión sobre componentes principales. PDF gratuito en statlearning.com.</a:t>
             </a:r>
           </a:p>
           <a:p>
@@ -8427,7 +8500,7 @@
                 </a:solidFill>
                 <a:latin typeface="Fira Sans"/>
               </a:rPr>
-              <a:t>Datos: Hitters, del libro de James et al. (statlearning.com), e iris (Fisher, 1936), incluido en scikit-learn.</a:t>
+              <a:t>Datos: Hitters, del libro de James et al. (statlearning.com).</a:t>
             </a:r>
           </a:p>
         </p:txBody>

--- a/presentaciones/clase08_componentes_principales.pptx
+++ b/presentaciones/clase08_componentes_principales.pptx
@@ -39,7 +39,6 @@
     <p:sldId id="287" r:id="rId38"/>
     <p:sldId id="288" r:id="rId39"/>
     <p:sldId id="289" r:id="rId40"/>
-    <p:sldId id="290" r:id="rId41"/>
   </p:sldIdLst>
   <p:sldSz cx="9144000" cy="5138928" type="screen4x3"/>
   <p:notesSz cx="6858000" cy="9144000"/>
@@ -7939,7 +7938,7 @@
                 </a:solidFill>
                 <a:latin typeface="Fira Sans"/>
               </a:rPr>
-              <a:t>Lo que sigue en el diplomado</a:t>
+              <a:t>Ahora: las presentaciones del avance</a:t>
             </a:r>
           </a:p>
         </p:txBody>
@@ -7990,7 +7989,7 @@
                 </a:solidFill>
                 <a:latin typeface="Fira Sans"/>
               </a:rPr>
-              <a:t>Módulo 2, Visualización e Inteligencia de Negocios: visualización efectiva, narrativas con datos y métricas de negocio.</a:t>
+              <a:t>Ocho equipos, en el orden en que se ofrezcan. Máximo 10 minutos por equipo; el tiempo se controla. Después, preguntas de la profesora y del curso.</a:t>
             </a:r>
           </a:p>
           <a:p>
@@ -8018,7 +8017,7 @@
                 </a:solidFill>
                 <a:latin typeface="Fira Sans"/>
               </a:rPr>
-              <a:t>Módulo 3, Machine Learning para la Toma de Decisiones: aprendizaje supervisado y no supervisado (clustering y PCA en profundidad), evaluación de modelos, redes neuronales y explicabilidad.</a:t>
+              <a:t>Se evalúa el avance, no un resultado final: el modelo es un primer intento. La exigencia está en el tiempo, la claridad, la explicación de los gráficos y las relaciones, y en advertir qué falta o qué no tiene sentido.</a:t>
             </a:r>
           </a:p>
           <a:p>
@@ -8046,7 +8045,7 @@
                 </a:solidFill>
                 <a:latin typeface="Fira Sans"/>
               </a:rPr>
-              <a:t>El Capstone continúa en esos módulos: el primer modelo de hoy es el punto de partida.</a:t>
+              <a:t>Las slides, en PDF, al Aula hasta las 20:30: un envío por equipo con los nombres.</a:t>
             </a:r>
           </a:p>
           <a:p>
@@ -8074,7 +8073,7 @@
                 </a:solidFill>
                 <a:latin typeface="Fira Sans"/>
               </a:rPr>
-              <a:t>Lo que se lleva de aquí: leer un resultado con su incertidumbre, juzgar un modelo en datos que no vio, y distinguir describir de encontrar una relación.</a:t>
+              <a:t>El informe escrito, el viernes 25 de septiembre por el Aula: máximo 7 páginas, con su rúbrica publicada.</a:t>
             </a:r>
           </a:p>
         </p:txBody>
@@ -8088,237 +8087,6 @@
 </file>
 
 <file path=ppt/slides/slide34.xml><?xml version="1.0" encoding="utf-8"?>
-<p:sld xmlns:a="http://schemas.openxmlformats.org/drawingml/2006/main" xmlns:p="http://schemas.openxmlformats.org/presentationml/2006/main" xmlns:r="http://schemas.openxmlformats.org/officeDocument/2006/relationships">
-  <p:cSld>
-    <p:spTree>
-      <p:nvGrpSpPr>
-        <p:cNvPr id="1" name=""/>
-        <p:cNvGrpSpPr/>
-        <p:nvPr/>
-      </p:nvGrpSpPr>
-      <p:grpSpPr/>
-      <p:sp>
-        <p:nvSpPr>
-          <p:cNvPr id="2" name="Rectangle 1"/>
-          <p:cNvSpPr/>
-          <p:nvPr/>
-        </p:nvSpPr>
-        <p:spPr>
-          <a:xfrm>
-            <a:off x="0" y="0"/>
-            <a:ext cx="9144000" cy="5138928"/>
-          </a:xfrm>
-          <a:prstGeom prst="rect">
-            <a:avLst/>
-          </a:prstGeom>
-          <a:solidFill>
-            <a:srgbClr val="FAFBFC"/>
-          </a:solidFill>
-          <a:ln>
-            <a:noFill/>
-          </a:ln>
-          <a:effectLst/>
-        </p:spPr>
-        <p:style>
-          <a:lnRef idx="1">
-            <a:schemeClr val="accent1"/>
-          </a:lnRef>
-          <a:fillRef idx="3">
-            <a:schemeClr val="accent1"/>
-          </a:fillRef>
-          <a:effectRef idx="2">
-            <a:schemeClr val="accent1"/>
-          </a:effectRef>
-          <a:fontRef idx="minor">
-            <a:schemeClr val="lt1"/>
-          </a:fontRef>
-        </p:style>
-        <p:txBody>
-          <a:bodyPr rtlCol="0" anchor="ctr"/>
-          <a:lstStyle/>
-          <a:p>
-            <a:pPr algn="ctr"/>
-          </a:p>
-        </p:txBody>
-      </p:sp>
-      <p:sp>
-        <p:nvSpPr>
-          <p:cNvPr id="3" name="TextBox 2"/>
-          <p:cNvSpPr txBox="1"/>
-          <p:nvPr/>
-        </p:nvSpPr>
-        <p:spPr>
-          <a:xfrm>
-            <a:off x="402336" y="301752"/>
-            <a:ext cx="8348472" cy="795528"/>
-          </a:xfrm>
-          <a:prstGeom prst="rect">
-            <a:avLst/>
-          </a:prstGeom>
-          <a:noFill/>
-        </p:spPr>
-        <p:txBody>
-          <a:bodyPr wrap="square">
-            <a:spAutoFit/>
-          </a:bodyPr>
-          <a:lstStyle/>
-          <a:p>
-            <a:r>
-              <a:rPr sz="2800" b="1">
-                <a:solidFill>
-                  <a:srgbClr val="0F0F0F"/>
-                </a:solidFill>
-                <a:latin typeface="Fira Sans"/>
-              </a:rPr>
-              <a:t>Ahora: las presentaciones del avance</a:t>
-            </a:r>
-          </a:p>
-        </p:txBody>
-      </p:sp>
-      <p:sp>
-        <p:nvSpPr>
-          <p:cNvPr id="4" name="TextBox 3"/>
-          <p:cNvSpPr txBox="1"/>
-          <p:nvPr/>
-        </p:nvSpPr>
-        <p:spPr>
-          <a:xfrm>
-            <a:off x="704088" y="1353312"/>
-            <a:ext cx="7744968" cy="3300984"/>
-          </a:xfrm>
-          <a:prstGeom prst="rect">
-            <a:avLst/>
-          </a:prstGeom>
-          <a:noFill/>
-        </p:spPr>
-        <p:txBody>
-          <a:bodyPr wrap="square">
-            <a:spAutoFit/>
-          </a:bodyPr>
-          <a:lstStyle/>
-          <a:p>
-            <a:pPr>
-              <a:lnSpc>
-                <a:spcPct val="112000"/>
-              </a:lnSpc>
-              <a:spcAft>
-                <a:spcPts val="900"/>
-              </a:spcAft>
-            </a:pPr>
-            <a:r>
-              <a:rPr sz="1800" b="1">
-                <a:solidFill>
-                  <a:srgbClr val="E0A437"/>
-                </a:solidFill>
-                <a:latin typeface="Fira Sans"/>
-              </a:rPr>
-              <a:t>▸ </a:t>
-            </a:r>
-            <a:r>
-              <a:rPr sz="1800" b="1">
-                <a:solidFill>
-                  <a:srgbClr val="1D3557"/>
-                </a:solidFill>
-                <a:latin typeface="Fira Sans"/>
-              </a:rPr>
-              <a:t>Ocho equipos, en el orden en que se ofrezcan. Máximo 10 minutos por equipo; el tiempo se controla. Después, preguntas de la profesora y del curso.</a:t>
-            </a:r>
-          </a:p>
-          <a:p>
-            <a:pPr>
-              <a:lnSpc>
-                <a:spcPct val="112000"/>
-              </a:lnSpc>
-              <a:spcAft>
-                <a:spcPts val="900"/>
-              </a:spcAft>
-            </a:pPr>
-            <a:r>
-              <a:rPr sz="1800" b="1">
-                <a:solidFill>
-                  <a:srgbClr val="E0A437"/>
-                </a:solidFill>
-                <a:latin typeface="Fira Sans"/>
-              </a:rPr>
-              <a:t>▸ </a:t>
-            </a:r>
-            <a:r>
-              <a:rPr sz="1800" b="0">
-                <a:solidFill>
-                  <a:srgbClr val="000000"/>
-                </a:solidFill>
-                <a:latin typeface="Fira Sans"/>
-              </a:rPr>
-              <a:t>Se evalúa el avance, no un resultado final: el modelo es un primer intento. La exigencia está en el tiempo, la claridad, la explicación de los gráficos y las relaciones, y en advertir qué falta o qué no tiene sentido.</a:t>
-            </a:r>
-          </a:p>
-          <a:p>
-            <a:pPr>
-              <a:lnSpc>
-                <a:spcPct val="112000"/>
-              </a:lnSpc>
-              <a:spcAft>
-                <a:spcPts val="900"/>
-              </a:spcAft>
-            </a:pPr>
-            <a:r>
-              <a:rPr sz="1800" b="1">
-                <a:solidFill>
-                  <a:srgbClr val="E0A437"/>
-                </a:solidFill>
-                <a:latin typeface="Fira Sans"/>
-              </a:rPr>
-              <a:t>▸ </a:t>
-            </a:r>
-            <a:r>
-              <a:rPr sz="1800" b="0">
-                <a:solidFill>
-                  <a:srgbClr val="000000"/>
-                </a:solidFill>
-                <a:latin typeface="Fira Sans"/>
-              </a:rPr>
-              <a:t>Las slides, en PDF, al Aula hasta las 20:30: un envío por equipo con los nombres.</a:t>
-            </a:r>
-          </a:p>
-          <a:p>
-            <a:pPr>
-              <a:lnSpc>
-                <a:spcPct val="112000"/>
-              </a:lnSpc>
-              <a:spcAft>
-                <a:spcPts val="900"/>
-              </a:spcAft>
-            </a:pPr>
-            <a:r>
-              <a:rPr sz="1800" b="1">
-                <a:solidFill>
-                  <a:srgbClr val="E0A437"/>
-                </a:solidFill>
-                <a:latin typeface="Fira Sans"/>
-              </a:rPr>
-              <a:t>▸ </a:t>
-            </a:r>
-            <a:r>
-              <a:rPr sz="1800" b="0">
-                <a:solidFill>
-                  <a:srgbClr val="000000"/>
-                </a:solidFill>
-                <a:latin typeface="Fira Sans"/>
-              </a:rPr>
-              <a:t>El informe escrito, el viernes 25 de septiembre por el Aula: máximo 7 páginas, con su rúbrica publicada.</a:t>
-            </a:r>
-          </a:p>
-        </p:txBody>
-      </p:sp>
-    </p:spTree>
-  </p:cSld>
-  <p:clrMapOvr>
-    <a:masterClrMapping/>
-  </p:clrMapOvr>
-</p:sld>
-</file>
-
-<file path=ppt/slides/slide35.xml><?xml version="1.0" encoding="utf-8"?>
 <p:sld xmlns:a="http://schemas.openxmlformats.org/drawingml/2006/main" xmlns:p="http://schemas.openxmlformats.org/presentationml/2006/main" xmlns:r="http://schemas.openxmlformats.org/officeDocument/2006/relationships">
   <p:cSld>
     <p:spTree>

--- a/presentaciones/clase08_componentes_principales.pptx
+++ b/presentaciones/clase08_componentes_principales.pptx
@@ -39,6 +39,7 @@
     <p:sldId id="287" r:id="rId38"/>
     <p:sldId id="288" r:id="rId39"/>
     <p:sldId id="289" r:id="rId40"/>
+    <p:sldId id="290" r:id="rId41"/>
   </p:sldIdLst>
   <p:sldSz cx="9144000" cy="5138928" type="screen4x3"/>
   <p:notesSz cx="6858000" cy="9144000"/>
@@ -5966,14 +5967,14 @@
                 </a:solidFill>
                 <a:latin typeface="Fira Sans"/>
               </a:rPr>
-              <a:t>De dónde salen los pesos</a:t>
+              <a:t>De dónde salen los pesos: con dos variables</a:t>
             </a:r>
           </a:p>
         </p:txBody>
       </p:sp>
       <p:pic>
         <p:nvPicPr>
-          <p:cNvPr id="4" name="Picture 3" descr="c8_04a_direccion.png"/>
+          <p:cNvPr id="4" name="Picture 3" descr="c8_04a_triangulo.png"/>
           <p:cNvPicPr>
             <a:picLocks noChangeAspect="1"/>
           </p:cNvPicPr>
@@ -5987,8 +5988,8 @@
         </p:blipFill>
         <p:spPr>
           <a:xfrm>
-            <a:off x="699515" y="1153192"/>
-            <a:ext cx="7744968" cy="3079431"/>
+            <a:off x="320040" y="1097280"/>
+            <a:ext cx="3314447" cy="3886200"/>
           </a:xfrm>
           <a:prstGeom prst="rect">
             <a:avLst/>
@@ -6003,8 +6004,8 @@
         </p:nvSpPr>
         <p:spPr>
           <a:xfrm>
-            <a:off x="704088" y="4369783"/>
-            <a:ext cx="7744968" cy="512064"/>
+            <a:off x="3863087" y="1325880"/>
+            <a:ext cx="4960872" cy="3566160"/>
           </a:xfrm>
           <a:prstGeom prst="rect">
             <a:avLst/>
@@ -6017,14 +6018,87 @@
           </a:bodyPr>
           <a:lstStyle/>
           <a:p>
-            <a:r>
-              <a:rPr sz="1300" b="0">
-                <a:solidFill>
-                  <a:srgbClr val="333333"/>
-                </a:solidFill>
-                <a:latin typeface="Fira Sans"/>
-              </a:rPr>
-              <a:t>Los pesos de una componente son la dirección de su eje: cuánto avanza cada variable en un paso de 1 sobre él. Con dos variables, 0,707 y 0,707; con dieciséis, dieciséis pesos cuyos cuadrados suman 1.</a:t>
+            <a:pPr>
+              <a:lnSpc>
+                <a:spcPct val="112000"/>
+              </a:lnSpc>
+              <a:spcAft>
+                <a:spcPts val="900"/>
+              </a:spcAft>
+            </a:pPr>
+            <a:r>
+              <a:rPr sz="1500" b="1">
+                <a:solidFill>
+                  <a:srgbClr val="E0A437"/>
+                </a:solidFill>
+                <a:latin typeface="Fira Sans"/>
+              </a:rPr>
+              <a:t>▸ </a:t>
+            </a:r>
+            <a:r>
+              <a:rPr sz="1500" b="1">
+                <a:solidFill>
+                  <a:srgbClr val="1D3557"/>
+                </a:solidFill>
+                <a:latin typeface="Fira Sans"/>
+              </a:rPr>
+              <a:t>La flecha azul es un paso de largo 1 sobre el eje nuevo: su punta queda a distancia 1 del centro.</a:t>
+            </a:r>
+          </a:p>
+          <a:p>
+            <a:pPr>
+              <a:lnSpc>
+                <a:spcPct val="112000"/>
+              </a:lnSpc>
+              <a:spcAft>
+                <a:spcPts val="900"/>
+              </a:spcAft>
+            </a:pPr>
+            <a:r>
+              <a:rPr sz="1500" b="1">
+                <a:solidFill>
+                  <a:srgbClr val="E0A437"/>
+                </a:solidFill>
+                <a:latin typeface="Fira Sans"/>
+              </a:rPr>
+              <a:t>▸ </a:t>
+            </a:r>
+            <a:r>
+              <a:rPr sz="1500" b="0">
+                <a:solidFill>
+                  <a:srgbClr val="000000"/>
+                </a:solidFill>
+                <a:latin typeface="Fira Sans"/>
+              </a:rPr>
+              <a:t>En ese paso, turnos avanza 0,707 y hits avanza 0,707: los dos catetos del triángulo (0,707² + 0,707² = 1²).</a:t>
+            </a:r>
+          </a:p>
+          <a:p>
+            <a:pPr>
+              <a:lnSpc>
+                <a:spcPct val="112000"/>
+              </a:lnSpc>
+              <a:spcAft>
+                <a:spcPts val="900"/>
+              </a:spcAft>
+            </a:pPr>
+            <a:r>
+              <a:rPr sz="1500" b="1">
+                <a:solidFill>
+                  <a:srgbClr val="E0A437"/>
+                </a:solidFill>
+                <a:latin typeface="Fira Sans"/>
+              </a:rPr>
+              <a:t>▸ </a:t>
+            </a:r>
+            <a:r>
+              <a:rPr sz="1500" b="0">
+                <a:solidFill>
+                  <a:srgbClr val="000000"/>
+                </a:solidFill>
+                <a:latin typeface="Fira Sans"/>
+              </a:rPr>
+              <a:t>Esos dos números son los pesos de la primera componente: cuánto avanza cada variable en un paso de 1 sobre el eje.</a:t>
             </a:r>
           </a:p>
         </p:txBody>
@@ -6120,14 +6194,14 @@
                 </a:solidFill>
                 <a:latin typeface="Fira Sans"/>
               </a:rPr>
-              <a:t>De qué está hecha cada componente: los pesos</a:t>
+              <a:t>Con 16 variables: los 16 pesos del 1.º eje</a:t>
             </a:r>
           </a:p>
         </p:txBody>
       </p:sp>
       <p:pic>
         <p:nvPicPr>
-          <p:cNvPr id="4" name="Picture 3" descr="c8_04_pesos.png"/>
+          <p:cNvPr id="4" name="Picture 3" descr="c8_04b_16pesos.png"/>
           <p:cNvPicPr>
             <a:picLocks noChangeAspect="1"/>
           </p:cNvPicPr>
@@ -6141,8 +6215,8 @@
         </p:blipFill>
         <p:spPr>
           <a:xfrm>
-            <a:off x="1433764" y="1143000"/>
-            <a:ext cx="6276471" cy="2843784"/>
+            <a:off x="2307211" y="1143000"/>
+            <a:ext cx="4529577" cy="2843784"/>
           </a:xfrm>
           <a:prstGeom prst="rect">
             <a:avLst/>
@@ -6178,7 +6252,7 @@
                 </a:solidFill>
                 <a:latin typeface="Fira Sans"/>
               </a:rPr>
-              <a:t>1.ª componente: la carrera pesa 0,29 a 0,34, la temporada 1986 la mitad (0,19 a 0,23) y la defensa nada: cuánta carrera lleva el jugador. 2.ª: la temporada positiva (0,24 a 0,39) y la carrera negativa (−0,12 a −0,26): quien rindió este año más de lo que dice su carrera.</a:t>
+              <a:t>Lo mismo en 16 dimensiones, donde ya no se puede dibujar: un paso de 1 sobre el primer eje avanza 0,33 en turnos_carrera, 0,33 en hits_carrera, 0,20 en turnos de 1986, 0,08 en outs de defensa y casi nada en errores. Son dieciséis catetos cuyos cuadrados suman 1.</a:t>
             </a:r>
           </a:p>
         </p:txBody>
@@ -6274,14 +6348,14 @@
                 </a:solidFill>
                 <a:latin typeface="Fira Sans"/>
               </a:rPr>
-              <a:t>Los 263 jugadores en dos componentes</a:t>
+              <a:t>De qué está hecha cada componente: los pesos</a:t>
             </a:r>
           </a:p>
         </p:txBody>
       </p:sp>
       <p:pic>
         <p:nvPicPr>
-          <p:cNvPr id="4" name="Picture 3" descr="c8_05_jugadores.png"/>
+          <p:cNvPr id="4" name="Picture 3" descr="c8_04_pesos.png"/>
           <p:cNvPicPr>
             <a:picLocks noChangeAspect="1"/>
           </p:cNvPicPr>
@@ -6295,8 +6369,8 @@
         </p:blipFill>
         <p:spPr>
           <a:xfrm>
-            <a:off x="2699826" y="1143000"/>
-            <a:ext cx="3744346" cy="2587751"/>
+            <a:off x="1433764" y="1143000"/>
+            <a:ext cx="6276471" cy="2843784"/>
           </a:xfrm>
           <a:prstGeom prst="rect">
             <a:avLst/>
@@ -6311,8 +6385,8 @@
         </p:nvSpPr>
         <p:spPr>
           <a:xfrm>
-            <a:off x="704088" y="3867912"/>
-            <a:ext cx="7744968" cy="1024128"/>
+            <a:off x="704088" y="4123944"/>
+            <a:ext cx="7744968" cy="768096"/>
           </a:xfrm>
           <a:prstGeom prst="rect">
             <a:avLst/>
@@ -6332,7 +6406,7 @@
                 </a:solidFill>
                 <a:latin typeface="Fira Sans"/>
               </a:rPr>
-              <a:t>Cada punto es un jugador y el color, su salario de 1987, que PCA no usó. El salario crece hacia la derecha (correlación 0,64 con la primera componente) y casi nada hacia arriba (0,11 con la segunda): la carrera pesa en el salario; la última temporada, poco. Dos ejes muestran lo que en 16 variables había que leer coeficiente por coeficiente.</a:t>
+              <a:t>1.ª componente: la carrera pesa 0,29 a 0,34, la temporada 1986 la mitad (0,19 a 0,23) y la defensa nada: cuánta carrera lleva el jugador. 2.ª: la temporada positiva (0,24 a 0,39) y la carrera negativa (−0,12 a −0,26): quien rindió este año más de lo que dice su carrera.</a:t>
             </a:r>
           </a:p>
         </p:txBody>
@@ -6428,14 +6502,14 @@
                 </a:solidFill>
                 <a:latin typeface="Fira Sans"/>
               </a:rPr>
-              <a:t>El salario con pocas componentes</a:t>
+              <a:t>Los 263 jugadores en dos componentes</a:t>
             </a:r>
           </a:p>
         </p:txBody>
       </p:sp>
       <p:pic>
         <p:nvPicPr>
-          <p:cNvPr id="4" name="Picture 3" descr="c8_09_pcr.png"/>
+          <p:cNvPr id="4" name="Picture 3" descr="c8_05_jugadores.png"/>
           <p:cNvPicPr>
             <a:picLocks noChangeAspect="1"/>
           </p:cNvPicPr>
@@ -6449,8 +6523,8 @@
         </p:blipFill>
         <p:spPr>
           <a:xfrm>
-            <a:off x="320040" y="1097280"/>
-            <a:ext cx="3567691" cy="3886200"/>
+            <a:off x="2699826" y="1143000"/>
+            <a:ext cx="3744346" cy="2587751"/>
           </a:xfrm>
           <a:prstGeom prst="rect">
             <a:avLst/>
@@ -6465,8 +6539,8 @@
         </p:nvSpPr>
         <p:spPr>
           <a:xfrm>
-            <a:off x="4116330" y="1325880"/>
-            <a:ext cx="4707629" cy="3566160"/>
+            <a:off x="704088" y="3867912"/>
+            <a:ext cx="7744968" cy="1024128"/>
           </a:xfrm>
           <a:prstGeom prst="rect">
             <a:avLst/>
@@ -6479,87 +6553,14 @@
           </a:bodyPr>
           <a:lstStyle/>
           <a:p>
-            <a:pPr>
-              <a:lnSpc>
-                <a:spcPct val="112000"/>
-              </a:lnSpc>
-              <a:spcAft>
-                <a:spcPts val="900"/>
-              </a:spcAft>
-            </a:pPr>
-            <a:r>
-              <a:rPr sz="1500" b="1">
-                <a:solidFill>
-                  <a:srgbClr val="E0A437"/>
-                </a:solidFill>
-                <a:latin typeface="Fira Sans"/>
-              </a:rPr>
-              <a:t>▸ </a:t>
-            </a:r>
-            <a:r>
-              <a:rPr sz="1500" b="1">
-                <a:solidFill>
-                  <a:srgbClr val="1D3557"/>
-                </a:solidFill>
-                <a:latin typeface="Fira Sans"/>
-              </a:rPr>
-              <a:t>Con el reparto de la clase 7 (131 y 132 jugadores), el salario se predice con las primeras k componentes. Con 1, 2 o 3, el error de prueba es 321.</a:t>
-            </a:r>
-          </a:p>
-          <a:p>
-            <a:pPr>
-              <a:lnSpc>
-                <a:spcPct val="112000"/>
-              </a:lnSpc>
-              <a:spcAft>
-                <a:spcPts val="900"/>
-              </a:spcAft>
-            </a:pPr>
-            <a:r>
-              <a:rPr sz="1500" b="1">
-                <a:solidFill>
-                  <a:srgbClr val="E0A437"/>
-                </a:solidFill>
-                <a:latin typeface="Fira Sans"/>
-              </a:rPr>
-              <a:t>▸ </a:t>
-            </a:r>
-            <a:r>
-              <a:rPr sz="1500" b="0">
-                <a:solidFill>
-                  <a:srgbClr val="000000"/>
-                </a:solidFill>
-                <a:latin typeface="Fira Sans"/>
-              </a:rPr>
-              <a:t>Mínimos cuadrados con las mismas 16 variables da 347 y con las 19, 342; Lasso 325 y Ridge 316.</a:t>
-            </a:r>
-          </a:p>
-          <a:p>
-            <a:pPr>
-              <a:lnSpc>
-                <a:spcPct val="112000"/>
-              </a:lnSpc>
-              <a:spcAft>
-                <a:spcPts val="900"/>
-              </a:spcAft>
-            </a:pPr>
-            <a:r>
-              <a:rPr sz="1500" b="1">
-                <a:solidFill>
-                  <a:srgbClr val="E0A437"/>
-                </a:solidFill>
-                <a:latin typeface="Fira Sans"/>
-              </a:rPr>
-              <a:t>▸ </a:t>
-            </a:r>
-            <a:r>
-              <a:rPr sz="1500" b="0">
-                <a:solidFill>
-                  <a:srgbClr val="000000"/>
-                </a:solidFill>
-                <a:latin typeface="Fira Sans"/>
-              </a:rPr>
-              <a:t>Dos números por jugador predicen casi tan bien como el mejor modelo de la clase 7 (en 20 repartos le gana a mínimos cuadrados en 17): es la regresión sobre componentes principales (James et al., 2013, sección 6.3.1).</a:t>
+            <a:r>
+              <a:rPr sz="1300" b="0">
+                <a:solidFill>
+                  <a:srgbClr val="333333"/>
+                </a:solidFill>
+                <a:latin typeface="Fira Sans"/>
+              </a:rPr>
+              <a:t>Cada punto es un jugador y el color, su salario de 1987, que PCA no usó. El salario crece hacia la derecha (correlación 0,64 con la primera componente) y casi nada hacia arriba (0,11 con la segunda): la carrera pesa en el salario; la última temporada, poco. Dos ejes muestran lo que en 16 variables había que leer coeficiente por coeficiente.</a:t>
             </a:r>
           </a:p>
         </p:txBody>
@@ -6597,7 +6598,7 @@
             <a:avLst/>
           </a:prstGeom>
           <a:solidFill>
-            <a:srgbClr val="1D3557"/>
+            <a:srgbClr val="FAFBFC"/>
           </a:solidFill>
           <a:ln>
             <a:noFill/>
@@ -6634,8 +6635,8 @@
         </p:nvSpPr>
         <p:spPr>
           <a:xfrm>
-            <a:off x="603504" y="1847088"/>
-            <a:ext cx="7946136" cy="1399032"/>
+            <a:off x="402336" y="301752"/>
+            <a:ext cx="8348472" cy="795528"/>
           </a:xfrm>
           <a:prstGeom prst="rect">
             <a:avLst/>
@@ -6649,24 +6650,144 @@
           <a:lstStyle/>
           <a:p>
             <a:r>
-              <a:rPr sz="3400" b="1">
-                <a:solidFill>
-                  <a:srgbClr val="FFFFFF"/>
-                </a:solidFill>
-                <a:latin typeface="Fira Sans"/>
-              </a:rPr>
-              <a:t>4. Cuándo</a:t>
-            </a:r>
-          </a:p>
-          <a:p>
-            <a:r>
-              <a:rPr sz="1800" b="0">
+              <a:rPr sz="2800" b="1">
+                <a:solidFill>
+                  <a:srgbClr val="0F0F0F"/>
+                </a:solidFill>
+                <a:latin typeface="Fira Sans"/>
+              </a:rPr>
+              <a:t>El salario con pocas componentes</a:t>
+            </a:r>
+          </a:p>
+        </p:txBody>
+      </p:sp>
+      <p:pic>
+        <p:nvPicPr>
+          <p:cNvPr id="4" name="Picture 3" descr="c8_09_pcr.png"/>
+          <p:cNvPicPr>
+            <a:picLocks noChangeAspect="1"/>
+          </p:cNvPicPr>
+          <p:nvPr/>
+        </p:nvPicPr>
+        <p:blipFill>
+          <a:blip r:embed="rId2"/>
+          <a:stretch>
+            <a:fillRect/>
+          </a:stretch>
+        </p:blipFill>
+        <p:spPr>
+          <a:xfrm>
+            <a:off x="320040" y="1097280"/>
+            <a:ext cx="3567691" cy="3886200"/>
+          </a:xfrm>
+          <a:prstGeom prst="rect">
+            <a:avLst/>
+          </a:prstGeom>
+        </p:spPr>
+      </p:pic>
+      <p:sp>
+        <p:nvSpPr>
+          <p:cNvPr id="5" name="TextBox 4"/>
+          <p:cNvSpPr txBox="1"/>
+          <p:nvPr/>
+        </p:nvSpPr>
+        <p:spPr>
+          <a:xfrm>
+            <a:off x="4116330" y="1325880"/>
+            <a:ext cx="4707629" cy="3566160"/>
+          </a:xfrm>
+          <a:prstGeom prst="rect">
+            <a:avLst/>
+          </a:prstGeom>
+          <a:noFill/>
+        </p:spPr>
+        <p:txBody>
+          <a:bodyPr wrap="square">
+            <a:spAutoFit/>
+          </a:bodyPr>
+          <a:lstStyle/>
+          <a:p>
+            <a:pPr>
+              <a:lnSpc>
+                <a:spcPct val="112000"/>
+              </a:lnSpc>
+              <a:spcAft>
+                <a:spcPts val="900"/>
+              </a:spcAft>
+            </a:pPr>
+            <a:r>
+              <a:rPr sz="1500" b="1">
                 <a:solidFill>
                   <a:srgbClr val="E0A437"/>
                 </a:solidFill>
                 <a:latin typeface="Fira Sans"/>
               </a:rPr>
-              <a:t>Cuándo conviene y cuándo no</a:t>
+              <a:t>▸ </a:t>
+            </a:r>
+            <a:r>
+              <a:rPr sz="1500" b="1">
+                <a:solidFill>
+                  <a:srgbClr val="1D3557"/>
+                </a:solidFill>
+                <a:latin typeface="Fira Sans"/>
+              </a:rPr>
+              <a:t>Con el reparto de la clase 7 (131 y 132 jugadores), el salario se predice con las primeras k componentes. Con 1, 2 o 3, el error de prueba es 321.</a:t>
+            </a:r>
+          </a:p>
+          <a:p>
+            <a:pPr>
+              <a:lnSpc>
+                <a:spcPct val="112000"/>
+              </a:lnSpc>
+              <a:spcAft>
+                <a:spcPts val="900"/>
+              </a:spcAft>
+            </a:pPr>
+            <a:r>
+              <a:rPr sz="1500" b="1">
+                <a:solidFill>
+                  <a:srgbClr val="E0A437"/>
+                </a:solidFill>
+                <a:latin typeface="Fira Sans"/>
+              </a:rPr>
+              <a:t>▸ </a:t>
+            </a:r>
+            <a:r>
+              <a:rPr sz="1500" b="0">
+                <a:solidFill>
+                  <a:srgbClr val="000000"/>
+                </a:solidFill>
+                <a:latin typeface="Fira Sans"/>
+              </a:rPr>
+              <a:t>Mínimos cuadrados con las mismas 16 variables da 347 y con las 19, 342; Lasso 325 y Ridge 316.</a:t>
+            </a:r>
+          </a:p>
+          <a:p>
+            <a:pPr>
+              <a:lnSpc>
+                <a:spcPct val="112000"/>
+              </a:lnSpc>
+              <a:spcAft>
+                <a:spcPts val="900"/>
+              </a:spcAft>
+            </a:pPr>
+            <a:r>
+              <a:rPr sz="1500" b="1">
+                <a:solidFill>
+                  <a:srgbClr val="E0A437"/>
+                </a:solidFill>
+                <a:latin typeface="Fira Sans"/>
+              </a:rPr>
+              <a:t>▸ </a:t>
+            </a:r>
+            <a:r>
+              <a:rPr sz="1500" b="0">
+                <a:solidFill>
+                  <a:srgbClr val="000000"/>
+                </a:solidFill>
+                <a:latin typeface="Fira Sans"/>
+              </a:rPr>
+              <a:t>Dos números por jugador predicen casi tan bien como el mejor modelo de la clase 7 (en 20 repartos le gana a mínimos cuadrados en 17): es la regresión sobre componentes principales (James et al., 2013, sección 6.3.1).</a:t>
             </a:r>
           </a:p>
         </p:txBody>
@@ -6704,7 +6825,7 @@
             <a:avLst/>
           </a:prstGeom>
           <a:solidFill>
-            <a:srgbClr val="FAFBFC"/>
+            <a:srgbClr val="1D3557"/>
           </a:solidFill>
           <a:ln>
             <a:noFill/>
@@ -6741,8 +6862,8 @@
         </p:nvSpPr>
         <p:spPr>
           <a:xfrm>
-            <a:off x="402336" y="301752"/>
-            <a:ext cx="8348472" cy="795528"/>
+            <a:off x="603504" y="1847088"/>
+            <a:ext cx="7946136" cy="1399032"/>
           </a:xfrm>
           <a:prstGeom prst="rect">
             <a:avLst/>
@@ -6756,120 +6877,24 @@
           <a:lstStyle/>
           <a:p>
             <a:r>
-              <a:rPr sz="2800" b="1">
-                <a:solidFill>
-                  <a:srgbClr val="0F0F0F"/>
-                </a:solidFill>
-                <a:latin typeface="Fira Sans"/>
-              </a:rPr>
-              <a:t>¿Cuándo conviene?</a:t>
-            </a:r>
-          </a:p>
-        </p:txBody>
-      </p:sp>
-      <p:sp>
-        <p:nvSpPr>
-          <p:cNvPr id="4" name="TextBox 3"/>
-          <p:cNvSpPr txBox="1"/>
-          <p:nvPr/>
-        </p:nvSpPr>
-        <p:spPr>
-          <a:xfrm>
-            <a:off x="704088" y="1353312"/>
-            <a:ext cx="7744968" cy="3300984"/>
-          </a:xfrm>
-          <a:prstGeom prst="rect">
-            <a:avLst/>
-          </a:prstGeom>
-          <a:noFill/>
-        </p:spPr>
-        <p:txBody>
-          <a:bodyPr wrap="square">
-            <a:spAutoFit/>
-          </a:bodyPr>
-          <a:lstStyle/>
-          <a:p>
-            <a:pPr>
-              <a:lnSpc>
-                <a:spcPct val="112000"/>
-              </a:lnSpc>
-              <a:spcAft>
-                <a:spcPts val="900"/>
-              </a:spcAft>
-            </a:pPr>
-            <a:r>
-              <a:rPr sz="1800" b="1">
+              <a:rPr sz="3400" b="1">
+                <a:solidFill>
+                  <a:srgbClr val="FFFFFF"/>
+                </a:solidFill>
+                <a:latin typeface="Fira Sans"/>
+              </a:rPr>
+              <a:t>4. Cuándo</a:t>
+            </a:r>
+          </a:p>
+          <a:p>
+            <a:r>
+              <a:rPr sz="1800" b="0">
                 <a:solidFill>
                   <a:srgbClr val="E0A437"/>
                 </a:solidFill>
                 <a:latin typeface="Fira Sans"/>
               </a:rPr>
-              <a:t>▸ </a:t>
-            </a:r>
-            <a:r>
-              <a:rPr sz="1800" b="1">
-                <a:solidFill>
-                  <a:srgbClr val="1D3557"/>
-                </a:solidFill>
-                <a:latin typeface="Fira Sans"/>
-              </a:rPr>
-              <a:t>Con muchas variables numéricas que se correlacionan en bloques, como en la matriz de la clase 7.</a:t>
-            </a:r>
-          </a:p>
-          <a:p>
-            <a:pPr>
-              <a:lnSpc>
-                <a:spcPct val="112000"/>
-              </a:lnSpc>
-              <a:spcAft>
-                <a:spcPts val="900"/>
-              </a:spcAft>
-            </a:pPr>
-            <a:r>
-              <a:rPr sz="1800" b="1">
-                <a:solidFill>
-                  <a:srgbClr val="E0A437"/>
-                </a:solidFill>
-                <a:latin typeface="Fira Sans"/>
-              </a:rPr>
-              <a:t>▸ </a:t>
-            </a:r>
-            <a:r>
-              <a:rPr sz="1800" b="0">
-                <a:solidFill>
-                  <a:srgbClr val="000000"/>
-                </a:solidFill>
-                <a:latin typeface="Fira Sans"/>
-              </a:rPr>
-              <a:t>Para mirar los datos en un plano, o para entregarle a un modelo menos entradas.</a:t>
-            </a:r>
-          </a:p>
-          <a:p>
-            <a:pPr>
-              <a:lnSpc>
-                <a:spcPct val="112000"/>
-              </a:lnSpc>
-              <a:spcAft>
-                <a:spcPts val="900"/>
-              </a:spcAft>
-            </a:pPr>
-            <a:r>
-              <a:rPr sz="1800" b="1">
-                <a:solidFill>
-                  <a:srgbClr val="E0A437"/>
-                </a:solidFill>
-                <a:latin typeface="Fira Sans"/>
-              </a:rPr>
-              <a:t>▸ </a:t>
-            </a:r>
-            <a:r>
-              <a:rPr sz="1800" b="0">
-                <a:solidFill>
-                  <a:srgbClr val="000000"/>
-                </a:solidFill>
-                <a:latin typeface="Fira Sans"/>
-              </a:rPr>
-              <a:t>No aporta si las variables son pocas y distintas entre sí: no hay nada que resumir.</a:t>
+              <a:t>Cuándo conviene y cuándo no</a:t>
             </a:r>
           </a:p>
         </p:txBody>
@@ -6965,7 +6990,7 @@
                 </a:solidFill>
                 <a:latin typeface="Fira Sans"/>
               </a:rPr>
-              <a:t>Tres precauciones</a:t>
+              <a:t>¿Cuándo conviene?</a:t>
             </a:r>
           </a:p>
         </p:txBody>
@@ -7016,7 +7041,7 @@
                 </a:solidFill>
                 <a:latin typeface="Fira Sans"/>
               </a:rPr>
-              <a:t>Las variables categóricas (las dummies de la clase 6) no entran bien en el cálculo: se dejan fuera o se tratan aparte.</a:t>
+              <a:t>Con muchas variables numéricas que se correlacionan en bloques, como en la matriz de la clase 7.</a:t>
             </a:r>
           </a:p>
           <a:p>
@@ -7044,7 +7069,7 @@
                 </a:solidFill>
                 <a:latin typeface="Fira Sans"/>
               </a:rPr>
-              <a:t>Las componentes no siempre tienen una lectura clara. Aquí sí (la carrera; la temporada frente a la carrera), pero no está garantizado.</a:t>
+              <a:t>Para mirar los datos en un plano, o para entregarle a un modelo menos entradas.</a:t>
             </a:r>
           </a:p>
           <a:p>
@@ -7072,7 +7097,7 @@
                 </a:solidFill>
                 <a:latin typeface="Fira Sans"/>
               </a:rPr>
-              <a:t>Es no supervisado: la dirección de más variación no es necesariamente la que mejor predice la respuesta. Ridge y Lasso eligen mirando Y; PCA no la mira.</a:t>
+              <a:t>No aporta si las variables son pocas y distintas entre sí: no hay nada que resumir.</a:t>
             </a:r>
           </a:p>
         </p:txBody>
@@ -7427,124 +7452,21 @@
                 </a:solidFill>
                 <a:latin typeface="Fira Sans"/>
               </a:rPr>
-              <a:t>En el código: cinco líneas</a:t>
-            </a:r>
-          </a:p>
-        </p:txBody>
-      </p:sp>
-      <p:sp>
-        <p:nvSpPr>
-          <p:cNvPr id="4" name="Rectangle 3"/>
-          <p:cNvSpPr/>
-          <p:nvPr/>
-        </p:nvSpPr>
-        <p:spPr>
-          <a:xfrm>
-            <a:off x="704088" y="1280160"/>
-            <a:ext cx="7744968" cy="2880360"/>
-          </a:xfrm>
-          <a:prstGeom prst="rect">
-            <a:avLst/>
-          </a:prstGeom>
-          <a:solidFill>
-            <a:srgbClr val="F0F2F5"/>
-          </a:solidFill>
-          <a:ln>
-            <a:solidFill>
-              <a:srgbClr val="D8DDE3"/>
-            </a:solidFill>
-          </a:ln>
-          <a:effectLst/>
-        </p:spPr>
-        <p:style>
-          <a:lnRef idx="1">
-            <a:schemeClr val="accent1"/>
-          </a:lnRef>
-          <a:fillRef idx="3">
-            <a:schemeClr val="accent1"/>
-          </a:fillRef>
-          <a:effectRef idx="2">
-            <a:schemeClr val="accent1"/>
-          </a:effectRef>
-          <a:fontRef idx="minor">
-            <a:schemeClr val="lt1"/>
-          </a:fontRef>
-        </p:style>
-        <p:txBody>
-          <a:bodyPr rtlCol="0" anchor="ctr" wrap="square" lIns="228600" tIns="137160"/>
-          <a:lstStyle/>
-          <a:p>
-            <a:pPr/>
-            <a:r>
-              <a:rPr sz="1500" b="0">
-                <a:solidFill>
-                  <a:srgbClr val="1D3557"/>
-                </a:solidFill>
-                <a:latin typeface="Menlo"/>
-              </a:rPr>
-              <a:t>Z = StandardScaler().fit_transform(X)  # 1. estandarizar</a:t>
-            </a:r>
-          </a:p>
-          <a:p>
-            <a:pPr/>
-            <a:r>
-              <a:rPr sz="1500" b="0">
-                <a:solidFill>
-                  <a:srgbClr val="1D3557"/>
-                </a:solidFill>
-                <a:latin typeface="Menlo"/>
-              </a:rPr>
-              <a:t>pca = PCA().fit(Z)                     # 2. las componentes</a:t>
-            </a:r>
-          </a:p>
-          <a:p>
-            <a:pPr/>
-            <a:r>
-              <a:rPr sz="1500" b="0">
-                <a:solidFill>
-                  <a:srgbClr val="1D3557"/>
-                </a:solidFill>
-                <a:latin typeface="Menlo"/>
-              </a:rPr>
-              <a:t>pca.explained_variance_ratio_          # 3. cuánto explica</a:t>
-            </a:r>
-          </a:p>
-          <a:p>
-            <a:pPr/>
-            <a:r>
-              <a:rPr sz="1500" b="0">
-                <a:solidFill>
-                  <a:srgbClr val="1D3557"/>
-                </a:solidFill>
-                <a:latin typeface="Menlo"/>
-              </a:rPr>
-              <a:t>pca.components_                        # 4. los pesos</a:t>
-            </a:r>
-          </a:p>
-          <a:p>
-            <a:pPr/>
-            <a:r>
-              <a:rPr sz="1500" b="0">
-                <a:solidFill>
-                  <a:srgbClr val="1D3557"/>
-                </a:solidFill>
-                <a:latin typeface="Menlo"/>
-              </a:rPr>
-              <a:t>puntajes = pca.transform(Z)            # 5. los puntajes</a:t>
-            </a:r>
-          </a:p>
-        </p:txBody>
-      </p:sp>
-      <p:sp>
-        <p:nvSpPr>
-          <p:cNvPr id="5" name="TextBox 4"/>
+              <a:t>Tres precauciones</a:t>
+            </a:r>
+          </a:p>
+        </p:txBody>
+      </p:sp>
+      <p:sp>
+        <p:nvSpPr>
+          <p:cNvPr id="4" name="TextBox 3"/>
           <p:cNvSpPr txBox="1"/>
           <p:nvPr/>
         </p:nvSpPr>
         <p:spPr>
           <a:xfrm>
-            <a:off x="704088" y="4389120"/>
-            <a:ext cx="7744968" cy="1097280"/>
+            <a:off x="704088" y="1353312"/>
+            <a:ext cx="7744968" cy="3300984"/>
           </a:xfrm>
           <a:prstGeom prst="rect">
             <a:avLst/>
@@ -7566,7 +7488,7 @@
               </a:spcAft>
             </a:pPr>
             <a:r>
-              <a:rPr sz="1600" b="1">
+              <a:rPr sz="1800" b="1">
                 <a:solidFill>
                   <a:srgbClr val="E0A437"/>
                 </a:solidFill>
@@ -7575,13 +7497,69 @@
               <a:t>▸ </a:t>
             </a:r>
             <a:r>
-              <a:rPr sz="1600" b="0">
+              <a:rPr sz="1800" b="1">
+                <a:solidFill>
+                  <a:srgbClr val="1D3557"/>
+                </a:solidFill>
+                <a:latin typeface="Fira Sans"/>
+              </a:rPr>
+              <a:t>Las variables categóricas (las dummies de la clase 6) no entran bien en el cálculo: se dejan fuera o se tratan aparte.</a:t>
+            </a:r>
+          </a:p>
+          <a:p>
+            <a:pPr>
+              <a:lnSpc>
+                <a:spcPct val="112000"/>
+              </a:lnSpc>
+              <a:spcAft>
+                <a:spcPts val="900"/>
+              </a:spcAft>
+            </a:pPr>
+            <a:r>
+              <a:rPr sz="1800" b="1">
+                <a:solidFill>
+                  <a:srgbClr val="E0A437"/>
+                </a:solidFill>
+                <a:latin typeface="Fira Sans"/>
+              </a:rPr>
+              <a:t>▸ </a:t>
+            </a:r>
+            <a:r>
+              <a:rPr sz="1800" b="0">
                 <a:solidFill>
                   <a:srgbClr val="000000"/>
                 </a:solidFill>
                 <a:latin typeface="Fira Sans"/>
               </a:rPr>
-              <a:t>El ejemplo completo, con las tablas de pesos y los gráficos de la clase, está en el notebook 08_componentes_principales.ipynb.</a:t>
+              <a:t>Las componentes no siempre tienen una lectura clara. Aquí sí (la carrera; la temporada frente a la carrera), pero no está garantizado.</a:t>
+            </a:r>
+          </a:p>
+          <a:p>
+            <a:pPr>
+              <a:lnSpc>
+                <a:spcPct val="112000"/>
+              </a:lnSpc>
+              <a:spcAft>
+                <a:spcPts val="900"/>
+              </a:spcAft>
+            </a:pPr>
+            <a:r>
+              <a:rPr sz="1800" b="1">
+                <a:solidFill>
+                  <a:srgbClr val="E0A437"/>
+                </a:solidFill>
+                <a:latin typeface="Fira Sans"/>
+              </a:rPr>
+              <a:t>▸ </a:t>
+            </a:r>
+            <a:r>
+              <a:rPr sz="1800" b="0">
+                <a:solidFill>
+                  <a:srgbClr val="000000"/>
+                </a:solidFill>
+                <a:latin typeface="Fira Sans"/>
+              </a:rPr>
+              <a:t>Es no supervisado: la dirección de más variación no es necesariamente la que mejor predice la respuesta. Ridge y Lasso eligen mirando Y; PCA no la mira.</a:t>
             </a:r>
           </a:p>
         </p:txBody>
@@ -7619,7 +7597,7 @@
             <a:avLst/>
           </a:prstGeom>
           <a:solidFill>
-            <a:srgbClr val="1D3557"/>
+            <a:srgbClr val="FAFBFC"/>
           </a:solidFill>
           <a:ln>
             <a:noFill/>
@@ -7656,8 +7634,8 @@
         </p:nvSpPr>
         <p:spPr>
           <a:xfrm>
-            <a:off x="603504" y="1847088"/>
-            <a:ext cx="7946136" cy="1399032"/>
+            <a:off x="402336" y="301752"/>
+            <a:ext cx="8348472" cy="795528"/>
           </a:xfrm>
           <a:prstGeom prst="rect">
             <a:avLst/>
@@ -7671,24 +7649,167 @@
           <a:lstStyle/>
           <a:p>
             <a:r>
-              <a:rPr sz="3400" b="1">
-                <a:solidFill>
-                  <a:srgbClr val="FFFFFF"/>
-                </a:solidFill>
-                <a:latin typeface="Fira Sans"/>
-              </a:rPr>
-              <a:t>5. Cierre del módulo</a:t>
-            </a:r>
-          </a:p>
-          <a:p>
-            <a:r>
-              <a:rPr sz="1800" b="0">
+              <a:rPr sz="2800" b="1">
+                <a:solidFill>
+                  <a:srgbClr val="0F0F0F"/>
+                </a:solidFill>
+                <a:latin typeface="Fira Sans"/>
+              </a:rPr>
+              <a:t>En el código: cinco líneas</a:t>
+            </a:r>
+          </a:p>
+        </p:txBody>
+      </p:sp>
+      <p:sp>
+        <p:nvSpPr>
+          <p:cNvPr id="4" name="Rectangle 3"/>
+          <p:cNvSpPr/>
+          <p:nvPr/>
+        </p:nvSpPr>
+        <p:spPr>
+          <a:xfrm>
+            <a:off x="704088" y="1280160"/>
+            <a:ext cx="7744968" cy="2880360"/>
+          </a:xfrm>
+          <a:prstGeom prst="rect">
+            <a:avLst/>
+          </a:prstGeom>
+          <a:solidFill>
+            <a:srgbClr val="F0F2F5"/>
+          </a:solidFill>
+          <a:ln>
+            <a:solidFill>
+              <a:srgbClr val="D8DDE3"/>
+            </a:solidFill>
+          </a:ln>
+          <a:effectLst/>
+        </p:spPr>
+        <p:style>
+          <a:lnRef idx="1">
+            <a:schemeClr val="accent1"/>
+          </a:lnRef>
+          <a:fillRef idx="3">
+            <a:schemeClr val="accent1"/>
+          </a:fillRef>
+          <a:effectRef idx="2">
+            <a:schemeClr val="accent1"/>
+          </a:effectRef>
+          <a:fontRef idx="minor">
+            <a:schemeClr val="lt1"/>
+          </a:fontRef>
+        </p:style>
+        <p:txBody>
+          <a:bodyPr rtlCol="0" anchor="ctr" wrap="square" lIns="228600" tIns="137160"/>
+          <a:lstStyle/>
+          <a:p>
+            <a:pPr/>
+            <a:r>
+              <a:rPr sz="1500" b="0">
+                <a:solidFill>
+                  <a:srgbClr val="1D3557"/>
+                </a:solidFill>
+                <a:latin typeface="Menlo"/>
+              </a:rPr>
+              <a:t>Z = StandardScaler().fit_transform(X)  # 1. estandarizar</a:t>
+            </a:r>
+          </a:p>
+          <a:p>
+            <a:pPr/>
+            <a:r>
+              <a:rPr sz="1500" b="0">
+                <a:solidFill>
+                  <a:srgbClr val="1D3557"/>
+                </a:solidFill>
+                <a:latin typeface="Menlo"/>
+              </a:rPr>
+              <a:t>pca = PCA().fit(Z)                     # 2. las componentes</a:t>
+            </a:r>
+          </a:p>
+          <a:p>
+            <a:pPr/>
+            <a:r>
+              <a:rPr sz="1500" b="0">
+                <a:solidFill>
+                  <a:srgbClr val="1D3557"/>
+                </a:solidFill>
+                <a:latin typeface="Menlo"/>
+              </a:rPr>
+              <a:t>pca.explained_variance_ratio_          # 3. cuánto explica</a:t>
+            </a:r>
+          </a:p>
+          <a:p>
+            <a:pPr/>
+            <a:r>
+              <a:rPr sz="1500" b="0">
+                <a:solidFill>
+                  <a:srgbClr val="1D3557"/>
+                </a:solidFill>
+                <a:latin typeface="Menlo"/>
+              </a:rPr>
+              <a:t>pca.components_                        # 4. los pesos</a:t>
+            </a:r>
+          </a:p>
+          <a:p>
+            <a:pPr/>
+            <a:r>
+              <a:rPr sz="1500" b="0">
+                <a:solidFill>
+                  <a:srgbClr val="1D3557"/>
+                </a:solidFill>
+                <a:latin typeface="Menlo"/>
+              </a:rPr>
+              <a:t>puntajes = pca.transform(Z)            # 5. los puntajes</a:t>
+            </a:r>
+          </a:p>
+        </p:txBody>
+      </p:sp>
+      <p:sp>
+        <p:nvSpPr>
+          <p:cNvPr id="5" name="TextBox 4"/>
+          <p:cNvSpPr txBox="1"/>
+          <p:nvPr/>
+        </p:nvSpPr>
+        <p:spPr>
+          <a:xfrm>
+            <a:off x="704088" y="4389120"/>
+            <a:ext cx="7744968" cy="1097280"/>
+          </a:xfrm>
+          <a:prstGeom prst="rect">
+            <a:avLst/>
+          </a:prstGeom>
+          <a:noFill/>
+        </p:spPr>
+        <p:txBody>
+          <a:bodyPr wrap="square">
+            <a:spAutoFit/>
+          </a:bodyPr>
+          <a:lstStyle/>
+          <a:p>
+            <a:pPr>
+              <a:lnSpc>
+                <a:spcPct val="112000"/>
+              </a:lnSpc>
+              <a:spcAft>
+                <a:spcPts val="900"/>
+              </a:spcAft>
+            </a:pPr>
+            <a:r>
+              <a:rPr sz="1600" b="1">
                 <a:solidFill>
                   <a:srgbClr val="E0A437"/>
                 </a:solidFill>
                 <a:latin typeface="Fira Sans"/>
               </a:rPr>
-              <a:t>Ocho clases, un hilo</a:t>
+              <a:t>▸ </a:t>
+            </a:r>
+            <a:r>
+              <a:rPr sz="1600" b="0">
+                <a:solidFill>
+                  <a:srgbClr val="000000"/>
+                </a:solidFill>
+                <a:latin typeface="Fira Sans"/>
+              </a:rPr>
+              <a:t>El ejemplo completo, con las tablas de pesos y los gráficos de la clase, está en el notebook 08_componentes_principales.ipynb.</a:t>
             </a:r>
           </a:p>
         </p:txBody>
@@ -7726,7 +7847,7 @@
             <a:avLst/>
           </a:prstGeom>
           <a:solidFill>
-            <a:srgbClr val="FAFBFC"/>
+            <a:srgbClr val="1D3557"/>
           </a:solidFill>
           <a:ln>
             <a:noFill/>
@@ -7763,8 +7884,8 @@
         </p:nvSpPr>
         <p:spPr>
           <a:xfrm>
-            <a:off x="402336" y="301752"/>
-            <a:ext cx="8348472" cy="795528"/>
+            <a:off x="603504" y="1847088"/>
+            <a:ext cx="7946136" cy="1399032"/>
           </a:xfrm>
           <a:prstGeom prst="rect">
             <a:avLst/>
@@ -7778,71 +7899,24 @@
           <a:lstStyle/>
           <a:p>
             <a:r>
-              <a:rPr sz="2800" b="1">
-                <a:solidFill>
-                  <a:srgbClr val="0F0F0F"/>
-                </a:solidFill>
-                <a:latin typeface="Fira Sans"/>
-              </a:rPr>
-              <a:t>El módulo en una página</a:t>
-            </a:r>
-          </a:p>
-        </p:txBody>
-      </p:sp>
-      <p:pic>
-        <p:nvPicPr>
-          <p:cNvPr id="4" name="Picture 3" descr="c8_07_mapa_modulo.png"/>
-          <p:cNvPicPr>
-            <a:picLocks noChangeAspect="1"/>
-          </p:cNvPicPr>
-          <p:nvPr/>
-        </p:nvPicPr>
-        <p:blipFill>
-          <a:blip r:embed="rId2"/>
-          <a:stretch>
-            <a:fillRect/>
-          </a:stretch>
-        </p:blipFill>
-        <p:spPr>
-          <a:xfrm>
-            <a:off x="1029546" y="1143000"/>
-            <a:ext cx="7084906" cy="3099816"/>
-          </a:xfrm>
-          <a:prstGeom prst="rect">
-            <a:avLst/>
-          </a:prstGeom>
-        </p:spPr>
-      </p:pic>
-      <p:sp>
-        <p:nvSpPr>
-          <p:cNvPr id="5" name="TextBox 4"/>
-          <p:cNvSpPr txBox="1"/>
-          <p:nvPr/>
-        </p:nvSpPr>
-        <p:spPr>
-          <a:xfrm>
-            <a:off x="704088" y="4379976"/>
-            <a:ext cx="7744968" cy="512064"/>
-          </a:xfrm>
-          <a:prstGeom prst="rect">
-            <a:avLst/>
-          </a:prstGeom>
-          <a:noFill/>
-        </p:spPr>
-        <p:txBody>
-          <a:bodyPr wrap="square">
-            <a:spAutoFit/>
-          </a:bodyPr>
-          <a:lstStyle/>
-          <a:p>
-            <a:r>
-              <a:rPr sz="1300" b="0">
-                <a:solidFill>
-                  <a:srgbClr val="333333"/>
-                </a:solidFill>
-                <a:latin typeface="Fira Sans"/>
-              </a:rPr>
-              <a:t>Cada clase dejó una idea. Juntas, son lo que el módulo enseñó: cómo se llega de una pregunta y unos datos a un resultado, y cómo se lee ese resultado con su incertidumbre.</a:t>
+              <a:rPr sz="3400" b="1">
+                <a:solidFill>
+                  <a:srgbClr val="FFFFFF"/>
+                </a:solidFill>
+                <a:latin typeface="Fira Sans"/>
+              </a:rPr>
+              <a:t>5. Cierre del módulo</a:t>
+            </a:r>
+          </a:p>
+          <a:p>
+            <a:r>
+              <a:rPr sz="1800" b="0">
+                <a:solidFill>
+                  <a:srgbClr val="E0A437"/>
+                </a:solidFill>
+                <a:latin typeface="Fira Sans"/>
+              </a:rPr>
+              <a:t>Ocho clases, un hilo</a:t>
             </a:r>
           </a:p>
         </p:txBody>
@@ -7938,21 +8012,45 @@
                 </a:solidFill>
                 <a:latin typeface="Fira Sans"/>
               </a:rPr>
-              <a:t>Ahora: las presentaciones del avance</a:t>
-            </a:r>
-          </a:p>
-        </p:txBody>
-      </p:sp>
-      <p:sp>
-        <p:nvSpPr>
-          <p:cNvPr id="4" name="TextBox 3"/>
+              <a:t>El módulo en una página</a:t>
+            </a:r>
+          </a:p>
+        </p:txBody>
+      </p:sp>
+      <p:pic>
+        <p:nvPicPr>
+          <p:cNvPr id="4" name="Picture 3" descr="c8_07_mapa_modulo.png"/>
+          <p:cNvPicPr>
+            <a:picLocks noChangeAspect="1"/>
+          </p:cNvPicPr>
+          <p:nvPr/>
+        </p:nvPicPr>
+        <p:blipFill>
+          <a:blip r:embed="rId2"/>
+          <a:stretch>
+            <a:fillRect/>
+          </a:stretch>
+        </p:blipFill>
+        <p:spPr>
+          <a:xfrm>
+            <a:off x="1029546" y="1143000"/>
+            <a:ext cx="7084906" cy="3099816"/>
+          </a:xfrm>
+          <a:prstGeom prst="rect">
+            <a:avLst/>
+          </a:prstGeom>
+        </p:spPr>
+      </p:pic>
+      <p:sp>
+        <p:nvSpPr>
+          <p:cNvPr id="5" name="TextBox 4"/>
           <p:cNvSpPr txBox="1"/>
           <p:nvPr/>
         </p:nvSpPr>
         <p:spPr>
           <a:xfrm>
-            <a:off x="704088" y="1353312"/>
-            <a:ext cx="7744968" cy="3300984"/>
+            <a:off x="704088" y="4379976"/>
+            <a:ext cx="7744968" cy="512064"/>
           </a:xfrm>
           <a:prstGeom prst="rect">
             <a:avLst/>
@@ -7965,115 +8063,14 @@
           </a:bodyPr>
           <a:lstStyle/>
           <a:p>
-            <a:pPr>
-              <a:lnSpc>
-                <a:spcPct val="112000"/>
-              </a:lnSpc>
-              <a:spcAft>
-                <a:spcPts val="900"/>
-              </a:spcAft>
-            </a:pPr>
-            <a:r>
-              <a:rPr sz="1800" b="1">
-                <a:solidFill>
-                  <a:srgbClr val="E0A437"/>
-                </a:solidFill>
-                <a:latin typeface="Fira Sans"/>
-              </a:rPr>
-              <a:t>▸ </a:t>
-            </a:r>
-            <a:r>
-              <a:rPr sz="1800" b="1">
-                <a:solidFill>
-                  <a:srgbClr val="1D3557"/>
-                </a:solidFill>
-                <a:latin typeface="Fira Sans"/>
-              </a:rPr>
-              <a:t>Ocho equipos, en el orden en que se ofrezcan. Máximo 10 minutos por equipo; el tiempo se controla. Después, preguntas de la profesora y del curso.</a:t>
-            </a:r>
-          </a:p>
-          <a:p>
-            <a:pPr>
-              <a:lnSpc>
-                <a:spcPct val="112000"/>
-              </a:lnSpc>
-              <a:spcAft>
-                <a:spcPts val="900"/>
-              </a:spcAft>
-            </a:pPr>
-            <a:r>
-              <a:rPr sz="1800" b="1">
-                <a:solidFill>
-                  <a:srgbClr val="E0A437"/>
-                </a:solidFill>
-                <a:latin typeface="Fira Sans"/>
-              </a:rPr>
-              <a:t>▸ </a:t>
-            </a:r>
-            <a:r>
-              <a:rPr sz="1800" b="0">
-                <a:solidFill>
-                  <a:srgbClr val="000000"/>
-                </a:solidFill>
-                <a:latin typeface="Fira Sans"/>
-              </a:rPr>
-              <a:t>Se evalúa el avance, no un resultado final: el modelo es un primer intento. La exigencia está en el tiempo, la claridad, la explicación de los gráficos y las relaciones, y en advertir qué falta o qué no tiene sentido.</a:t>
-            </a:r>
-          </a:p>
-          <a:p>
-            <a:pPr>
-              <a:lnSpc>
-                <a:spcPct val="112000"/>
-              </a:lnSpc>
-              <a:spcAft>
-                <a:spcPts val="900"/>
-              </a:spcAft>
-            </a:pPr>
-            <a:r>
-              <a:rPr sz="1800" b="1">
-                <a:solidFill>
-                  <a:srgbClr val="E0A437"/>
-                </a:solidFill>
-                <a:latin typeface="Fira Sans"/>
-              </a:rPr>
-              <a:t>▸ </a:t>
-            </a:r>
-            <a:r>
-              <a:rPr sz="1800" b="0">
-                <a:solidFill>
-                  <a:srgbClr val="000000"/>
-                </a:solidFill>
-                <a:latin typeface="Fira Sans"/>
-              </a:rPr>
-              <a:t>Las slides, en PDF, al Aula hasta las 20:30: un envío por equipo con los nombres.</a:t>
-            </a:r>
-          </a:p>
-          <a:p>
-            <a:pPr>
-              <a:lnSpc>
-                <a:spcPct val="112000"/>
-              </a:lnSpc>
-              <a:spcAft>
-                <a:spcPts val="900"/>
-              </a:spcAft>
-            </a:pPr>
-            <a:r>
-              <a:rPr sz="1800" b="1">
-                <a:solidFill>
-                  <a:srgbClr val="E0A437"/>
-                </a:solidFill>
-                <a:latin typeface="Fira Sans"/>
-              </a:rPr>
-              <a:t>▸ </a:t>
-            </a:r>
-            <a:r>
-              <a:rPr sz="1800" b="0">
-                <a:solidFill>
-                  <a:srgbClr val="000000"/>
-                </a:solidFill>
-                <a:latin typeface="Fira Sans"/>
-              </a:rPr>
-              <a:t>El informe escrito, el viernes 25 de septiembre por el Aula: máximo 7 páginas, con su rúbrica publicada.</a:t>
+            <a:r>
+              <a:rPr sz="1300" b="0">
+                <a:solidFill>
+                  <a:srgbClr val="333333"/>
+                </a:solidFill>
+                <a:latin typeface="Fira Sans"/>
+              </a:rPr>
+              <a:t>Cada clase dejó una idea. Juntas, son lo que el módulo enseñó: cómo se llega de una pregunta y unos datos a un resultado, y cómo se lee ese resultado con su incertidumbre.</a:t>
             </a:r>
           </a:p>
         </p:txBody>
@@ -8087,6 +8084,237 @@
 </file>
 
 <file path=ppt/slides/slide34.xml><?xml version="1.0" encoding="utf-8"?>
+<p:sld xmlns:a="http://schemas.openxmlformats.org/drawingml/2006/main" xmlns:p="http://schemas.openxmlformats.org/presentationml/2006/main" xmlns:r="http://schemas.openxmlformats.org/officeDocument/2006/relationships">
+  <p:cSld>
+    <p:spTree>
+      <p:nvGrpSpPr>
+        <p:cNvPr id="1" name=""/>
+        <p:cNvGrpSpPr/>
+        <p:nvPr/>
+      </p:nvGrpSpPr>
+      <p:grpSpPr/>
+      <p:sp>
+        <p:nvSpPr>
+          <p:cNvPr id="2" name="Rectangle 1"/>
+          <p:cNvSpPr/>
+          <p:nvPr/>
+        </p:nvSpPr>
+        <p:spPr>
+          <a:xfrm>
+            <a:off x="0" y="0"/>
+            <a:ext cx="9144000" cy="5138928"/>
+          </a:xfrm>
+          <a:prstGeom prst="rect">
+            <a:avLst/>
+          </a:prstGeom>
+          <a:solidFill>
+            <a:srgbClr val="FAFBFC"/>
+          </a:solidFill>
+          <a:ln>
+            <a:noFill/>
+          </a:ln>
+          <a:effectLst/>
+        </p:spPr>
+        <p:style>
+          <a:lnRef idx="1">
+            <a:schemeClr val="accent1"/>
+          </a:lnRef>
+          <a:fillRef idx="3">
+            <a:schemeClr val="accent1"/>
+          </a:fillRef>
+          <a:effectRef idx="2">
+            <a:schemeClr val="accent1"/>
+          </a:effectRef>
+          <a:fontRef idx="minor">
+            <a:schemeClr val="lt1"/>
+          </a:fontRef>
+        </p:style>
+        <p:txBody>
+          <a:bodyPr rtlCol="0" anchor="ctr"/>
+          <a:lstStyle/>
+          <a:p>
+            <a:pPr algn="ctr"/>
+          </a:p>
+        </p:txBody>
+      </p:sp>
+      <p:sp>
+        <p:nvSpPr>
+          <p:cNvPr id="3" name="TextBox 2"/>
+          <p:cNvSpPr txBox="1"/>
+          <p:nvPr/>
+        </p:nvSpPr>
+        <p:spPr>
+          <a:xfrm>
+            <a:off x="402336" y="301752"/>
+            <a:ext cx="8348472" cy="795528"/>
+          </a:xfrm>
+          <a:prstGeom prst="rect">
+            <a:avLst/>
+          </a:prstGeom>
+          <a:noFill/>
+        </p:spPr>
+        <p:txBody>
+          <a:bodyPr wrap="square">
+            <a:spAutoFit/>
+          </a:bodyPr>
+          <a:lstStyle/>
+          <a:p>
+            <a:r>
+              <a:rPr sz="2800" b="1">
+                <a:solidFill>
+                  <a:srgbClr val="0F0F0F"/>
+                </a:solidFill>
+                <a:latin typeface="Fira Sans"/>
+              </a:rPr>
+              <a:t>Ahora: las presentaciones del avance</a:t>
+            </a:r>
+          </a:p>
+        </p:txBody>
+      </p:sp>
+      <p:sp>
+        <p:nvSpPr>
+          <p:cNvPr id="4" name="TextBox 3"/>
+          <p:cNvSpPr txBox="1"/>
+          <p:nvPr/>
+        </p:nvSpPr>
+        <p:spPr>
+          <a:xfrm>
+            <a:off x="704088" y="1353312"/>
+            <a:ext cx="7744968" cy="3300984"/>
+          </a:xfrm>
+          <a:prstGeom prst="rect">
+            <a:avLst/>
+          </a:prstGeom>
+          <a:noFill/>
+        </p:spPr>
+        <p:txBody>
+          <a:bodyPr wrap="square">
+            <a:spAutoFit/>
+          </a:bodyPr>
+          <a:lstStyle/>
+          <a:p>
+            <a:pPr>
+              <a:lnSpc>
+                <a:spcPct val="112000"/>
+              </a:lnSpc>
+              <a:spcAft>
+                <a:spcPts val="900"/>
+              </a:spcAft>
+            </a:pPr>
+            <a:r>
+              <a:rPr sz="1800" b="1">
+                <a:solidFill>
+                  <a:srgbClr val="E0A437"/>
+                </a:solidFill>
+                <a:latin typeface="Fira Sans"/>
+              </a:rPr>
+              <a:t>▸ </a:t>
+            </a:r>
+            <a:r>
+              <a:rPr sz="1800" b="1">
+                <a:solidFill>
+                  <a:srgbClr val="1D3557"/>
+                </a:solidFill>
+                <a:latin typeface="Fira Sans"/>
+              </a:rPr>
+              <a:t>Ocho equipos, en el orden en que se ofrezcan. Máximo 10 minutos por equipo; el tiempo se controla. Después, preguntas de la profesora y del curso.</a:t>
+            </a:r>
+          </a:p>
+          <a:p>
+            <a:pPr>
+              <a:lnSpc>
+                <a:spcPct val="112000"/>
+              </a:lnSpc>
+              <a:spcAft>
+                <a:spcPts val="900"/>
+              </a:spcAft>
+            </a:pPr>
+            <a:r>
+              <a:rPr sz="1800" b="1">
+                <a:solidFill>
+                  <a:srgbClr val="E0A437"/>
+                </a:solidFill>
+                <a:latin typeface="Fira Sans"/>
+              </a:rPr>
+              <a:t>▸ </a:t>
+            </a:r>
+            <a:r>
+              <a:rPr sz="1800" b="0">
+                <a:solidFill>
+                  <a:srgbClr val="000000"/>
+                </a:solidFill>
+                <a:latin typeface="Fira Sans"/>
+              </a:rPr>
+              <a:t>Se evalúa el avance, no un resultado final: el modelo es un primer intento. La exigencia está en el tiempo, la claridad, la explicación de los gráficos y las relaciones, y en advertir qué falta o qué no tiene sentido.</a:t>
+            </a:r>
+          </a:p>
+          <a:p>
+            <a:pPr>
+              <a:lnSpc>
+                <a:spcPct val="112000"/>
+              </a:lnSpc>
+              <a:spcAft>
+                <a:spcPts val="900"/>
+              </a:spcAft>
+            </a:pPr>
+            <a:r>
+              <a:rPr sz="1800" b="1">
+                <a:solidFill>
+                  <a:srgbClr val="E0A437"/>
+                </a:solidFill>
+                <a:latin typeface="Fira Sans"/>
+              </a:rPr>
+              <a:t>▸ </a:t>
+            </a:r>
+            <a:r>
+              <a:rPr sz="1800" b="0">
+                <a:solidFill>
+                  <a:srgbClr val="000000"/>
+                </a:solidFill>
+                <a:latin typeface="Fira Sans"/>
+              </a:rPr>
+              <a:t>Las slides, en PDF, al Aula hasta las 20:30: un envío por equipo con los nombres.</a:t>
+            </a:r>
+          </a:p>
+          <a:p>
+            <a:pPr>
+              <a:lnSpc>
+                <a:spcPct val="112000"/>
+              </a:lnSpc>
+              <a:spcAft>
+                <a:spcPts val="900"/>
+              </a:spcAft>
+            </a:pPr>
+            <a:r>
+              <a:rPr sz="1800" b="1">
+                <a:solidFill>
+                  <a:srgbClr val="E0A437"/>
+                </a:solidFill>
+                <a:latin typeface="Fira Sans"/>
+              </a:rPr>
+              <a:t>▸ </a:t>
+            </a:r>
+            <a:r>
+              <a:rPr sz="1800" b="0">
+                <a:solidFill>
+                  <a:srgbClr val="000000"/>
+                </a:solidFill>
+                <a:latin typeface="Fira Sans"/>
+              </a:rPr>
+              <a:t>El informe escrito, el viernes 25 de septiembre por el Aula: máximo 7 páginas, con su rúbrica publicada.</a:t>
+            </a:r>
+          </a:p>
+        </p:txBody>
+      </p:sp>
+    </p:spTree>
+  </p:cSld>
+  <p:clrMapOvr>
+    <a:masterClrMapping/>
+  </p:clrMapOvr>
+</p:sld>
+</file>
+
+<file path=ppt/slides/slide35.xml><?xml version="1.0" encoding="utf-8"?>
 <p:sld xmlns:a="http://schemas.openxmlformats.org/drawingml/2006/main" xmlns:p="http://schemas.openxmlformats.org/presentationml/2006/main" xmlns:r="http://schemas.openxmlformats.org/officeDocument/2006/relationships">
   <p:cSld>
     <p:spTree>

--- a/presentaciones/clase08_componentes_principales.pptx
+++ b/presentaciones/clase08_componentes_principales.pptx
@@ -40,6 +40,12 @@
     <p:sldId id="288" r:id="rId39"/>
     <p:sldId id="289" r:id="rId40"/>
     <p:sldId id="290" r:id="rId41"/>
+    <p:sldId id="291" r:id="rId42"/>
+    <p:sldId id="292" r:id="rId43"/>
+    <p:sldId id="293" r:id="rId44"/>
+    <p:sldId id="294" r:id="rId45"/>
+    <p:sldId id="295" r:id="rId46"/>
+    <p:sldId id="296" r:id="rId47"/>
   </p:sldIdLst>
   <p:sldSz cx="9144000" cy="5138928" type="screen4x3"/>
   <p:notesSz cx="6858000" cy="9144000"/>
@@ -8509,6 +8515,766 @@
 </p:sld>
 </file>
 
+<file path=ppt/slides/slide36.xml><?xml version="1.0" encoding="utf-8"?>
+<p:sld xmlns:a="http://schemas.openxmlformats.org/drawingml/2006/main" xmlns:p="http://schemas.openxmlformats.org/presentationml/2006/main" xmlns:r="http://schemas.openxmlformats.org/officeDocument/2006/relationships">
+  <p:cSld>
+    <p:spTree>
+      <p:nvGrpSpPr>
+        <p:cNvPr id="1" name=""/>
+        <p:cNvGrpSpPr/>
+        <p:nvPr/>
+      </p:nvGrpSpPr>
+      <p:grpSpPr/>
+      <p:sp>
+        <p:nvSpPr>
+          <p:cNvPr id="2" name="Rectangle 1"/>
+          <p:cNvSpPr/>
+          <p:nvPr/>
+        </p:nvSpPr>
+        <p:spPr>
+          <a:xfrm>
+            <a:off x="0" y="0"/>
+            <a:ext cx="9144000" cy="5138928"/>
+          </a:xfrm>
+          <a:prstGeom prst="rect">
+            <a:avLst/>
+          </a:prstGeom>
+          <a:solidFill>
+            <a:srgbClr val="1D3557"/>
+          </a:solidFill>
+          <a:ln>
+            <a:noFill/>
+          </a:ln>
+          <a:effectLst/>
+        </p:spPr>
+        <p:style>
+          <a:lnRef idx="1">
+            <a:schemeClr val="accent1"/>
+          </a:lnRef>
+          <a:fillRef idx="3">
+            <a:schemeClr val="accent1"/>
+          </a:fillRef>
+          <a:effectRef idx="2">
+            <a:schemeClr val="accent1"/>
+          </a:effectRef>
+          <a:fontRef idx="minor">
+            <a:schemeClr val="lt1"/>
+          </a:fontRef>
+        </p:style>
+        <p:txBody>
+          <a:bodyPr rtlCol="0" anchor="ctr"/>
+          <a:lstStyle/>
+          <a:p>
+            <a:pPr algn="ctr"/>
+          </a:p>
+        </p:txBody>
+      </p:sp>
+      <p:sp>
+        <p:nvSpPr>
+          <p:cNvPr id="3" name="TextBox 2"/>
+          <p:cNvSpPr txBox="1"/>
+          <p:nvPr/>
+        </p:nvSpPr>
+        <p:spPr>
+          <a:xfrm>
+            <a:off x="603504" y="1847088"/>
+            <a:ext cx="7946136" cy="1399032"/>
+          </a:xfrm>
+          <a:prstGeom prst="rect">
+            <a:avLst/>
+          </a:prstGeom>
+          <a:noFill/>
+        </p:spPr>
+        <p:txBody>
+          <a:bodyPr wrap="square">
+            <a:spAutoFit/>
+          </a:bodyPr>
+          <a:lstStyle/>
+          <a:p>
+            <a:r>
+              <a:rPr sz="3400" b="1">
+                <a:solidFill>
+                  <a:srgbClr val="FFFFFF"/>
+                </a:solidFill>
+                <a:latin typeface="Fira Sans"/>
+              </a:rPr>
+              <a:t>Anexo</a:t>
+            </a:r>
+          </a:p>
+          <a:p>
+            <a:r>
+              <a:rPr sz="1800" b="0">
+                <a:solidFill>
+                  <a:srgbClr val="E0A437"/>
+                </a:solidFill>
+                <a:latin typeface="Fira Sans"/>
+              </a:rPr>
+              <a:t>Cómo se calcula la componente de un jugador, paso a paso</a:t>
+            </a:r>
+          </a:p>
+        </p:txBody>
+      </p:sp>
+    </p:spTree>
+  </p:cSld>
+  <p:clrMapOvr>
+    <a:masterClrMapping/>
+  </p:clrMapOvr>
+</p:sld>
+</file>
+
+<file path=ppt/slides/slide37.xml><?xml version="1.0" encoding="utf-8"?>
+<p:sld xmlns:a="http://schemas.openxmlformats.org/drawingml/2006/main" xmlns:p="http://schemas.openxmlformats.org/presentationml/2006/main" xmlns:r="http://schemas.openxmlformats.org/officeDocument/2006/relationships">
+  <p:cSld>
+    <p:spTree>
+      <p:nvGrpSpPr>
+        <p:cNvPr id="1" name=""/>
+        <p:cNvGrpSpPr/>
+        <p:nvPr/>
+      </p:nvGrpSpPr>
+      <p:grpSpPr/>
+      <p:sp>
+        <p:nvSpPr>
+          <p:cNvPr id="2" name="Rectangle 1"/>
+          <p:cNvSpPr/>
+          <p:nvPr/>
+        </p:nvSpPr>
+        <p:spPr>
+          <a:xfrm>
+            <a:off x="0" y="0"/>
+            <a:ext cx="9144000" cy="5138928"/>
+          </a:xfrm>
+          <a:prstGeom prst="rect">
+            <a:avLst/>
+          </a:prstGeom>
+          <a:solidFill>
+            <a:srgbClr val="FAFBFC"/>
+          </a:solidFill>
+          <a:ln>
+            <a:noFill/>
+          </a:ln>
+          <a:effectLst/>
+        </p:spPr>
+        <p:style>
+          <a:lnRef idx="1">
+            <a:schemeClr val="accent1"/>
+          </a:lnRef>
+          <a:fillRef idx="3">
+            <a:schemeClr val="accent1"/>
+          </a:fillRef>
+          <a:effectRef idx="2">
+            <a:schemeClr val="accent1"/>
+          </a:effectRef>
+          <a:fontRef idx="minor">
+            <a:schemeClr val="lt1"/>
+          </a:fontRef>
+        </p:style>
+        <p:txBody>
+          <a:bodyPr rtlCol="0" anchor="ctr"/>
+          <a:lstStyle/>
+          <a:p>
+            <a:pPr algn="ctr"/>
+          </a:p>
+        </p:txBody>
+      </p:sp>
+      <p:sp>
+        <p:nvSpPr>
+          <p:cNvPr id="3" name="TextBox 2"/>
+          <p:cNvSpPr txBox="1"/>
+          <p:nvPr/>
+        </p:nvSpPr>
+        <p:spPr>
+          <a:xfrm>
+            <a:off x="402336" y="301752"/>
+            <a:ext cx="8348472" cy="795528"/>
+          </a:xfrm>
+          <a:prstGeom prst="rect">
+            <a:avLst/>
+          </a:prstGeom>
+          <a:noFill/>
+        </p:spPr>
+        <p:txBody>
+          <a:bodyPr wrap="square">
+            <a:spAutoFit/>
+          </a:bodyPr>
+          <a:lstStyle/>
+          <a:p>
+            <a:r>
+              <a:rPr sz="2800" b="1">
+                <a:solidFill>
+                  <a:srgbClr val="0F0F0F"/>
+                </a:solidFill>
+                <a:latin typeface="Fira Sans"/>
+              </a:rPr>
+              <a:t>Anexo 1. El jugador y su posición en el eje</a:t>
+            </a:r>
+          </a:p>
+        </p:txBody>
+      </p:sp>
+      <p:pic>
+        <p:nvPicPr>
+          <p:cNvPr id="4" name="Picture 3" descr="c8_anexo_1_posicion.png"/>
+          <p:cNvPicPr>
+            <a:picLocks noChangeAspect="1"/>
+          </p:cNvPicPr>
+          <p:nvPr/>
+        </p:nvPicPr>
+        <p:blipFill>
+          <a:blip r:embed="rId2"/>
+          <a:stretch>
+            <a:fillRect/>
+          </a:stretch>
+        </p:blipFill>
+        <p:spPr>
+          <a:xfrm>
+            <a:off x="320040" y="1097280"/>
+            <a:ext cx="3756280" cy="3886200"/>
+          </a:xfrm>
+          <a:prstGeom prst="rect">
+            <a:avLst/>
+          </a:prstGeom>
+        </p:spPr>
+      </p:pic>
+      <p:sp>
+        <p:nvSpPr>
+          <p:cNvPr id="5" name="TextBox 4"/>
+          <p:cNvSpPr txBox="1"/>
+          <p:nvPr/>
+        </p:nvSpPr>
+        <p:spPr>
+          <a:xfrm>
+            <a:off x="4304920" y="1325880"/>
+            <a:ext cx="4519039" cy="3566160"/>
+          </a:xfrm>
+          <a:prstGeom prst="rect">
+            <a:avLst/>
+          </a:prstGeom>
+          <a:noFill/>
+        </p:spPr>
+        <p:txBody>
+          <a:bodyPr wrap="square">
+            <a:spAutoFit/>
+          </a:bodyPr>
+          <a:lstStyle/>
+          <a:p>
+            <a:pPr>
+              <a:lnSpc>
+                <a:spcPct val="112000"/>
+              </a:lnSpc>
+              <a:spcAft>
+                <a:spcPts val="900"/>
+              </a:spcAft>
+            </a:pPr>
+            <a:r>
+              <a:rPr sz="1500" b="1">
+                <a:solidFill>
+                  <a:srgbClr val="E0A437"/>
+                </a:solidFill>
+                <a:latin typeface="Fira Sans"/>
+              </a:rPr>
+              <a:t>▸ </a:t>
+            </a:r>
+            <a:r>
+              <a:rPr sz="1500" b="1">
+                <a:solidFill>
+                  <a:srgbClr val="1D3557"/>
+                </a:solidFill>
+                <a:latin typeface="Fira Sans"/>
+              </a:rPr>
+              <a:t>Un jugador con 5.409 turnos y 1.338 hits en la carrera: estandarizado, queda en (1,21; 0,95).</a:t>
+            </a:r>
+          </a:p>
+          <a:p>
+            <a:pPr>
+              <a:lnSpc>
+                <a:spcPct val="112000"/>
+              </a:lnSpc>
+              <a:spcAft>
+                <a:spcPts val="900"/>
+              </a:spcAft>
+            </a:pPr>
+            <a:r>
+              <a:rPr sz="1500" b="1">
+                <a:solidFill>
+                  <a:srgbClr val="E0A437"/>
+                </a:solidFill>
+                <a:latin typeface="Fira Sans"/>
+              </a:rPr>
+              <a:t>▸ </a:t>
+            </a:r>
+            <a:r>
+              <a:rPr sz="1500" b="0">
+                <a:solidFill>
+                  <a:srgbClr val="000000"/>
+                </a:solidFill>
+                <a:latin typeface="Fira Sans"/>
+              </a:rPr>
+              <a:t>Del punto se baja la perpendicular al eje nuevo y se lee la regla: 1,53.</a:t>
+            </a:r>
+          </a:p>
+          <a:p>
+            <a:pPr>
+              <a:lnSpc>
+                <a:spcPct val="112000"/>
+              </a:lnSpc>
+              <a:spcAft>
+                <a:spcPts val="900"/>
+              </a:spcAft>
+            </a:pPr>
+            <a:r>
+              <a:rPr sz="1500" b="1">
+                <a:solidFill>
+                  <a:srgbClr val="E0A437"/>
+                </a:solidFill>
+                <a:latin typeface="Fira Sans"/>
+              </a:rPr>
+              <a:t>▸ </a:t>
+            </a:r>
+            <a:r>
+              <a:rPr sz="1500" b="0">
+                <a:solidFill>
+                  <a:srgbClr val="000000"/>
+                </a:solidFill>
+                <a:latin typeface="Fira Sans"/>
+              </a:rPr>
+              <a:t>Ese número es su primera componente. Lo que sigue muestra de dónde sale el 1,53 sin mirar el dibujo.</a:t>
+            </a:r>
+          </a:p>
+        </p:txBody>
+      </p:sp>
+    </p:spTree>
+  </p:cSld>
+  <p:clrMapOvr>
+    <a:masterClrMapping/>
+  </p:clrMapOvr>
+</p:sld>
+</file>
+
+<file path=ppt/slides/slide38.xml><?xml version="1.0" encoding="utf-8"?>
+<p:sld xmlns:a="http://schemas.openxmlformats.org/drawingml/2006/main" xmlns:p="http://schemas.openxmlformats.org/presentationml/2006/main" xmlns:r="http://schemas.openxmlformats.org/officeDocument/2006/relationships">
+  <p:cSld>
+    <p:spTree>
+      <p:nvGrpSpPr>
+        <p:cNvPr id="1" name=""/>
+        <p:cNvGrpSpPr/>
+        <p:nvPr/>
+      </p:nvGrpSpPr>
+      <p:grpSpPr/>
+      <p:sp>
+        <p:nvSpPr>
+          <p:cNvPr id="2" name="Rectangle 1"/>
+          <p:cNvSpPr/>
+          <p:nvPr/>
+        </p:nvSpPr>
+        <p:spPr>
+          <a:xfrm>
+            <a:off x="0" y="0"/>
+            <a:ext cx="9144000" cy="5138928"/>
+          </a:xfrm>
+          <a:prstGeom prst="rect">
+            <a:avLst/>
+          </a:prstGeom>
+          <a:solidFill>
+            <a:srgbClr val="FAFBFC"/>
+          </a:solidFill>
+          <a:ln>
+            <a:noFill/>
+          </a:ln>
+          <a:effectLst/>
+        </p:spPr>
+        <p:style>
+          <a:lnRef idx="1">
+            <a:schemeClr val="accent1"/>
+          </a:lnRef>
+          <a:fillRef idx="3">
+            <a:schemeClr val="accent1"/>
+          </a:fillRef>
+          <a:effectRef idx="2">
+            <a:schemeClr val="accent1"/>
+          </a:effectRef>
+          <a:fontRef idx="minor">
+            <a:schemeClr val="lt1"/>
+          </a:fontRef>
+        </p:style>
+        <p:txBody>
+          <a:bodyPr rtlCol="0" anchor="ctr"/>
+          <a:lstStyle/>
+          <a:p>
+            <a:pPr algn="ctr"/>
+          </a:p>
+        </p:txBody>
+      </p:sp>
+      <p:sp>
+        <p:nvSpPr>
+          <p:cNvPr id="3" name="TextBox 2"/>
+          <p:cNvSpPr txBox="1"/>
+          <p:nvPr/>
+        </p:nvSpPr>
+        <p:spPr>
+          <a:xfrm>
+            <a:off x="402336" y="301752"/>
+            <a:ext cx="8348472" cy="795528"/>
+          </a:xfrm>
+          <a:prstGeom prst="rect">
+            <a:avLst/>
+          </a:prstGeom>
+          <a:noFill/>
+        </p:spPr>
+        <p:txBody>
+          <a:bodyPr wrap="square">
+            <a:spAutoFit/>
+          </a:bodyPr>
+          <a:lstStyle/>
+          <a:p>
+            <a:r>
+              <a:rPr sz="2800" b="1">
+                <a:solidFill>
+                  <a:srgbClr val="0F0F0F"/>
+                </a:solidFill>
+                <a:latin typeface="Fira Sans"/>
+              </a:rPr>
+              <a:t>Anexo 2. Del centro al jugador en dos tramos</a:t>
+            </a:r>
+          </a:p>
+        </p:txBody>
+      </p:sp>
+      <p:pic>
+        <p:nvPicPr>
+          <p:cNvPr id="4" name="Picture 3" descr="c8_anexo_2_tramos.png"/>
+          <p:cNvPicPr>
+            <a:picLocks noChangeAspect="1"/>
+          </p:cNvPicPr>
+          <p:nvPr/>
+        </p:nvPicPr>
+        <p:blipFill>
+          <a:blip r:embed="rId2"/>
+          <a:stretch>
+            <a:fillRect/>
+          </a:stretch>
+        </p:blipFill>
+        <p:spPr>
+          <a:xfrm>
+            <a:off x="320040" y="1097280"/>
+            <a:ext cx="3756280" cy="3886200"/>
+          </a:xfrm>
+          <a:prstGeom prst="rect">
+            <a:avLst/>
+          </a:prstGeom>
+        </p:spPr>
+      </p:pic>
+      <p:sp>
+        <p:nvSpPr>
+          <p:cNvPr id="5" name="TextBox 4"/>
+          <p:cNvSpPr txBox="1"/>
+          <p:nvPr/>
+        </p:nvSpPr>
+        <p:spPr>
+          <a:xfrm>
+            <a:off x="4304920" y="1325880"/>
+            <a:ext cx="4519039" cy="3566160"/>
+          </a:xfrm>
+          <a:prstGeom prst="rect">
+            <a:avLst/>
+          </a:prstGeom>
+          <a:noFill/>
+        </p:spPr>
+        <p:txBody>
+          <a:bodyPr wrap="square">
+            <a:spAutoFit/>
+          </a:bodyPr>
+          <a:lstStyle/>
+          <a:p>
+            <a:pPr>
+              <a:lnSpc>
+                <a:spcPct val="112000"/>
+              </a:lnSpc>
+              <a:spcAft>
+                <a:spcPts val="900"/>
+              </a:spcAft>
+            </a:pPr>
+            <a:r>
+              <a:rPr sz="1500" b="1">
+                <a:solidFill>
+                  <a:srgbClr val="E0A437"/>
+                </a:solidFill>
+                <a:latin typeface="Fira Sans"/>
+              </a:rPr>
+              <a:t>▸ </a:t>
+            </a:r>
+            <a:r>
+              <a:rPr sz="1500" b="1">
+                <a:solidFill>
+                  <a:srgbClr val="1D3557"/>
+                </a:solidFill>
+                <a:latin typeface="Fira Sans"/>
+              </a:rPr>
+              <a:t>Para llegar al jugador se camina primero 1,21 por turnos y después 0,95 por hits.</a:t>
+            </a:r>
+          </a:p>
+          <a:p>
+            <a:pPr>
+              <a:lnSpc>
+                <a:spcPct val="112000"/>
+              </a:lnSpc>
+              <a:spcAft>
+                <a:spcPts val="900"/>
+              </a:spcAft>
+            </a:pPr>
+            <a:r>
+              <a:rPr sz="1500" b="1">
+                <a:solidFill>
+                  <a:srgbClr val="E0A437"/>
+                </a:solidFill>
+                <a:latin typeface="Fira Sans"/>
+              </a:rPr>
+              <a:t>▸ </a:t>
+            </a:r>
+            <a:r>
+              <a:rPr sz="1500" b="0">
+                <a:solidFill>
+                  <a:srgbClr val="000000"/>
+                </a:solidFill>
+                <a:latin typeface="Fira Sans"/>
+              </a:rPr>
+              <a:t>Los dos tramos son sus dos coordenadas estandarizadas.</a:t>
+            </a:r>
+          </a:p>
+        </p:txBody>
+      </p:sp>
+    </p:spTree>
+  </p:cSld>
+  <p:clrMapOvr>
+    <a:masterClrMapping/>
+  </p:clrMapOvr>
+</p:sld>
+</file>
+
+<file path=ppt/slides/slide39.xml><?xml version="1.0" encoding="utf-8"?>
+<p:sld xmlns:a="http://schemas.openxmlformats.org/drawingml/2006/main" xmlns:p="http://schemas.openxmlformats.org/presentationml/2006/main" xmlns:r="http://schemas.openxmlformats.org/officeDocument/2006/relationships">
+  <p:cSld>
+    <p:spTree>
+      <p:nvGrpSpPr>
+        <p:cNvPr id="1" name=""/>
+        <p:cNvGrpSpPr/>
+        <p:nvPr/>
+      </p:nvGrpSpPr>
+      <p:grpSpPr/>
+      <p:sp>
+        <p:nvSpPr>
+          <p:cNvPr id="2" name="Rectangle 1"/>
+          <p:cNvSpPr/>
+          <p:nvPr/>
+        </p:nvSpPr>
+        <p:spPr>
+          <a:xfrm>
+            <a:off x="0" y="0"/>
+            <a:ext cx="9144000" cy="5138928"/>
+          </a:xfrm>
+          <a:prstGeom prst="rect">
+            <a:avLst/>
+          </a:prstGeom>
+          <a:solidFill>
+            <a:srgbClr val="FAFBFC"/>
+          </a:solidFill>
+          <a:ln>
+            <a:noFill/>
+          </a:ln>
+          <a:effectLst/>
+        </p:spPr>
+        <p:style>
+          <a:lnRef idx="1">
+            <a:schemeClr val="accent1"/>
+          </a:lnRef>
+          <a:fillRef idx="3">
+            <a:schemeClr val="accent1"/>
+          </a:fillRef>
+          <a:effectRef idx="2">
+            <a:schemeClr val="accent1"/>
+          </a:effectRef>
+          <a:fontRef idx="minor">
+            <a:schemeClr val="lt1"/>
+          </a:fontRef>
+        </p:style>
+        <p:txBody>
+          <a:bodyPr rtlCol="0" anchor="ctr"/>
+          <a:lstStyle/>
+          <a:p>
+            <a:pPr algn="ctr"/>
+          </a:p>
+        </p:txBody>
+      </p:sp>
+      <p:sp>
+        <p:nvSpPr>
+          <p:cNvPr id="3" name="TextBox 2"/>
+          <p:cNvSpPr txBox="1"/>
+          <p:nvPr/>
+        </p:nvSpPr>
+        <p:spPr>
+          <a:xfrm>
+            <a:off x="402336" y="301752"/>
+            <a:ext cx="8348472" cy="795528"/>
+          </a:xfrm>
+          <a:prstGeom prst="rect">
+            <a:avLst/>
+          </a:prstGeom>
+          <a:noFill/>
+        </p:spPr>
+        <p:txBody>
+          <a:bodyPr wrap="square">
+            <a:spAutoFit/>
+          </a:bodyPr>
+          <a:lstStyle/>
+          <a:p>
+            <a:r>
+              <a:rPr sz="2800" b="1">
+                <a:solidFill>
+                  <a:srgbClr val="0F0F0F"/>
+                </a:solidFill>
+                <a:latin typeface="Fira Sans"/>
+              </a:rPr>
+              <a:t>Anexo 3. Cada tramo proyecta su sombra</a:t>
+            </a:r>
+          </a:p>
+        </p:txBody>
+      </p:sp>
+      <p:pic>
+        <p:nvPicPr>
+          <p:cNvPr id="4" name="Picture 3" descr="c8_anexo_3_sombras.png"/>
+          <p:cNvPicPr>
+            <a:picLocks noChangeAspect="1"/>
+          </p:cNvPicPr>
+          <p:nvPr/>
+        </p:nvPicPr>
+        <p:blipFill>
+          <a:blip r:embed="rId2"/>
+          <a:stretch>
+            <a:fillRect/>
+          </a:stretch>
+        </p:blipFill>
+        <p:spPr>
+          <a:xfrm>
+            <a:off x="320040" y="1097280"/>
+            <a:ext cx="3756280" cy="3886200"/>
+          </a:xfrm>
+          <a:prstGeom prst="rect">
+            <a:avLst/>
+          </a:prstGeom>
+        </p:spPr>
+      </p:pic>
+      <p:sp>
+        <p:nvSpPr>
+          <p:cNvPr id="5" name="TextBox 4"/>
+          <p:cNvSpPr txBox="1"/>
+          <p:nvPr/>
+        </p:nvSpPr>
+        <p:spPr>
+          <a:xfrm>
+            <a:off x="4304920" y="1325880"/>
+            <a:ext cx="4519039" cy="3566160"/>
+          </a:xfrm>
+          <a:prstGeom prst="rect">
+            <a:avLst/>
+          </a:prstGeom>
+          <a:noFill/>
+        </p:spPr>
+        <p:txBody>
+          <a:bodyPr wrap="square">
+            <a:spAutoFit/>
+          </a:bodyPr>
+          <a:lstStyle/>
+          <a:p>
+            <a:pPr>
+              <a:lnSpc>
+                <a:spcPct val="112000"/>
+              </a:lnSpc>
+              <a:spcAft>
+                <a:spcPts val="900"/>
+              </a:spcAft>
+            </a:pPr>
+            <a:r>
+              <a:rPr sz="1500" b="1">
+                <a:solidFill>
+                  <a:srgbClr val="E0A437"/>
+                </a:solidFill>
+                <a:latin typeface="Fira Sans"/>
+              </a:rPr>
+              <a:t>▸ </a:t>
+            </a:r>
+            <a:r>
+              <a:rPr sz="1500" b="1">
+                <a:solidFill>
+                  <a:srgbClr val="1D3557"/>
+                </a:solidFill>
+                <a:latin typeface="Fira Sans"/>
+              </a:rPr>
+              <a:t>Sombra del tramo 1 sobre el eje: 1,21 × 0,707 = 0,85.</a:t>
+            </a:r>
+          </a:p>
+          <a:p>
+            <a:pPr>
+              <a:lnSpc>
+                <a:spcPct val="112000"/>
+              </a:lnSpc>
+              <a:spcAft>
+                <a:spcPts val="900"/>
+              </a:spcAft>
+            </a:pPr>
+            <a:r>
+              <a:rPr sz="1500" b="1">
+                <a:solidFill>
+                  <a:srgbClr val="E0A437"/>
+                </a:solidFill>
+                <a:latin typeface="Fira Sans"/>
+              </a:rPr>
+              <a:t>▸ </a:t>
+            </a:r>
+            <a:r>
+              <a:rPr sz="1500" b="0">
+                <a:solidFill>
+                  <a:srgbClr val="000000"/>
+                </a:solidFill>
+                <a:latin typeface="Fira Sans"/>
+              </a:rPr>
+              <a:t>Sombra del tramo 2: 0,95 × 0,707 = 0,67.</a:t>
+            </a:r>
+          </a:p>
+          <a:p>
+            <a:pPr>
+              <a:lnSpc>
+                <a:spcPct val="112000"/>
+              </a:lnSpc>
+              <a:spcAft>
+                <a:spcPts val="900"/>
+              </a:spcAft>
+            </a:pPr>
+            <a:r>
+              <a:rPr sz="1500" b="1">
+                <a:solidFill>
+                  <a:srgbClr val="E0A437"/>
+                </a:solidFill>
+                <a:latin typeface="Fira Sans"/>
+              </a:rPr>
+              <a:t>▸ </a:t>
+            </a:r>
+            <a:r>
+              <a:rPr sz="1500" b="0">
+                <a:solidFill>
+                  <a:srgbClr val="000000"/>
+                </a:solidFill>
+                <a:latin typeface="Fira Sans"/>
+              </a:rPr>
+              <a:t>Las sombras se ponen una a continuación de la otra y suman 0,85 + 0,67 = 1,53: el mismo número del anexo 1.</a:t>
+            </a:r>
+          </a:p>
+        </p:txBody>
+      </p:sp>
+    </p:spTree>
+  </p:cSld>
+  <p:clrMapOvr>
+    <a:masterClrMapping/>
+  </p:clrMapOvr>
+</p:sld>
+</file>
+
 <file path=ppt/slides/slide4.xml><?xml version="1.0" encoding="utf-8"?>
 <p:sld xmlns:a="http://schemas.openxmlformats.org/drawingml/2006/main" xmlns:p="http://schemas.openxmlformats.org/presentationml/2006/main" xmlns:r="http://schemas.openxmlformats.org/officeDocument/2006/relationships">
   <p:cSld>
@@ -8728,6 +9494,464 @@
                 <a:latin typeface="Fira Sans"/>
               </a:rPr>
               <a:t>Con los números del béisbol de la clase 7: 16 variables que, en lo esencial, son dos.</a:t>
+            </a:r>
+          </a:p>
+        </p:txBody>
+      </p:sp>
+    </p:spTree>
+  </p:cSld>
+  <p:clrMapOvr>
+    <a:masterClrMapping/>
+  </p:clrMapOvr>
+</p:sld>
+</file>
+
+<file path=ppt/slides/slide40.xml><?xml version="1.0" encoding="utf-8"?>
+<p:sld xmlns:a="http://schemas.openxmlformats.org/drawingml/2006/main" xmlns:p="http://schemas.openxmlformats.org/presentationml/2006/main" xmlns:r="http://schemas.openxmlformats.org/officeDocument/2006/relationships">
+  <p:cSld>
+    <p:spTree>
+      <p:nvGrpSpPr>
+        <p:cNvPr id="1" name=""/>
+        <p:cNvGrpSpPr/>
+        <p:nvPr/>
+      </p:nvGrpSpPr>
+      <p:grpSpPr/>
+      <p:sp>
+        <p:nvSpPr>
+          <p:cNvPr id="2" name="Rectangle 1"/>
+          <p:cNvSpPr/>
+          <p:nvPr/>
+        </p:nvSpPr>
+        <p:spPr>
+          <a:xfrm>
+            <a:off x="0" y="0"/>
+            <a:ext cx="9144000" cy="5138928"/>
+          </a:xfrm>
+          <a:prstGeom prst="rect">
+            <a:avLst/>
+          </a:prstGeom>
+          <a:solidFill>
+            <a:srgbClr val="FAFBFC"/>
+          </a:solidFill>
+          <a:ln>
+            <a:noFill/>
+          </a:ln>
+          <a:effectLst/>
+        </p:spPr>
+        <p:style>
+          <a:lnRef idx="1">
+            <a:schemeClr val="accent1"/>
+          </a:lnRef>
+          <a:fillRef idx="3">
+            <a:schemeClr val="accent1"/>
+          </a:fillRef>
+          <a:effectRef idx="2">
+            <a:schemeClr val="accent1"/>
+          </a:effectRef>
+          <a:fontRef idx="minor">
+            <a:schemeClr val="lt1"/>
+          </a:fontRef>
+        </p:style>
+        <p:txBody>
+          <a:bodyPr rtlCol="0" anchor="ctr"/>
+          <a:lstStyle/>
+          <a:p>
+            <a:pPr algn="ctr"/>
+          </a:p>
+        </p:txBody>
+      </p:sp>
+      <p:sp>
+        <p:nvSpPr>
+          <p:cNvPr id="3" name="TextBox 2"/>
+          <p:cNvSpPr txBox="1"/>
+          <p:nvPr/>
+        </p:nvSpPr>
+        <p:spPr>
+          <a:xfrm>
+            <a:off x="402336" y="301752"/>
+            <a:ext cx="8348472" cy="795528"/>
+          </a:xfrm>
+          <a:prstGeom prst="rect">
+            <a:avLst/>
+          </a:prstGeom>
+          <a:noFill/>
+        </p:spPr>
+        <p:txBody>
+          <a:bodyPr wrap="square">
+            <a:spAutoFit/>
+          </a:bodyPr>
+          <a:lstStyle/>
+          <a:p>
+            <a:r>
+              <a:rPr sz="2800" b="1">
+                <a:solidFill>
+                  <a:srgbClr val="0F0F0F"/>
+                </a:solidFill>
+                <a:latin typeface="Fira Sans"/>
+              </a:rPr>
+              <a:t>Anexo 4. Por qué se multiplica por 0,707</a:t>
+            </a:r>
+          </a:p>
+        </p:txBody>
+      </p:sp>
+      <p:pic>
+        <p:nvPicPr>
+          <p:cNvPr id="4" name="Picture 3" descr="c8_anexo_4_por_que.png"/>
+          <p:cNvPicPr>
+            <a:picLocks noChangeAspect="1"/>
+          </p:cNvPicPr>
+          <p:nvPr/>
+        </p:nvPicPr>
+        <p:blipFill>
+          <a:blip r:embed="rId2"/>
+          <a:stretch>
+            <a:fillRect/>
+          </a:stretch>
+        </p:blipFill>
+        <p:spPr>
+          <a:xfrm>
+            <a:off x="320040" y="1097280"/>
+            <a:ext cx="3812608" cy="3886200"/>
+          </a:xfrm>
+          <a:prstGeom prst="rect">
+            <a:avLst/>
+          </a:prstGeom>
+        </p:spPr>
+      </p:pic>
+      <p:sp>
+        <p:nvSpPr>
+          <p:cNvPr id="5" name="TextBox 4"/>
+          <p:cNvSpPr txBox="1"/>
+          <p:nvPr/>
+        </p:nvSpPr>
+        <p:spPr>
+          <a:xfrm>
+            <a:off x="4361248" y="1325880"/>
+            <a:ext cx="4462711" cy="3566160"/>
+          </a:xfrm>
+          <a:prstGeom prst="rect">
+            <a:avLst/>
+          </a:prstGeom>
+          <a:noFill/>
+        </p:spPr>
+        <p:txBody>
+          <a:bodyPr wrap="square">
+            <a:spAutoFit/>
+          </a:bodyPr>
+          <a:lstStyle/>
+          <a:p>
+            <a:pPr>
+              <a:lnSpc>
+                <a:spcPct val="112000"/>
+              </a:lnSpc>
+              <a:spcAft>
+                <a:spcPts val="900"/>
+              </a:spcAft>
+            </a:pPr>
+            <a:r>
+              <a:rPr sz="1500" b="1">
+                <a:solidFill>
+                  <a:srgbClr val="E0A437"/>
+                </a:solidFill>
+                <a:latin typeface="Fira Sans"/>
+              </a:rPr>
+              <a:t>▸ </a:t>
+            </a:r>
+            <a:r>
+              <a:rPr sz="1500" b="1">
+                <a:solidFill>
+                  <a:srgbClr val="1D3557"/>
+                </a:solidFill>
+                <a:latin typeface="Fira Sans"/>
+              </a:rPr>
+              <a:t>El eje va a 45°. Un tramo de largo 1 en turnos proyecta sobre él una sombra de cos 45° = 0,707; un tramo de 1,21 proyecta 1,21 veces eso.</a:t>
+            </a:r>
+          </a:p>
+          <a:p>
+            <a:pPr>
+              <a:lnSpc>
+                <a:spcPct val="112000"/>
+              </a:lnSpc>
+              <a:spcAft>
+                <a:spcPts val="900"/>
+              </a:spcAft>
+            </a:pPr>
+            <a:r>
+              <a:rPr sz="1500" b="1">
+                <a:solidFill>
+                  <a:srgbClr val="E0A437"/>
+                </a:solidFill>
+                <a:latin typeface="Fira Sans"/>
+              </a:rPr>
+              <a:t>▸ </a:t>
+            </a:r>
+            <a:r>
+              <a:rPr sz="1500" b="0">
+                <a:solidFill>
+                  <a:srgbClr val="000000"/>
+                </a:solidFill>
+                <a:latin typeface="Fira Sans"/>
+              </a:rPr>
+              <a:t>Con hits pasa lo mismo, porque el eje también está a 45° de ese lado.</a:t>
+            </a:r>
+          </a:p>
+          <a:p>
+            <a:pPr>
+              <a:lnSpc>
+                <a:spcPct val="112000"/>
+              </a:lnSpc>
+              <a:spcAft>
+                <a:spcPts val="900"/>
+              </a:spcAft>
+            </a:pPr>
+            <a:r>
+              <a:rPr sz="1500" b="1">
+                <a:solidFill>
+                  <a:srgbClr val="E0A437"/>
+                </a:solidFill>
+                <a:latin typeface="Fira Sans"/>
+              </a:rPr>
+              <a:t>▸ </a:t>
+            </a:r>
+            <a:r>
+              <a:rPr sz="1500" b="0">
+                <a:solidFill>
+                  <a:srgbClr val="000000"/>
+                </a:solidFill>
+                <a:latin typeface="Fira Sans"/>
+              </a:rPr>
+              <a:t>Si el eje se inclinara más hacia turnos, el peso de turnos sería mayor que el de hits: los pesos son los cosenos de esos dos ángulos.</a:t>
+            </a:r>
+          </a:p>
+        </p:txBody>
+      </p:sp>
+    </p:spTree>
+  </p:cSld>
+  <p:clrMapOvr>
+    <a:masterClrMapping/>
+  </p:clrMapOvr>
+</p:sld>
+</file>
+
+<file path=ppt/slides/slide41.xml><?xml version="1.0" encoding="utf-8"?>
+<p:sld xmlns:a="http://schemas.openxmlformats.org/drawingml/2006/main" xmlns:p="http://schemas.openxmlformats.org/presentationml/2006/main" xmlns:r="http://schemas.openxmlformats.org/officeDocument/2006/relationships">
+  <p:cSld>
+    <p:spTree>
+      <p:nvGrpSpPr>
+        <p:cNvPr id="1" name=""/>
+        <p:cNvGrpSpPr/>
+        <p:nvPr/>
+      </p:nvGrpSpPr>
+      <p:grpSpPr/>
+      <p:sp>
+        <p:nvSpPr>
+          <p:cNvPr id="2" name="Rectangle 1"/>
+          <p:cNvSpPr/>
+          <p:nvPr/>
+        </p:nvSpPr>
+        <p:spPr>
+          <a:xfrm>
+            <a:off x="0" y="0"/>
+            <a:ext cx="9144000" cy="5138928"/>
+          </a:xfrm>
+          <a:prstGeom prst="rect">
+            <a:avLst/>
+          </a:prstGeom>
+          <a:solidFill>
+            <a:srgbClr val="FAFBFC"/>
+          </a:solidFill>
+          <a:ln>
+            <a:noFill/>
+          </a:ln>
+          <a:effectLst/>
+        </p:spPr>
+        <p:style>
+          <a:lnRef idx="1">
+            <a:schemeClr val="accent1"/>
+          </a:lnRef>
+          <a:fillRef idx="3">
+            <a:schemeClr val="accent1"/>
+          </a:fillRef>
+          <a:effectRef idx="2">
+            <a:schemeClr val="accent1"/>
+          </a:effectRef>
+          <a:fontRef idx="minor">
+            <a:schemeClr val="lt1"/>
+          </a:fontRef>
+        </p:style>
+        <p:txBody>
+          <a:bodyPr rtlCol="0" anchor="ctr"/>
+          <a:lstStyle/>
+          <a:p>
+            <a:pPr algn="ctr"/>
+          </a:p>
+        </p:txBody>
+      </p:sp>
+      <p:sp>
+        <p:nvSpPr>
+          <p:cNvPr id="3" name="TextBox 2"/>
+          <p:cNvSpPr txBox="1"/>
+          <p:nvPr/>
+        </p:nvSpPr>
+        <p:spPr>
+          <a:xfrm>
+            <a:off x="402336" y="301752"/>
+            <a:ext cx="8348472" cy="795528"/>
+          </a:xfrm>
+          <a:prstGeom prst="rect">
+            <a:avLst/>
+          </a:prstGeom>
+          <a:noFill/>
+        </p:spPr>
+        <p:txBody>
+          <a:bodyPr wrap="square">
+            <a:spAutoFit/>
+          </a:bodyPr>
+          <a:lstStyle/>
+          <a:p>
+            <a:r>
+              <a:rPr sz="2800" b="1">
+                <a:solidFill>
+                  <a:srgbClr val="0F0F0F"/>
+                </a:solidFill>
+                <a:latin typeface="Fira Sans"/>
+              </a:rPr>
+              <a:t>Anexo 5. La cuenta completa, sin dibujo</a:t>
+            </a:r>
+          </a:p>
+        </p:txBody>
+      </p:sp>
+      <p:sp>
+        <p:nvSpPr>
+          <p:cNvPr id="4" name="TextBox 3"/>
+          <p:cNvSpPr txBox="1"/>
+          <p:nvPr/>
+        </p:nvSpPr>
+        <p:spPr>
+          <a:xfrm>
+            <a:off x="704088" y="1353312"/>
+            <a:ext cx="7744968" cy="3300984"/>
+          </a:xfrm>
+          <a:prstGeom prst="rect">
+            <a:avLst/>
+          </a:prstGeom>
+          <a:noFill/>
+        </p:spPr>
+        <p:txBody>
+          <a:bodyPr wrap="square">
+            <a:spAutoFit/>
+          </a:bodyPr>
+          <a:lstStyle/>
+          <a:p>
+            <a:pPr>
+              <a:lnSpc>
+                <a:spcPct val="112000"/>
+              </a:lnSpc>
+              <a:spcAft>
+                <a:spcPts val="900"/>
+              </a:spcAft>
+            </a:pPr>
+            <a:r>
+              <a:rPr sz="1800" b="1">
+                <a:solidFill>
+                  <a:srgbClr val="E0A437"/>
+                </a:solidFill>
+                <a:latin typeface="Fira Sans"/>
+              </a:rPr>
+              <a:t>▸ </a:t>
+            </a:r>
+            <a:r>
+              <a:rPr sz="1800" b="1">
+                <a:solidFill>
+                  <a:srgbClr val="1D3557"/>
+                </a:solidFill>
+                <a:latin typeface="Fira Sans"/>
+              </a:rPr>
+              <a:t>componente = 0,707 × z(turnos) + 0,707 × z(hits) = 0,707 × 1,21 + 0,707 × 0,95 = 0,85 + 0,67 = 1,53.</a:t>
+            </a:r>
+          </a:p>
+          <a:p>
+            <a:pPr>
+              <a:lnSpc>
+                <a:spcPct val="112000"/>
+              </a:lnSpc>
+              <a:spcAft>
+                <a:spcPts val="900"/>
+              </a:spcAft>
+            </a:pPr>
+            <a:r>
+              <a:rPr sz="1800" b="1">
+                <a:solidFill>
+                  <a:srgbClr val="E0A437"/>
+                </a:solidFill>
+                <a:latin typeface="Fira Sans"/>
+              </a:rPr>
+              <a:t>▸ </a:t>
+            </a:r>
+            <a:r>
+              <a:rPr sz="1800" b="0">
+                <a:solidFill>
+                  <a:srgbClr val="000000"/>
+                </a:solidFill>
+                <a:latin typeface="Fira Sans"/>
+              </a:rPr>
+              <a:t>Es la fórmula del puntaje ponderado: cada peso dice cuánto vale, hacia el eje nuevo, cada unidad de esa variable; se multiplica por las unidades que el jugador tiene y se suman los aportes.</a:t>
+            </a:r>
+          </a:p>
+          <a:p>
+            <a:pPr>
+              <a:lnSpc>
+                <a:spcPct val="112000"/>
+              </a:lnSpc>
+              <a:spcAft>
+                <a:spcPts val="900"/>
+              </a:spcAft>
+            </a:pPr>
+            <a:r>
+              <a:rPr sz="1800" b="1">
+                <a:solidFill>
+                  <a:srgbClr val="E0A437"/>
+                </a:solidFill>
+                <a:latin typeface="Fira Sans"/>
+              </a:rPr>
+              <a:t>▸ </a:t>
+            </a:r>
+            <a:r>
+              <a:rPr sz="1800" b="0">
+                <a:solidFill>
+                  <a:srgbClr val="000000"/>
+                </a:solidFill>
+                <a:latin typeface="Fira Sans"/>
+              </a:rPr>
+              <a:t>Con 16 variables el camino tiene 16 tramos y la suma, 16 términos: ya no hay dibujo donde leer la regla, y la cuenta es la forma de leerla.</a:t>
+            </a:r>
+          </a:p>
+          <a:p>
+            <a:pPr>
+              <a:lnSpc>
+                <a:spcPct val="112000"/>
+              </a:lnSpc>
+              <a:spcAft>
+                <a:spcPts val="900"/>
+              </a:spcAft>
+            </a:pPr>
+            <a:r>
+              <a:rPr sz="1800" b="1">
+                <a:solidFill>
+                  <a:srgbClr val="E0A437"/>
+                </a:solidFill>
+                <a:latin typeface="Fira Sans"/>
+              </a:rPr>
+              <a:t>▸ </a:t>
+            </a:r>
+            <a:r>
+              <a:rPr sz="1800" b="0">
+                <a:solidFill>
+                  <a:srgbClr val="000000"/>
+                </a:solidFill>
+                <a:latin typeface="Fira Sans"/>
+              </a:rPr>
+              <a:t>En scikit-learn, pca.components_ son los pesos y pca.transform(Z) hace esta cuenta para cada jugador.</a:t>
             </a:r>
           </a:p>
         </p:txBody>

--- a/presentaciones/clase08_componentes_principales.pptx
+++ b/presentaciones/clase08_componentes_principales.pptx
@@ -9923,7 +9923,7 @@
                 </a:solidFill>
                 <a:latin typeface="Fira Sans"/>
               </a:rPr>
-              <a:t>Con 16 variables el camino tiene 16 tramos y la suma, 16 términos: ya no hay dibujo donde leer la regla, y la cuenta es la forma de leerla.</a:t>
+              <a:t>Con 16 variables el camino tiene 16 tramos y la suma, 16 términos.</a:t>
             </a:r>
           </a:p>
           <a:p>
